--- a/static/ppts/G6_Math_T5_Experimental_Prob.pptx
+++ b/static/ppts/G6_Math_T5_Experimental_Prob.pptx
@@ -9,9 +9,10 @@
     <p:sldId id="257" r:id="rId3"/>
     <p:sldId id="258" r:id="rId4"/>
     <p:sldId id="259" r:id="rId5"/>
+    <p:sldId id="260" r:id="rId6"/>
   </p:sldIdLst>
   <p:notesMasterIdLst>
-    <p:notesMasterId r:id="rId6"/>
+    <p:notesMasterId r:id="rId7"/>
   </p:notesMasterIdLst>
   <p:sldSz cx="9144000" cy="5143500"/>
   <p:notesSz cx="5143500" cy="9144000"/>
@@ -811,6 +812,94 @@
 </p:notes>
 </file>
 
+<file path=ppt/notesSlides/notesSlide5.xml><?xml version="1.0" encoding="utf-8"?>
+<p:notes xmlns:a="http://schemas.openxmlformats.org/drawingml/2006/main" xmlns:r="http://schemas.openxmlformats.org/officeDocument/2006/relationships" xmlns:p="http://schemas.openxmlformats.org/presentationml/2006/main">
+  <p:cSld>
+    <p:spTree>
+      <p:nvGrpSpPr>
+        <p:cNvPr id="1" name=""/>
+        <p:cNvGrpSpPr/>
+        <p:nvPr/>
+      </p:nvGrpSpPr>
+      <p:grpSpPr>
+        <a:xfrm>
+          <a:off x="0" y="0"/>
+          <a:ext cx="0" cy="0"/>
+          <a:chOff x="0" y="0"/>
+          <a:chExt cx="0" cy="0"/>
+        </a:xfrm>
+      </p:grpSpPr>
+      <p:sp>
+        <p:nvSpPr>
+          <p:cNvPr id="2" name="Slide Image Placeholder 1"/>
+          <p:cNvSpPr>
+            <a:spLocks noGrp="1" noRot="1" noChangeAspect="1"/>
+          </p:cNvSpPr>
+          <p:nvPr>
+            <p:ph type="sldImg"/>
+          </p:nvPr>
+        </p:nvSpPr>
+        <p:spPr/>
+      </p:sp>
+      <p:sp>
+        <p:nvSpPr>
+          <p:cNvPr id="3" name="Notes Placeholder 2"/>
+          <p:cNvSpPr>
+            <a:spLocks noGrp="1"/>
+          </p:cNvSpPr>
+          <p:nvPr>
+            <p:ph type="body" idx="1"/>
+          </p:nvPr>
+        </p:nvSpPr>
+        <p:spPr/>
+        <p:txBody>
+          <a:bodyPr/>
+          <a:lstStyle/>
+          <a:p>
+            <a:r>
+              <a:rPr lang="en-US" dirty="0"/>
+              <a:t/>
+            </a:r>
+            <a:endParaRPr lang="en-US" dirty="0"/>
+          </a:p>
+        </p:txBody>
+      </p:sp>
+      <p:sp>
+        <p:nvSpPr>
+          <p:cNvPr id="4" name="Slide Number Placeholder 3"/>
+          <p:cNvSpPr>
+            <a:spLocks noGrp="1"/>
+          </p:cNvSpPr>
+          <p:nvPr>
+            <p:ph type="sldNum" sz="quarter" idx="10"/>
+          </p:nvPr>
+        </p:nvSpPr>
+        <p:spPr/>
+        <p:txBody>
+          <a:bodyPr/>
+          <a:lstStyle/>
+          <a:p>
+            <a:fld id="{F7021451-1387-4CA6-816F-3879F97B5CBC}" type="slidenum">
+              <a:rPr lang="en-US"/>
+              <a:t>5</a:t>
+            </a:fld>
+            <a:endParaRPr lang="en-US"/>
+          </a:p>
+        </p:txBody>
+      </p:sp>
+    </p:spTree>
+    <p:extLst>
+      <p:ext uri="{BB962C8B-B14F-4D97-AF65-F5344CB8AC3E}">
+        <p14:creationId xmlns:p14="http://schemas.microsoft.com/office/powerpoint/2010/main" val="1024086991"/>
+      </p:ext>
+    </p:extLst>
+  </p:cSld>
+  <p:clrMapOvr>
+    <a:masterClrMapping/>
+  </p:clrMapOvr>
+</p:notes>
+</file>
+
 <file path=ppt/slideLayouts/slideLayout1.xml><?xml version="1.0" encoding="utf-8"?>
 <p:sldLayout xmlns:a="http://schemas.openxmlformats.org/drawingml/2006/main" xmlns:r="http://schemas.openxmlformats.org/officeDocument/2006/relationships" xmlns:p="http://schemas.openxmlformats.org/presentationml/2006/main" preserve="1">
   <p:cSld name="DEFAULT">
@@ -1170,7 +1259,7 @@
         </p:nvSpPr>
         <p:spPr>
           <a:xfrm>
-            <a:off x="731520" y="1280160"/>
+            <a:off x="731520" y="1097280"/>
             <a:ext cx="7772400" cy="1371600"/>
           </a:xfrm>
           <a:prstGeom prst="rect">
@@ -1187,7 +1276,7 @@
               <a:buNone/>
             </a:pPr>
             <a:r>
-              <a:rPr lang="en-US" sz="3600" b="1" dirty="0">
+              <a:rPr lang="en-US" sz="4000" b="1" dirty="0">
                 <a:solidFill>
                   <a:srgbClr val="FFFFFF"/>
                 </a:solidFill>
@@ -1197,7 +1286,7 @@
               </a:rPr>
               <a:t>Experimental vs Theoretical Probability</a:t>
             </a:r>
-            <a:endParaRPr lang="en-US" sz="3600" dirty="0"/>
+            <a:endParaRPr lang="en-US" sz="4000" dirty="0"/>
           </a:p>
         </p:txBody>
       </p:sp>
@@ -1209,7 +1298,7 @@
         </p:nvSpPr>
         <p:spPr>
           <a:xfrm>
-            <a:off x="731520" y="2743200"/>
+            <a:off x="731520" y="2560320"/>
             <a:ext cx="7772400" cy="548640"/>
           </a:xfrm>
           <a:prstGeom prst="rect">
@@ -1228,13 +1317,13 @@
             <a:r>
               <a:rPr lang="en-US" sz="1600" dirty="0">
                 <a:solidFill>
-                  <a:srgbClr val="9B9690"/>
+                  <a:srgbClr val="E9C46A"/>
                 </a:solidFill>
                 <a:latin typeface="Calibri" pitchFamily="34" charset="0"/>
                 <a:ea typeface="Calibri" pitchFamily="34" charset="-122"/>
                 <a:cs typeface="Calibri" pitchFamily="34" charset="-120"/>
               </a:rPr>
-              <a:t>G6 Maths · Probability &amp; Statistics</a:t>
+              <a:t>Grade 6 Mathematics · Mr Zocchi</a:t>
             </a:r>
             <a:endParaRPr lang="en-US" sz="1600" dirty="0"/>
           </a:p>
@@ -1242,14 +1331,36 @@
       </p:sp>
       <p:sp>
         <p:nvSpPr>
-          <p:cNvPr id="5" name="Text 3"/>
+          <p:cNvPr id="5" name="Shape 3"/>
           <p:cNvSpPr/>
           <p:nvPr/>
         </p:nvSpPr>
         <p:spPr>
           <a:xfrm>
-            <a:off x="731520" y="4389120"/>
-            <a:ext cx="7772400" cy="457200"/>
+            <a:off x="731520" y="3474720"/>
+            <a:ext cx="2011680" cy="411480"/>
+          </a:xfrm>
+          <a:prstGeom prst="roundRect">
+            <a:avLst>
+              <a:gd name="adj" fmla="val 17778"/>
+            </a:avLst>
+          </a:prstGeom>
+          <a:solidFill>
+            <a:srgbClr val="2A9D8F"/>
+          </a:solidFill>
+          <a:ln/>
+        </p:spPr>
+      </p:sp>
+      <p:sp>
+        <p:nvSpPr>
+          <p:cNvPr id="6" name="Text 4"/>
+          <p:cNvSpPr/>
+          <p:nvPr/>
+        </p:nvSpPr>
+        <p:spPr>
+          <a:xfrm>
+            <a:off x="731520" y="3474720"/>
+            <a:ext cx="2011680" cy="411480"/>
           </a:xfrm>
           <a:prstGeom prst="rect">
             <a:avLst/>
@@ -1261,21 +1372,21 @@
           <a:bodyPr wrap="square" rtlCol="0" anchor="ctr"/>
           <a:lstStyle/>
           <a:p>
-            <a:pPr indent="0" marL="0">
+            <a:pPr algn="ctr" indent="0" marL="0">
               <a:buNone/>
             </a:pPr>
             <a:r>
-              <a:rPr lang="en-US" sz="1000" dirty="0">
-                <a:solidFill>
-                  <a:srgbClr val="6B6660"/>
+              <a:rPr lang="en-US" sz="1200" b="1" dirty="0">
+                <a:solidFill>
+                  <a:srgbClr val="FFFFFF"/>
                 </a:solidFill>
                 <a:latin typeface="Calibri" pitchFamily="34" charset="0"/>
                 <a:ea typeface="Calibri" pitchFamily="34" charset="-122"/>
                 <a:cs typeface="Calibri" pitchFamily="34" charset="-120"/>
               </a:rPr>
-              <a:t>Mr Zocchi · mrzocchi.com</a:t>
-            </a:r>
-            <a:endParaRPr lang="en-US" sz="1000" dirty="0"/>
+              <a:t>Term 5 · Probability &amp; Statistics</a:t>
+            </a:r>
+            <a:endParaRPr lang="en-US" sz="1200" dirty="0"/>
           </a:p>
         </p:txBody>
       </p:sp>
@@ -1293,7 +1404,7 @@
     <p:bg>
       <p:bgPr>
         <a:solidFill>
-          <a:srgbClr val="FFFFFF"/>
+          <a:srgbClr val="FAF8F5"/>
         </a:solidFill>
       </p:bgPr>
     </p:bg>
@@ -1339,8 +1450,8 @@
         </p:nvSpPr>
         <p:spPr>
           <a:xfrm>
-            <a:off x="548640" y="274320"/>
-            <a:ext cx="8046720" cy="640080"/>
+            <a:off x="7772400" y="4709160"/>
+            <a:ext cx="1097280" cy="320040"/>
           </a:xfrm>
           <a:prstGeom prst="rect">
             <a:avLst/>
@@ -1349,14 +1460,105 @@
           <a:ln/>
         </p:spPr>
         <p:txBody>
-          <a:bodyPr wrap="square" lIns="0" tIns="0" rIns="0" bIns="0" rtlCol="0" anchor="ctr"/>
+          <a:bodyPr wrap="square" rtlCol="0" anchor="ctr"/>
+          <a:lstStyle/>
+          <a:p>
+            <a:pPr algn="r" indent="0" marL="0">
+              <a:buNone/>
+            </a:pPr>
+            <a:r>
+              <a:rPr lang="en-US" sz="900" dirty="0">
+                <a:solidFill>
+                  <a:srgbClr val="6B6660"/>
+                </a:solidFill>
+                <a:latin typeface="Calibri" pitchFamily="34" charset="0"/>
+                <a:ea typeface="Calibri" pitchFamily="34" charset="-122"/>
+                <a:cs typeface="Calibri" pitchFamily="34" charset="-120"/>
+              </a:rPr>
+              <a:t>2 / 5</a:t>
+            </a:r>
+            <a:endParaRPr lang="en-US" sz="900" dirty="0"/>
+          </a:p>
+        </p:txBody>
+      </p:sp>
+      <p:sp>
+        <p:nvSpPr>
+          <p:cNvPr id="4" name="Shape 2"/>
+          <p:cNvSpPr/>
+          <p:nvPr/>
+        </p:nvSpPr>
+        <p:spPr>
+          <a:xfrm>
+            <a:off x="1371600" y="914400"/>
+            <a:ext cx="6400800" cy="3200400"/>
+          </a:xfrm>
+          <a:prstGeom prst="rect">
+            <a:avLst/>
+          </a:prstGeom>
+          <a:solidFill>
+            <a:srgbClr val="FFFFFF"/>
+          </a:solidFill>
+          <a:ln w="12700">
+            <a:solidFill>
+              <a:srgbClr val="E5E2DC"/>
+            </a:solidFill>
+            <a:prstDash val="solid"/>
+          </a:ln>
+          <a:effectLst>
+            <a:outerShdw sx="100000" sy="100000" kx="0" ky="0" algn="bl" rotWithShape="0" blurRad="50800" dist="25400" dir="8100000">
+              <a:srgbClr val="000000">
+                <a:alpha val="10000"/>
+              </a:srgbClr>
+            </a:outerShdw>
+          </a:effectLst>
+        </p:spPr>
+      </p:sp>
+      <p:sp>
+        <p:nvSpPr>
+          <p:cNvPr id="5" name="Shape 3"/>
+          <p:cNvSpPr/>
+          <p:nvPr/>
+        </p:nvSpPr>
+        <p:spPr>
+          <a:xfrm>
+            <a:off x="1371600" y="914400"/>
+            <a:ext cx="91440" cy="3200400"/>
+          </a:xfrm>
+          <a:prstGeom prst="rect">
+            <a:avLst/>
+          </a:prstGeom>
+          <a:solidFill>
+            <a:srgbClr val="2A9D8F"/>
+          </a:solidFill>
+          <a:ln/>
+        </p:spPr>
+      </p:sp>
+      <p:sp>
+        <p:nvSpPr>
+          <p:cNvPr id="6" name="Text 4"/>
+          <p:cNvSpPr/>
+          <p:nvPr/>
+        </p:nvSpPr>
+        <p:spPr>
+          <a:xfrm>
+            <a:off x="1828800" y="1097280"/>
+            <a:ext cx="5669280" cy="640080"/>
+          </a:xfrm>
+          <a:prstGeom prst="rect">
+            <a:avLst/>
+          </a:prstGeom>
+          <a:noFill/>
+          <a:ln/>
+        </p:spPr>
+        <p:txBody>
+          <a:bodyPr wrap="square" rtlCol="0" anchor="ctr"/>
           <a:lstStyle/>
           <a:p>
             <a:pPr indent="0" marL="0">
               <a:buNone/>
             </a:pPr>
             <a:r>
-              <a:rPr lang="en-US" sz="2600" b="1" dirty="0">
+              <a:rPr lang="en-US" sz="2400" b="1" dirty="0">
                 <a:solidFill>
                   <a:srgbClr val="1B2A4A"/>
                 </a:solidFill>
@@ -1364,22 +1566,22 @@
                 <a:ea typeface="Georgia" pitchFamily="34" charset="-122"/>
                 <a:cs typeface="Georgia" pitchFamily="34" charset="-120"/>
               </a:rPr>
-              <a:t>Two Types of Probability</a:t>
-            </a:r>
-            <a:endParaRPr lang="en-US" sz="2600" dirty="0"/>
-          </a:p>
-        </p:txBody>
-      </p:sp>
-      <p:sp>
-        <p:nvSpPr>
-          <p:cNvPr id="4" name="Text 2"/>
+              <a:t>Theory vs Practice</a:t>
+            </a:r>
+            <a:endParaRPr lang="en-US" sz="2400" dirty="0"/>
+          </a:p>
+        </p:txBody>
+      </p:sp>
+      <p:sp>
+        <p:nvSpPr>
+          <p:cNvPr id="7" name="Text 5"/>
           <p:cNvSpPr/>
           <p:nvPr/>
         </p:nvSpPr>
         <p:spPr>
           <a:xfrm>
-            <a:off x="548640" y="1097280"/>
-            <a:ext cx="8046720" cy="3474720"/>
+            <a:off x="1828800" y="1828800"/>
+            <a:ext cx="5669280" cy="2011680"/>
           </a:xfrm>
           <a:prstGeom prst="rect">
             <a:avLst/>
@@ -1391,12 +1593,11 @@
           <a:bodyPr wrap="square" rtlCol="0" anchor="t"/>
           <a:lstStyle/>
           <a:p>
-            <a:pPr marL="342900" indent="-342900">
-              <a:spcAft>
-                <a:spcPts val="800"/>
-              </a:spcAft>
-              <a:buSzPct val="100000"/>
-              <a:buChar char="•"/>
+            <a:pPr indent="0" marL="0">
+              <a:lnSpc>
+                <a:spcPct val="130000"/>
+              </a:lnSpc>
+              <a:buNone/>
             </a:pPr>
             <a:r>
               <a:rPr lang="en-US" sz="1500" dirty="0">
@@ -1407,129 +1608,9 @@
                 <a:ea typeface="Calibri" pitchFamily="34" charset="-122"/>
                 <a:cs typeface="Calibri" pitchFamily="34" charset="-120"/>
               </a:rPr>
-              <a:t>Theoretical: calculated using equally likely outcomes (what SHOULD happen)</a:t>
+              <a:t>Theoretical probability is what SHOULD happen based on maths. Experimental probability is what ACTUALLY happens when you try it. The more times you repeat an experiment, the closer the experimental probability gets to the theoretical probability. This is called the Law of Large Numbers.</a:t>
             </a:r>
             <a:endParaRPr lang="en-US" sz="1500" dirty="0"/>
-          </a:p>
-          <a:p>
-            <a:pPr marL="342900" indent="-342900">
-              <a:spcAft>
-                <a:spcPts val="800"/>
-              </a:spcAft>
-              <a:buSzPct val="100000"/>
-              <a:buChar char="•"/>
-            </a:pPr>
-            <a:r>
-              <a:rPr lang="en-US" sz="1500" dirty="0">
-                <a:solidFill>
-                  <a:srgbClr val="3D3A36"/>
-                </a:solidFill>
-                <a:latin typeface="Calibri" pitchFamily="34" charset="0"/>
-                <a:ea typeface="Calibri" pitchFamily="34" charset="-122"/>
-                <a:cs typeface="Calibri" pitchFamily="34" charset="-120"/>
-              </a:rPr>
-              <a:t>Experimental: found by actually doing an experiment (what DID happen)</a:t>
-            </a:r>
-            <a:endParaRPr lang="en-US" sz="1500" dirty="0"/>
-          </a:p>
-          <a:p>
-            <a:pPr marL="342900" indent="-342900">
-              <a:spcAft>
-                <a:spcPts val="800"/>
-              </a:spcAft>
-              <a:buSzPct val="100000"/>
-              <a:buChar char="•"/>
-            </a:pPr>
-            <a:r>
-              <a:rPr lang="en-US" sz="1500" dirty="0">
-                <a:solidFill>
-                  <a:srgbClr val="3D3A36"/>
-                </a:solidFill>
-                <a:latin typeface="Calibri" pitchFamily="34" charset="0"/>
-                <a:ea typeface="Calibri" pitchFamily="34" charset="-122"/>
-                <a:cs typeface="Calibri" pitchFamily="34" charset="-120"/>
-              </a:rPr>
-              <a:t>Experimental probability = number of times event occurred ÷ total trials</a:t>
-            </a:r>
-            <a:endParaRPr lang="en-US" sz="1500" dirty="0"/>
-          </a:p>
-          <a:p>
-            <a:pPr marL="342900" indent="-342900">
-              <a:spcAft>
-                <a:spcPts val="800"/>
-              </a:spcAft>
-              <a:buSzPct val="100000"/>
-              <a:buChar char="•"/>
-            </a:pPr>
-            <a:r>
-              <a:rPr lang="en-US" sz="1500" dirty="0">
-                <a:solidFill>
-                  <a:srgbClr val="3D3A36"/>
-                </a:solidFill>
-                <a:latin typeface="Calibri" pitchFamily="34" charset="0"/>
-                <a:ea typeface="Calibri" pitchFamily="34" charset="-122"/>
-                <a:cs typeface="Calibri" pitchFamily="34" charset="-120"/>
-              </a:rPr>
-              <a:t>More trials → experimental gets closer to theoretical</a:t>
-            </a:r>
-            <a:endParaRPr lang="en-US" sz="1500" dirty="0"/>
-          </a:p>
-          <a:p>
-            <a:pPr marL="342900" indent="-342900">
-              <a:spcAft>
-                <a:spcPts val="800"/>
-              </a:spcAft>
-              <a:buSzPct val="100000"/>
-              <a:buChar char="•"/>
-            </a:pPr>
-            <a:r>
-              <a:rPr lang="en-US" sz="1500" dirty="0">
-                <a:solidFill>
-                  <a:srgbClr val="3D3A36"/>
-                </a:solidFill>
-                <a:latin typeface="Calibri" pitchFamily="34" charset="0"/>
-                <a:ea typeface="Calibri" pitchFamily="34" charset="-122"/>
-                <a:cs typeface="Calibri" pitchFamily="34" charset="-120"/>
-              </a:rPr>
-              <a:t>They may not match exactly due to random variation</a:t>
-            </a:r>
-            <a:endParaRPr lang="en-US" sz="1500" dirty="0"/>
-          </a:p>
-        </p:txBody>
-      </p:sp>
-      <p:sp>
-        <p:nvSpPr>
-          <p:cNvPr id="5" name="Text 3"/>
-          <p:cNvSpPr/>
-          <p:nvPr/>
-        </p:nvSpPr>
-        <p:spPr>
-          <a:xfrm>
-            <a:off x="548640" y="4800600"/>
-            <a:ext cx="3657600" cy="274320"/>
-          </a:xfrm>
-          <a:prstGeom prst="rect">
-            <a:avLst/>
-          </a:prstGeom>
-          <a:noFill/>
-          <a:ln/>
-        </p:spPr>
-        <p:txBody>
-          <a:bodyPr wrap="square" rtlCol="0" anchor="ctr"/>
-          <a:lstStyle/>
-          <a:p>
-            <a:pPr indent="0" marL="0">
-              <a:buNone/>
-            </a:pPr>
-            <a:r>
-              <a:rPr lang="en-US" sz="800" dirty="0">
-                <a:solidFill>
-                  <a:srgbClr val="9B9690"/>
-                </a:solidFill>
-              </a:rPr>
-              <a:t>mrzocchi.com</a:t>
-            </a:r>
-            <a:endParaRPr lang="en-US" sz="800" dirty="0"/>
           </a:p>
         </p:txBody>
       </p:sp>
@@ -1547,7 +1628,7 @@
     <p:bg>
       <p:bgPr>
         <a:solidFill>
-          <a:srgbClr val="FFFFFF"/>
+          <a:srgbClr val="FAF8F5"/>
         </a:solidFill>
       </p:bgPr>
     </p:bg>
@@ -1593,8 +1674,8 @@
         </p:nvSpPr>
         <p:spPr>
           <a:xfrm>
-            <a:off x="548640" y="274320"/>
-            <a:ext cx="8046720" cy="640080"/>
+            <a:off x="7772400" y="4709160"/>
+            <a:ext cx="1097280" cy="320040"/>
           </a:xfrm>
           <a:prstGeom prst="rect">
             <a:avLst/>
@@ -1603,7 +1684,46 @@
           <a:ln/>
         </p:spPr>
         <p:txBody>
-          <a:bodyPr wrap="square" lIns="0" tIns="0" rIns="0" bIns="0" rtlCol="0" anchor="ctr"/>
+          <a:bodyPr wrap="square" rtlCol="0" anchor="ctr"/>
+          <a:lstStyle/>
+          <a:p>
+            <a:pPr algn="r" indent="0" marL="0">
+              <a:buNone/>
+            </a:pPr>
+            <a:r>
+              <a:rPr lang="en-US" sz="900" dirty="0">
+                <a:solidFill>
+                  <a:srgbClr val="6B6660"/>
+                </a:solidFill>
+                <a:latin typeface="Calibri" pitchFamily="34" charset="0"/>
+                <a:ea typeface="Calibri" pitchFamily="34" charset="-122"/>
+                <a:cs typeface="Calibri" pitchFamily="34" charset="-120"/>
+              </a:rPr>
+              <a:t>3 / 5</a:t>
+            </a:r>
+            <a:endParaRPr lang="en-US" sz="900" dirty="0"/>
+          </a:p>
+        </p:txBody>
+      </p:sp>
+      <p:sp>
+        <p:nvSpPr>
+          <p:cNvPr id="4" name="Text 2"/>
+          <p:cNvSpPr/>
+          <p:nvPr/>
+        </p:nvSpPr>
+        <p:spPr>
+          <a:xfrm>
+            <a:off x="457200" y="274320"/>
+            <a:ext cx="8229600" cy="640080"/>
+          </a:xfrm>
+          <a:prstGeom prst="rect">
+            <a:avLst/>
+          </a:prstGeom>
+          <a:noFill/>
+          <a:ln/>
+        </p:spPr>
+        <p:txBody>
+          <a:bodyPr wrap="square" rtlCol="0" anchor="ctr"/>
           <a:lstStyle/>
           <a:p>
             <a:pPr indent="0" marL="0">
@@ -1618,7 +1738,7 @@
                 <a:ea typeface="Georgia" pitchFamily="34" charset="-122"/>
                 <a:cs typeface="Georgia" pitchFamily="34" charset="-120"/>
               </a:rPr>
-              <a:t>Running Experiments</a:t>
+              <a:t>Theoretical Probability</a:t>
             </a:r>
             <a:endParaRPr lang="en-US" sz="2600" dirty="0"/>
           </a:p>
@@ -1626,14 +1746,14 @@
       </p:sp>
       <p:sp>
         <p:nvSpPr>
-          <p:cNvPr id="4" name="Text 2"/>
+          <p:cNvPr id="5" name="Text 3"/>
           <p:cNvSpPr/>
           <p:nvPr/>
         </p:nvSpPr>
         <p:spPr>
           <a:xfrm>
-            <a:off x="548640" y="1097280"/>
-            <a:ext cx="8046720" cy="3474720"/>
+            <a:off x="457200" y="1188720"/>
+            <a:ext cx="3840480" cy="3474720"/>
           </a:xfrm>
           <a:prstGeom prst="rect">
             <a:avLst/>
@@ -1647,13 +1767,13 @@
           <a:p>
             <a:pPr marL="342900" indent="-342900">
               <a:spcAft>
-                <a:spcPts val="800"/>
+                <a:spcPts val="600"/>
               </a:spcAft>
               <a:buSzPct val="100000"/>
               <a:buChar char="•"/>
             </a:pPr>
             <a:r>
-              <a:rPr lang="en-US" sz="1500" dirty="0">
+              <a:rPr lang="en-US" sz="1400" dirty="0">
                 <a:solidFill>
                   <a:srgbClr val="3D3A36"/>
                 </a:solidFill>
@@ -1661,20 +1781,20 @@
                 <a:ea typeface="Calibri" pitchFamily="34" charset="-122"/>
                 <a:cs typeface="Calibri" pitchFamily="34" charset="-120"/>
               </a:rPr>
-              <a:t>Example: flip a coin 50 times, get 23 heads</a:t>
-            </a:r>
-            <a:endParaRPr lang="en-US" sz="1500" dirty="0"/>
+              <a:t>Based on equally likely outcomes</a:t>
+            </a:r>
+            <a:endParaRPr lang="en-US" sz="1400" dirty="0"/>
           </a:p>
           <a:p>
             <a:pPr marL="342900" indent="-342900">
               <a:spcAft>
-                <a:spcPts val="800"/>
+                <a:spcPts val="600"/>
               </a:spcAft>
               <a:buSzPct val="100000"/>
               <a:buChar char="•"/>
             </a:pPr>
             <a:r>
-              <a:rPr lang="en-US" sz="1500" dirty="0">
+              <a:rPr lang="en-US" sz="1400" dirty="0">
                 <a:solidFill>
                   <a:srgbClr val="3D3A36"/>
                 </a:solidFill>
@@ -1682,20 +1802,20 @@
                 <a:ea typeface="Calibri" pitchFamily="34" charset="-122"/>
                 <a:cs typeface="Calibri" pitchFamily="34" charset="-120"/>
               </a:rPr>
-              <a:t>Experimental P(heads) = 23/50 = 0.46 (theoretical = 0.5)</a:t>
-            </a:r>
-            <a:endParaRPr lang="en-US" sz="1500" dirty="0"/>
+              <a:t>P(heads) = 1/2 because there are 2 equally likely outcomes</a:t>
+            </a:r>
+            <a:endParaRPr lang="en-US" sz="1400" dirty="0"/>
           </a:p>
           <a:p>
             <a:pPr marL="342900" indent="-342900">
               <a:spcAft>
-                <a:spcPts val="800"/>
+                <a:spcPts val="600"/>
               </a:spcAft>
               <a:buSzPct val="100000"/>
               <a:buChar char="•"/>
             </a:pPr>
             <a:r>
-              <a:rPr lang="en-US" sz="1500" dirty="0">
+              <a:rPr lang="en-US" sz="1400" dirty="0">
                 <a:solidFill>
                   <a:srgbClr val="3D3A36"/>
                 </a:solidFill>
@@ -1703,20 +1823,20 @@
                 <a:ea typeface="Calibri" pitchFamily="34" charset="-122"/>
                 <a:cs typeface="Calibri" pitchFamily="34" charset="-120"/>
               </a:rPr>
-              <a:t>If you flipped 1000 times, you'd get closer to 0.5</a:t>
-            </a:r>
-            <a:endParaRPr lang="en-US" sz="1500" dirty="0"/>
+              <a:t>P(rolling 6) = 1/6 because there are 6 equally likely outcomes</a:t>
+            </a:r>
+            <a:endParaRPr lang="en-US" sz="1400" dirty="0"/>
           </a:p>
           <a:p>
             <a:pPr marL="342900" indent="-342900">
               <a:spcAft>
-                <a:spcPts val="800"/>
+                <a:spcPts val="600"/>
               </a:spcAft>
               <a:buSzPct val="100000"/>
               <a:buChar char="•"/>
             </a:pPr>
             <a:r>
-              <a:rPr lang="en-US" sz="1500" dirty="0">
+              <a:rPr lang="en-US" sz="1400" dirty="0">
                 <a:solidFill>
                   <a:srgbClr val="3D3A36"/>
                 </a:solidFill>
@@ -1724,20 +1844,20 @@
                 <a:ea typeface="Calibri" pitchFamily="34" charset="-122"/>
                 <a:cs typeface="Calibri" pitchFamily="34" charset="-120"/>
               </a:rPr>
-              <a:t>Relative frequency = another name for experimental probability</a:t>
-            </a:r>
-            <a:endParaRPr lang="en-US" sz="1500" dirty="0"/>
+              <a:t>Doesn't require any actual experiments</a:t>
+            </a:r>
+            <a:endParaRPr lang="en-US" sz="1400" dirty="0"/>
           </a:p>
           <a:p>
             <a:pPr marL="342900" indent="-342900">
               <a:spcAft>
-                <a:spcPts val="800"/>
+                <a:spcPts val="600"/>
               </a:spcAft>
               <a:buSzPct val="100000"/>
               <a:buChar char="•"/>
             </a:pPr>
             <a:r>
-              <a:rPr lang="en-US" sz="1500" dirty="0">
+              <a:rPr lang="en-US" sz="1400" dirty="0">
                 <a:solidFill>
                   <a:srgbClr val="3D3A36"/>
                 </a:solidFill>
@@ -1745,22 +1865,74 @@
                 <a:ea typeface="Calibri" pitchFamily="34" charset="-122"/>
                 <a:cs typeface="Calibri" pitchFamily="34" charset="-120"/>
               </a:rPr>
-              <a:t>Record results in a frequency table</a:t>
-            </a:r>
-            <a:endParaRPr lang="en-US" sz="1500" dirty="0"/>
-          </a:p>
-        </p:txBody>
-      </p:sp>
-      <p:sp>
-        <p:nvSpPr>
-          <p:cNvPr id="5" name="Text 3"/>
+              <a:t>Assumes fair/unbiased conditions</a:t>
+            </a:r>
+            <a:endParaRPr lang="en-US" sz="1400" dirty="0"/>
+          </a:p>
+        </p:txBody>
+      </p:sp>
+      <p:sp>
+        <p:nvSpPr>
+          <p:cNvPr id="6" name="Shape 4"/>
           <p:cNvSpPr/>
           <p:nvPr/>
         </p:nvSpPr>
         <p:spPr>
           <a:xfrm>
-            <a:off x="548640" y="4800600"/>
-            <a:ext cx="3657600" cy="274320"/>
+            <a:off x="4846320" y="1188720"/>
+            <a:ext cx="3840480" cy="3474720"/>
+          </a:xfrm>
+          <a:prstGeom prst="rect">
+            <a:avLst/>
+          </a:prstGeom>
+          <a:solidFill>
+            <a:srgbClr val="FFFFFF"/>
+          </a:solidFill>
+          <a:ln w="12700">
+            <a:solidFill>
+              <a:srgbClr val="E5E2DC"/>
+            </a:solidFill>
+            <a:prstDash val="solid"/>
+          </a:ln>
+          <a:effectLst>
+            <a:outerShdw sx="100000" sy="100000" kx="0" ky="0" algn="bl" rotWithShape="0" blurRad="50800" dist="25400" dir="8100000">
+              <a:srgbClr val="000000">
+                <a:alpha val="10000"/>
+              </a:srgbClr>
+            </a:outerShdw>
+          </a:effectLst>
+        </p:spPr>
+      </p:sp>
+      <p:sp>
+        <p:nvSpPr>
+          <p:cNvPr id="7" name="Shape 5"/>
+          <p:cNvSpPr/>
+          <p:nvPr/>
+        </p:nvSpPr>
+        <p:spPr>
+          <a:xfrm>
+            <a:off x="4846320" y="1188720"/>
+            <a:ext cx="3840480" cy="54864"/>
+          </a:xfrm>
+          <a:prstGeom prst="rect">
+            <a:avLst/>
+          </a:prstGeom>
+          <a:solidFill>
+            <a:srgbClr val="2A9D8F"/>
+          </a:solidFill>
+          <a:ln/>
+        </p:spPr>
+      </p:sp>
+      <p:sp>
+        <p:nvSpPr>
+          <p:cNvPr id="8" name="Text 6"/>
+          <p:cNvSpPr/>
+          <p:nvPr/>
+        </p:nvSpPr>
+        <p:spPr>
+          <a:xfrm>
+            <a:off x="5120640" y="1371600"/>
+            <a:ext cx="3291840" cy="3108960"/>
           </a:xfrm>
           <a:prstGeom prst="rect">
             <a:avLst/>
@@ -1769,21 +1941,136 @@
           <a:ln/>
         </p:spPr>
         <p:txBody>
-          <a:bodyPr wrap="square" rtlCol="0" anchor="ctr"/>
+          <a:bodyPr wrap="square" rtlCol="0" anchor="t"/>
           <a:lstStyle/>
           <a:p>
             <a:pPr indent="0" marL="0">
+              <a:spcAft>
+                <a:spcPts val="400"/>
+              </a:spcAft>
               <a:buNone/>
             </a:pPr>
             <a:r>
-              <a:rPr lang="en-US" sz="800" dirty="0">
-                <a:solidFill>
-                  <a:srgbClr val="9B9690"/>
-                </a:solidFill>
-              </a:rPr>
-              <a:t>mrzocchi.com</a:t>
-            </a:r>
-            <a:endParaRPr lang="en-US" sz="800" dirty="0"/>
+              <a:rPr lang="en-US" sz="1600" b="1" dirty="0">
+                <a:solidFill>
+                  <a:srgbClr val="1B2A4A"/>
+                </a:solidFill>
+                <a:latin typeface="Calibri" pitchFamily="34" charset="0"/>
+                <a:ea typeface="Calibri" pitchFamily="34" charset="-122"/>
+                <a:cs typeface="Calibri" pitchFamily="34" charset="-120"/>
+              </a:rPr>
+              <a:t>Experimental Probability</a:t>
+            </a:r>
+            <a:endParaRPr lang="en-US" sz="1600" dirty="0"/>
+          </a:p>
+          <a:p>
+            <a:pPr indent="0" marL="0">
+              <a:spcAft>
+                <a:spcPts val="400"/>
+              </a:spcAft>
+              <a:buNone/>
+            </a:pPr>
+            <a:endParaRPr lang="en-US" sz="1600" dirty="0"/>
+          </a:p>
+          <a:p>
+            <a:pPr indent="0" marL="0">
+              <a:spcAft>
+                <a:spcPts val="400"/>
+              </a:spcAft>
+              <a:buNone/>
+            </a:pPr>
+            <a:r>
+              <a:rPr lang="en-US" sz="1300" dirty="0">
+                <a:solidFill>
+                  <a:srgbClr val="3D3A36"/>
+                </a:solidFill>
+                <a:latin typeface="Calibri" pitchFamily="34" charset="0"/>
+                <a:ea typeface="Calibri" pitchFamily="34" charset="-122"/>
+                <a:cs typeface="Calibri" pitchFamily="34" charset="-120"/>
+              </a:rPr>
+              <a:t>Based on actual results from experiments</a:t>
+            </a:r>
+            <a:endParaRPr lang="en-US" sz="1600" dirty="0"/>
+          </a:p>
+          <a:p>
+            <a:pPr indent="0" marL="0">
+              <a:spcAft>
+                <a:spcPts val="400"/>
+              </a:spcAft>
+              <a:buNone/>
+            </a:pPr>
+            <a:r>
+              <a:rPr lang="en-US" sz="1300" dirty="0">
+                <a:solidFill>
+                  <a:srgbClr val="3D3A36"/>
+                </a:solidFill>
+                <a:latin typeface="Calibri" pitchFamily="34" charset="0"/>
+                <a:ea typeface="Calibri" pitchFamily="34" charset="-122"/>
+                <a:cs typeface="Calibri" pitchFamily="34" charset="-120"/>
+              </a:rPr>
+              <a:t>P(heads) = number of heads ÷ number of flips</a:t>
+            </a:r>
+            <a:endParaRPr lang="en-US" sz="1600" dirty="0"/>
+          </a:p>
+          <a:p>
+            <a:pPr indent="0" marL="0">
+              <a:spcAft>
+                <a:spcPts val="400"/>
+              </a:spcAft>
+              <a:buNone/>
+            </a:pPr>
+            <a:r>
+              <a:rPr lang="en-US" sz="1300" dirty="0">
+                <a:solidFill>
+                  <a:srgbClr val="3D3A36"/>
+                </a:solidFill>
+                <a:latin typeface="Calibri" pitchFamily="34" charset="0"/>
+                <a:ea typeface="Calibri" pitchFamily="34" charset="-122"/>
+                <a:cs typeface="Calibri" pitchFamily="34" charset="-120"/>
+              </a:rPr>
+              <a:t>If you flip 100 times and get 47 heads: P = 47/100 = 0.47</a:t>
+            </a:r>
+            <a:endParaRPr lang="en-US" sz="1600" dirty="0"/>
+          </a:p>
+          <a:p>
+            <a:pPr indent="0" marL="0">
+              <a:spcAft>
+                <a:spcPts val="400"/>
+              </a:spcAft>
+              <a:buNone/>
+            </a:pPr>
+            <a:r>
+              <a:rPr lang="en-US" sz="1300" dirty="0">
+                <a:solidFill>
+                  <a:srgbClr val="3D3A36"/>
+                </a:solidFill>
+                <a:latin typeface="Calibri" pitchFamily="34" charset="0"/>
+                <a:ea typeface="Calibri" pitchFamily="34" charset="-122"/>
+                <a:cs typeface="Calibri" pitchFamily="34" charset="-120"/>
+              </a:rPr>
+              <a:t>Results vary each time you repeat</a:t>
+            </a:r>
+            <a:endParaRPr lang="en-US" sz="1600" dirty="0"/>
+          </a:p>
+          <a:p>
+            <a:pPr indent="0" marL="0">
+              <a:spcAft>
+                <a:spcPts val="400"/>
+              </a:spcAft>
+              <a:buNone/>
+            </a:pPr>
+            <a:r>
+              <a:rPr lang="en-US" sz="1300" dirty="0">
+                <a:solidFill>
+                  <a:srgbClr val="3D3A36"/>
+                </a:solidFill>
+                <a:latin typeface="Calibri" pitchFamily="34" charset="0"/>
+                <a:ea typeface="Calibri" pitchFamily="34" charset="-122"/>
+                <a:cs typeface="Calibri" pitchFamily="34" charset="-120"/>
+              </a:rPr>
+              <a:t>More trials = closer to theoretical probability</a:t>
+            </a:r>
+            <a:endParaRPr lang="en-US" sz="1600" dirty="0"/>
           </a:p>
         </p:txBody>
       </p:sp>
@@ -1798,6 +2085,305 @@
 <file path=ppt/slides/slide4.xml><?xml version="1.0" encoding="utf-8"?>
 <p:sld xmlns:a="http://schemas.openxmlformats.org/drawingml/2006/main" xmlns:r="http://schemas.openxmlformats.org/officeDocument/2006/relationships" xmlns:p="http://schemas.openxmlformats.org/presentationml/2006/main">
   <p:cSld name="Slide 4">
+    <p:bg>
+      <p:bgPr>
+        <a:solidFill>
+          <a:srgbClr val="FAF8F5"/>
+        </a:solidFill>
+      </p:bgPr>
+    </p:bg>
+    <p:spTree>
+      <p:nvGrpSpPr>
+        <p:cNvPr id="1" name=""/>
+        <p:cNvGrpSpPr/>
+        <p:nvPr/>
+      </p:nvGrpSpPr>
+      <p:grpSpPr>
+        <a:xfrm>
+          <a:off x="0" y="0"/>
+          <a:ext cx="0" cy="0"/>
+          <a:chOff x="0" y="0"/>
+          <a:chExt cx="0" cy="0"/>
+        </a:xfrm>
+      </p:grpSpPr>
+      <p:sp>
+        <p:nvSpPr>
+          <p:cNvPr id="2" name="Shape 0"/>
+          <p:cNvSpPr/>
+          <p:nvPr/>
+        </p:nvSpPr>
+        <p:spPr>
+          <a:xfrm>
+            <a:off x="0" y="0"/>
+            <a:ext cx="9144000" cy="54864"/>
+          </a:xfrm>
+          <a:prstGeom prst="rect">
+            <a:avLst/>
+          </a:prstGeom>
+          <a:solidFill>
+            <a:srgbClr val="2A9D8F"/>
+          </a:solidFill>
+          <a:ln/>
+        </p:spPr>
+      </p:sp>
+      <p:sp>
+        <p:nvSpPr>
+          <p:cNvPr id="3" name="Text 1"/>
+          <p:cNvSpPr/>
+          <p:nvPr/>
+        </p:nvSpPr>
+        <p:spPr>
+          <a:xfrm>
+            <a:off x="7772400" y="4709160"/>
+            <a:ext cx="1097280" cy="320040"/>
+          </a:xfrm>
+          <a:prstGeom prst="rect">
+            <a:avLst/>
+          </a:prstGeom>
+          <a:noFill/>
+          <a:ln/>
+        </p:spPr>
+        <p:txBody>
+          <a:bodyPr wrap="square" rtlCol="0" anchor="ctr"/>
+          <a:lstStyle/>
+          <a:p>
+            <a:pPr algn="r" indent="0" marL="0">
+              <a:buNone/>
+            </a:pPr>
+            <a:r>
+              <a:rPr lang="en-US" sz="900" dirty="0">
+                <a:solidFill>
+                  <a:srgbClr val="6B6660"/>
+                </a:solidFill>
+                <a:latin typeface="Calibri" pitchFamily="34" charset="0"/>
+                <a:ea typeface="Calibri" pitchFamily="34" charset="-122"/>
+                <a:cs typeface="Calibri" pitchFamily="34" charset="-120"/>
+              </a:rPr>
+              <a:t>4 / 5</a:t>
+            </a:r>
+            <a:endParaRPr lang="en-US" sz="900" dirty="0"/>
+          </a:p>
+        </p:txBody>
+      </p:sp>
+      <p:sp>
+        <p:nvSpPr>
+          <p:cNvPr id="4" name="Text 2"/>
+          <p:cNvSpPr/>
+          <p:nvPr/>
+        </p:nvSpPr>
+        <p:spPr>
+          <a:xfrm>
+            <a:off x="457200" y="274320"/>
+            <a:ext cx="8229600" cy="640080"/>
+          </a:xfrm>
+          <a:prstGeom prst="rect">
+            <a:avLst/>
+          </a:prstGeom>
+          <a:noFill/>
+          <a:ln/>
+        </p:spPr>
+        <p:txBody>
+          <a:bodyPr wrap="square" rtlCol="0" anchor="ctr"/>
+          <a:lstStyle/>
+          <a:p>
+            <a:pPr indent="0" marL="0">
+              <a:buNone/>
+            </a:pPr>
+            <a:r>
+              <a:rPr lang="en-US" sz="2600" b="1" dirty="0">
+                <a:solidFill>
+                  <a:srgbClr val="1B2A4A"/>
+                </a:solidFill>
+                <a:latin typeface="Georgia" pitchFamily="34" charset="0"/>
+                <a:ea typeface="Georgia" pitchFamily="34" charset="-122"/>
+                <a:cs typeface="Georgia" pitchFamily="34" charset="-120"/>
+              </a:rPr>
+              <a:t>The Law of Large Numbers</a:t>
+            </a:r>
+            <a:endParaRPr lang="en-US" sz="2600" dirty="0"/>
+          </a:p>
+        </p:txBody>
+      </p:sp>
+      <p:sp>
+        <p:nvSpPr>
+          <p:cNvPr id="5" name="Text 3"/>
+          <p:cNvSpPr/>
+          <p:nvPr/>
+        </p:nvSpPr>
+        <p:spPr>
+          <a:xfrm>
+            <a:off x="457200" y="1097280"/>
+            <a:ext cx="8229600" cy="3657600"/>
+          </a:xfrm>
+          <a:prstGeom prst="rect">
+            <a:avLst/>
+          </a:prstGeom>
+          <a:noFill/>
+          <a:ln/>
+        </p:spPr>
+        <p:txBody>
+          <a:bodyPr wrap="square" rtlCol="0" anchor="t"/>
+          <a:lstStyle/>
+          <a:p>
+            <a:pPr marL="342900" indent="-342900">
+              <a:spcAft>
+                <a:spcPts val="800"/>
+              </a:spcAft>
+              <a:buSzPct val="100000"/>
+              <a:buChar char="•"/>
+            </a:pPr>
+            <a:r>
+              <a:rPr lang="en-US" sz="1400" dirty="0">
+                <a:solidFill>
+                  <a:srgbClr val="3D3A36"/>
+                </a:solidFill>
+                <a:latin typeface="Calibri" pitchFamily="34" charset="0"/>
+                <a:ea typeface="Calibri" pitchFamily="34" charset="-122"/>
+                <a:cs typeface="Calibri" pitchFamily="34" charset="-120"/>
+              </a:rPr>
+              <a:t>With few trials, results can be very different from theoretical</a:t>
+            </a:r>
+            <a:endParaRPr lang="en-US" sz="1400" dirty="0"/>
+          </a:p>
+          <a:p>
+            <a:pPr marL="342900" indent="-342900">
+              <a:spcAft>
+                <a:spcPts val="800"/>
+              </a:spcAft>
+              <a:buSzPct val="100000"/>
+              <a:buChar char="•"/>
+            </a:pPr>
+            <a:r>
+              <a:rPr lang="en-US" sz="1400" dirty="0">
+                <a:solidFill>
+                  <a:srgbClr val="3D3A36"/>
+                </a:solidFill>
+                <a:latin typeface="Calibri" pitchFamily="34" charset="0"/>
+                <a:ea typeface="Calibri" pitchFamily="34" charset="-122"/>
+                <a:cs typeface="Calibri" pitchFamily="34" charset="-120"/>
+              </a:rPr>
+              <a:t>Flip a coin 10 times: might get 7 heads (70%) — not unusual</a:t>
+            </a:r>
+            <a:endParaRPr lang="en-US" sz="1400" dirty="0"/>
+          </a:p>
+          <a:p>
+            <a:pPr marL="342900" indent="-342900">
+              <a:spcAft>
+                <a:spcPts val="800"/>
+              </a:spcAft>
+              <a:buSzPct val="100000"/>
+              <a:buChar char="•"/>
+            </a:pPr>
+            <a:r>
+              <a:rPr lang="en-US" sz="1400" dirty="0">
+                <a:solidFill>
+                  <a:srgbClr val="3D3A36"/>
+                </a:solidFill>
+                <a:latin typeface="Calibri" pitchFamily="34" charset="0"/>
+                <a:ea typeface="Calibri" pitchFamily="34" charset="-122"/>
+                <a:cs typeface="Calibri" pitchFamily="34" charset="-120"/>
+              </a:rPr>
+              <a:t>Flip 100 times: probably closer to 50% heads</a:t>
+            </a:r>
+            <a:endParaRPr lang="en-US" sz="1400" dirty="0"/>
+          </a:p>
+          <a:p>
+            <a:pPr marL="342900" indent="-342900">
+              <a:spcAft>
+                <a:spcPts val="800"/>
+              </a:spcAft>
+              <a:buSzPct val="100000"/>
+              <a:buChar char="•"/>
+            </a:pPr>
+            <a:r>
+              <a:rPr lang="en-US" sz="1400" dirty="0">
+                <a:solidFill>
+                  <a:srgbClr val="3D3A36"/>
+                </a:solidFill>
+                <a:latin typeface="Calibri" pitchFamily="34" charset="0"/>
+                <a:ea typeface="Calibri" pitchFamily="34" charset="-122"/>
+                <a:cs typeface="Calibri" pitchFamily="34" charset="-120"/>
+              </a:rPr>
+              <a:t>Flip 1000 times: very close to 50%</a:t>
+            </a:r>
+            <a:endParaRPr lang="en-US" sz="1400" dirty="0"/>
+          </a:p>
+          <a:p>
+            <a:pPr marL="342900" indent="-342900">
+              <a:spcAft>
+                <a:spcPts val="800"/>
+              </a:spcAft>
+              <a:buSzPct val="100000"/>
+              <a:buChar char="•"/>
+            </a:pPr>
+            <a:r>
+              <a:rPr lang="en-US" sz="1400" dirty="0">
+                <a:solidFill>
+                  <a:srgbClr val="3D3A36"/>
+                </a:solidFill>
+                <a:latin typeface="Calibri" pitchFamily="34" charset="0"/>
+                <a:ea typeface="Calibri" pitchFamily="34" charset="-122"/>
+                <a:cs typeface="Calibri" pitchFamily="34" charset="-120"/>
+              </a:rPr>
+              <a:t>This pattern is the Law of Large Numbers</a:t>
+            </a:r>
+            <a:endParaRPr lang="en-US" sz="1400" dirty="0"/>
+          </a:p>
+          <a:p>
+            <a:pPr marL="342900" indent="-342900">
+              <a:spcAft>
+                <a:spcPts val="800"/>
+              </a:spcAft>
+              <a:buSzPct val="100000"/>
+              <a:buChar char="•"/>
+            </a:pPr>
+            <a:r>
+              <a:rPr lang="en-US" sz="1400" dirty="0">
+                <a:solidFill>
+                  <a:srgbClr val="3D3A36"/>
+                </a:solidFill>
+                <a:latin typeface="Calibri" pitchFamily="34" charset="0"/>
+                <a:ea typeface="Calibri" pitchFamily="34" charset="-122"/>
+                <a:cs typeface="Calibri" pitchFamily="34" charset="-120"/>
+              </a:rPr>
+              <a:t>It doesn't mean results will be EXACTLY 50% — just close</a:t>
+            </a:r>
+            <a:endParaRPr lang="en-US" sz="1400" dirty="0"/>
+          </a:p>
+          <a:p>
+            <a:pPr marL="342900" indent="-342900">
+              <a:spcAft>
+                <a:spcPts val="800"/>
+              </a:spcAft>
+              <a:buSzPct val="100000"/>
+              <a:buChar char="•"/>
+            </a:pPr>
+            <a:r>
+              <a:rPr lang="en-US" sz="1400" dirty="0">
+                <a:solidFill>
+                  <a:srgbClr val="3D3A36"/>
+                </a:solidFill>
+                <a:latin typeface="Calibri" pitchFamily="34" charset="0"/>
+                <a:ea typeface="Calibri" pitchFamily="34" charset="-122"/>
+                <a:cs typeface="Calibri" pitchFamily="34" charset="-120"/>
+              </a:rPr>
+              <a:t>Experimental probability is useful when theoretical is hard to calculate</a:t>
+            </a:r>
+            <a:endParaRPr lang="en-US" sz="1400" dirty="0"/>
+          </a:p>
+        </p:txBody>
+      </p:sp>
+    </p:spTree>
+  </p:cSld>
+  <p:clrMapOvr>
+    <a:masterClrMapping/>
+  </p:clrMapOvr>
+</p:sld>
+</file>
+
+<file path=ppt/slides/slide5.xml><?xml version="1.0" encoding="utf-8"?>
+<p:sld xmlns:a="http://schemas.openxmlformats.org/drawingml/2006/main" xmlns:r="http://schemas.openxmlformats.org/officeDocument/2006/relationships" xmlns:p="http://schemas.openxmlformats.org/presentationml/2006/main">
+  <p:cSld name="Slide 5">
     <p:bg>
       <p:bgPr>
         <a:solidFill>
@@ -1828,13 +2414,13 @@
         <p:spPr>
           <a:xfrm>
             <a:off x="0" y="0"/>
-            <a:ext cx="9144000" cy="54864"/>
-          </a:xfrm>
-          <a:prstGeom prst="rect">
-            <a:avLst/>
-          </a:prstGeom>
-          <a:solidFill>
-            <a:srgbClr val="2A9D8F"/>
+            <a:ext cx="109728" cy="5143500"/>
+          </a:xfrm>
+          <a:prstGeom prst="rect">
+            <a:avLst/>
+          </a:prstGeom>
+          <a:solidFill>
+            <a:srgbClr val="E9C46A"/>
           </a:solidFill>
           <a:ln/>
         </p:spPr>
@@ -1847,8 +2433,8 @@
         </p:nvSpPr>
         <p:spPr>
           <a:xfrm>
-            <a:off x="548640" y="457200"/>
-            <a:ext cx="8046720" cy="640080"/>
+            <a:off x="731520" y="457200"/>
+            <a:ext cx="7772400" cy="731520"/>
           </a:xfrm>
           <a:prstGeom prst="rect">
             <a:avLst/>
@@ -1864,7 +2450,7 @@
               <a:buNone/>
             </a:pPr>
             <a:r>
-              <a:rPr lang="en-US" sz="2800" b="1" dirty="0">
+              <a:rPr lang="en-US" sz="3200" b="1" dirty="0">
                 <a:solidFill>
                   <a:srgbClr val="FFFFFF"/>
                 </a:solidFill>
@@ -1874,7 +2460,7 @@
               </a:rPr>
               <a:t>Key Takeaways</a:t>
             </a:r>
-            <a:endParaRPr lang="en-US" sz="2800" dirty="0"/>
+            <a:endParaRPr lang="en-US" sz="3200" dirty="0"/>
           </a:p>
         </p:txBody>
       </p:sp>
@@ -1886,8 +2472,8 @@
         </p:nvSpPr>
         <p:spPr>
           <a:xfrm>
-            <a:off x="731520" y="1371600"/>
-            <a:ext cx="7680960" cy="3200400"/>
+            <a:off x="731520" y="1463040"/>
+            <a:ext cx="7772400" cy="3200400"/>
           </a:xfrm>
           <a:prstGeom prst="rect">
             <a:avLst/>
@@ -1907,7 +2493,7 @@
               <a:buChar char="•"/>
             </a:pPr>
             <a:r>
-              <a:rPr lang="en-US" sz="1600" dirty="0">
+              <a:rPr lang="en-US" sz="1500" dirty="0">
                 <a:solidFill>
                   <a:srgbClr val="CADCFC"/>
                 </a:solidFill>
@@ -1915,9 +2501,9 @@
                 <a:ea typeface="Calibri" pitchFamily="34" charset="-122"/>
                 <a:cs typeface="Calibri" pitchFamily="34" charset="-120"/>
               </a:rPr>
-              <a:t>Theoretical = calculated; Experimental = observed from trials</a:t>
-            </a:r>
-            <a:endParaRPr lang="en-US" sz="1600" dirty="0"/>
+              <a:t>Theoretical: based on maths (equally likely outcomes)</a:t>
+            </a:r>
+            <a:endParaRPr lang="en-US" sz="1500" dirty="0"/>
           </a:p>
           <a:p>
             <a:pPr marL="342900" indent="-342900">
@@ -1928,7 +2514,7 @@
               <a:buChar char="•"/>
             </a:pPr>
             <a:r>
-              <a:rPr lang="en-US" sz="1600" dirty="0">
+              <a:rPr lang="en-US" sz="1500" dirty="0">
                 <a:solidFill>
                   <a:srgbClr val="CADCFC"/>
                 </a:solidFill>
@@ -1936,9 +2522,9 @@
                 <a:ea typeface="Calibri" pitchFamily="34" charset="-122"/>
                 <a:cs typeface="Calibri" pitchFamily="34" charset="-120"/>
               </a:rPr>
-              <a:t>More trials = experimental probability gets closer to theoretical</a:t>
-            </a:r>
-            <a:endParaRPr lang="en-US" sz="1600" dirty="0"/>
+              <a:t>Experimental: based on actual trial results</a:t>
+            </a:r>
+            <a:endParaRPr lang="en-US" sz="1500" dirty="0"/>
           </a:p>
           <a:p>
             <a:pPr marL="342900" indent="-342900">
@@ -1949,7 +2535,7 @@
               <a:buChar char="•"/>
             </a:pPr>
             <a:r>
-              <a:rPr lang="en-US" sz="1600" dirty="0">
+              <a:rPr lang="en-US" sz="1500" dirty="0">
                 <a:solidFill>
                   <a:srgbClr val="CADCFC"/>
                 </a:solidFill>
@@ -1957,9 +2543,9 @@
                 <a:ea typeface="Calibri" pitchFamily="34" charset="-122"/>
                 <a:cs typeface="Calibri" pitchFamily="34" charset="-120"/>
               </a:rPr>
-              <a:t>Relative frequency = experimental probability</a:t>
-            </a:r>
-            <a:endParaRPr lang="en-US" sz="1600" dirty="0"/>
+              <a:t>More trials → experimental approaches theoretical (Law of Large Numbers)</a:t>
+            </a:r>
+            <a:endParaRPr lang="en-US" sz="1500" dirty="0"/>
           </a:p>
           <a:p>
             <a:pPr marL="342900" indent="-342900">
@@ -1970,7 +2556,7 @@
               <a:buChar char="•"/>
             </a:pPr>
             <a:r>
-              <a:rPr lang="en-US" sz="1600" dirty="0">
+              <a:rPr lang="en-US" sz="1500" dirty="0">
                 <a:solidFill>
                   <a:srgbClr val="CADCFC"/>
                 </a:solidFill>
@@ -1978,9 +2564,30 @@
                 <a:ea typeface="Calibri" pitchFamily="34" charset="-122"/>
                 <a:cs typeface="Calibri" pitchFamily="34" charset="-120"/>
               </a:rPr>
-              <a:t>Results vary due to randomness — this is normal</a:t>
-            </a:r>
-            <a:endParaRPr lang="en-US" sz="1600" dirty="0"/>
+              <a:t>Results vary with small samples</a:t>
+            </a:r>
+            <a:endParaRPr lang="en-US" sz="1500" dirty="0"/>
+          </a:p>
+          <a:p>
+            <a:pPr marL="342900" indent="-342900">
+              <a:spcAft>
+                <a:spcPts val="1000"/>
+              </a:spcAft>
+              <a:buSzPct val="100000"/>
+              <a:buChar char="•"/>
+            </a:pPr>
+            <a:r>
+              <a:rPr lang="en-US" sz="1500" dirty="0">
+                <a:solidFill>
+                  <a:srgbClr val="CADCFC"/>
+                </a:solidFill>
+                <a:latin typeface="Calibri" pitchFamily="34" charset="0"/>
+                <a:ea typeface="Calibri" pitchFamily="34" charset="-122"/>
+                <a:cs typeface="Calibri" pitchFamily="34" charset="-120"/>
+              </a:rPr>
+              <a:t>Experimental useful when you can't calculate theoretical</a:t>
+            </a:r>
+            <a:endParaRPr lang="en-US" sz="1500" dirty="0"/>
           </a:p>
         </p:txBody>
       </p:sp>
@@ -1992,8 +2599,8 @@
         </p:nvSpPr>
         <p:spPr>
           <a:xfrm>
-            <a:off x="548640" y="4572000"/>
-            <a:ext cx="3657600" cy="274320"/>
+            <a:off x="731520" y="4572000"/>
+            <a:ext cx="7772400" cy="365760"/>
           </a:xfrm>
           <a:prstGeom prst="rect">
             <a:avLst/>
@@ -2009,14 +2616,17 @@
               <a:buNone/>
             </a:pPr>
             <a:r>
-              <a:rPr lang="en-US" sz="1000" dirty="0">
-                <a:solidFill>
-                  <a:srgbClr val="6B6660"/>
-                </a:solidFill>
+              <a:rPr lang="en-US" sz="1100" dirty="0">
+                <a:solidFill>
+                  <a:srgbClr val="E9C46A"/>
+                </a:solidFill>
+                <a:latin typeface="Calibri" pitchFamily="34" charset="0"/>
+                <a:ea typeface="Calibri" pitchFamily="34" charset="-122"/>
+                <a:cs typeface="Calibri" pitchFamily="34" charset="-120"/>
               </a:rPr>
               <a:t>mrzocchi.com</a:t>
             </a:r>
-            <a:endParaRPr lang="en-US" sz="1000" dirty="0"/>
+            <a:endParaRPr lang="en-US" sz="1100" dirty="0"/>
           </a:p>
         </p:txBody>
       </p:sp>

--- a/static/ppts/G6_Math_T5_Experimental_Prob.pptx
+++ b/static/ppts/G6_Math_T5_Experimental_Prob.pptx
@@ -10,9 +10,11 @@
     <p:sldId id="258" r:id="rId4"/>
     <p:sldId id="259" r:id="rId5"/>
     <p:sldId id="260" r:id="rId6"/>
+    <p:sldId id="261" r:id="rId7"/>
+    <p:sldId id="262" r:id="rId8"/>
   </p:sldIdLst>
   <p:notesMasterIdLst>
-    <p:notesMasterId r:id="rId7"/>
+    <p:notesMasterId r:id="rId9"/>
   </p:notesMasterIdLst>
   <p:sldSz cx="9144000" cy="5143500"/>
   <p:notesSz cx="5143500" cy="9144000"/>
@@ -900,6 +902,182 @@
 </p:notes>
 </file>
 
+<file path=ppt/notesSlides/notesSlide6.xml><?xml version="1.0" encoding="utf-8"?>
+<p:notes xmlns:a="http://schemas.openxmlformats.org/drawingml/2006/main" xmlns:r="http://schemas.openxmlformats.org/officeDocument/2006/relationships" xmlns:p="http://schemas.openxmlformats.org/presentationml/2006/main">
+  <p:cSld>
+    <p:spTree>
+      <p:nvGrpSpPr>
+        <p:cNvPr id="1" name=""/>
+        <p:cNvGrpSpPr/>
+        <p:nvPr/>
+      </p:nvGrpSpPr>
+      <p:grpSpPr>
+        <a:xfrm>
+          <a:off x="0" y="0"/>
+          <a:ext cx="0" cy="0"/>
+          <a:chOff x="0" y="0"/>
+          <a:chExt cx="0" cy="0"/>
+        </a:xfrm>
+      </p:grpSpPr>
+      <p:sp>
+        <p:nvSpPr>
+          <p:cNvPr id="2" name="Slide Image Placeholder 1"/>
+          <p:cNvSpPr>
+            <a:spLocks noGrp="1" noRot="1" noChangeAspect="1"/>
+          </p:cNvSpPr>
+          <p:nvPr>
+            <p:ph type="sldImg"/>
+          </p:nvPr>
+        </p:nvSpPr>
+        <p:spPr/>
+      </p:sp>
+      <p:sp>
+        <p:nvSpPr>
+          <p:cNvPr id="3" name="Notes Placeholder 2"/>
+          <p:cNvSpPr>
+            <a:spLocks noGrp="1"/>
+          </p:cNvSpPr>
+          <p:nvPr>
+            <p:ph type="body" idx="1"/>
+          </p:nvPr>
+        </p:nvSpPr>
+        <p:spPr/>
+        <p:txBody>
+          <a:bodyPr/>
+          <a:lstStyle/>
+          <a:p>
+            <a:r>
+              <a:rPr lang="en-US" dirty="0"/>
+              <a:t/>
+            </a:r>
+            <a:endParaRPr lang="en-US" dirty="0"/>
+          </a:p>
+        </p:txBody>
+      </p:sp>
+      <p:sp>
+        <p:nvSpPr>
+          <p:cNvPr id="4" name="Slide Number Placeholder 3"/>
+          <p:cNvSpPr>
+            <a:spLocks noGrp="1"/>
+          </p:cNvSpPr>
+          <p:nvPr>
+            <p:ph type="sldNum" sz="quarter" idx="10"/>
+          </p:nvPr>
+        </p:nvSpPr>
+        <p:spPr/>
+        <p:txBody>
+          <a:bodyPr/>
+          <a:lstStyle/>
+          <a:p>
+            <a:fld id="{F7021451-1387-4CA6-816F-3879F97B5CBC}" type="slidenum">
+              <a:rPr lang="en-US"/>
+              <a:t>6</a:t>
+            </a:fld>
+            <a:endParaRPr lang="en-US"/>
+          </a:p>
+        </p:txBody>
+      </p:sp>
+    </p:spTree>
+    <p:extLst>
+      <p:ext uri="{BB962C8B-B14F-4D97-AF65-F5344CB8AC3E}">
+        <p14:creationId xmlns:p14="http://schemas.microsoft.com/office/powerpoint/2010/main" val="1024086991"/>
+      </p:ext>
+    </p:extLst>
+  </p:cSld>
+  <p:clrMapOvr>
+    <a:masterClrMapping/>
+  </p:clrMapOvr>
+</p:notes>
+</file>
+
+<file path=ppt/notesSlides/notesSlide7.xml><?xml version="1.0" encoding="utf-8"?>
+<p:notes xmlns:a="http://schemas.openxmlformats.org/drawingml/2006/main" xmlns:r="http://schemas.openxmlformats.org/officeDocument/2006/relationships" xmlns:p="http://schemas.openxmlformats.org/presentationml/2006/main">
+  <p:cSld>
+    <p:spTree>
+      <p:nvGrpSpPr>
+        <p:cNvPr id="1" name=""/>
+        <p:cNvGrpSpPr/>
+        <p:nvPr/>
+      </p:nvGrpSpPr>
+      <p:grpSpPr>
+        <a:xfrm>
+          <a:off x="0" y="0"/>
+          <a:ext cx="0" cy="0"/>
+          <a:chOff x="0" y="0"/>
+          <a:chExt cx="0" cy="0"/>
+        </a:xfrm>
+      </p:grpSpPr>
+      <p:sp>
+        <p:nvSpPr>
+          <p:cNvPr id="2" name="Slide Image Placeholder 1"/>
+          <p:cNvSpPr>
+            <a:spLocks noGrp="1" noRot="1" noChangeAspect="1"/>
+          </p:cNvSpPr>
+          <p:nvPr>
+            <p:ph type="sldImg"/>
+          </p:nvPr>
+        </p:nvSpPr>
+        <p:spPr/>
+      </p:sp>
+      <p:sp>
+        <p:nvSpPr>
+          <p:cNvPr id="3" name="Notes Placeholder 2"/>
+          <p:cNvSpPr>
+            <a:spLocks noGrp="1"/>
+          </p:cNvSpPr>
+          <p:nvPr>
+            <p:ph type="body" idx="1"/>
+          </p:nvPr>
+        </p:nvSpPr>
+        <p:spPr/>
+        <p:txBody>
+          <a:bodyPr/>
+          <a:lstStyle/>
+          <a:p>
+            <a:r>
+              <a:rPr lang="en-US" dirty="0"/>
+              <a:t/>
+            </a:r>
+            <a:endParaRPr lang="en-US" dirty="0"/>
+          </a:p>
+        </p:txBody>
+      </p:sp>
+      <p:sp>
+        <p:nvSpPr>
+          <p:cNvPr id="4" name="Slide Number Placeholder 3"/>
+          <p:cNvSpPr>
+            <a:spLocks noGrp="1"/>
+          </p:cNvSpPr>
+          <p:nvPr>
+            <p:ph type="sldNum" sz="quarter" idx="10"/>
+          </p:nvPr>
+        </p:nvSpPr>
+        <p:spPr/>
+        <p:txBody>
+          <a:bodyPr/>
+          <a:lstStyle/>
+          <a:p>
+            <a:fld id="{F7021451-1387-4CA6-816F-3879F97B5CBC}" type="slidenum">
+              <a:rPr lang="en-US"/>
+              <a:t>7</a:t>
+            </a:fld>
+            <a:endParaRPr lang="en-US"/>
+          </a:p>
+        </p:txBody>
+      </p:sp>
+    </p:spTree>
+    <p:extLst>
+      <p:ext uri="{BB962C8B-B14F-4D97-AF65-F5344CB8AC3E}">
+        <p14:creationId xmlns:p14="http://schemas.microsoft.com/office/powerpoint/2010/main" val="1024086991"/>
+      </p:ext>
+    </p:extLst>
+  </p:cSld>
+  <p:clrMapOvr>
+    <a:masterClrMapping/>
+  </p:clrMapOvr>
+</p:notes>
+</file>
+
 <file path=ppt/slideLayouts/slideLayout1.xml><?xml version="1.0" encoding="utf-8"?>
 <p:sldLayout xmlns:a="http://schemas.openxmlformats.org/drawingml/2006/main" xmlns:r="http://schemas.openxmlformats.org/officeDocument/2006/relationships" xmlns:p="http://schemas.openxmlformats.org/presentationml/2006/main" preserve="1">
   <p:cSld name="DEFAULT">
@@ -1210,13 +1388,6 @@
 <file path=ppt/slides/slide1.xml><?xml version="1.0" encoding="utf-8"?>
 <p:sld xmlns:a="http://schemas.openxmlformats.org/drawingml/2006/main" xmlns:r="http://schemas.openxmlformats.org/officeDocument/2006/relationships" xmlns:p="http://schemas.openxmlformats.org/presentationml/2006/main">
   <p:cSld name="Slide 1">
-    <p:bg>
-      <p:bgPr>
-        <a:solidFill>
-          <a:srgbClr val="1B2A4A"/>
-        </a:solidFill>
-      </p:bgPr>
-    </p:bg>
     <p:spTree>
       <p:nvGrpSpPr>
         <p:cNvPr id="1" name=""/>
@@ -1240,7 +1411,27 @@
         <p:spPr>
           <a:xfrm>
             <a:off x="0" y="0"/>
-            <a:ext cx="109728" cy="5143500"/>
+            <a:ext cx="9144000" cy="5143500"/>
+          </a:xfrm>
+          <a:prstGeom prst="rect">
+            <a:avLst/>
+          </a:prstGeom>
+          <a:solidFill>
+            <a:srgbClr val="1B2A4A"/>
+          </a:solidFill>
+          <a:ln/>
+        </p:spPr>
+      </p:sp>
+      <p:sp>
+        <p:nvSpPr>
+          <p:cNvPr id="3" name="Shape 1"/>
+          <p:cNvSpPr/>
+          <p:nvPr/>
+        </p:nvSpPr>
+        <p:spPr>
+          <a:xfrm>
+            <a:off x="0" y="4777740"/>
+            <a:ext cx="9144000" cy="365760"/>
           </a:xfrm>
           <a:prstGeom prst="rect">
             <a:avLst/>
@@ -1253,14 +1444,36 @@
       </p:sp>
       <p:sp>
         <p:nvSpPr>
-          <p:cNvPr id="3" name="Text 1"/>
-          <p:cNvSpPr/>
-          <p:nvPr/>
-        </p:nvSpPr>
-        <p:spPr>
-          <a:xfrm>
-            <a:off x="731520" y="1097280"/>
-            <a:ext cx="7772400" cy="1371600"/>
+          <p:cNvPr id="4" name="Shape 2"/>
+          <p:cNvSpPr/>
+          <p:nvPr/>
+        </p:nvSpPr>
+        <p:spPr>
+          <a:xfrm>
+            <a:off x="6858000" y="-1371600"/>
+            <a:ext cx="4572000" cy="4572000"/>
+          </a:xfrm>
+          <a:prstGeom prst="ellipse">
+            <a:avLst/>
+          </a:prstGeom>
+          <a:solidFill>
+            <a:srgbClr val="2A9D8F">
+              <a:alpha val="12000"/>
+            </a:srgbClr>
+          </a:solidFill>
+          <a:ln/>
+        </p:spPr>
+      </p:sp>
+      <p:sp>
+        <p:nvSpPr>
+          <p:cNvPr id="5" name="Text 3"/>
+          <p:cNvSpPr/>
+          <p:nvPr/>
+        </p:nvSpPr>
+        <p:spPr>
+          <a:xfrm>
+            <a:off x="731520" y="914400"/>
+            <a:ext cx="7680960" cy="457200"/>
           </a:xfrm>
           <a:prstGeom prst="rect">
             <a:avLst/>
@@ -1276,7 +1489,46 @@
               <a:buNone/>
             </a:pPr>
             <a:r>
-              <a:rPr lang="en-US" sz="4000" b="1" dirty="0">
+              <a:rPr lang="en-US" sz="1300" b="1" spc="500" kern="0" dirty="0">
+                <a:solidFill>
+                  <a:srgbClr val="2A9D8F"/>
+                </a:solidFill>
+                <a:latin typeface="Calibri" pitchFamily="34" charset="0"/>
+                <a:ea typeface="Calibri" pitchFamily="34" charset="-122"/>
+                <a:cs typeface="Calibri" pitchFamily="34" charset="-120"/>
+              </a:rPr>
+              <a:t>GRADE 6 MATHEMATICS</a:t>
+            </a:r>
+            <a:endParaRPr lang="en-US" sz="1300" dirty="0"/>
+          </a:p>
+        </p:txBody>
+      </p:sp>
+      <p:sp>
+        <p:nvSpPr>
+          <p:cNvPr id="6" name="Text 4"/>
+          <p:cNvSpPr/>
+          <p:nvPr/>
+        </p:nvSpPr>
+        <p:spPr>
+          <a:xfrm>
+            <a:off x="731520" y="1463040"/>
+            <a:ext cx="6858000" cy="1645920"/>
+          </a:xfrm>
+          <a:prstGeom prst="rect">
+            <a:avLst/>
+          </a:prstGeom>
+          <a:noFill/>
+          <a:ln/>
+        </p:spPr>
+        <p:txBody>
+          <a:bodyPr wrap="square" rtlCol="0" anchor="t"/>
+          <a:lstStyle/>
+          <a:p>
+            <a:pPr indent="0" marL="0">
+              <a:buNone/>
+            </a:pPr>
+            <a:r>
+              <a:rPr lang="en-US" sz="3800" b="1" dirty="0">
                 <a:solidFill>
                   <a:srgbClr val="FFFFFF"/>
                 </a:solidFill>
@@ -1284,46 +1536,63 @@
                 <a:ea typeface="Georgia" pitchFamily="34" charset="-122"/>
                 <a:cs typeface="Georgia" pitchFamily="34" charset="-120"/>
               </a:rPr>
-              <a:t>Experimental vs Theoretical Probability</a:t>
-            </a:r>
-            <a:endParaRPr lang="en-US" sz="4000" dirty="0"/>
-          </a:p>
-        </p:txBody>
-      </p:sp>
-      <p:sp>
-        <p:nvSpPr>
-          <p:cNvPr id="4" name="Text 2"/>
-          <p:cNvSpPr/>
-          <p:nvPr/>
-        </p:nvSpPr>
-        <p:spPr>
-          <a:xfrm>
-            <a:off x="731520" y="2560320"/>
-            <a:ext cx="7772400" cy="548640"/>
-          </a:xfrm>
-          <a:prstGeom prst="rect">
-            <a:avLst/>
-          </a:prstGeom>
-          <a:noFill/>
-          <a:ln/>
-        </p:spPr>
-        <p:txBody>
-          <a:bodyPr wrap="square" rtlCol="0" anchor="ctr"/>
-          <a:lstStyle/>
+              <a:t>Experimental vs</a:t>
+            </a:r>
+            <a:endParaRPr lang="en-US" sz="3800" dirty="0"/>
+          </a:p>
           <a:p>
             <a:pPr indent="0" marL="0">
               <a:buNone/>
             </a:pPr>
             <a:r>
-              <a:rPr lang="en-US" sz="1600" dirty="0">
-                <a:solidFill>
-                  <a:srgbClr val="E9C46A"/>
+              <a:rPr lang="en-US" sz="3800" b="1" dirty="0">
+                <a:solidFill>
+                  <a:srgbClr val="FFFFFF"/>
+                </a:solidFill>
+                <a:latin typeface="Georgia" pitchFamily="34" charset="0"/>
+                <a:ea typeface="Georgia" pitchFamily="34" charset="-122"/>
+                <a:cs typeface="Georgia" pitchFamily="34" charset="-120"/>
+              </a:rPr>
+              <a:t>Theoretical Probability</a:t>
+            </a:r>
+            <a:endParaRPr lang="en-US" sz="3800" dirty="0"/>
+          </a:p>
+        </p:txBody>
+      </p:sp>
+      <p:sp>
+        <p:nvSpPr>
+          <p:cNvPr id="7" name="Text 5"/>
+          <p:cNvSpPr/>
+          <p:nvPr/>
+        </p:nvSpPr>
+        <p:spPr>
+          <a:xfrm>
+            <a:off x="731520" y="3200400"/>
+            <a:ext cx="6400800" cy="548640"/>
+          </a:xfrm>
+          <a:prstGeom prst="rect">
+            <a:avLst/>
+          </a:prstGeom>
+          <a:noFill/>
+          <a:ln/>
+        </p:spPr>
+        <p:txBody>
+          <a:bodyPr wrap="square" rtlCol="0" anchor="ctr"/>
+          <a:lstStyle/>
+          <a:p>
+            <a:pPr indent="0" marL="0">
+              <a:buNone/>
+            </a:pPr>
+            <a:r>
+              <a:rPr lang="en-US" sz="1600" i="1" dirty="0">
+                <a:solidFill>
+                  <a:srgbClr val="9B9690"/>
                 </a:solidFill>
                 <a:latin typeface="Calibri" pitchFamily="34" charset="0"/>
                 <a:ea typeface="Calibri" pitchFamily="34" charset="-122"/>
                 <a:cs typeface="Calibri" pitchFamily="34" charset="-120"/>
               </a:rPr>
-              <a:t>Grade 6 Mathematics · Mr Zocchi</a:t>
+              <a:t>What should happen vs what actually happens</a:t>
             </a:r>
             <a:endParaRPr lang="en-US" sz="1600" dirty="0"/>
           </a:p>
@@ -1331,36 +1600,14 @@
       </p:sp>
       <p:sp>
         <p:nvSpPr>
-          <p:cNvPr id="5" name="Shape 3"/>
-          <p:cNvSpPr/>
-          <p:nvPr/>
-        </p:nvSpPr>
-        <p:spPr>
-          <a:xfrm>
-            <a:off x="731520" y="3474720"/>
-            <a:ext cx="2011680" cy="411480"/>
-          </a:xfrm>
-          <a:prstGeom prst="roundRect">
-            <a:avLst>
-              <a:gd name="adj" fmla="val 17778"/>
-            </a:avLst>
-          </a:prstGeom>
-          <a:solidFill>
-            <a:srgbClr val="2A9D8F"/>
-          </a:solidFill>
-          <a:ln/>
-        </p:spPr>
-      </p:sp>
-      <p:sp>
-        <p:nvSpPr>
-          <p:cNvPr id="6" name="Text 4"/>
-          <p:cNvSpPr/>
-          <p:nvPr/>
-        </p:nvSpPr>
-        <p:spPr>
-          <a:xfrm>
-            <a:off x="731520" y="3474720"/>
-            <a:ext cx="2011680" cy="411480"/>
+          <p:cNvPr id="8" name="Text 6"/>
+          <p:cNvSpPr/>
+          <p:nvPr/>
+        </p:nvSpPr>
+        <p:spPr>
+          <a:xfrm>
+            <a:off x="731520" y="4297680"/>
+            <a:ext cx="2743200" cy="365760"/>
           </a:xfrm>
           <a:prstGeom prst="rect">
             <a:avLst/>
@@ -1372,21 +1619,21 @@
           <a:bodyPr wrap="square" rtlCol="0" anchor="ctr"/>
           <a:lstStyle/>
           <a:p>
-            <a:pPr algn="ctr" indent="0" marL="0">
+            <a:pPr indent="0" marL="0">
               <a:buNone/>
             </a:pPr>
             <a:r>
-              <a:rPr lang="en-US" sz="1200" b="1" dirty="0">
-                <a:solidFill>
-                  <a:srgbClr val="FFFFFF"/>
+              <a:rPr lang="en-US" sz="1100" dirty="0">
+                <a:solidFill>
+                  <a:srgbClr val="9B9690"/>
                 </a:solidFill>
                 <a:latin typeface="Calibri" pitchFamily="34" charset="0"/>
                 <a:ea typeface="Calibri" pitchFamily="34" charset="-122"/>
                 <a:cs typeface="Calibri" pitchFamily="34" charset="-120"/>
               </a:rPr>
-              <a:t>Term 5 · Probability &amp; Statistics</a:t>
-            </a:r>
-            <a:endParaRPr lang="en-US" sz="1200" dirty="0"/>
+              <a:t>mrzocchi.com</a:t>
+            </a:r>
+            <a:endParaRPr lang="en-US" sz="1100" dirty="0"/>
           </a:p>
         </p:txBody>
       </p:sp>
@@ -1431,7 +1678,47 @@
         <p:spPr>
           <a:xfrm>
             <a:off x="0" y="0"/>
-            <a:ext cx="9144000" cy="54864"/>
+            <a:ext cx="9144000" cy="822960"/>
+          </a:xfrm>
+          <a:prstGeom prst="rect">
+            <a:avLst/>
+          </a:prstGeom>
+          <a:solidFill>
+            <a:srgbClr val="FFFFFF"/>
+          </a:solidFill>
+          <a:ln/>
+        </p:spPr>
+      </p:sp>
+      <p:sp>
+        <p:nvSpPr>
+          <p:cNvPr id="3" name="Shape 1"/>
+          <p:cNvSpPr/>
+          <p:nvPr/>
+        </p:nvSpPr>
+        <p:spPr>
+          <a:xfrm>
+            <a:off x="0" y="804672"/>
+            <a:ext cx="9144000" cy="27432"/>
+          </a:xfrm>
+          <a:prstGeom prst="rect">
+            <a:avLst/>
+          </a:prstGeom>
+          <a:solidFill>
+            <a:srgbClr val="E5E2DC"/>
+          </a:solidFill>
+          <a:ln/>
+        </p:spPr>
+      </p:sp>
+      <p:sp>
+        <p:nvSpPr>
+          <p:cNvPr id="4" name="Shape 2"/>
+          <p:cNvSpPr/>
+          <p:nvPr/>
+        </p:nvSpPr>
+        <p:spPr>
+          <a:xfrm>
+            <a:off x="548640" y="201168"/>
+            <a:ext cx="54864" cy="420624"/>
           </a:xfrm>
           <a:prstGeom prst="rect">
             <a:avLst/>
@@ -1444,14 +1731,14 @@
       </p:sp>
       <p:sp>
         <p:nvSpPr>
-          <p:cNvPr id="3" name="Text 1"/>
-          <p:cNvSpPr/>
-          <p:nvPr/>
-        </p:nvSpPr>
-        <p:spPr>
-          <a:xfrm>
-            <a:off x="7772400" y="4709160"/>
-            <a:ext cx="1097280" cy="320040"/>
+          <p:cNvPr id="5" name="Text 3"/>
+          <p:cNvSpPr/>
+          <p:nvPr/>
+        </p:nvSpPr>
+        <p:spPr>
+          <a:xfrm>
+            <a:off x="777240" y="137160"/>
+            <a:ext cx="7772400" cy="548640"/>
           </a:xfrm>
           <a:prstGeom prst="rect">
             <a:avLst/>
@@ -1460,37 +1747,37 @@
           <a:ln/>
         </p:spPr>
         <p:txBody>
-          <a:bodyPr wrap="square" rtlCol="0" anchor="ctr"/>
-          <a:lstStyle/>
-          <a:p>
-            <a:pPr algn="r" indent="0" marL="0">
+          <a:bodyPr wrap="square" lIns="0" tIns="0" rIns="0" bIns="0" rtlCol="0" anchor="ctr"/>
+          <a:lstStyle/>
+          <a:p>
+            <a:pPr indent="0" marL="0">
               <a:buNone/>
             </a:pPr>
             <a:r>
-              <a:rPr lang="en-US" sz="900" dirty="0">
-                <a:solidFill>
-                  <a:srgbClr val="6B6660"/>
-                </a:solidFill>
-                <a:latin typeface="Calibri" pitchFamily="34" charset="0"/>
-                <a:ea typeface="Calibri" pitchFamily="34" charset="-122"/>
-                <a:cs typeface="Calibri" pitchFamily="34" charset="-120"/>
-              </a:rPr>
-              <a:t>2 / 5</a:t>
-            </a:r>
-            <a:endParaRPr lang="en-US" sz="900" dirty="0"/>
-          </a:p>
-        </p:txBody>
-      </p:sp>
-      <p:sp>
-        <p:nvSpPr>
-          <p:cNvPr id="4" name="Shape 2"/>
-          <p:cNvSpPr/>
-          <p:nvPr/>
-        </p:nvSpPr>
-        <p:spPr>
-          <a:xfrm>
-            <a:off x="1371600" y="914400"/>
-            <a:ext cx="6400800" cy="3200400"/>
+              <a:rPr lang="en-US" sz="2000" b="1" dirty="0">
+                <a:solidFill>
+                  <a:srgbClr val="1B2A4A"/>
+                </a:solidFill>
+                <a:latin typeface="Georgia" pitchFamily="34" charset="0"/>
+                <a:ea typeface="Georgia" pitchFamily="34" charset="-122"/>
+                <a:cs typeface="Georgia" pitchFamily="34" charset="-120"/>
+              </a:rPr>
+              <a:t>Key Vocabulary</a:t>
+            </a:r>
+            <a:endParaRPr lang="en-US" sz="2000" dirty="0"/>
+          </a:p>
+        </p:txBody>
+      </p:sp>
+      <p:sp>
+        <p:nvSpPr>
+          <p:cNvPr id="6" name="Shape 4"/>
+          <p:cNvSpPr/>
+          <p:nvPr/>
+        </p:nvSpPr>
+        <p:spPr>
+          <a:xfrm>
+            <a:off x="731520" y="1051560"/>
+            <a:ext cx="3657600" cy="658368"/>
           </a:xfrm>
           <a:prstGeom prst="rect">
             <a:avLst/>
@@ -1498,12 +1785,7 @@
           <a:solidFill>
             <a:srgbClr val="FFFFFF"/>
           </a:solidFill>
-          <a:ln w="12700">
-            <a:solidFill>
-              <a:srgbClr val="E5E2DC"/>
-            </a:solidFill>
-            <a:prstDash val="solid"/>
-          </a:ln>
+          <a:ln/>
           <a:effectLst>
             <a:outerShdw sx="100000" sy="100000" kx="0" ky="0" algn="bl" rotWithShape="0" blurRad="50800" dist="25400" dir="8100000">
               <a:srgbClr val="000000">
@@ -1515,14 +1797,14 @@
       </p:sp>
       <p:sp>
         <p:nvSpPr>
-          <p:cNvPr id="5" name="Shape 3"/>
-          <p:cNvSpPr/>
-          <p:nvPr/>
-        </p:nvSpPr>
-        <p:spPr>
-          <a:xfrm>
-            <a:off x="1371600" y="914400"/>
-            <a:ext cx="91440" cy="3200400"/>
+          <p:cNvPr id="7" name="Shape 5"/>
+          <p:cNvSpPr/>
+          <p:nvPr/>
+        </p:nvSpPr>
+        <p:spPr>
+          <a:xfrm>
+            <a:off x="731520" y="1051560"/>
+            <a:ext cx="54864" cy="658368"/>
           </a:xfrm>
           <a:prstGeom prst="rect">
             <a:avLst/>
@@ -1535,14 +1817,14 @@
       </p:sp>
       <p:sp>
         <p:nvSpPr>
-          <p:cNvPr id="6" name="Text 4"/>
-          <p:cNvSpPr/>
-          <p:nvPr/>
-        </p:nvSpPr>
-        <p:spPr>
-          <a:xfrm>
-            <a:off x="1828800" y="1097280"/>
-            <a:ext cx="5669280" cy="640080"/>
+          <p:cNvPr id="8" name="Text 6"/>
+          <p:cNvSpPr/>
+          <p:nvPr/>
+        </p:nvSpPr>
+        <p:spPr>
+          <a:xfrm>
+            <a:off x="914400" y="1051560"/>
+            <a:ext cx="1463040" cy="658368"/>
           </a:xfrm>
           <a:prstGeom prst="rect">
             <a:avLst/>
@@ -1551,14 +1833,14 @@
           <a:ln/>
         </p:spPr>
         <p:txBody>
-          <a:bodyPr wrap="square" rtlCol="0" anchor="ctr"/>
+          <a:bodyPr wrap="square" lIns="0" tIns="0" rIns="0" bIns="0" rtlCol="0" anchor="ctr"/>
           <a:lstStyle/>
           <a:p>
             <a:pPr indent="0" marL="0">
               <a:buNone/>
             </a:pPr>
             <a:r>
-              <a:rPr lang="en-US" sz="2400" b="1" dirty="0">
+              <a:rPr lang="en-US" sz="1300" b="1" dirty="0">
                 <a:solidFill>
                   <a:srgbClr val="1B2A4A"/>
                 </a:solidFill>
@@ -1566,22 +1848,22 @@
                 <a:ea typeface="Georgia" pitchFamily="34" charset="-122"/>
                 <a:cs typeface="Georgia" pitchFamily="34" charset="-120"/>
               </a:rPr>
-              <a:t>Theory vs Practice</a:t>
-            </a:r>
-            <a:endParaRPr lang="en-US" sz="2400" dirty="0"/>
-          </a:p>
-        </p:txBody>
-      </p:sp>
-      <p:sp>
-        <p:nvSpPr>
-          <p:cNvPr id="7" name="Text 5"/>
-          <p:cNvSpPr/>
-          <p:nvPr/>
-        </p:nvSpPr>
-        <p:spPr>
-          <a:xfrm>
-            <a:off x="1828800" y="1828800"/>
-            <a:ext cx="5669280" cy="2011680"/>
+              <a:t>Theoretical</a:t>
+            </a:r>
+            <a:endParaRPr lang="en-US" sz="1300" dirty="0"/>
+          </a:p>
+        </p:txBody>
+      </p:sp>
+      <p:sp>
+        <p:nvSpPr>
+          <p:cNvPr id="9" name="Text 7"/>
+          <p:cNvSpPr/>
+          <p:nvPr/>
+        </p:nvSpPr>
+        <p:spPr>
+          <a:xfrm>
+            <a:off x="2377440" y="1051560"/>
+            <a:ext cx="1920240" cy="658368"/>
           </a:xfrm>
           <a:prstGeom prst="rect">
             <a:avLst/>
@@ -1590,27 +1872,649 @@
           <a:ln/>
         </p:spPr>
         <p:txBody>
-          <a:bodyPr wrap="square" rtlCol="0" anchor="t"/>
+          <a:bodyPr wrap="square" lIns="0" tIns="0" rIns="0" bIns="0" rtlCol="0" anchor="ctr"/>
           <a:lstStyle/>
           <a:p>
             <a:pPr indent="0" marL="0">
-              <a:lnSpc>
-                <a:spcPct val="130000"/>
-              </a:lnSpc>
               <a:buNone/>
             </a:pPr>
             <a:r>
-              <a:rPr lang="en-US" sz="1500" dirty="0">
-                <a:solidFill>
-                  <a:srgbClr val="3D3A36"/>
+              <a:rPr lang="en-US" sz="1100" dirty="0">
+                <a:solidFill>
+                  <a:srgbClr val="6B6660"/>
                 </a:solidFill>
                 <a:latin typeface="Calibri" pitchFamily="34" charset="0"/>
                 <a:ea typeface="Calibri" pitchFamily="34" charset="-122"/>
                 <a:cs typeface="Calibri" pitchFamily="34" charset="-120"/>
               </a:rPr>
-              <a:t>Theoretical probability is what SHOULD happen based on maths. Experimental probability is what ACTUALLY happens when you try it. The more times you repeat an experiment, the closer the experimental probability gets to the theoretical probability. This is called the Law of Large Numbers.</a:t>
-            </a:r>
-            <a:endParaRPr lang="en-US" sz="1500" dirty="0"/>
+              <a:t>What SHOULD happen based on equally likely outcomes</a:t>
+            </a:r>
+            <a:endParaRPr lang="en-US" sz="1100" dirty="0"/>
+          </a:p>
+        </p:txBody>
+      </p:sp>
+      <p:sp>
+        <p:nvSpPr>
+          <p:cNvPr id="10" name="Shape 8"/>
+          <p:cNvSpPr/>
+          <p:nvPr/>
+        </p:nvSpPr>
+        <p:spPr>
+          <a:xfrm>
+            <a:off x="4754880" y="1051560"/>
+            <a:ext cx="3657600" cy="658368"/>
+          </a:xfrm>
+          <a:prstGeom prst="rect">
+            <a:avLst/>
+          </a:prstGeom>
+          <a:solidFill>
+            <a:srgbClr val="FFFFFF"/>
+          </a:solidFill>
+          <a:ln/>
+          <a:effectLst>
+            <a:outerShdw sx="100000" sy="100000" kx="0" ky="0" algn="bl" rotWithShape="0" blurRad="50800" dist="25400" dir="8100000">
+              <a:srgbClr val="000000">
+                <a:alpha val="10000"/>
+              </a:srgbClr>
+            </a:outerShdw>
+          </a:effectLst>
+        </p:spPr>
+      </p:sp>
+      <p:sp>
+        <p:nvSpPr>
+          <p:cNvPr id="11" name="Shape 9"/>
+          <p:cNvSpPr/>
+          <p:nvPr/>
+        </p:nvSpPr>
+        <p:spPr>
+          <a:xfrm>
+            <a:off x="4754880" y="1051560"/>
+            <a:ext cx="54864" cy="658368"/>
+          </a:xfrm>
+          <a:prstGeom prst="rect">
+            <a:avLst/>
+          </a:prstGeom>
+          <a:solidFill>
+            <a:srgbClr val="2A9D8F"/>
+          </a:solidFill>
+          <a:ln/>
+        </p:spPr>
+      </p:sp>
+      <p:sp>
+        <p:nvSpPr>
+          <p:cNvPr id="12" name="Text 10"/>
+          <p:cNvSpPr/>
+          <p:nvPr/>
+        </p:nvSpPr>
+        <p:spPr>
+          <a:xfrm>
+            <a:off x="4937760" y="1051560"/>
+            <a:ext cx="1463040" cy="658368"/>
+          </a:xfrm>
+          <a:prstGeom prst="rect">
+            <a:avLst/>
+          </a:prstGeom>
+          <a:noFill/>
+          <a:ln/>
+        </p:spPr>
+        <p:txBody>
+          <a:bodyPr wrap="square" lIns="0" tIns="0" rIns="0" bIns="0" rtlCol="0" anchor="ctr"/>
+          <a:lstStyle/>
+          <a:p>
+            <a:pPr indent="0" marL="0">
+              <a:buNone/>
+            </a:pPr>
+            <a:r>
+              <a:rPr lang="en-US" sz="1300" b="1" dirty="0">
+                <a:solidFill>
+                  <a:srgbClr val="1B2A4A"/>
+                </a:solidFill>
+                <a:latin typeface="Georgia" pitchFamily="34" charset="0"/>
+                <a:ea typeface="Georgia" pitchFamily="34" charset="-122"/>
+                <a:cs typeface="Georgia" pitchFamily="34" charset="-120"/>
+              </a:rPr>
+              <a:t>Experimental</a:t>
+            </a:r>
+            <a:endParaRPr lang="en-US" sz="1300" dirty="0"/>
+          </a:p>
+        </p:txBody>
+      </p:sp>
+      <p:sp>
+        <p:nvSpPr>
+          <p:cNvPr id="13" name="Text 11"/>
+          <p:cNvSpPr/>
+          <p:nvPr/>
+        </p:nvSpPr>
+        <p:spPr>
+          <a:xfrm>
+            <a:off x="6400800" y="1051560"/>
+            <a:ext cx="1920240" cy="658368"/>
+          </a:xfrm>
+          <a:prstGeom prst="rect">
+            <a:avLst/>
+          </a:prstGeom>
+          <a:noFill/>
+          <a:ln/>
+        </p:spPr>
+        <p:txBody>
+          <a:bodyPr wrap="square" lIns="0" tIns="0" rIns="0" bIns="0" rtlCol="0" anchor="ctr"/>
+          <a:lstStyle/>
+          <a:p>
+            <a:pPr indent="0" marL="0">
+              <a:buNone/>
+            </a:pPr>
+            <a:r>
+              <a:rPr lang="en-US" sz="1100" dirty="0">
+                <a:solidFill>
+                  <a:srgbClr val="6B6660"/>
+                </a:solidFill>
+                <a:latin typeface="Calibri" pitchFamily="34" charset="0"/>
+                <a:ea typeface="Calibri" pitchFamily="34" charset="-122"/>
+                <a:cs typeface="Calibri" pitchFamily="34" charset="-120"/>
+              </a:rPr>
+              <a:t>What ACTUALLY happens when you do an experiment</a:t>
+            </a:r>
+            <a:endParaRPr lang="en-US" sz="1100" dirty="0"/>
+          </a:p>
+        </p:txBody>
+      </p:sp>
+      <p:sp>
+        <p:nvSpPr>
+          <p:cNvPr id="14" name="Shape 12"/>
+          <p:cNvSpPr/>
+          <p:nvPr/>
+        </p:nvSpPr>
+        <p:spPr>
+          <a:xfrm>
+            <a:off x="731520" y="1819656"/>
+            <a:ext cx="3657600" cy="658368"/>
+          </a:xfrm>
+          <a:prstGeom prst="rect">
+            <a:avLst/>
+          </a:prstGeom>
+          <a:solidFill>
+            <a:srgbClr val="FFFFFF"/>
+          </a:solidFill>
+          <a:ln/>
+          <a:effectLst>
+            <a:outerShdw sx="100000" sy="100000" kx="0" ky="0" algn="bl" rotWithShape="0" blurRad="50800" dist="25400" dir="8100000">
+              <a:srgbClr val="000000">
+                <a:alpha val="10000"/>
+              </a:srgbClr>
+            </a:outerShdw>
+          </a:effectLst>
+        </p:spPr>
+      </p:sp>
+      <p:sp>
+        <p:nvSpPr>
+          <p:cNvPr id="15" name="Shape 13"/>
+          <p:cNvSpPr/>
+          <p:nvPr/>
+        </p:nvSpPr>
+        <p:spPr>
+          <a:xfrm>
+            <a:off x="731520" y="1819656"/>
+            <a:ext cx="54864" cy="658368"/>
+          </a:xfrm>
+          <a:prstGeom prst="rect">
+            <a:avLst/>
+          </a:prstGeom>
+          <a:solidFill>
+            <a:srgbClr val="2A9D8F"/>
+          </a:solidFill>
+          <a:ln/>
+        </p:spPr>
+      </p:sp>
+      <p:sp>
+        <p:nvSpPr>
+          <p:cNvPr id="16" name="Text 14"/>
+          <p:cNvSpPr/>
+          <p:nvPr/>
+        </p:nvSpPr>
+        <p:spPr>
+          <a:xfrm>
+            <a:off x="914400" y="1819656"/>
+            <a:ext cx="1463040" cy="658368"/>
+          </a:xfrm>
+          <a:prstGeom prst="rect">
+            <a:avLst/>
+          </a:prstGeom>
+          <a:noFill/>
+          <a:ln/>
+        </p:spPr>
+        <p:txBody>
+          <a:bodyPr wrap="square" lIns="0" tIns="0" rIns="0" bIns="0" rtlCol="0" anchor="ctr"/>
+          <a:lstStyle/>
+          <a:p>
+            <a:pPr indent="0" marL="0">
+              <a:buNone/>
+            </a:pPr>
+            <a:r>
+              <a:rPr lang="en-US" sz="1300" b="1" dirty="0">
+                <a:solidFill>
+                  <a:srgbClr val="1B2A4A"/>
+                </a:solidFill>
+                <a:latin typeface="Georgia" pitchFamily="34" charset="0"/>
+                <a:ea typeface="Georgia" pitchFamily="34" charset="-122"/>
+                <a:cs typeface="Georgia" pitchFamily="34" charset="-120"/>
+              </a:rPr>
+              <a:t>Trial</a:t>
+            </a:r>
+            <a:endParaRPr lang="en-US" sz="1300" dirty="0"/>
+          </a:p>
+        </p:txBody>
+      </p:sp>
+      <p:sp>
+        <p:nvSpPr>
+          <p:cNvPr id="17" name="Text 15"/>
+          <p:cNvSpPr/>
+          <p:nvPr/>
+        </p:nvSpPr>
+        <p:spPr>
+          <a:xfrm>
+            <a:off x="2377440" y="1819656"/>
+            <a:ext cx="1920240" cy="658368"/>
+          </a:xfrm>
+          <a:prstGeom prst="rect">
+            <a:avLst/>
+          </a:prstGeom>
+          <a:noFill/>
+          <a:ln/>
+        </p:spPr>
+        <p:txBody>
+          <a:bodyPr wrap="square" lIns="0" tIns="0" rIns="0" bIns="0" rtlCol="0" anchor="ctr"/>
+          <a:lstStyle/>
+          <a:p>
+            <a:pPr indent="0" marL="0">
+              <a:buNone/>
+            </a:pPr>
+            <a:r>
+              <a:rPr lang="en-US" sz="1100" dirty="0">
+                <a:solidFill>
+                  <a:srgbClr val="6B6660"/>
+                </a:solidFill>
+                <a:latin typeface="Calibri" pitchFamily="34" charset="0"/>
+                <a:ea typeface="Calibri" pitchFamily="34" charset="-122"/>
+                <a:cs typeface="Calibri" pitchFamily="34" charset="-120"/>
+              </a:rPr>
+              <a:t>One attempt in an experiment</a:t>
+            </a:r>
+            <a:endParaRPr lang="en-US" sz="1100" dirty="0"/>
+          </a:p>
+        </p:txBody>
+      </p:sp>
+      <p:sp>
+        <p:nvSpPr>
+          <p:cNvPr id="18" name="Shape 16"/>
+          <p:cNvSpPr/>
+          <p:nvPr/>
+        </p:nvSpPr>
+        <p:spPr>
+          <a:xfrm>
+            <a:off x="4754880" y="1819656"/>
+            <a:ext cx="3657600" cy="658368"/>
+          </a:xfrm>
+          <a:prstGeom prst="rect">
+            <a:avLst/>
+          </a:prstGeom>
+          <a:solidFill>
+            <a:srgbClr val="FFFFFF"/>
+          </a:solidFill>
+          <a:ln/>
+          <a:effectLst>
+            <a:outerShdw sx="100000" sy="100000" kx="0" ky="0" algn="bl" rotWithShape="0" blurRad="50800" dist="25400" dir="8100000">
+              <a:srgbClr val="000000">
+                <a:alpha val="10000"/>
+              </a:srgbClr>
+            </a:outerShdw>
+          </a:effectLst>
+        </p:spPr>
+      </p:sp>
+      <p:sp>
+        <p:nvSpPr>
+          <p:cNvPr id="19" name="Shape 17"/>
+          <p:cNvSpPr/>
+          <p:nvPr/>
+        </p:nvSpPr>
+        <p:spPr>
+          <a:xfrm>
+            <a:off x="4754880" y="1819656"/>
+            <a:ext cx="54864" cy="658368"/>
+          </a:xfrm>
+          <a:prstGeom prst="rect">
+            <a:avLst/>
+          </a:prstGeom>
+          <a:solidFill>
+            <a:srgbClr val="2A9D8F"/>
+          </a:solidFill>
+          <a:ln/>
+        </p:spPr>
+      </p:sp>
+      <p:sp>
+        <p:nvSpPr>
+          <p:cNvPr id="20" name="Text 18"/>
+          <p:cNvSpPr/>
+          <p:nvPr/>
+        </p:nvSpPr>
+        <p:spPr>
+          <a:xfrm>
+            <a:off x="4937760" y="1819656"/>
+            <a:ext cx="1463040" cy="658368"/>
+          </a:xfrm>
+          <a:prstGeom prst="rect">
+            <a:avLst/>
+          </a:prstGeom>
+          <a:noFill/>
+          <a:ln/>
+        </p:spPr>
+        <p:txBody>
+          <a:bodyPr wrap="square" lIns="0" tIns="0" rIns="0" bIns="0" rtlCol="0" anchor="ctr"/>
+          <a:lstStyle/>
+          <a:p>
+            <a:pPr indent="0" marL="0">
+              <a:buNone/>
+            </a:pPr>
+            <a:r>
+              <a:rPr lang="en-US" sz="1300" b="1" dirty="0">
+                <a:solidFill>
+                  <a:srgbClr val="1B2A4A"/>
+                </a:solidFill>
+                <a:latin typeface="Georgia" pitchFamily="34" charset="0"/>
+                <a:ea typeface="Georgia" pitchFamily="34" charset="-122"/>
+                <a:cs typeface="Georgia" pitchFamily="34" charset="-120"/>
+              </a:rPr>
+              <a:t>Relative frequency</a:t>
+            </a:r>
+            <a:endParaRPr lang="en-US" sz="1300" dirty="0"/>
+          </a:p>
+        </p:txBody>
+      </p:sp>
+      <p:sp>
+        <p:nvSpPr>
+          <p:cNvPr id="21" name="Text 19"/>
+          <p:cNvSpPr/>
+          <p:nvPr/>
+        </p:nvSpPr>
+        <p:spPr>
+          <a:xfrm>
+            <a:off x="6400800" y="1819656"/>
+            <a:ext cx="1920240" cy="658368"/>
+          </a:xfrm>
+          <a:prstGeom prst="rect">
+            <a:avLst/>
+          </a:prstGeom>
+          <a:noFill/>
+          <a:ln/>
+        </p:spPr>
+        <p:txBody>
+          <a:bodyPr wrap="square" lIns="0" tIns="0" rIns="0" bIns="0" rtlCol="0" anchor="ctr"/>
+          <a:lstStyle/>
+          <a:p>
+            <a:pPr indent="0" marL="0">
+              <a:buNone/>
+            </a:pPr>
+            <a:r>
+              <a:rPr lang="en-US" sz="1100" dirty="0">
+                <a:solidFill>
+                  <a:srgbClr val="6B6660"/>
+                </a:solidFill>
+                <a:latin typeface="Calibri" pitchFamily="34" charset="0"/>
+                <a:ea typeface="Calibri" pitchFamily="34" charset="-122"/>
+                <a:cs typeface="Calibri" pitchFamily="34" charset="-120"/>
+              </a:rPr>
+              <a:t>Experimental probability from results</a:t>
+            </a:r>
+            <a:endParaRPr lang="en-US" sz="1100" dirty="0"/>
+          </a:p>
+        </p:txBody>
+      </p:sp>
+      <p:sp>
+        <p:nvSpPr>
+          <p:cNvPr id="22" name="Shape 20"/>
+          <p:cNvSpPr/>
+          <p:nvPr/>
+        </p:nvSpPr>
+        <p:spPr>
+          <a:xfrm>
+            <a:off x="731520" y="2587752"/>
+            <a:ext cx="3657600" cy="658368"/>
+          </a:xfrm>
+          <a:prstGeom prst="rect">
+            <a:avLst/>
+          </a:prstGeom>
+          <a:solidFill>
+            <a:srgbClr val="FFFFFF"/>
+          </a:solidFill>
+          <a:ln/>
+          <a:effectLst>
+            <a:outerShdw sx="100000" sy="100000" kx="0" ky="0" algn="bl" rotWithShape="0" blurRad="50800" dist="25400" dir="8100000">
+              <a:srgbClr val="000000">
+                <a:alpha val="10000"/>
+              </a:srgbClr>
+            </a:outerShdw>
+          </a:effectLst>
+        </p:spPr>
+      </p:sp>
+      <p:sp>
+        <p:nvSpPr>
+          <p:cNvPr id="23" name="Shape 21"/>
+          <p:cNvSpPr/>
+          <p:nvPr/>
+        </p:nvSpPr>
+        <p:spPr>
+          <a:xfrm>
+            <a:off x="731520" y="2587752"/>
+            <a:ext cx="54864" cy="658368"/>
+          </a:xfrm>
+          <a:prstGeom prst="rect">
+            <a:avLst/>
+          </a:prstGeom>
+          <a:solidFill>
+            <a:srgbClr val="2A9D8F"/>
+          </a:solidFill>
+          <a:ln/>
+        </p:spPr>
+      </p:sp>
+      <p:sp>
+        <p:nvSpPr>
+          <p:cNvPr id="24" name="Text 22"/>
+          <p:cNvSpPr/>
+          <p:nvPr/>
+        </p:nvSpPr>
+        <p:spPr>
+          <a:xfrm>
+            <a:off x="914400" y="2587752"/>
+            <a:ext cx="1463040" cy="658368"/>
+          </a:xfrm>
+          <a:prstGeom prst="rect">
+            <a:avLst/>
+          </a:prstGeom>
+          <a:noFill/>
+          <a:ln/>
+        </p:spPr>
+        <p:txBody>
+          <a:bodyPr wrap="square" lIns="0" tIns="0" rIns="0" bIns="0" rtlCol="0" anchor="ctr"/>
+          <a:lstStyle/>
+          <a:p>
+            <a:pPr indent="0" marL="0">
+              <a:buNone/>
+            </a:pPr>
+            <a:r>
+              <a:rPr lang="en-US" sz="1300" b="1" dirty="0">
+                <a:solidFill>
+                  <a:srgbClr val="1B2A4A"/>
+                </a:solidFill>
+                <a:latin typeface="Georgia" pitchFamily="34" charset="0"/>
+                <a:ea typeface="Georgia" pitchFamily="34" charset="-122"/>
+                <a:cs typeface="Georgia" pitchFamily="34" charset="-120"/>
+              </a:rPr>
+              <a:t>Fair</a:t>
+            </a:r>
+            <a:endParaRPr lang="en-US" sz="1300" dirty="0"/>
+          </a:p>
+        </p:txBody>
+      </p:sp>
+      <p:sp>
+        <p:nvSpPr>
+          <p:cNvPr id="25" name="Text 23"/>
+          <p:cNvSpPr/>
+          <p:nvPr/>
+        </p:nvSpPr>
+        <p:spPr>
+          <a:xfrm>
+            <a:off x="2377440" y="2587752"/>
+            <a:ext cx="1920240" cy="658368"/>
+          </a:xfrm>
+          <a:prstGeom prst="rect">
+            <a:avLst/>
+          </a:prstGeom>
+          <a:noFill/>
+          <a:ln/>
+        </p:spPr>
+        <p:txBody>
+          <a:bodyPr wrap="square" lIns="0" tIns="0" rIns="0" bIns="0" rtlCol="0" anchor="ctr"/>
+          <a:lstStyle/>
+          <a:p>
+            <a:pPr indent="0" marL="0">
+              <a:buNone/>
+            </a:pPr>
+            <a:r>
+              <a:rPr lang="en-US" sz="1100" dirty="0">
+                <a:solidFill>
+                  <a:srgbClr val="6B6660"/>
+                </a:solidFill>
+                <a:latin typeface="Calibri" pitchFamily="34" charset="0"/>
+                <a:ea typeface="Calibri" pitchFamily="34" charset="-122"/>
+                <a:cs typeface="Calibri" pitchFamily="34" charset="-120"/>
+              </a:rPr>
+              <a:t>All outcomes equally likely</a:t>
+            </a:r>
+            <a:endParaRPr lang="en-US" sz="1100" dirty="0"/>
+          </a:p>
+        </p:txBody>
+      </p:sp>
+      <p:sp>
+        <p:nvSpPr>
+          <p:cNvPr id="26" name="Shape 24"/>
+          <p:cNvSpPr/>
+          <p:nvPr/>
+        </p:nvSpPr>
+        <p:spPr>
+          <a:xfrm>
+            <a:off x="4754880" y="2587752"/>
+            <a:ext cx="3657600" cy="658368"/>
+          </a:xfrm>
+          <a:prstGeom prst="rect">
+            <a:avLst/>
+          </a:prstGeom>
+          <a:solidFill>
+            <a:srgbClr val="FFFFFF"/>
+          </a:solidFill>
+          <a:ln/>
+          <a:effectLst>
+            <a:outerShdw sx="100000" sy="100000" kx="0" ky="0" algn="bl" rotWithShape="0" blurRad="50800" dist="25400" dir="8100000">
+              <a:srgbClr val="000000">
+                <a:alpha val="10000"/>
+              </a:srgbClr>
+            </a:outerShdw>
+          </a:effectLst>
+        </p:spPr>
+      </p:sp>
+      <p:sp>
+        <p:nvSpPr>
+          <p:cNvPr id="27" name="Shape 25"/>
+          <p:cNvSpPr/>
+          <p:nvPr/>
+        </p:nvSpPr>
+        <p:spPr>
+          <a:xfrm>
+            <a:off x="4754880" y="2587752"/>
+            <a:ext cx="54864" cy="658368"/>
+          </a:xfrm>
+          <a:prstGeom prst="rect">
+            <a:avLst/>
+          </a:prstGeom>
+          <a:solidFill>
+            <a:srgbClr val="2A9D8F"/>
+          </a:solidFill>
+          <a:ln/>
+        </p:spPr>
+      </p:sp>
+      <p:sp>
+        <p:nvSpPr>
+          <p:cNvPr id="28" name="Text 26"/>
+          <p:cNvSpPr/>
+          <p:nvPr/>
+        </p:nvSpPr>
+        <p:spPr>
+          <a:xfrm>
+            <a:off x="4937760" y="2587752"/>
+            <a:ext cx="1463040" cy="658368"/>
+          </a:xfrm>
+          <a:prstGeom prst="rect">
+            <a:avLst/>
+          </a:prstGeom>
+          <a:noFill/>
+          <a:ln/>
+        </p:spPr>
+        <p:txBody>
+          <a:bodyPr wrap="square" lIns="0" tIns="0" rIns="0" bIns="0" rtlCol="0" anchor="ctr"/>
+          <a:lstStyle/>
+          <a:p>
+            <a:pPr indent="0" marL="0">
+              <a:buNone/>
+            </a:pPr>
+            <a:r>
+              <a:rPr lang="en-US" sz="1300" b="1" dirty="0">
+                <a:solidFill>
+                  <a:srgbClr val="1B2A4A"/>
+                </a:solidFill>
+                <a:latin typeface="Georgia" pitchFamily="34" charset="0"/>
+                <a:ea typeface="Georgia" pitchFamily="34" charset="-122"/>
+                <a:cs typeface="Georgia" pitchFamily="34" charset="-120"/>
+              </a:rPr>
+              <a:t>Biased</a:t>
+            </a:r>
+            <a:endParaRPr lang="en-US" sz="1300" dirty="0"/>
+          </a:p>
+        </p:txBody>
+      </p:sp>
+      <p:sp>
+        <p:nvSpPr>
+          <p:cNvPr id="29" name="Text 27"/>
+          <p:cNvSpPr/>
+          <p:nvPr/>
+        </p:nvSpPr>
+        <p:spPr>
+          <a:xfrm>
+            <a:off x="6400800" y="2587752"/>
+            <a:ext cx="1920240" cy="658368"/>
+          </a:xfrm>
+          <a:prstGeom prst="rect">
+            <a:avLst/>
+          </a:prstGeom>
+          <a:noFill/>
+          <a:ln/>
+        </p:spPr>
+        <p:txBody>
+          <a:bodyPr wrap="square" lIns="0" tIns="0" rIns="0" bIns="0" rtlCol="0" anchor="ctr"/>
+          <a:lstStyle/>
+          <a:p>
+            <a:pPr indent="0" marL="0">
+              <a:buNone/>
+            </a:pPr>
+            <a:r>
+              <a:rPr lang="en-US" sz="1100" dirty="0">
+                <a:solidFill>
+                  <a:srgbClr val="6B6660"/>
+                </a:solidFill>
+                <a:latin typeface="Calibri" pitchFamily="34" charset="0"/>
+                <a:ea typeface="Calibri" pitchFamily="34" charset="-122"/>
+                <a:cs typeface="Calibri" pitchFamily="34" charset="-120"/>
+              </a:rPr>
+              <a:t>Some outcomes more likely than others</a:t>
+            </a:r>
+            <a:endParaRPr lang="en-US" sz="1100" dirty="0"/>
           </a:p>
         </p:txBody>
       </p:sp>
@@ -1655,7 +2559,47 @@
         <p:spPr>
           <a:xfrm>
             <a:off x="0" y="0"/>
-            <a:ext cx="9144000" cy="54864"/>
+            <a:ext cx="9144000" cy="822960"/>
+          </a:xfrm>
+          <a:prstGeom prst="rect">
+            <a:avLst/>
+          </a:prstGeom>
+          <a:solidFill>
+            <a:srgbClr val="FFFFFF"/>
+          </a:solidFill>
+          <a:ln/>
+        </p:spPr>
+      </p:sp>
+      <p:sp>
+        <p:nvSpPr>
+          <p:cNvPr id="3" name="Shape 1"/>
+          <p:cNvSpPr/>
+          <p:nvPr/>
+        </p:nvSpPr>
+        <p:spPr>
+          <a:xfrm>
+            <a:off x="0" y="804672"/>
+            <a:ext cx="9144000" cy="27432"/>
+          </a:xfrm>
+          <a:prstGeom prst="rect">
+            <a:avLst/>
+          </a:prstGeom>
+          <a:solidFill>
+            <a:srgbClr val="E5E2DC"/>
+          </a:solidFill>
+          <a:ln/>
+        </p:spPr>
+      </p:sp>
+      <p:sp>
+        <p:nvSpPr>
+          <p:cNvPr id="4" name="Shape 2"/>
+          <p:cNvSpPr/>
+          <p:nvPr/>
+        </p:nvSpPr>
+        <p:spPr>
+          <a:xfrm>
+            <a:off x="548640" y="201168"/>
+            <a:ext cx="54864" cy="420624"/>
           </a:xfrm>
           <a:prstGeom prst="rect">
             <a:avLst/>
@@ -1668,14 +2612,14 @@
       </p:sp>
       <p:sp>
         <p:nvSpPr>
-          <p:cNvPr id="3" name="Text 1"/>
-          <p:cNvSpPr/>
-          <p:nvPr/>
-        </p:nvSpPr>
-        <p:spPr>
-          <a:xfrm>
-            <a:off x="7772400" y="4709160"/>
-            <a:ext cx="1097280" cy="320040"/>
+          <p:cNvPr id="5" name="Text 3"/>
+          <p:cNvSpPr/>
+          <p:nvPr/>
+        </p:nvSpPr>
+        <p:spPr>
+          <a:xfrm>
+            <a:off x="777240" y="137160"/>
+            <a:ext cx="7772400" cy="548640"/>
           </a:xfrm>
           <a:prstGeom prst="rect">
             <a:avLst/>
@@ -1684,53 +2628,14 @@
           <a:ln/>
         </p:spPr>
         <p:txBody>
-          <a:bodyPr wrap="square" rtlCol="0" anchor="ctr"/>
-          <a:lstStyle/>
-          <a:p>
-            <a:pPr algn="r" indent="0" marL="0">
-              <a:buNone/>
-            </a:pPr>
-            <a:r>
-              <a:rPr lang="en-US" sz="900" dirty="0">
-                <a:solidFill>
-                  <a:srgbClr val="6B6660"/>
-                </a:solidFill>
-                <a:latin typeface="Calibri" pitchFamily="34" charset="0"/>
-                <a:ea typeface="Calibri" pitchFamily="34" charset="-122"/>
-                <a:cs typeface="Calibri" pitchFamily="34" charset="-120"/>
-              </a:rPr>
-              <a:t>3 / 5</a:t>
-            </a:r>
-            <a:endParaRPr lang="en-US" sz="900" dirty="0"/>
-          </a:p>
-        </p:txBody>
-      </p:sp>
-      <p:sp>
-        <p:nvSpPr>
-          <p:cNvPr id="4" name="Text 2"/>
-          <p:cNvSpPr/>
-          <p:nvPr/>
-        </p:nvSpPr>
-        <p:spPr>
-          <a:xfrm>
-            <a:off x="457200" y="274320"/>
-            <a:ext cx="8229600" cy="640080"/>
-          </a:xfrm>
-          <a:prstGeom prst="rect">
-            <a:avLst/>
-          </a:prstGeom>
-          <a:noFill/>
-          <a:ln/>
-        </p:spPr>
-        <p:txBody>
-          <a:bodyPr wrap="square" rtlCol="0" anchor="ctr"/>
+          <a:bodyPr wrap="square" lIns="0" tIns="0" rIns="0" bIns="0" rtlCol="0" anchor="ctr"/>
           <a:lstStyle/>
           <a:p>
             <a:pPr indent="0" marL="0">
               <a:buNone/>
             </a:pPr>
             <a:r>
-              <a:rPr lang="en-US" sz="2600" b="1" dirty="0">
+              <a:rPr lang="en-US" sz="2000" b="1" dirty="0">
                 <a:solidFill>
                   <a:srgbClr val="1B2A4A"/>
                 </a:solidFill>
@@ -1738,162 +2643,30 @@
                 <a:ea typeface="Georgia" pitchFamily="34" charset="-122"/>
                 <a:cs typeface="Georgia" pitchFamily="34" charset="-120"/>
               </a:rPr>
-              <a:t>Theoretical Probability</a:t>
-            </a:r>
-            <a:endParaRPr lang="en-US" sz="2600" dirty="0"/>
-          </a:p>
-        </p:txBody>
-      </p:sp>
-      <p:sp>
-        <p:nvSpPr>
-          <p:cNvPr id="5" name="Text 3"/>
-          <p:cNvSpPr/>
-          <p:nvPr/>
-        </p:nvSpPr>
-        <p:spPr>
-          <a:xfrm>
-            <a:off x="457200" y="1188720"/>
+              <a:t>Theoretical vs Experimental</a:t>
+            </a:r>
+            <a:endParaRPr lang="en-US" sz="2000" dirty="0"/>
+          </a:p>
+        </p:txBody>
+      </p:sp>
+      <p:sp>
+        <p:nvSpPr>
+          <p:cNvPr id="6" name="Shape 4"/>
+          <p:cNvSpPr/>
+          <p:nvPr/>
+        </p:nvSpPr>
+        <p:spPr>
+          <a:xfrm>
+            <a:off x="548640" y="1051560"/>
             <a:ext cx="3840480" cy="3474720"/>
           </a:xfrm>
           <a:prstGeom prst="rect">
             <a:avLst/>
           </a:prstGeom>
-          <a:noFill/>
-          <a:ln/>
-        </p:spPr>
-        <p:txBody>
-          <a:bodyPr wrap="square" rtlCol="0" anchor="t"/>
-          <a:lstStyle/>
-          <a:p>
-            <a:pPr marL="342900" indent="-342900">
-              <a:spcAft>
-                <a:spcPts val="600"/>
-              </a:spcAft>
-              <a:buSzPct val="100000"/>
-              <a:buChar char="•"/>
-            </a:pPr>
-            <a:r>
-              <a:rPr lang="en-US" sz="1400" dirty="0">
-                <a:solidFill>
-                  <a:srgbClr val="3D3A36"/>
-                </a:solidFill>
-                <a:latin typeface="Calibri" pitchFamily="34" charset="0"/>
-                <a:ea typeface="Calibri" pitchFamily="34" charset="-122"/>
-                <a:cs typeface="Calibri" pitchFamily="34" charset="-120"/>
-              </a:rPr>
-              <a:t>Based on equally likely outcomes</a:t>
-            </a:r>
-            <a:endParaRPr lang="en-US" sz="1400" dirty="0"/>
-          </a:p>
-          <a:p>
-            <a:pPr marL="342900" indent="-342900">
-              <a:spcAft>
-                <a:spcPts val="600"/>
-              </a:spcAft>
-              <a:buSzPct val="100000"/>
-              <a:buChar char="•"/>
-            </a:pPr>
-            <a:r>
-              <a:rPr lang="en-US" sz="1400" dirty="0">
-                <a:solidFill>
-                  <a:srgbClr val="3D3A36"/>
-                </a:solidFill>
-                <a:latin typeface="Calibri" pitchFamily="34" charset="0"/>
-                <a:ea typeface="Calibri" pitchFamily="34" charset="-122"/>
-                <a:cs typeface="Calibri" pitchFamily="34" charset="-120"/>
-              </a:rPr>
-              <a:t>P(heads) = 1/2 because there are 2 equally likely outcomes</a:t>
-            </a:r>
-            <a:endParaRPr lang="en-US" sz="1400" dirty="0"/>
-          </a:p>
-          <a:p>
-            <a:pPr marL="342900" indent="-342900">
-              <a:spcAft>
-                <a:spcPts val="600"/>
-              </a:spcAft>
-              <a:buSzPct val="100000"/>
-              <a:buChar char="•"/>
-            </a:pPr>
-            <a:r>
-              <a:rPr lang="en-US" sz="1400" dirty="0">
-                <a:solidFill>
-                  <a:srgbClr val="3D3A36"/>
-                </a:solidFill>
-                <a:latin typeface="Calibri" pitchFamily="34" charset="0"/>
-                <a:ea typeface="Calibri" pitchFamily="34" charset="-122"/>
-                <a:cs typeface="Calibri" pitchFamily="34" charset="-120"/>
-              </a:rPr>
-              <a:t>P(rolling 6) = 1/6 because there are 6 equally likely outcomes</a:t>
-            </a:r>
-            <a:endParaRPr lang="en-US" sz="1400" dirty="0"/>
-          </a:p>
-          <a:p>
-            <a:pPr marL="342900" indent="-342900">
-              <a:spcAft>
-                <a:spcPts val="600"/>
-              </a:spcAft>
-              <a:buSzPct val="100000"/>
-              <a:buChar char="•"/>
-            </a:pPr>
-            <a:r>
-              <a:rPr lang="en-US" sz="1400" dirty="0">
-                <a:solidFill>
-                  <a:srgbClr val="3D3A36"/>
-                </a:solidFill>
-                <a:latin typeface="Calibri" pitchFamily="34" charset="0"/>
-                <a:ea typeface="Calibri" pitchFamily="34" charset="-122"/>
-                <a:cs typeface="Calibri" pitchFamily="34" charset="-120"/>
-              </a:rPr>
-              <a:t>Doesn't require any actual experiments</a:t>
-            </a:r>
-            <a:endParaRPr lang="en-US" sz="1400" dirty="0"/>
-          </a:p>
-          <a:p>
-            <a:pPr marL="342900" indent="-342900">
-              <a:spcAft>
-                <a:spcPts val="600"/>
-              </a:spcAft>
-              <a:buSzPct val="100000"/>
-              <a:buChar char="•"/>
-            </a:pPr>
-            <a:r>
-              <a:rPr lang="en-US" sz="1400" dirty="0">
-                <a:solidFill>
-                  <a:srgbClr val="3D3A36"/>
-                </a:solidFill>
-                <a:latin typeface="Calibri" pitchFamily="34" charset="0"/>
-                <a:ea typeface="Calibri" pitchFamily="34" charset="-122"/>
-                <a:cs typeface="Calibri" pitchFamily="34" charset="-120"/>
-              </a:rPr>
-              <a:t>Assumes fair/unbiased conditions</a:t>
-            </a:r>
-            <a:endParaRPr lang="en-US" sz="1400" dirty="0"/>
-          </a:p>
-        </p:txBody>
-      </p:sp>
-      <p:sp>
-        <p:nvSpPr>
-          <p:cNvPr id="6" name="Shape 4"/>
-          <p:cNvSpPr/>
-          <p:nvPr/>
-        </p:nvSpPr>
-        <p:spPr>
-          <a:xfrm>
-            <a:off x="4846320" y="1188720"/>
-            <a:ext cx="3840480" cy="3474720"/>
-          </a:xfrm>
-          <a:prstGeom prst="rect">
-            <a:avLst/>
-          </a:prstGeom>
           <a:solidFill>
             <a:srgbClr val="FFFFFF"/>
           </a:solidFill>
-          <a:ln w="12700">
-            <a:solidFill>
-              <a:srgbClr val="E5E2DC"/>
-            </a:solidFill>
-            <a:prstDash val="solid"/>
-          </a:ln>
+          <a:ln/>
           <a:effectLst>
             <a:outerShdw sx="100000" sy="100000" kx="0" ky="0" algn="bl" rotWithShape="0" blurRad="50800" dist="25400" dir="8100000">
               <a:srgbClr val="000000">
@@ -1911,7 +2684,7 @@
         </p:nvSpPr>
         <p:spPr>
           <a:xfrm>
-            <a:off x="4846320" y="1188720"/>
+            <a:off x="548640" y="1051560"/>
             <a:ext cx="3840480" cy="54864"/>
           </a:xfrm>
           <a:prstGeom prst="rect">
@@ -1931,8 +2704,8 @@
         </p:nvSpPr>
         <p:spPr>
           <a:xfrm>
-            <a:off x="5120640" y="1371600"/>
-            <a:ext cx="3291840" cy="3108960"/>
+            <a:off x="777240" y="1188720"/>
+            <a:ext cx="3383280" cy="457200"/>
           </a:xfrm>
           <a:prstGeom prst="rect">
             <a:avLst/>
@@ -1941,43 +2714,75 @@
           <a:ln/>
         </p:spPr>
         <p:txBody>
+          <a:bodyPr wrap="square" lIns="0" tIns="0" rIns="0" bIns="0" rtlCol="0" anchor="ctr"/>
+          <a:lstStyle/>
+          <a:p>
+            <a:pPr indent="0" marL="0">
+              <a:buNone/>
+            </a:pPr>
+            <a:r>
+              <a:rPr lang="en-US" sz="1500" b="1" dirty="0">
+                <a:solidFill>
+                  <a:srgbClr val="1B2A4A"/>
+                </a:solidFill>
+                <a:latin typeface="Georgia" pitchFamily="34" charset="0"/>
+                <a:ea typeface="Georgia" pitchFamily="34" charset="-122"/>
+                <a:cs typeface="Georgia" pitchFamily="34" charset="-120"/>
+              </a:rPr>
+              <a:t>Theoretical</a:t>
+            </a:r>
+            <a:endParaRPr lang="en-US" sz="1500" dirty="0"/>
+          </a:p>
+        </p:txBody>
+      </p:sp>
+      <p:sp>
+        <p:nvSpPr>
+          <p:cNvPr id="9" name="Text 7"/>
+          <p:cNvSpPr/>
+          <p:nvPr/>
+        </p:nvSpPr>
+        <p:spPr>
+          <a:xfrm>
+            <a:off x="777240" y="1691640"/>
+            <a:ext cx="3383280" cy="2651760"/>
+          </a:xfrm>
+          <a:prstGeom prst="rect">
+            <a:avLst/>
+          </a:prstGeom>
+          <a:noFill/>
+          <a:ln/>
+        </p:spPr>
+        <p:txBody>
           <a:bodyPr wrap="square" rtlCol="0" anchor="t"/>
           <a:lstStyle/>
           <a:p>
-            <a:pPr indent="0" marL="0">
+            <a:pPr marL="342900" indent="-342900">
               <a:spcAft>
-                <a:spcPts val="400"/>
+                <a:spcPts val="600"/>
               </a:spcAft>
-              <a:buNone/>
-            </a:pPr>
-            <a:r>
-              <a:rPr lang="en-US" sz="1600" b="1" dirty="0">
-                <a:solidFill>
-                  <a:srgbClr val="1B2A4A"/>
+              <a:buSzPct val="100000"/>
+              <a:buChar char="•"/>
+            </a:pPr>
+            <a:r>
+              <a:rPr lang="en-US" sz="1300" dirty="0">
+                <a:solidFill>
+                  <a:srgbClr val="3D3A36"/>
                 </a:solidFill>
                 <a:latin typeface="Calibri" pitchFamily="34" charset="0"/>
                 <a:ea typeface="Calibri" pitchFamily="34" charset="-122"/>
                 <a:cs typeface="Calibri" pitchFamily="34" charset="-120"/>
               </a:rPr>
-              <a:t>Experimental Probability</a:t>
-            </a:r>
-            <a:endParaRPr lang="en-US" sz="1600" dirty="0"/>
-          </a:p>
-          <a:p>
-            <a:pPr indent="0" marL="0">
+              <a:t>Calculated using logic</a:t>
+            </a:r>
+            <a:endParaRPr lang="en-US" sz="1300" dirty="0"/>
+          </a:p>
+          <a:p>
+            <a:pPr marL="342900" indent="-342900">
               <a:spcAft>
-                <a:spcPts val="400"/>
+                <a:spcPts val="600"/>
               </a:spcAft>
-              <a:buNone/>
-            </a:pPr>
-            <a:endParaRPr lang="en-US" sz="1600" dirty="0"/>
-          </a:p>
-          <a:p>
-            <a:pPr indent="0" marL="0">
-              <a:spcAft>
-                <a:spcPts val="400"/>
-              </a:spcAft>
-              <a:buNone/>
+              <a:buSzPct val="100000"/>
+              <a:buChar char="•"/>
             </a:pPr>
             <a:r>
               <a:rPr lang="en-US" sz="1300" dirty="0">
@@ -1988,16 +2793,17 @@
                 <a:ea typeface="Calibri" pitchFamily="34" charset="-122"/>
                 <a:cs typeface="Calibri" pitchFamily="34" charset="-120"/>
               </a:rPr>
-              <a:t>Based on actual results from experiments</a:t>
-            </a:r>
-            <a:endParaRPr lang="en-US" sz="1600" dirty="0"/>
-          </a:p>
-          <a:p>
-            <a:pPr indent="0" marL="0">
+              <a:t>Assumes fair/equally likely outcomes</a:t>
+            </a:r>
+            <a:endParaRPr lang="en-US" sz="1300" dirty="0"/>
+          </a:p>
+          <a:p>
+            <a:pPr marL="342900" indent="-342900">
               <a:spcAft>
-                <a:spcPts val="400"/>
+                <a:spcPts val="600"/>
               </a:spcAft>
-              <a:buNone/>
+              <a:buSzPct val="100000"/>
+              <a:buChar char="•"/>
             </a:pPr>
             <a:r>
               <a:rPr lang="en-US" sz="1300" dirty="0">
@@ -2008,16 +2814,17 @@
                 <a:ea typeface="Calibri" pitchFamily="34" charset="-122"/>
                 <a:cs typeface="Calibri" pitchFamily="34" charset="-120"/>
               </a:rPr>
-              <a:t>P(heads) = number of heads ÷ number of flips</a:t>
-            </a:r>
-            <a:endParaRPr lang="en-US" sz="1600" dirty="0"/>
-          </a:p>
-          <a:p>
-            <a:pPr indent="0" marL="0">
+              <a:t>P(heads) = ½ for a fair coin</a:t>
+            </a:r>
+            <a:endParaRPr lang="en-US" sz="1300" dirty="0"/>
+          </a:p>
+          <a:p>
+            <a:pPr marL="342900" indent="-342900">
               <a:spcAft>
-                <a:spcPts val="400"/>
+                <a:spcPts val="600"/>
               </a:spcAft>
-              <a:buNone/>
+              <a:buSzPct val="100000"/>
+              <a:buChar char="•"/>
             </a:pPr>
             <a:r>
               <a:rPr lang="en-US" sz="1300" dirty="0">
@@ -2028,16 +2835,17 @@
                 <a:ea typeface="Calibri" pitchFamily="34" charset="-122"/>
                 <a:cs typeface="Calibri" pitchFamily="34" charset="-120"/>
               </a:rPr>
-              <a:t>If you flip 100 times and get 47 heads: P = 47/100 = 0.47</a:t>
-            </a:r>
-            <a:endParaRPr lang="en-US" sz="1600" dirty="0"/>
-          </a:p>
-          <a:p>
-            <a:pPr indent="0" marL="0">
+              <a:t>Does NOT require an experiment</a:t>
+            </a:r>
+            <a:endParaRPr lang="en-US" sz="1300" dirty="0"/>
+          </a:p>
+          <a:p>
+            <a:pPr marL="342900" indent="-342900">
               <a:spcAft>
-                <a:spcPts val="400"/>
+                <a:spcPts val="600"/>
               </a:spcAft>
-              <a:buNone/>
+              <a:buSzPct val="100000"/>
+              <a:buChar char="•"/>
             </a:pPr>
             <a:r>
               <a:rPr lang="en-US" sz="1300" dirty="0">
@@ -2048,16 +2856,125 @@
                 <a:ea typeface="Calibri" pitchFamily="34" charset="-122"/>
                 <a:cs typeface="Calibri" pitchFamily="34" charset="-120"/>
               </a:rPr>
-              <a:t>Results vary each time you repeat</a:t>
-            </a:r>
-            <a:endParaRPr lang="en-US" sz="1600" dirty="0"/>
-          </a:p>
+              <a:t>The 'expected' probability</a:t>
+            </a:r>
+            <a:endParaRPr lang="en-US" sz="1300" dirty="0"/>
+          </a:p>
+        </p:txBody>
+      </p:sp>
+      <p:sp>
+        <p:nvSpPr>
+          <p:cNvPr id="10" name="Shape 8"/>
+          <p:cNvSpPr/>
+          <p:nvPr/>
+        </p:nvSpPr>
+        <p:spPr>
+          <a:xfrm>
+            <a:off x="4754880" y="1051560"/>
+            <a:ext cx="3840480" cy="3474720"/>
+          </a:xfrm>
+          <a:prstGeom prst="rect">
+            <a:avLst/>
+          </a:prstGeom>
+          <a:solidFill>
+            <a:srgbClr val="FFFFFF"/>
+          </a:solidFill>
+          <a:ln/>
+          <a:effectLst>
+            <a:outerShdw sx="100000" sy="100000" kx="0" ky="0" algn="bl" rotWithShape="0" blurRad="50800" dist="25400" dir="8100000">
+              <a:srgbClr val="000000">
+                <a:alpha val="10000"/>
+              </a:srgbClr>
+            </a:outerShdw>
+          </a:effectLst>
+        </p:spPr>
+      </p:sp>
+      <p:sp>
+        <p:nvSpPr>
+          <p:cNvPr id="11" name="Shape 9"/>
+          <p:cNvSpPr/>
+          <p:nvPr/>
+        </p:nvSpPr>
+        <p:spPr>
+          <a:xfrm>
+            <a:off x="4754880" y="1051560"/>
+            <a:ext cx="3840480" cy="54864"/>
+          </a:xfrm>
+          <a:prstGeom prst="rect">
+            <a:avLst/>
+          </a:prstGeom>
+          <a:solidFill>
+            <a:srgbClr val="E9C46A"/>
+          </a:solidFill>
+          <a:ln/>
+        </p:spPr>
+      </p:sp>
+      <p:sp>
+        <p:nvSpPr>
+          <p:cNvPr id="12" name="Text 10"/>
+          <p:cNvSpPr/>
+          <p:nvPr/>
+        </p:nvSpPr>
+        <p:spPr>
+          <a:xfrm>
+            <a:off x="4983480" y="1188720"/>
+            <a:ext cx="3383280" cy="457200"/>
+          </a:xfrm>
+          <a:prstGeom prst="rect">
+            <a:avLst/>
+          </a:prstGeom>
+          <a:noFill/>
+          <a:ln/>
+        </p:spPr>
+        <p:txBody>
+          <a:bodyPr wrap="square" lIns="0" tIns="0" rIns="0" bIns="0" rtlCol="0" anchor="ctr"/>
+          <a:lstStyle/>
           <a:p>
             <a:pPr indent="0" marL="0">
+              <a:buNone/>
+            </a:pPr>
+            <a:r>
+              <a:rPr lang="en-US" sz="1500" b="1" dirty="0">
+                <a:solidFill>
+                  <a:srgbClr val="1B2A4A"/>
+                </a:solidFill>
+                <a:latin typeface="Georgia" pitchFamily="34" charset="0"/>
+                <a:ea typeface="Georgia" pitchFamily="34" charset="-122"/>
+                <a:cs typeface="Georgia" pitchFamily="34" charset="-120"/>
+              </a:rPr>
+              <a:t>Experimental</a:t>
+            </a:r>
+            <a:endParaRPr lang="en-US" sz="1500" dirty="0"/>
+          </a:p>
+        </p:txBody>
+      </p:sp>
+      <p:sp>
+        <p:nvSpPr>
+          <p:cNvPr id="13" name="Text 11"/>
+          <p:cNvSpPr/>
+          <p:nvPr/>
+        </p:nvSpPr>
+        <p:spPr>
+          <a:xfrm>
+            <a:off x="4983480" y="1691640"/>
+            <a:ext cx="3383280" cy="2651760"/>
+          </a:xfrm>
+          <a:prstGeom prst="rect">
+            <a:avLst/>
+          </a:prstGeom>
+          <a:noFill/>
+          <a:ln/>
+        </p:spPr>
+        <p:txBody>
+          <a:bodyPr wrap="square" rtlCol="0" anchor="t"/>
+          <a:lstStyle/>
+          <a:p>
+            <a:pPr marL="342900" indent="-342900">
               <a:spcAft>
-                <a:spcPts val="400"/>
+                <a:spcPts val="600"/>
               </a:spcAft>
-              <a:buNone/>
+              <a:buSzPct val="100000"/>
+              <a:buChar char="•"/>
             </a:pPr>
             <a:r>
               <a:rPr lang="en-US" sz="1300" dirty="0">
@@ -2068,9 +2985,93 @@
                 <a:ea typeface="Calibri" pitchFamily="34" charset="-122"/>
                 <a:cs typeface="Calibri" pitchFamily="34" charset="-120"/>
               </a:rPr>
-              <a:t>More trials = closer to theoretical probability</a:t>
-            </a:r>
-            <a:endParaRPr lang="en-US" sz="1600" dirty="0"/>
+              <a:t>Found by DOING the experiment</a:t>
+            </a:r>
+            <a:endParaRPr lang="en-US" sz="1300" dirty="0"/>
+          </a:p>
+          <a:p>
+            <a:pPr marL="342900" indent="-342900">
+              <a:spcAft>
+                <a:spcPts val="600"/>
+              </a:spcAft>
+              <a:buSzPct val="100000"/>
+              <a:buChar char="•"/>
+            </a:pPr>
+            <a:r>
+              <a:rPr lang="en-US" sz="1300" dirty="0">
+                <a:solidFill>
+                  <a:srgbClr val="3D3A36"/>
+                </a:solidFill>
+                <a:latin typeface="Calibri" pitchFamily="34" charset="0"/>
+                <a:ea typeface="Calibri" pitchFamily="34" charset="-122"/>
+                <a:cs typeface="Calibri" pitchFamily="34" charset="-120"/>
+              </a:rPr>
+              <a:t>Count outcomes and divide by total trials</a:t>
+            </a:r>
+            <a:endParaRPr lang="en-US" sz="1300" dirty="0"/>
+          </a:p>
+          <a:p>
+            <a:pPr marL="342900" indent="-342900">
+              <a:spcAft>
+                <a:spcPts val="600"/>
+              </a:spcAft>
+              <a:buSzPct val="100000"/>
+              <a:buChar char="•"/>
+            </a:pPr>
+            <a:r>
+              <a:rPr lang="en-US" sz="1300" dirty="0">
+                <a:solidFill>
+                  <a:srgbClr val="3D3A36"/>
+                </a:solidFill>
+                <a:latin typeface="Calibri" pitchFamily="34" charset="0"/>
+                <a:ea typeface="Calibri" pitchFamily="34" charset="-122"/>
+                <a:cs typeface="Calibri" pitchFamily="34" charset="-120"/>
+              </a:rPr>
+              <a:t>May NOT match theoretical</a:t>
+            </a:r>
+            <a:endParaRPr lang="en-US" sz="1300" dirty="0"/>
+          </a:p>
+          <a:p>
+            <a:pPr marL="342900" indent="-342900">
+              <a:spcAft>
+                <a:spcPts val="600"/>
+              </a:spcAft>
+              <a:buSzPct val="100000"/>
+              <a:buChar char="•"/>
+            </a:pPr>
+            <a:r>
+              <a:rPr lang="en-US" sz="1300" dirty="0">
+                <a:solidFill>
+                  <a:srgbClr val="3D3A36"/>
+                </a:solidFill>
+                <a:latin typeface="Calibri" pitchFamily="34" charset="0"/>
+                <a:ea typeface="Calibri" pitchFamily="34" charset="-122"/>
+                <a:cs typeface="Calibri" pitchFamily="34" charset="-120"/>
+              </a:rPr>
+              <a:t>More trials → closer to theoretical</a:t>
+            </a:r>
+            <a:endParaRPr lang="en-US" sz="1300" dirty="0"/>
+          </a:p>
+          <a:p>
+            <a:pPr marL="342900" indent="-342900">
+              <a:spcAft>
+                <a:spcPts val="600"/>
+              </a:spcAft>
+              <a:buSzPct val="100000"/>
+              <a:buChar char="•"/>
+            </a:pPr>
+            <a:r>
+              <a:rPr lang="en-US" sz="1300" dirty="0">
+                <a:solidFill>
+                  <a:srgbClr val="3D3A36"/>
+                </a:solidFill>
+                <a:latin typeface="Calibri" pitchFamily="34" charset="0"/>
+                <a:ea typeface="Calibri" pitchFamily="34" charset="-122"/>
+                <a:cs typeface="Calibri" pitchFamily="34" charset="-120"/>
+              </a:rPr>
+              <a:t>Also called relative frequency</a:t>
+            </a:r>
+            <a:endParaRPr lang="en-US" sz="1300" dirty="0"/>
           </a:p>
         </p:txBody>
       </p:sp>
@@ -2115,7 +3116,47 @@
         <p:spPr>
           <a:xfrm>
             <a:off x="0" y="0"/>
-            <a:ext cx="9144000" cy="54864"/>
+            <a:ext cx="9144000" cy="822960"/>
+          </a:xfrm>
+          <a:prstGeom prst="rect">
+            <a:avLst/>
+          </a:prstGeom>
+          <a:solidFill>
+            <a:srgbClr val="FFFFFF"/>
+          </a:solidFill>
+          <a:ln/>
+        </p:spPr>
+      </p:sp>
+      <p:sp>
+        <p:nvSpPr>
+          <p:cNvPr id="3" name="Shape 1"/>
+          <p:cNvSpPr/>
+          <p:nvPr/>
+        </p:nvSpPr>
+        <p:spPr>
+          <a:xfrm>
+            <a:off x="0" y="804672"/>
+            <a:ext cx="9144000" cy="27432"/>
+          </a:xfrm>
+          <a:prstGeom prst="rect">
+            <a:avLst/>
+          </a:prstGeom>
+          <a:solidFill>
+            <a:srgbClr val="E5E2DC"/>
+          </a:solidFill>
+          <a:ln/>
+        </p:spPr>
+      </p:sp>
+      <p:sp>
+        <p:nvSpPr>
+          <p:cNvPr id="4" name="Shape 2"/>
+          <p:cNvSpPr/>
+          <p:nvPr/>
+        </p:nvSpPr>
+        <p:spPr>
+          <a:xfrm>
+            <a:off x="548640" y="201168"/>
+            <a:ext cx="54864" cy="420624"/>
           </a:xfrm>
           <a:prstGeom prst="rect">
             <a:avLst/>
@@ -2128,14 +3169,14 @@
       </p:sp>
       <p:sp>
         <p:nvSpPr>
-          <p:cNvPr id="3" name="Text 1"/>
-          <p:cNvSpPr/>
-          <p:nvPr/>
-        </p:nvSpPr>
-        <p:spPr>
-          <a:xfrm>
-            <a:off x="7772400" y="4709160"/>
-            <a:ext cx="1097280" cy="320040"/>
+          <p:cNvPr id="5" name="Text 3"/>
+          <p:cNvSpPr/>
+          <p:nvPr/>
+        </p:nvSpPr>
+        <p:spPr>
+          <a:xfrm>
+            <a:off x="777240" y="137160"/>
+            <a:ext cx="7772400" cy="548640"/>
           </a:xfrm>
           <a:prstGeom prst="rect">
             <a:avLst/>
@@ -2144,53 +3185,14 @@
           <a:ln/>
         </p:spPr>
         <p:txBody>
-          <a:bodyPr wrap="square" rtlCol="0" anchor="ctr"/>
-          <a:lstStyle/>
-          <a:p>
-            <a:pPr algn="r" indent="0" marL="0">
-              <a:buNone/>
-            </a:pPr>
-            <a:r>
-              <a:rPr lang="en-US" sz="900" dirty="0">
-                <a:solidFill>
-                  <a:srgbClr val="6B6660"/>
-                </a:solidFill>
-                <a:latin typeface="Calibri" pitchFamily="34" charset="0"/>
-                <a:ea typeface="Calibri" pitchFamily="34" charset="-122"/>
-                <a:cs typeface="Calibri" pitchFamily="34" charset="-120"/>
-              </a:rPr>
-              <a:t>4 / 5</a:t>
-            </a:r>
-            <a:endParaRPr lang="en-US" sz="900" dirty="0"/>
-          </a:p>
-        </p:txBody>
-      </p:sp>
-      <p:sp>
-        <p:nvSpPr>
-          <p:cNvPr id="4" name="Text 2"/>
-          <p:cNvSpPr/>
-          <p:nvPr/>
-        </p:nvSpPr>
-        <p:spPr>
-          <a:xfrm>
-            <a:off x="457200" y="274320"/>
-            <a:ext cx="8229600" cy="640080"/>
-          </a:xfrm>
-          <a:prstGeom prst="rect">
-            <a:avLst/>
-          </a:prstGeom>
-          <a:noFill/>
-          <a:ln/>
-        </p:spPr>
-        <p:txBody>
-          <a:bodyPr wrap="square" rtlCol="0" anchor="ctr"/>
+          <a:bodyPr wrap="square" lIns="0" tIns="0" rIns="0" bIns="0" rtlCol="0" anchor="ctr"/>
           <a:lstStyle/>
           <a:p>
             <a:pPr indent="0" marL="0">
               <a:buNone/>
             </a:pPr>
             <a:r>
-              <a:rPr lang="en-US" sz="2600" b="1" dirty="0">
+              <a:rPr lang="en-US" sz="2000" b="1" dirty="0">
                 <a:solidFill>
                   <a:srgbClr val="1B2A4A"/>
                 </a:solidFill>
@@ -2198,22 +3200,22 @@
                 <a:ea typeface="Georgia" pitchFamily="34" charset="-122"/>
                 <a:cs typeface="Georgia" pitchFamily="34" charset="-120"/>
               </a:rPr>
-              <a:t>The Law of Large Numbers</a:t>
-            </a:r>
-            <a:endParaRPr lang="en-US" sz="2600" dirty="0"/>
-          </a:p>
-        </p:txBody>
-      </p:sp>
-      <p:sp>
-        <p:nvSpPr>
-          <p:cNvPr id="5" name="Text 3"/>
-          <p:cNvSpPr/>
-          <p:nvPr/>
-        </p:nvSpPr>
-        <p:spPr>
-          <a:xfrm>
-            <a:off x="457200" y="1097280"/>
-            <a:ext cx="8229600" cy="3657600"/>
+              <a:t>Why Do They Differ?</a:t>
+            </a:r>
+            <a:endParaRPr lang="en-US" sz="2000" dirty="0"/>
+          </a:p>
+        </p:txBody>
+      </p:sp>
+      <p:sp>
+        <p:nvSpPr>
+          <p:cNvPr id="6" name="Text 4"/>
+          <p:cNvSpPr/>
+          <p:nvPr/>
+        </p:nvSpPr>
+        <p:spPr>
+          <a:xfrm>
+            <a:off x="731520" y="1051560"/>
+            <a:ext cx="7680960" cy="3108960"/>
           </a:xfrm>
           <a:prstGeom prst="rect">
             <a:avLst/>
@@ -2233,7 +3235,7 @@
               <a:buChar char="•"/>
             </a:pPr>
             <a:r>
-              <a:rPr lang="en-US" sz="1400" dirty="0">
+              <a:rPr lang="en-US" sz="1500" dirty="0">
                 <a:solidFill>
                   <a:srgbClr val="3D3A36"/>
                 </a:solidFill>
@@ -2241,9 +3243,9 @@
                 <a:ea typeface="Calibri" pitchFamily="34" charset="-122"/>
                 <a:cs typeface="Calibri" pitchFamily="34" charset="-120"/>
               </a:rPr>
-              <a:t>With few trials, results can be very different from theoretical</a:t>
-            </a:r>
-            <a:endParaRPr lang="en-US" sz="1400" dirty="0"/>
+              <a:t>With few trials, results can be very different from expected.</a:t>
+            </a:r>
+            <a:endParaRPr lang="en-US" sz="1500" dirty="0"/>
           </a:p>
           <a:p>
             <a:pPr marL="342900" indent="-342900">
@@ -2254,7 +3256,7 @@
               <a:buChar char="•"/>
             </a:pPr>
             <a:r>
-              <a:rPr lang="en-US" sz="1400" dirty="0">
+              <a:rPr lang="en-US" sz="1500" dirty="0">
                 <a:solidFill>
                   <a:srgbClr val="3D3A36"/>
                 </a:solidFill>
@@ -2262,9 +3264,9 @@
                 <a:ea typeface="Calibri" pitchFamily="34" charset="-122"/>
                 <a:cs typeface="Calibri" pitchFamily="34" charset="-120"/>
               </a:rPr>
-              <a:t>Flip a coin 10 times: might get 7 heads (70%) — not unusual</a:t>
-            </a:r>
-            <a:endParaRPr lang="en-US" sz="1400" dirty="0"/>
+              <a:t>Example: flip a coin 10 times — you might get 7 heads and 3 tails (not 5 and 5).</a:t>
+            </a:r>
+            <a:endParaRPr lang="en-US" sz="1500" dirty="0"/>
           </a:p>
           <a:p>
             <a:pPr marL="342900" indent="-342900">
@@ -2275,7 +3277,7 @@
               <a:buChar char="•"/>
             </a:pPr>
             <a:r>
-              <a:rPr lang="en-US" sz="1400" dirty="0">
+              <a:rPr lang="en-US" sz="1500" dirty="0">
                 <a:solidFill>
                   <a:srgbClr val="3D3A36"/>
                 </a:solidFill>
@@ -2283,9 +3285,9 @@
                 <a:ea typeface="Calibri" pitchFamily="34" charset="-122"/>
                 <a:cs typeface="Calibri" pitchFamily="34" charset="-120"/>
               </a:rPr>
-              <a:t>Flip 100 times: probably closer to 50% heads</a:t>
-            </a:r>
-            <a:endParaRPr lang="en-US" sz="1400" dirty="0"/>
+              <a:t>With MORE trials, experimental probability gets CLOSER to theoretical.</a:t>
+            </a:r>
+            <a:endParaRPr lang="en-US" sz="1500" dirty="0"/>
           </a:p>
           <a:p>
             <a:pPr marL="342900" indent="-342900">
@@ -2296,7 +3298,7 @@
               <a:buChar char="•"/>
             </a:pPr>
             <a:r>
-              <a:rPr lang="en-US" sz="1400" dirty="0">
+              <a:rPr lang="en-US" sz="1500" dirty="0">
                 <a:solidFill>
                   <a:srgbClr val="3D3A36"/>
                 </a:solidFill>
@@ -2304,9 +3306,9 @@
                 <a:ea typeface="Calibri" pitchFamily="34" charset="-122"/>
                 <a:cs typeface="Calibri" pitchFamily="34" charset="-120"/>
               </a:rPr>
-              <a:t>Flip 1000 times: very close to 50%</a:t>
-            </a:r>
-            <a:endParaRPr lang="en-US" sz="1400" dirty="0"/>
+              <a:t>This is called the LAW OF LARGE NUMBERS.</a:t>
+            </a:r>
+            <a:endParaRPr lang="en-US" sz="1500" dirty="0"/>
           </a:p>
           <a:p>
             <a:pPr marL="342900" indent="-342900">
@@ -2317,7 +3319,7 @@
               <a:buChar char="•"/>
             </a:pPr>
             <a:r>
-              <a:rPr lang="en-US" sz="1400" dirty="0">
+              <a:rPr lang="en-US" sz="1500" dirty="0">
                 <a:solidFill>
                   <a:srgbClr val="3D3A36"/>
                 </a:solidFill>
@@ -2325,41 +3327,79 @@
                 <a:ea typeface="Calibri" pitchFamily="34" charset="-122"/>
                 <a:cs typeface="Calibri" pitchFamily="34" charset="-120"/>
               </a:rPr>
-              <a:t>This pattern is the Law of Large Numbers</a:t>
-            </a:r>
-            <a:endParaRPr lang="en-US" sz="1400" dirty="0"/>
-          </a:p>
-          <a:p>
-            <a:pPr marL="342900" indent="-342900">
-              <a:spcAft>
-                <a:spcPts val="800"/>
-              </a:spcAft>
-              <a:buSzPct val="100000"/>
-              <a:buChar char="•"/>
-            </a:pPr>
-            <a:r>
-              <a:rPr lang="en-US" sz="1400" dirty="0">
-                <a:solidFill>
-                  <a:srgbClr val="3D3A36"/>
+              <a:t>If experimental probability is very different from theoretical, the object may be BIASED.</a:t>
+            </a:r>
+            <a:endParaRPr lang="en-US" sz="1500" dirty="0"/>
+          </a:p>
+        </p:txBody>
+      </p:sp>
+      <p:sp>
+        <p:nvSpPr>
+          <p:cNvPr id="7" name="Shape 5"/>
+          <p:cNvSpPr/>
+          <p:nvPr/>
+        </p:nvSpPr>
+        <p:spPr>
+          <a:xfrm>
+            <a:off x="731520" y="4206240"/>
+            <a:ext cx="7680960" cy="640080"/>
+          </a:xfrm>
+          <a:prstGeom prst="rect">
+            <a:avLst/>
+          </a:prstGeom>
+          <a:solidFill>
+            <a:srgbClr val="E8F5F3"/>
+          </a:solidFill>
+          <a:ln/>
+          <a:effectLst>
+            <a:outerShdw sx="100000" sy="100000" kx="0" ky="0" algn="bl" rotWithShape="0" blurRad="50800" dist="25400" dir="8100000">
+              <a:srgbClr val="000000">
+                <a:alpha val="10000"/>
+              </a:srgbClr>
+            </a:outerShdw>
+          </a:effectLst>
+        </p:spPr>
+      </p:sp>
+      <p:sp>
+        <p:nvSpPr>
+          <p:cNvPr id="8" name="Text 6"/>
+          <p:cNvSpPr/>
+          <p:nvPr/>
+        </p:nvSpPr>
+        <p:spPr>
+          <a:xfrm>
+            <a:off x="914400" y="4251960"/>
+            <a:ext cx="7315200" cy="548640"/>
+          </a:xfrm>
+          <a:prstGeom prst="rect">
+            <a:avLst/>
+          </a:prstGeom>
+          <a:noFill/>
+          <a:ln/>
+        </p:spPr>
+        <p:txBody>
+          <a:bodyPr wrap="square" rtlCol="0" anchor="ctr"/>
+          <a:lstStyle/>
+          <a:p>
+            <a:pPr indent="0" marL="0">
+              <a:buNone/>
+            </a:pPr>
+            <a:r>
+              <a:rPr lang="en-US" sz="1200" b="1" dirty="0">
+                <a:solidFill>
+                  <a:srgbClr val="2A9D8F"/>
                 </a:solidFill>
                 <a:latin typeface="Calibri" pitchFamily="34" charset="0"/>
                 <a:ea typeface="Calibri" pitchFamily="34" charset="-122"/>
                 <a:cs typeface="Calibri" pitchFamily="34" charset="-120"/>
               </a:rPr>
-              <a:t>It doesn't mean results will be EXACTLY 50% — just close</a:t>
-            </a:r>
-            <a:endParaRPr lang="en-US" sz="1400" dirty="0"/>
-          </a:p>
-          <a:p>
-            <a:pPr marL="342900" indent="-342900">
-              <a:spcAft>
-                <a:spcPts val="800"/>
-              </a:spcAft>
-              <a:buSzPct val="100000"/>
-              <a:buChar char="•"/>
-            </a:pPr>
-            <a:r>
-              <a:rPr lang="en-US" sz="1400" dirty="0">
+              <a:t>Key Idea: </a:t>
+            </a:r>
+            <a:pPr indent="0" marL="0">
+              <a:buNone/>
+            </a:pPr>
+            <a:r>
+              <a:rPr lang="en-US" sz="1200" i="1" dirty="0">
                 <a:solidFill>
                   <a:srgbClr val="3D3A36"/>
                 </a:solidFill>
@@ -2367,9 +3407,9 @@
                 <a:ea typeface="Calibri" pitchFamily="34" charset="-122"/>
                 <a:cs typeface="Calibri" pitchFamily="34" charset="-120"/>
               </a:rPr>
-              <a:t>Experimental probability is useful when theoretical is hard to calculate</a:t>
-            </a:r>
-            <a:endParaRPr lang="en-US" sz="1400" dirty="0"/>
+              <a:t>100 flips is more reliable than 10 flips. 1,000 flips is even more reliable.</a:t>
+            </a:r>
+            <a:endParaRPr lang="en-US" sz="1200" dirty="0"/>
           </a:p>
         </p:txBody>
       </p:sp>
@@ -2387,7 +3427,7 @@
     <p:bg>
       <p:bgPr>
         <a:solidFill>
-          <a:srgbClr val="1B2A4A"/>
+          <a:srgbClr val="FAF8F5"/>
         </a:solidFill>
       </p:bgPr>
     </p:bg>
@@ -2414,27 +3454,67 @@
         <p:spPr>
           <a:xfrm>
             <a:off x="0" y="0"/>
-            <a:ext cx="109728" cy="5143500"/>
-          </a:xfrm>
-          <a:prstGeom prst="rect">
-            <a:avLst/>
-          </a:prstGeom>
-          <a:solidFill>
-            <a:srgbClr val="E9C46A"/>
-          </a:solidFill>
-          <a:ln/>
-        </p:spPr>
-      </p:sp>
-      <p:sp>
-        <p:nvSpPr>
-          <p:cNvPr id="3" name="Text 1"/>
-          <p:cNvSpPr/>
-          <p:nvPr/>
-        </p:nvSpPr>
-        <p:spPr>
-          <a:xfrm>
-            <a:off x="731520" y="457200"/>
-            <a:ext cx="7772400" cy="731520"/>
+            <a:ext cx="9144000" cy="822960"/>
+          </a:xfrm>
+          <a:prstGeom prst="rect">
+            <a:avLst/>
+          </a:prstGeom>
+          <a:solidFill>
+            <a:srgbClr val="FFFFFF"/>
+          </a:solidFill>
+          <a:ln/>
+        </p:spPr>
+      </p:sp>
+      <p:sp>
+        <p:nvSpPr>
+          <p:cNvPr id="3" name="Shape 1"/>
+          <p:cNvSpPr/>
+          <p:nvPr/>
+        </p:nvSpPr>
+        <p:spPr>
+          <a:xfrm>
+            <a:off x="0" y="804672"/>
+            <a:ext cx="9144000" cy="27432"/>
+          </a:xfrm>
+          <a:prstGeom prst="rect">
+            <a:avLst/>
+          </a:prstGeom>
+          <a:solidFill>
+            <a:srgbClr val="E5E2DC"/>
+          </a:solidFill>
+          <a:ln/>
+        </p:spPr>
+      </p:sp>
+      <p:sp>
+        <p:nvSpPr>
+          <p:cNvPr id="4" name="Shape 2"/>
+          <p:cNvSpPr/>
+          <p:nvPr/>
+        </p:nvSpPr>
+        <p:spPr>
+          <a:xfrm>
+            <a:off x="548640" y="201168"/>
+            <a:ext cx="54864" cy="420624"/>
+          </a:xfrm>
+          <a:prstGeom prst="rect">
+            <a:avLst/>
+          </a:prstGeom>
+          <a:solidFill>
+            <a:srgbClr val="2A9D8F"/>
+          </a:solidFill>
+          <a:ln/>
+        </p:spPr>
+      </p:sp>
+      <p:sp>
+        <p:nvSpPr>
+          <p:cNvPr id="5" name="Text 3"/>
+          <p:cNvSpPr/>
+          <p:nvPr/>
+        </p:nvSpPr>
+        <p:spPr>
+          <a:xfrm>
+            <a:off x="777240" y="137160"/>
+            <a:ext cx="7772400" cy="548640"/>
           </a:xfrm>
           <a:prstGeom prst="rect">
             <a:avLst/>
@@ -2443,37 +3523,37 @@
           <a:ln/>
         </p:spPr>
         <p:txBody>
-          <a:bodyPr wrap="square" rtlCol="0" anchor="ctr"/>
+          <a:bodyPr wrap="square" lIns="0" tIns="0" rIns="0" bIns="0" rtlCol="0" anchor="ctr"/>
           <a:lstStyle/>
           <a:p>
             <a:pPr indent="0" marL="0">
               <a:buNone/>
             </a:pPr>
             <a:r>
-              <a:rPr lang="en-US" sz="3200" b="1" dirty="0">
-                <a:solidFill>
-                  <a:srgbClr val="FFFFFF"/>
+              <a:rPr lang="en-US" sz="2000" b="1" dirty="0">
+                <a:solidFill>
+                  <a:srgbClr val="1B2A4A"/>
                 </a:solidFill>
                 <a:latin typeface="Georgia" pitchFamily="34" charset="0"/>
                 <a:ea typeface="Georgia" pitchFamily="34" charset="-122"/>
                 <a:cs typeface="Georgia" pitchFamily="34" charset="-120"/>
               </a:rPr>
-              <a:t>Key Takeaways</a:t>
-            </a:r>
-            <a:endParaRPr lang="en-US" sz="3200" dirty="0"/>
-          </a:p>
-        </p:txBody>
-      </p:sp>
-      <p:sp>
-        <p:nvSpPr>
-          <p:cNvPr id="4" name="Text 2"/>
-          <p:cNvSpPr/>
-          <p:nvPr/>
-        </p:nvSpPr>
-        <p:spPr>
-          <a:xfrm>
-            <a:off x="731520" y="1463040"/>
-            <a:ext cx="7772400" cy="3200400"/>
+              <a:t>Using Experimental Probability</a:t>
+            </a:r>
+            <a:endParaRPr lang="en-US" sz="2000" dirty="0"/>
+          </a:p>
+        </p:txBody>
+      </p:sp>
+      <p:sp>
+        <p:nvSpPr>
+          <p:cNvPr id="6" name="Text 4"/>
+          <p:cNvSpPr/>
+          <p:nvPr/>
+        </p:nvSpPr>
+        <p:spPr>
+          <a:xfrm>
+            <a:off x="731520" y="1051560"/>
+            <a:ext cx="7680960" cy="3108960"/>
           </a:xfrm>
           <a:prstGeom prst="rect">
             <a:avLst/>
@@ -2487,7 +3567,7 @@
           <a:p>
             <a:pPr marL="342900" indent="-342900">
               <a:spcAft>
-                <a:spcPts val="1000"/>
+                <a:spcPts val="800"/>
               </a:spcAft>
               <a:buSzPct val="100000"/>
               <a:buChar char="•"/>
@@ -2495,20 +3575,20 @@
             <a:r>
               <a:rPr lang="en-US" sz="1500" dirty="0">
                 <a:solidFill>
-                  <a:srgbClr val="CADCFC"/>
+                  <a:srgbClr val="3D3A36"/>
                 </a:solidFill>
                 <a:latin typeface="Calibri" pitchFamily="34" charset="0"/>
                 <a:ea typeface="Calibri" pitchFamily="34" charset="-122"/>
                 <a:cs typeface="Calibri" pitchFamily="34" charset="-120"/>
               </a:rPr>
-              <a:t>Theoretical: based on maths (equally likely outcomes)</a:t>
+              <a:t>Experimental probability = number of successes ÷ total number of trials.</a:t>
             </a:r>
             <a:endParaRPr lang="en-US" sz="1500" dirty="0"/>
           </a:p>
           <a:p>
             <a:pPr marL="342900" indent="-342900">
               <a:spcAft>
-                <a:spcPts val="1000"/>
+                <a:spcPts val="800"/>
               </a:spcAft>
               <a:buSzPct val="100000"/>
               <a:buChar char="•"/>
@@ -2516,20 +3596,20 @@
             <a:r>
               <a:rPr lang="en-US" sz="1500" dirty="0">
                 <a:solidFill>
-                  <a:srgbClr val="CADCFC"/>
+                  <a:srgbClr val="3D3A36"/>
                 </a:solidFill>
                 <a:latin typeface="Calibri" pitchFamily="34" charset="0"/>
                 <a:ea typeface="Calibri" pitchFamily="34" charset="-122"/>
                 <a:cs typeface="Calibri" pitchFamily="34" charset="-120"/>
               </a:rPr>
-              <a:t>Experimental: based on actual trial results</a:t>
+              <a:t>Example: you spin a spinner 50 times and get red 18 times. P(red) ≈ 18/50 = 0.36.</a:t>
             </a:r>
             <a:endParaRPr lang="en-US" sz="1500" dirty="0"/>
           </a:p>
           <a:p>
             <a:pPr marL="342900" indent="-342900">
               <a:spcAft>
-                <a:spcPts val="1000"/>
+                <a:spcPts val="800"/>
               </a:spcAft>
               <a:buSzPct val="100000"/>
               <a:buChar char="•"/>
@@ -2537,20 +3617,20 @@
             <a:r>
               <a:rPr lang="en-US" sz="1500" dirty="0">
                 <a:solidFill>
-                  <a:srgbClr val="CADCFC"/>
+                  <a:srgbClr val="3D3A36"/>
                 </a:solidFill>
                 <a:latin typeface="Calibri" pitchFamily="34" charset="0"/>
                 <a:ea typeface="Calibri" pitchFamily="34" charset="-122"/>
                 <a:cs typeface="Calibri" pitchFamily="34" charset="-120"/>
               </a:rPr>
-              <a:t>More trials → experimental approaches theoretical (Law of Large Numbers)</a:t>
+              <a:t>Use experimental probability when you CANNOT calculate theoretical (e.g. biased dice).</a:t>
             </a:r>
             <a:endParaRPr lang="en-US" sz="1500" dirty="0"/>
           </a:p>
           <a:p>
             <a:pPr marL="342900" indent="-342900">
               <a:spcAft>
-                <a:spcPts val="1000"/>
+                <a:spcPts val="800"/>
               </a:spcAft>
               <a:buSzPct val="100000"/>
               <a:buChar char="•"/>
@@ -2558,20 +3638,20 @@
             <a:r>
               <a:rPr lang="en-US" sz="1500" dirty="0">
                 <a:solidFill>
-                  <a:srgbClr val="CADCFC"/>
+                  <a:srgbClr val="3D3A36"/>
                 </a:solidFill>
                 <a:latin typeface="Calibri" pitchFamily="34" charset="0"/>
                 <a:ea typeface="Calibri" pitchFamily="34" charset="-122"/>
                 <a:cs typeface="Calibri" pitchFamily="34" charset="-120"/>
               </a:rPr>
-              <a:t>Results vary with small samples</a:t>
+              <a:t>The more trials you do, the more reliable your estimate becomes.</a:t>
             </a:r>
             <a:endParaRPr lang="en-US" sz="1500" dirty="0"/>
           </a:p>
           <a:p>
             <a:pPr marL="342900" indent="-342900">
               <a:spcAft>
-                <a:spcPts val="1000"/>
+                <a:spcPts val="800"/>
               </a:spcAft>
               <a:buSzPct val="100000"/>
               <a:buChar char="•"/>
@@ -2579,18 +3659,110 @@
             <a:r>
               <a:rPr lang="en-US" sz="1500" dirty="0">
                 <a:solidFill>
-                  <a:srgbClr val="CADCFC"/>
+                  <a:srgbClr val="3D3A36"/>
                 </a:solidFill>
                 <a:latin typeface="Calibri" pitchFamily="34" charset="0"/>
                 <a:ea typeface="Calibri" pitchFamily="34" charset="-122"/>
                 <a:cs typeface="Calibri" pitchFamily="34" charset="-120"/>
               </a:rPr>
-              <a:t>Experimental useful when you can't calculate theoretical</a:t>
+              <a:t>Compare experimental results with theoretical to check for fairness.</a:t>
             </a:r>
             <a:endParaRPr lang="en-US" sz="1500" dirty="0"/>
           </a:p>
         </p:txBody>
       </p:sp>
+    </p:spTree>
+  </p:cSld>
+  <p:clrMapOvr>
+    <a:masterClrMapping/>
+  </p:clrMapOvr>
+</p:sld>
+</file>
+
+<file path=ppt/slides/slide6.xml><?xml version="1.0" encoding="utf-8"?>
+<p:sld xmlns:a="http://schemas.openxmlformats.org/drawingml/2006/main" xmlns:r="http://schemas.openxmlformats.org/officeDocument/2006/relationships" xmlns:p="http://schemas.openxmlformats.org/presentationml/2006/main">
+  <p:cSld name="Slide 6">
+    <p:bg>
+      <p:bgPr>
+        <a:solidFill>
+          <a:srgbClr val="FAF8F5"/>
+        </a:solidFill>
+      </p:bgPr>
+    </p:bg>
+    <p:spTree>
+      <p:nvGrpSpPr>
+        <p:cNvPr id="1" name=""/>
+        <p:cNvGrpSpPr/>
+        <p:nvPr/>
+      </p:nvGrpSpPr>
+      <p:grpSpPr>
+        <a:xfrm>
+          <a:off x="0" y="0"/>
+          <a:ext cx="0" cy="0"/>
+          <a:chOff x="0" y="0"/>
+          <a:chExt cx="0" cy="0"/>
+        </a:xfrm>
+      </p:grpSpPr>
+      <p:sp>
+        <p:nvSpPr>
+          <p:cNvPr id="2" name="Shape 0"/>
+          <p:cNvSpPr/>
+          <p:nvPr/>
+        </p:nvSpPr>
+        <p:spPr>
+          <a:xfrm>
+            <a:off x="0" y="0"/>
+            <a:ext cx="9144000" cy="822960"/>
+          </a:xfrm>
+          <a:prstGeom prst="rect">
+            <a:avLst/>
+          </a:prstGeom>
+          <a:solidFill>
+            <a:srgbClr val="FFFFFF"/>
+          </a:solidFill>
+          <a:ln/>
+        </p:spPr>
+      </p:sp>
+      <p:sp>
+        <p:nvSpPr>
+          <p:cNvPr id="3" name="Shape 1"/>
+          <p:cNvSpPr/>
+          <p:nvPr/>
+        </p:nvSpPr>
+        <p:spPr>
+          <a:xfrm>
+            <a:off x="0" y="804672"/>
+            <a:ext cx="9144000" cy="27432"/>
+          </a:xfrm>
+          <a:prstGeom prst="rect">
+            <a:avLst/>
+          </a:prstGeom>
+          <a:solidFill>
+            <a:srgbClr val="E5E2DC"/>
+          </a:solidFill>
+          <a:ln/>
+        </p:spPr>
+      </p:sp>
+      <p:sp>
+        <p:nvSpPr>
+          <p:cNvPr id="4" name="Shape 2"/>
+          <p:cNvSpPr/>
+          <p:nvPr/>
+        </p:nvSpPr>
+        <p:spPr>
+          <a:xfrm>
+            <a:off x="548640" y="201168"/>
+            <a:ext cx="54864" cy="420624"/>
+          </a:xfrm>
+          <a:prstGeom prst="rect">
+            <a:avLst/>
+          </a:prstGeom>
+          <a:solidFill>
+            <a:srgbClr val="2A9D8F"/>
+          </a:solidFill>
+          <a:ln/>
+        </p:spPr>
+      </p:sp>
       <p:sp>
         <p:nvSpPr>
           <p:cNvPr id="5" name="Text 3"/>
@@ -2599,8 +3771,8 @@
         </p:nvSpPr>
         <p:spPr>
           <a:xfrm>
-            <a:off x="731520" y="4572000"/>
-            <a:ext cx="7772400" cy="365760"/>
+            <a:off x="777240" y="137160"/>
+            <a:ext cx="7772400" cy="548640"/>
           </a:xfrm>
           <a:prstGeom prst="rect">
             <a:avLst/>
@@ -2609,24 +3781,783 @@
           <a:ln/>
         </p:spPr>
         <p:txBody>
-          <a:bodyPr wrap="square" rtlCol="0" anchor="ctr"/>
+          <a:bodyPr wrap="square" lIns="0" tIns="0" rIns="0" bIns="0" rtlCol="0" anchor="ctr"/>
           <a:lstStyle/>
           <a:p>
             <a:pPr indent="0" marL="0">
               <a:buNone/>
             </a:pPr>
             <a:r>
-              <a:rPr lang="en-US" sz="1100" dirty="0">
-                <a:solidFill>
-                  <a:srgbClr val="E9C46A"/>
+              <a:rPr lang="en-US" sz="2000" b="1" dirty="0">
+                <a:solidFill>
+                  <a:srgbClr val="1B2A4A"/>
+                </a:solidFill>
+                <a:latin typeface="Georgia" pitchFamily="34" charset="0"/>
+                <a:ea typeface="Georgia" pitchFamily="34" charset="-122"/>
+                <a:cs typeface="Georgia" pitchFamily="34" charset="-120"/>
+              </a:rPr>
+              <a:t>Check Your Understanding</a:t>
+            </a:r>
+            <a:endParaRPr lang="en-US" sz="2000" dirty="0"/>
+          </a:p>
+        </p:txBody>
+      </p:sp>
+      <p:sp>
+        <p:nvSpPr>
+          <p:cNvPr id="6" name="Shape 4"/>
+          <p:cNvSpPr/>
+          <p:nvPr/>
+        </p:nvSpPr>
+        <p:spPr>
+          <a:xfrm>
+            <a:off x="731520" y="1051560"/>
+            <a:ext cx="7680960" cy="438912"/>
+          </a:xfrm>
+          <a:prstGeom prst="rect">
+            <a:avLst/>
+          </a:prstGeom>
+          <a:solidFill>
+            <a:srgbClr val="FFFFFF"/>
+          </a:solidFill>
+          <a:ln/>
+        </p:spPr>
+      </p:sp>
+      <p:sp>
+        <p:nvSpPr>
+          <p:cNvPr id="7" name="Text 5"/>
+          <p:cNvSpPr/>
+          <p:nvPr/>
+        </p:nvSpPr>
+        <p:spPr>
+          <a:xfrm>
+            <a:off x="868680" y="1051560"/>
+            <a:ext cx="320040" cy="438912"/>
+          </a:xfrm>
+          <a:prstGeom prst="rect">
+            <a:avLst/>
+          </a:prstGeom>
+          <a:noFill/>
+          <a:ln/>
+        </p:spPr>
+        <p:txBody>
+          <a:bodyPr wrap="square" rtlCol="0" anchor="ctr"/>
+          <a:lstStyle/>
+          <a:p>
+            <a:pPr indent="0" marL="0">
+              <a:buNone/>
+            </a:pPr>
+            <a:r>
+              <a:rPr lang="en-US" sz="1400" dirty="0">
+                <a:solidFill>
+                  <a:srgbClr val="2A9D8F"/>
+                </a:solidFill>
+              </a:rPr>
+              <a:t>☐</a:t>
+            </a:r>
+            <a:endParaRPr lang="en-US" sz="1400" dirty="0"/>
+          </a:p>
+        </p:txBody>
+      </p:sp>
+      <p:sp>
+        <p:nvSpPr>
+          <p:cNvPr id="8" name="Text 6"/>
+          <p:cNvSpPr/>
+          <p:nvPr/>
+        </p:nvSpPr>
+        <p:spPr>
+          <a:xfrm>
+            <a:off x="1234440" y="1051560"/>
+            <a:ext cx="6949440" cy="438912"/>
+          </a:xfrm>
+          <a:prstGeom prst="rect">
+            <a:avLst/>
+          </a:prstGeom>
+          <a:noFill/>
+          <a:ln/>
+        </p:spPr>
+        <p:txBody>
+          <a:bodyPr wrap="square" rtlCol="0" anchor="ctr"/>
+          <a:lstStyle/>
+          <a:p>
+            <a:pPr indent="0" marL="0">
+              <a:buNone/>
+            </a:pPr>
+            <a:r>
+              <a:rPr lang="en-US" sz="1300" dirty="0">
+                <a:solidFill>
+                  <a:srgbClr val="3D3A36"/>
                 </a:solidFill>
                 <a:latin typeface="Calibri" pitchFamily="34" charset="0"/>
                 <a:ea typeface="Calibri" pitchFamily="34" charset="-122"/>
                 <a:cs typeface="Calibri" pitchFamily="34" charset="-120"/>
               </a:rPr>
+              <a:t>I can calculate theoretical and experimental probability</a:t>
+            </a:r>
+            <a:endParaRPr lang="en-US" sz="1300" dirty="0"/>
+          </a:p>
+        </p:txBody>
+      </p:sp>
+      <p:sp>
+        <p:nvSpPr>
+          <p:cNvPr id="9" name="Shape 7"/>
+          <p:cNvSpPr/>
+          <p:nvPr/>
+        </p:nvSpPr>
+        <p:spPr>
+          <a:xfrm>
+            <a:off x="731520" y="1554480"/>
+            <a:ext cx="7680960" cy="438912"/>
+          </a:xfrm>
+          <a:prstGeom prst="rect">
+            <a:avLst/>
+          </a:prstGeom>
+          <a:solidFill>
+            <a:srgbClr val="F8F6F3"/>
+          </a:solidFill>
+          <a:ln/>
+        </p:spPr>
+      </p:sp>
+      <p:sp>
+        <p:nvSpPr>
+          <p:cNvPr id="10" name="Text 8"/>
+          <p:cNvSpPr/>
+          <p:nvPr/>
+        </p:nvSpPr>
+        <p:spPr>
+          <a:xfrm>
+            <a:off x="868680" y="1554480"/>
+            <a:ext cx="320040" cy="438912"/>
+          </a:xfrm>
+          <a:prstGeom prst="rect">
+            <a:avLst/>
+          </a:prstGeom>
+          <a:noFill/>
+          <a:ln/>
+        </p:spPr>
+        <p:txBody>
+          <a:bodyPr wrap="square" rtlCol="0" anchor="ctr"/>
+          <a:lstStyle/>
+          <a:p>
+            <a:pPr indent="0" marL="0">
+              <a:buNone/>
+            </a:pPr>
+            <a:r>
+              <a:rPr lang="en-US" sz="1400" dirty="0">
+                <a:solidFill>
+                  <a:srgbClr val="2A9D8F"/>
+                </a:solidFill>
+              </a:rPr>
+              <a:t>☐</a:t>
+            </a:r>
+            <a:endParaRPr lang="en-US" sz="1400" dirty="0"/>
+          </a:p>
+        </p:txBody>
+      </p:sp>
+      <p:sp>
+        <p:nvSpPr>
+          <p:cNvPr id="11" name="Text 9"/>
+          <p:cNvSpPr/>
+          <p:nvPr/>
+        </p:nvSpPr>
+        <p:spPr>
+          <a:xfrm>
+            <a:off x="1234440" y="1554480"/>
+            <a:ext cx="6949440" cy="438912"/>
+          </a:xfrm>
+          <a:prstGeom prst="rect">
+            <a:avLst/>
+          </a:prstGeom>
+          <a:noFill/>
+          <a:ln/>
+        </p:spPr>
+        <p:txBody>
+          <a:bodyPr wrap="square" rtlCol="0" anchor="ctr"/>
+          <a:lstStyle/>
+          <a:p>
+            <a:pPr indent="0" marL="0">
+              <a:buNone/>
+            </a:pPr>
+            <a:r>
+              <a:rPr lang="en-US" sz="1300" dirty="0">
+                <a:solidFill>
+                  <a:srgbClr val="3D3A36"/>
+                </a:solidFill>
+                <a:latin typeface="Calibri" pitchFamily="34" charset="0"/>
+                <a:ea typeface="Calibri" pitchFamily="34" charset="-122"/>
+                <a:cs typeface="Calibri" pitchFamily="34" charset="-120"/>
+              </a:rPr>
+              <a:t>I understand why they may differ</a:t>
+            </a:r>
+            <a:endParaRPr lang="en-US" sz="1300" dirty="0"/>
+          </a:p>
+        </p:txBody>
+      </p:sp>
+      <p:sp>
+        <p:nvSpPr>
+          <p:cNvPr id="12" name="Shape 10"/>
+          <p:cNvSpPr/>
+          <p:nvPr/>
+        </p:nvSpPr>
+        <p:spPr>
+          <a:xfrm>
+            <a:off x="731520" y="2057400"/>
+            <a:ext cx="7680960" cy="438912"/>
+          </a:xfrm>
+          <a:prstGeom prst="rect">
+            <a:avLst/>
+          </a:prstGeom>
+          <a:solidFill>
+            <a:srgbClr val="FFFFFF"/>
+          </a:solidFill>
+          <a:ln/>
+        </p:spPr>
+      </p:sp>
+      <p:sp>
+        <p:nvSpPr>
+          <p:cNvPr id="13" name="Text 11"/>
+          <p:cNvSpPr/>
+          <p:nvPr/>
+        </p:nvSpPr>
+        <p:spPr>
+          <a:xfrm>
+            <a:off x="868680" y="2057400"/>
+            <a:ext cx="320040" cy="438912"/>
+          </a:xfrm>
+          <a:prstGeom prst="rect">
+            <a:avLst/>
+          </a:prstGeom>
+          <a:noFill/>
+          <a:ln/>
+        </p:spPr>
+        <p:txBody>
+          <a:bodyPr wrap="square" rtlCol="0" anchor="ctr"/>
+          <a:lstStyle/>
+          <a:p>
+            <a:pPr indent="0" marL="0">
+              <a:buNone/>
+            </a:pPr>
+            <a:r>
+              <a:rPr lang="en-US" sz="1400" dirty="0">
+                <a:solidFill>
+                  <a:srgbClr val="2A9D8F"/>
+                </a:solidFill>
+              </a:rPr>
+              <a:t>☐</a:t>
+            </a:r>
+            <a:endParaRPr lang="en-US" sz="1400" dirty="0"/>
+          </a:p>
+        </p:txBody>
+      </p:sp>
+      <p:sp>
+        <p:nvSpPr>
+          <p:cNvPr id="14" name="Text 12"/>
+          <p:cNvSpPr/>
+          <p:nvPr/>
+        </p:nvSpPr>
+        <p:spPr>
+          <a:xfrm>
+            <a:off x="1234440" y="2057400"/>
+            <a:ext cx="6949440" cy="438912"/>
+          </a:xfrm>
+          <a:prstGeom prst="rect">
+            <a:avLst/>
+          </a:prstGeom>
+          <a:noFill/>
+          <a:ln/>
+        </p:spPr>
+        <p:txBody>
+          <a:bodyPr wrap="square" rtlCol="0" anchor="ctr"/>
+          <a:lstStyle/>
+          <a:p>
+            <a:pPr indent="0" marL="0">
+              <a:buNone/>
+            </a:pPr>
+            <a:r>
+              <a:rPr lang="en-US" sz="1300" dirty="0">
+                <a:solidFill>
+                  <a:srgbClr val="3D3A36"/>
+                </a:solidFill>
+                <a:latin typeface="Calibri" pitchFamily="34" charset="0"/>
+                <a:ea typeface="Calibri" pitchFamily="34" charset="-122"/>
+                <a:cs typeface="Calibri" pitchFamily="34" charset="-120"/>
+              </a:rPr>
+              <a:t>I know that more trials gives more reliable results</a:t>
+            </a:r>
+            <a:endParaRPr lang="en-US" sz="1300" dirty="0"/>
+          </a:p>
+        </p:txBody>
+      </p:sp>
+      <p:sp>
+        <p:nvSpPr>
+          <p:cNvPr id="15" name="Shape 13"/>
+          <p:cNvSpPr/>
+          <p:nvPr/>
+        </p:nvSpPr>
+        <p:spPr>
+          <a:xfrm>
+            <a:off x="731520" y="2560320"/>
+            <a:ext cx="7680960" cy="438912"/>
+          </a:xfrm>
+          <a:prstGeom prst="rect">
+            <a:avLst/>
+          </a:prstGeom>
+          <a:solidFill>
+            <a:srgbClr val="F8F6F3"/>
+          </a:solidFill>
+          <a:ln/>
+        </p:spPr>
+      </p:sp>
+      <p:sp>
+        <p:nvSpPr>
+          <p:cNvPr id="16" name="Text 14"/>
+          <p:cNvSpPr/>
+          <p:nvPr/>
+        </p:nvSpPr>
+        <p:spPr>
+          <a:xfrm>
+            <a:off x="868680" y="2560320"/>
+            <a:ext cx="320040" cy="438912"/>
+          </a:xfrm>
+          <a:prstGeom prst="rect">
+            <a:avLst/>
+          </a:prstGeom>
+          <a:noFill/>
+          <a:ln/>
+        </p:spPr>
+        <p:txBody>
+          <a:bodyPr wrap="square" rtlCol="0" anchor="ctr"/>
+          <a:lstStyle/>
+          <a:p>
+            <a:pPr indent="0" marL="0">
+              <a:buNone/>
+            </a:pPr>
+            <a:r>
+              <a:rPr lang="en-US" sz="1400" dirty="0">
+                <a:solidFill>
+                  <a:srgbClr val="2A9D8F"/>
+                </a:solidFill>
+              </a:rPr>
+              <a:t>☐</a:t>
+            </a:r>
+            <a:endParaRPr lang="en-US" sz="1400" dirty="0"/>
+          </a:p>
+        </p:txBody>
+      </p:sp>
+      <p:sp>
+        <p:nvSpPr>
+          <p:cNvPr id="17" name="Text 15"/>
+          <p:cNvSpPr/>
+          <p:nvPr/>
+        </p:nvSpPr>
+        <p:spPr>
+          <a:xfrm>
+            <a:off x="1234440" y="2560320"/>
+            <a:ext cx="6949440" cy="438912"/>
+          </a:xfrm>
+          <a:prstGeom prst="rect">
+            <a:avLst/>
+          </a:prstGeom>
+          <a:noFill/>
+          <a:ln/>
+        </p:spPr>
+        <p:txBody>
+          <a:bodyPr wrap="square" rtlCol="0" anchor="ctr"/>
+          <a:lstStyle/>
+          <a:p>
+            <a:pPr indent="0" marL="0">
+              <a:buNone/>
+            </a:pPr>
+            <a:r>
+              <a:rPr lang="en-US" sz="1300" dirty="0">
+                <a:solidFill>
+                  <a:srgbClr val="3D3A36"/>
+                </a:solidFill>
+                <a:latin typeface="Calibri" pitchFamily="34" charset="0"/>
+                <a:ea typeface="Calibri" pitchFamily="34" charset="-122"/>
+                <a:cs typeface="Calibri" pitchFamily="34" charset="-120"/>
+              </a:rPr>
+              <a:t>I can identify whether an object might be biased</a:t>
+            </a:r>
+            <a:endParaRPr lang="en-US" sz="1300" dirty="0"/>
+          </a:p>
+        </p:txBody>
+      </p:sp>
+      <p:sp>
+        <p:nvSpPr>
+          <p:cNvPr id="18" name="Shape 16"/>
+          <p:cNvSpPr/>
+          <p:nvPr/>
+        </p:nvSpPr>
+        <p:spPr>
+          <a:xfrm>
+            <a:off x="731520" y="3063240"/>
+            <a:ext cx="7680960" cy="438912"/>
+          </a:xfrm>
+          <a:prstGeom prst="rect">
+            <a:avLst/>
+          </a:prstGeom>
+          <a:solidFill>
+            <a:srgbClr val="FFFFFF"/>
+          </a:solidFill>
+          <a:ln/>
+        </p:spPr>
+      </p:sp>
+      <p:sp>
+        <p:nvSpPr>
+          <p:cNvPr id="19" name="Text 17"/>
+          <p:cNvSpPr/>
+          <p:nvPr/>
+        </p:nvSpPr>
+        <p:spPr>
+          <a:xfrm>
+            <a:off x="868680" y="3063240"/>
+            <a:ext cx="320040" cy="438912"/>
+          </a:xfrm>
+          <a:prstGeom prst="rect">
+            <a:avLst/>
+          </a:prstGeom>
+          <a:noFill/>
+          <a:ln/>
+        </p:spPr>
+        <p:txBody>
+          <a:bodyPr wrap="square" rtlCol="0" anchor="ctr"/>
+          <a:lstStyle/>
+          <a:p>
+            <a:pPr indent="0" marL="0">
+              <a:buNone/>
+            </a:pPr>
+            <a:r>
+              <a:rPr lang="en-US" sz="1400" dirty="0">
+                <a:solidFill>
+                  <a:srgbClr val="2A9D8F"/>
+                </a:solidFill>
+              </a:rPr>
+              <a:t>☐</a:t>
+            </a:r>
+            <a:endParaRPr lang="en-US" sz="1400" dirty="0"/>
+          </a:p>
+        </p:txBody>
+      </p:sp>
+      <p:sp>
+        <p:nvSpPr>
+          <p:cNvPr id="20" name="Text 18"/>
+          <p:cNvSpPr/>
+          <p:nvPr/>
+        </p:nvSpPr>
+        <p:spPr>
+          <a:xfrm>
+            <a:off x="1234440" y="3063240"/>
+            <a:ext cx="6949440" cy="438912"/>
+          </a:xfrm>
+          <a:prstGeom prst="rect">
+            <a:avLst/>
+          </a:prstGeom>
+          <a:noFill/>
+          <a:ln/>
+        </p:spPr>
+        <p:txBody>
+          <a:bodyPr wrap="square" rtlCol="0" anchor="ctr"/>
+          <a:lstStyle/>
+          <a:p>
+            <a:pPr indent="0" marL="0">
+              <a:buNone/>
+            </a:pPr>
+            <a:r>
+              <a:rPr lang="en-US" sz="1300" dirty="0">
+                <a:solidFill>
+                  <a:srgbClr val="3D3A36"/>
+                </a:solidFill>
+                <a:latin typeface="Calibri" pitchFamily="34" charset="0"/>
+                <a:ea typeface="Calibri" pitchFamily="34" charset="-122"/>
+                <a:cs typeface="Calibri" pitchFamily="34" charset="-120"/>
+              </a:rPr>
+              <a:t>I can use relative frequency from experimental data</a:t>
+            </a:r>
+            <a:endParaRPr lang="en-US" sz="1300" dirty="0"/>
+          </a:p>
+        </p:txBody>
+      </p:sp>
+      <p:sp>
+        <p:nvSpPr>
+          <p:cNvPr id="21" name="Shape 19"/>
+          <p:cNvSpPr/>
+          <p:nvPr/>
+        </p:nvSpPr>
+        <p:spPr>
+          <a:xfrm>
+            <a:off x="731520" y="3749040"/>
+            <a:ext cx="7680960" cy="594360"/>
+          </a:xfrm>
+          <a:prstGeom prst="rect">
+            <a:avLst/>
+          </a:prstGeom>
+          <a:solidFill>
+            <a:srgbClr val="E8F5F3"/>
+          </a:solidFill>
+          <a:ln/>
+          <a:effectLst>
+            <a:outerShdw sx="100000" sy="100000" kx="0" ky="0" algn="bl" rotWithShape="0" blurRad="50800" dist="25400" dir="8100000">
+              <a:srgbClr val="000000">
+                <a:alpha val="10000"/>
+              </a:srgbClr>
+            </a:outerShdw>
+          </a:effectLst>
+        </p:spPr>
+      </p:sp>
+      <p:sp>
+        <p:nvSpPr>
+          <p:cNvPr id="22" name="Text 20"/>
+          <p:cNvSpPr/>
+          <p:nvPr/>
+        </p:nvSpPr>
+        <p:spPr>
+          <a:xfrm>
+            <a:off x="914400" y="3749040"/>
+            <a:ext cx="7315200" cy="594360"/>
+          </a:xfrm>
+          <a:prstGeom prst="rect">
+            <a:avLst/>
+          </a:prstGeom>
+          <a:noFill/>
+          <a:ln/>
+        </p:spPr>
+        <p:txBody>
+          <a:bodyPr wrap="square" rtlCol="0" anchor="ctr"/>
+          <a:lstStyle/>
+          <a:p>
+            <a:pPr indent="0" marL="0">
+              <a:buNone/>
+            </a:pPr>
+            <a:r>
+              <a:rPr lang="en-US" sz="1200" b="1" dirty="0">
+                <a:solidFill>
+                  <a:srgbClr val="2A9D8F"/>
+                </a:solidFill>
+                <a:latin typeface="Calibri" pitchFamily="34" charset="0"/>
+                <a:ea typeface="Calibri" pitchFamily="34" charset="-122"/>
+                <a:cs typeface="Calibri" pitchFamily="34" charset="-120"/>
+              </a:rPr>
+              <a:t>Key Idea: </a:t>
+            </a:r>
+            <a:pPr indent="0" marL="0">
+              <a:buNone/>
+            </a:pPr>
+            <a:r>
+              <a:rPr lang="en-US" sz="1200" i="1" dirty="0">
+                <a:solidFill>
+                  <a:srgbClr val="3D3A36"/>
+                </a:solidFill>
+                <a:latin typeface="Calibri" pitchFamily="34" charset="0"/>
+                <a:ea typeface="Calibri" pitchFamily="34" charset="-122"/>
+                <a:cs typeface="Calibri" pitchFamily="34" charset="-120"/>
+              </a:rPr>
+              <a:t>More trials = closer to theoretical probability. This is the law of large numbers.</a:t>
+            </a:r>
+            <a:endParaRPr lang="en-US" sz="1200" dirty="0"/>
+          </a:p>
+        </p:txBody>
+      </p:sp>
+    </p:spTree>
+  </p:cSld>
+  <p:clrMapOvr>
+    <a:masterClrMapping/>
+  </p:clrMapOvr>
+</p:sld>
+</file>
+
+<file path=ppt/slides/slide7.xml><?xml version="1.0" encoding="utf-8"?>
+<p:sld xmlns:a="http://schemas.openxmlformats.org/drawingml/2006/main" xmlns:r="http://schemas.openxmlformats.org/officeDocument/2006/relationships" xmlns:p="http://schemas.openxmlformats.org/presentationml/2006/main">
+  <p:cSld name="Slide 7">
+    <p:spTree>
+      <p:nvGrpSpPr>
+        <p:cNvPr id="1" name=""/>
+        <p:cNvGrpSpPr/>
+        <p:nvPr/>
+      </p:nvGrpSpPr>
+      <p:grpSpPr>
+        <a:xfrm>
+          <a:off x="0" y="0"/>
+          <a:ext cx="0" cy="0"/>
+          <a:chOff x="0" y="0"/>
+          <a:chExt cx="0" cy="0"/>
+        </a:xfrm>
+      </p:grpSpPr>
+      <p:sp>
+        <p:nvSpPr>
+          <p:cNvPr id="2" name="Shape 0"/>
+          <p:cNvSpPr/>
+          <p:nvPr/>
+        </p:nvSpPr>
+        <p:spPr>
+          <a:xfrm>
+            <a:off x="0" y="0"/>
+            <a:ext cx="9144000" cy="5143500"/>
+          </a:xfrm>
+          <a:prstGeom prst="rect">
+            <a:avLst/>
+          </a:prstGeom>
+          <a:solidFill>
+            <a:srgbClr val="1B2A4A"/>
+          </a:solidFill>
+          <a:ln/>
+        </p:spPr>
+      </p:sp>
+      <p:sp>
+        <p:nvSpPr>
+          <p:cNvPr id="3" name="Shape 1"/>
+          <p:cNvSpPr/>
+          <p:nvPr/>
+        </p:nvSpPr>
+        <p:spPr>
+          <a:xfrm>
+            <a:off x="0" y="4777740"/>
+            <a:ext cx="9144000" cy="365760"/>
+          </a:xfrm>
+          <a:prstGeom prst="rect">
+            <a:avLst/>
+          </a:prstGeom>
+          <a:solidFill>
+            <a:srgbClr val="2A9D8F"/>
+          </a:solidFill>
+          <a:ln/>
+        </p:spPr>
+      </p:sp>
+      <p:sp>
+        <p:nvSpPr>
+          <p:cNvPr id="4" name="Shape 2"/>
+          <p:cNvSpPr/>
+          <p:nvPr/>
+        </p:nvSpPr>
+        <p:spPr>
+          <a:xfrm>
+            <a:off x="-914400" y="-914400"/>
+            <a:ext cx="3657600" cy="3657600"/>
+          </a:xfrm>
+          <a:prstGeom prst="ellipse">
+            <a:avLst/>
+          </a:prstGeom>
+          <a:solidFill>
+            <a:srgbClr val="2A9D8F">
+              <a:alpha val="10000"/>
+            </a:srgbClr>
+          </a:solidFill>
+          <a:ln/>
+        </p:spPr>
+      </p:sp>
+      <p:sp>
+        <p:nvSpPr>
+          <p:cNvPr id="5" name="Text 3"/>
+          <p:cNvSpPr/>
+          <p:nvPr/>
+        </p:nvSpPr>
+        <p:spPr>
+          <a:xfrm>
+            <a:off x="731520" y="1463040"/>
+            <a:ext cx="7680960" cy="822960"/>
+          </a:xfrm>
+          <a:prstGeom prst="rect">
+            <a:avLst/>
+          </a:prstGeom>
+          <a:noFill/>
+          <a:ln/>
+        </p:spPr>
+        <p:txBody>
+          <a:bodyPr wrap="square" rtlCol="0" anchor="ctr"/>
+          <a:lstStyle/>
+          <a:p>
+            <a:pPr algn="ctr" indent="0" marL="0">
+              <a:buNone/>
+            </a:pPr>
+            <a:r>
+              <a:rPr lang="en-US" sz="3400" b="1" dirty="0">
+                <a:solidFill>
+                  <a:srgbClr val="FFFFFF"/>
+                </a:solidFill>
+                <a:latin typeface="Georgia" pitchFamily="34" charset="0"/>
+                <a:ea typeface="Georgia" pitchFamily="34" charset="-122"/>
+                <a:cs typeface="Georgia" pitchFamily="34" charset="-120"/>
+              </a:rPr>
+              <a:t>Review &amp; Practise</a:t>
+            </a:r>
+            <a:endParaRPr lang="en-US" sz="3400" dirty="0"/>
+          </a:p>
+        </p:txBody>
+      </p:sp>
+      <p:sp>
+        <p:nvSpPr>
+          <p:cNvPr id="6" name="Text 4"/>
+          <p:cNvSpPr/>
+          <p:nvPr/>
+        </p:nvSpPr>
+        <p:spPr>
+          <a:xfrm>
+            <a:off x="731520" y="2468880"/>
+            <a:ext cx="7680960" cy="457200"/>
+          </a:xfrm>
+          <a:prstGeom prst="rect">
+            <a:avLst/>
+          </a:prstGeom>
+          <a:noFill/>
+          <a:ln/>
+        </p:spPr>
+        <p:txBody>
+          <a:bodyPr wrap="square" rtlCol="0" anchor="ctr"/>
+          <a:lstStyle/>
+          <a:p>
+            <a:pPr algn="ctr" indent="0" marL="0">
+              <a:buNone/>
+            </a:pPr>
+            <a:r>
+              <a:rPr lang="en-US" sz="1800" dirty="0">
+                <a:solidFill>
+                  <a:srgbClr val="2A9D8F"/>
+                </a:solidFill>
+                <a:latin typeface="Calibri" pitchFamily="34" charset="0"/>
+                <a:ea typeface="Calibri" pitchFamily="34" charset="-122"/>
+                <a:cs typeface="Calibri" pitchFamily="34" charset="-120"/>
+              </a:rPr>
               <a:t>mrzocchi.com</a:t>
             </a:r>
-            <a:endParaRPr lang="en-US" sz="1100" dirty="0"/>
+            <a:endParaRPr lang="en-US" sz="1800" dirty="0"/>
+          </a:p>
+        </p:txBody>
+      </p:sp>
+      <p:sp>
+        <p:nvSpPr>
+          <p:cNvPr id="7" name="Text 5"/>
+          <p:cNvSpPr/>
+          <p:nvPr/>
+        </p:nvSpPr>
+        <p:spPr>
+          <a:xfrm>
+            <a:off x="731520" y="3108960"/>
+            <a:ext cx="7680960" cy="457200"/>
+          </a:xfrm>
+          <a:prstGeom prst="rect">
+            <a:avLst/>
+          </a:prstGeom>
+          <a:noFill/>
+          <a:ln/>
+        </p:spPr>
+        <p:txBody>
+          <a:bodyPr wrap="square" rtlCol="0" anchor="ctr"/>
+          <a:lstStyle/>
+          <a:p>
+            <a:pPr algn="ctr" indent="0" marL="0">
+              <a:buNone/>
+            </a:pPr>
+            <a:r>
+              <a:rPr lang="en-US" sz="1300" dirty="0">
+                <a:solidFill>
+                  <a:srgbClr val="9B9690"/>
+                </a:solidFill>
+                <a:latin typeface="Calibri" pitchFamily="34" charset="0"/>
+                <a:ea typeface="Calibri" pitchFamily="34" charset="-122"/>
+                <a:cs typeface="Calibri" pitchFamily="34" charset="-120"/>
+              </a:rPr>
+              <a:t>Use the Self-Quiz, Review Games, and Practice Builder to test yourself.</a:t>
+            </a:r>
+            <a:endParaRPr lang="en-US" sz="1300" dirty="0"/>
           </a:p>
         </p:txBody>
       </p:sp>

--- a/static/ppts/G6_Math_T5_Experimental_Prob.pptx
+++ b/static/ppts/G6_Math_T5_Experimental_Prob.pptx
@@ -16,8 +16,8 @@
   <p:notesMasterIdLst>
     <p:notesMasterId r:id="rId9"/>
   </p:notesMasterIdLst>
-  <p:sldSz cx="9144000" cy="5143500"/>
-  <p:notesSz cx="5143500" cy="9144000"/>
+  <p:sldSz cx="12192000" cy="6858000"/>
+  <p:notesSz cx="6858000" cy="12192000"/>
   <p:defaultTextStyle>
     <a:lvl1pPr marL="0" algn="l" defTabSz="914400" rtl="0" eaLnBrk="1" latinLnBrk="0" hangingPunct="1">
       <a:defRPr sz="1800" kern="1200">
@@ -1388,6 +1388,13 @@
 <file path=ppt/slides/slide1.xml><?xml version="1.0" encoding="utf-8"?>
 <p:sld xmlns:a="http://schemas.openxmlformats.org/drawingml/2006/main" xmlns:r="http://schemas.openxmlformats.org/officeDocument/2006/relationships" xmlns:p="http://schemas.openxmlformats.org/presentationml/2006/main">
   <p:cSld name="Slide 1">
+    <p:bg>
+      <p:bgPr>
+        <a:solidFill>
+          <a:srgbClr val="2A9D8F"/>
+        </a:solidFill>
+      </p:bgPr>
+    </p:bg>
     <p:spTree>
       <p:nvGrpSpPr>
         <p:cNvPr id="1" name=""/>
@@ -1410,55 +1417,15 @@
         </p:nvSpPr>
         <p:spPr>
           <a:xfrm>
-            <a:off x="0" y="0"/>
-            <a:ext cx="9144000" cy="5143500"/>
-          </a:xfrm>
-          <a:prstGeom prst="rect">
-            <a:avLst/>
-          </a:prstGeom>
-          <a:solidFill>
-            <a:srgbClr val="1B2A4A"/>
-          </a:solidFill>
-          <a:ln/>
-        </p:spPr>
-      </p:sp>
-      <p:sp>
-        <p:nvSpPr>
-          <p:cNvPr id="3" name="Shape 1"/>
-          <p:cNvSpPr/>
-          <p:nvPr/>
-        </p:nvSpPr>
-        <p:spPr>
-          <a:xfrm>
-            <a:off x="0" y="4777740"/>
-            <a:ext cx="9144000" cy="365760"/>
-          </a:xfrm>
-          <a:prstGeom prst="rect">
-            <a:avLst/>
-          </a:prstGeom>
-          <a:solidFill>
-            <a:srgbClr val="2A9D8F"/>
-          </a:solidFill>
-          <a:ln/>
-        </p:spPr>
-      </p:sp>
-      <p:sp>
-        <p:nvSpPr>
-          <p:cNvPr id="4" name="Shape 2"/>
-          <p:cNvSpPr/>
-          <p:nvPr/>
-        </p:nvSpPr>
-        <p:spPr>
-          <a:xfrm>
-            <a:off x="6858000" y="-1371600"/>
-            <a:ext cx="4572000" cy="4572000"/>
+            <a:off x="7772400" y="-914400"/>
+            <a:ext cx="3657600" cy="3657600"/>
           </a:xfrm>
           <a:prstGeom prst="ellipse">
             <a:avLst/>
           </a:prstGeom>
           <a:solidFill>
-            <a:srgbClr val="2A9D8F">
-              <a:alpha val="12000"/>
+            <a:srgbClr val="FFFFFF">
+              <a:alpha val="8000"/>
             </a:srgbClr>
           </a:solidFill>
           <a:ln/>
@@ -1466,14 +1433,14 @@
       </p:sp>
       <p:sp>
         <p:nvSpPr>
-          <p:cNvPr id="5" name="Text 3"/>
+          <p:cNvPr id="3" name="Text 1"/>
           <p:cNvSpPr/>
           <p:nvPr/>
         </p:nvSpPr>
         <p:spPr>
           <a:xfrm>
-            <a:off x="731520" y="914400"/>
-            <a:ext cx="7680960" cy="457200"/>
+            <a:off x="731520" y="548640"/>
+            <a:ext cx="7315200" cy="365760"/>
           </a:xfrm>
           <a:prstGeom prst="rect">
             <a:avLst/>
@@ -1489,86 +1456,30 @@
               <a:buNone/>
             </a:pPr>
             <a:r>
-              <a:rPr lang="en-US" sz="1300" b="1" spc="500" kern="0" dirty="0">
+              <a:rPr lang="en-US" sz="1100" b="1" dirty="0">
                 <a:solidFill>
-                  <a:srgbClr val="2A9D8F"/>
+                  <a:srgbClr val="F2D68A"/>
                 </a:solidFill>
-                <a:latin typeface="Calibri" pitchFamily="34" charset="0"/>
-                <a:ea typeface="Calibri" pitchFamily="34" charset="-122"/>
-                <a:cs typeface="Calibri" pitchFamily="34" charset="-120"/>
+                <a:latin typeface="Arial" pitchFamily="34" charset="0"/>
+                <a:ea typeface="Arial" pitchFamily="34" charset="-122"/>
+                <a:cs typeface="Arial" pitchFamily="34" charset="-120"/>
               </a:rPr>
               <a:t>GRADE 6 MATHEMATICS</a:t>
             </a:r>
-            <a:endParaRPr lang="en-US" sz="1300" dirty="0"/>
+            <a:endParaRPr lang="en-US" sz="1100" dirty="0"/>
           </a:p>
         </p:txBody>
       </p:sp>
       <p:sp>
         <p:nvSpPr>
-          <p:cNvPr id="6" name="Text 4"/>
+          <p:cNvPr id="4" name="Text 2"/>
           <p:cNvSpPr/>
           <p:nvPr/>
         </p:nvSpPr>
         <p:spPr>
           <a:xfrm>
-            <a:off x="731520" y="1463040"/>
-            <a:ext cx="6858000" cy="1645920"/>
-          </a:xfrm>
-          <a:prstGeom prst="rect">
-            <a:avLst/>
-          </a:prstGeom>
-          <a:noFill/>
-          <a:ln/>
-        </p:spPr>
-        <p:txBody>
-          <a:bodyPr wrap="square" rtlCol="0" anchor="t"/>
-          <a:lstStyle/>
-          <a:p>
-            <a:pPr indent="0" marL="0">
-              <a:buNone/>
-            </a:pPr>
-            <a:r>
-              <a:rPr lang="en-US" sz="3800" b="1" dirty="0">
-                <a:solidFill>
-                  <a:srgbClr val="FFFFFF"/>
-                </a:solidFill>
-                <a:latin typeface="Georgia" pitchFamily="34" charset="0"/>
-                <a:ea typeface="Georgia" pitchFamily="34" charset="-122"/>
-                <a:cs typeface="Georgia" pitchFamily="34" charset="-120"/>
-              </a:rPr>
-              <a:t>Experimental vs</a:t>
-            </a:r>
-            <a:endParaRPr lang="en-US" sz="3800" dirty="0"/>
-          </a:p>
-          <a:p>
-            <a:pPr indent="0" marL="0">
-              <a:buNone/>
-            </a:pPr>
-            <a:r>
-              <a:rPr lang="en-US" sz="3800" b="1" dirty="0">
-                <a:solidFill>
-                  <a:srgbClr val="FFFFFF"/>
-                </a:solidFill>
-                <a:latin typeface="Georgia" pitchFamily="34" charset="0"/>
-                <a:ea typeface="Georgia" pitchFamily="34" charset="-122"/>
-                <a:cs typeface="Georgia" pitchFamily="34" charset="-120"/>
-              </a:rPr>
-              <a:t>Theoretical Probability</a:t>
-            </a:r>
-            <a:endParaRPr lang="en-US" sz="3800" dirty="0"/>
-          </a:p>
-        </p:txBody>
-      </p:sp>
-      <p:sp>
-        <p:nvSpPr>
-          <p:cNvPr id="7" name="Text 5"/>
-          <p:cNvSpPr/>
-          <p:nvPr/>
-        </p:nvSpPr>
-        <p:spPr>
-          <a:xfrm>
-            <a:off x="731520" y="3200400"/>
-            <a:ext cx="6400800" cy="548640"/>
+            <a:off x="731520" y="1371600"/>
+            <a:ext cx="9144000" cy="1645920"/>
           </a:xfrm>
           <a:prstGeom prst="rect">
             <a:avLst/>
@@ -1581,33 +1492,36 @@
           <a:lstStyle/>
           <a:p>
             <a:pPr indent="0" marL="0">
+              <a:lnSpc>
+                <a:spcPct val="110000"/>
+              </a:lnSpc>
               <a:buNone/>
             </a:pPr>
             <a:r>
-              <a:rPr lang="en-US" sz="1600" i="1" dirty="0">
+              <a:rPr lang="en-US" sz="3600" b="1" dirty="0">
                 <a:solidFill>
-                  <a:srgbClr val="9B9690"/>
+                  <a:srgbClr val="FFFFFF"/>
                 </a:solidFill>
-                <a:latin typeface="Calibri" pitchFamily="34" charset="0"/>
-                <a:ea typeface="Calibri" pitchFamily="34" charset="-122"/>
-                <a:cs typeface="Calibri" pitchFamily="34" charset="-120"/>
+                <a:latin typeface="Georgia" pitchFamily="34" charset="0"/>
+                <a:ea typeface="Georgia" pitchFamily="34" charset="-122"/>
+                <a:cs typeface="Georgia" pitchFamily="34" charset="-120"/>
               </a:rPr>
-              <a:t>What should happen vs what actually happens</a:t>
+              <a:t>Experimental vs Theoretical Probability</a:t>
             </a:r>
-            <a:endParaRPr lang="en-US" sz="1600" dirty="0"/>
+            <a:endParaRPr lang="en-US" sz="3600" dirty="0"/>
           </a:p>
         </p:txBody>
       </p:sp>
       <p:sp>
         <p:nvSpPr>
-          <p:cNvPr id="8" name="Text 6"/>
+          <p:cNvPr id="5" name="Text 3"/>
           <p:cNvSpPr/>
           <p:nvPr/>
         </p:nvSpPr>
         <p:spPr>
           <a:xfrm>
-            <a:off x="731520" y="4297680"/>
-            <a:ext cx="2743200" cy="365760"/>
+            <a:off x="731520" y="3200400"/>
+            <a:ext cx="7315200" cy="548640"/>
           </a:xfrm>
           <a:prstGeom prst="rect">
             <a:avLst/>
@@ -1623,17 +1537,60 @@
               <a:buNone/>
             </a:pPr>
             <a:r>
-              <a:rPr lang="en-US" sz="1100" dirty="0">
+              <a:rPr lang="en-US" sz="1600" dirty="0">
                 <a:solidFill>
-                  <a:srgbClr val="9B9690"/>
+                  <a:srgbClr val="FFFFFF">
+                    <a:alpha val="65000"/>
+                  </a:srgbClr>
                 </a:solidFill>
-                <a:latin typeface="Calibri" pitchFamily="34" charset="0"/>
-                <a:ea typeface="Calibri" pitchFamily="34" charset="-122"/>
-                <a:cs typeface="Calibri" pitchFamily="34" charset="-120"/>
+                <a:latin typeface="Arial" pitchFamily="34" charset="0"/>
+                <a:ea typeface="Arial" pitchFamily="34" charset="-122"/>
+                <a:cs typeface="Arial" pitchFamily="34" charset="-120"/>
+              </a:rPr>
+              <a:t>What should happen vs what does happen</a:t>
+            </a:r>
+            <a:endParaRPr lang="en-US" sz="1600" dirty="0"/>
+          </a:p>
+        </p:txBody>
+      </p:sp>
+      <p:sp>
+        <p:nvSpPr>
+          <p:cNvPr id="6" name="Text 4"/>
+          <p:cNvSpPr/>
+          <p:nvPr/>
+        </p:nvSpPr>
+        <p:spPr>
+          <a:xfrm>
+            <a:off x="731520" y="4389120"/>
+            <a:ext cx="2743200" cy="320040"/>
+          </a:xfrm>
+          <a:prstGeom prst="rect">
+            <a:avLst/>
+          </a:prstGeom>
+          <a:noFill/>
+          <a:ln/>
+        </p:spPr>
+        <p:txBody>
+          <a:bodyPr wrap="square" rtlCol="0" anchor="ctr"/>
+          <a:lstStyle/>
+          <a:p>
+            <a:pPr indent="0" marL="0">
+              <a:buNone/>
+            </a:pPr>
+            <a:r>
+              <a:rPr lang="en-US" sz="1000" dirty="0">
+                <a:solidFill>
+                  <a:srgbClr val="FFFFFF">
+                    <a:alpha val="40000"/>
+                  </a:srgbClr>
+                </a:solidFill>
+                <a:latin typeface="Arial" pitchFamily="34" charset="0"/>
+                <a:ea typeface="Arial" pitchFamily="34" charset="-122"/>
+                <a:cs typeface="Arial" pitchFamily="34" charset="-120"/>
               </a:rPr>
               <a:t>mrzocchi.com</a:t>
             </a:r>
-            <a:endParaRPr lang="en-US" sz="1100" dirty="0"/>
+            <a:endParaRPr lang="en-US" sz="1000" dirty="0"/>
           </a:p>
         </p:txBody>
       </p:sp>
@@ -1678,47 +1635,7 @@
         <p:spPr>
           <a:xfrm>
             <a:off x="0" y="0"/>
-            <a:ext cx="9144000" cy="822960"/>
-          </a:xfrm>
-          <a:prstGeom prst="rect">
-            <a:avLst/>
-          </a:prstGeom>
-          <a:solidFill>
-            <a:srgbClr val="FFFFFF"/>
-          </a:solidFill>
-          <a:ln/>
-        </p:spPr>
-      </p:sp>
-      <p:sp>
-        <p:nvSpPr>
-          <p:cNvPr id="3" name="Shape 1"/>
-          <p:cNvSpPr/>
-          <p:nvPr/>
-        </p:nvSpPr>
-        <p:spPr>
-          <a:xfrm>
-            <a:off x="0" y="804672"/>
-            <a:ext cx="9144000" cy="27432"/>
-          </a:xfrm>
-          <a:prstGeom prst="rect">
-            <a:avLst/>
-          </a:prstGeom>
-          <a:solidFill>
-            <a:srgbClr val="E5E2DC"/>
-          </a:solidFill>
-          <a:ln/>
-        </p:spPr>
-      </p:sp>
-      <p:sp>
-        <p:nvSpPr>
-          <p:cNvPr id="4" name="Shape 2"/>
-          <p:cNvSpPr/>
-          <p:nvPr/>
-        </p:nvSpPr>
-        <p:spPr>
-          <a:xfrm>
-            <a:off x="548640" y="201168"/>
-            <a:ext cx="54864" cy="420624"/>
+            <a:ext cx="73152" cy="5148072"/>
           </a:xfrm>
           <a:prstGeom prst="rect">
             <a:avLst/>
@@ -1731,14 +1648,14 @@
       </p:sp>
       <p:sp>
         <p:nvSpPr>
-          <p:cNvPr id="5" name="Text 3"/>
+          <p:cNvPr id="3" name="Text 1"/>
           <p:cNvSpPr/>
           <p:nvPr/>
         </p:nvSpPr>
         <p:spPr>
           <a:xfrm>
-            <a:off x="777240" y="137160"/>
-            <a:ext cx="7772400" cy="548640"/>
+            <a:off x="548640" y="274320"/>
+            <a:ext cx="9144000" cy="640080"/>
           </a:xfrm>
           <a:prstGeom prst="rect">
             <a:avLst/>
@@ -1747,14 +1664,14 @@
           <a:ln/>
         </p:spPr>
         <p:txBody>
-          <a:bodyPr wrap="square" lIns="0" tIns="0" rIns="0" bIns="0" rtlCol="0" anchor="ctr"/>
+          <a:bodyPr wrap="square" rtlCol="0" anchor="ctr"/>
           <a:lstStyle/>
           <a:p>
             <a:pPr indent="0" marL="0">
               <a:buNone/>
             </a:pPr>
             <a:r>
-              <a:rPr lang="en-US" sz="2000" b="1" dirty="0">
+              <a:rPr lang="en-US" sz="2400" b="1" dirty="0">
                 <a:solidFill>
                   <a:srgbClr val="1B2A4A"/>
                 </a:solidFill>
@@ -1762,49 +1679,22 @@
                 <a:ea typeface="Georgia" pitchFamily="34" charset="-122"/>
                 <a:cs typeface="Georgia" pitchFamily="34" charset="-120"/>
               </a:rPr>
-              <a:t>Key Vocabulary</a:t>
+              <a:t>Two Types of Probability</a:t>
             </a:r>
-            <a:endParaRPr lang="en-US" sz="2000" dirty="0"/>
+            <a:endParaRPr lang="en-US" sz="2400" dirty="0"/>
           </a:p>
         </p:txBody>
       </p:sp>
       <p:sp>
         <p:nvSpPr>
-          <p:cNvPr id="6" name="Shape 4"/>
+          <p:cNvPr id="4" name="Shape 2"/>
           <p:cNvSpPr/>
           <p:nvPr/>
         </p:nvSpPr>
         <p:spPr>
           <a:xfrm>
-            <a:off x="731520" y="1051560"/>
-            <a:ext cx="3657600" cy="658368"/>
-          </a:xfrm>
-          <a:prstGeom prst="rect">
-            <a:avLst/>
-          </a:prstGeom>
-          <a:solidFill>
-            <a:srgbClr val="FFFFFF"/>
-          </a:solidFill>
-          <a:ln/>
-          <a:effectLst>
-            <a:outerShdw sx="100000" sy="100000" kx="0" ky="0" algn="bl" rotWithShape="0" blurRad="50800" dist="25400" dir="8100000">
-              <a:srgbClr val="000000">
-                <a:alpha val="10000"/>
-              </a:srgbClr>
-            </a:outerShdw>
-          </a:effectLst>
-        </p:spPr>
-      </p:sp>
-      <p:sp>
-        <p:nvSpPr>
-          <p:cNvPr id="7" name="Shape 5"/>
-          <p:cNvSpPr/>
-          <p:nvPr/>
-        </p:nvSpPr>
-        <p:spPr>
-          <a:xfrm>
-            <a:off x="731520" y="1051560"/>
-            <a:ext cx="54864" cy="658368"/>
+            <a:off x="548640" y="960120"/>
+            <a:ext cx="2286000" cy="36576"/>
           </a:xfrm>
           <a:prstGeom prst="rect">
             <a:avLst/>
@@ -1817,14 +1707,41 @@
       </p:sp>
       <p:sp>
         <p:nvSpPr>
-          <p:cNvPr id="8" name="Text 6"/>
+          <p:cNvPr id="5" name="Shape 3"/>
           <p:cNvSpPr/>
           <p:nvPr/>
         </p:nvSpPr>
         <p:spPr>
           <a:xfrm>
-            <a:off x="914400" y="1051560"/>
-            <a:ext cx="1463040" cy="658368"/>
+            <a:off x="548640" y="1188720"/>
+            <a:ext cx="5029200" cy="3474720"/>
+          </a:xfrm>
+          <a:prstGeom prst="roundRect">
+            <a:avLst>
+              <a:gd name="adj" fmla="val 3158"/>
+            </a:avLst>
+          </a:prstGeom>
+          <a:solidFill>
+            <a:srgbClr val="FFFFFF"/>
+          </a:solidFill>
+          <a:ln w="9525">
+            <a:solidFill>
+              <a:srgbClr val="E5E2DC"/>
+            </a:solidFill>
+            <a:prstDash val="solid"/>
+          </a:ln>
+        </p:spPr>
+      </p:sp>
+      <p:sp>
+        <p:nvSpPr>
+          <p:cNvPr id="6" name="Text 4"/>
+          <p:cNvSpPr/>
+          <p:nvPr/>
+        </p:nvSpPr>
+        <p:spPr>
+          <a:xfrm>
+            <a:off x="777240" y="1325880"/>
+            <a:ext cx="4572000" cy="365760"/>
           </a:xfrm>
           <a:prstGeom prst="rect">
             <a:avLst/>
@@ -1833,37 +1750,37 @@
           <a:ln/>
         </p:spPr>
         <p:txBody>
-          <a:bodyPr wrap="square" lIns="0" tIns="0" rIns="0" bIns="0" rtlCol="0" anchor="ctr"/>
+          <a:bodyPr wrap="square" rtlCol="0" anchor="ctr"/>
           <a:lstStyle/>
           <a:p>
             <a:pPr indent="0" marL="0">
               <a:buNone/>
             </a:pPr>
             <a:r>
-              <a:rPr lang="en-US" sz="1300" b="1" dirty="0">
+              <a:rPr lang="en-US" sz="1500" b="1" dirty="0">
                 <a:solidFill>
-                  <a:srgbClr val="1B2A4A"/>
+                  <a:srgbClr val="2A9D8F"/>
                 </a:solidFill>
                 <a:latin typeface="Georgia" pitchFamily="34" charset="0"/>
                 <a:ea typeface="Georgia" pitchFamily="34" charset="-122"/>
                 <a:cs typeface="Georgia" pitchFamily="34" charset="-120"/>
               </a:rPr>
-              <a:t>Theoretical</a:t>
+              <a:t>Theoretical Probability</a:t>
             </a:r>
-            <a:endParaRPr lang="en-US" sz="1300" dirty="0"/>
+            <a:endParaRPr lang="en-US" sz="1500" dirty="0"/>
           </a:p>
         </p:txBody>
       </p:sp>
       <p:sp>
         <p:nvSpPr>
-          <p:cNvPr id="9" name="Text 7"/>
+          <p:cNvPr id="7" name="Text 5"/>
           <p:cNvSpPr/>
           <p:nvPr/>
         </p:nvSpPr>
         <p:spPr>
           <a:xfrm>
-            <a:off x="2377440" y="1051560"/>
-            <a:ext cx="1920240" cy="658368"/>
+            <a:off x="777240" y="1783080"/>
+            <a:ext cx="4572000" cy="2651760"/>
           </a:xfrm>
           <a:prstGeom prst="rect">
             <a:avLst/>
@@ -1872,84 +1789,157 @@
           <a:ln/>
         </p:spPr>
         <p:txBody>
-          <a:bodyPr wrap="square" lIns="0" tIns="0" rIns="0" bIns="0" rtlCol="0" anchor="ctr"/>
+          <a:bodyPr wrap="square" rtlCol="0" anchor="t"/>
           <a:lstStyle/>
           <a:p>
-            <a:pPr indent="0" marL="0">
-              <a:buNone/>
+            <a:pPr>
+              <a:lnSpc>
+                <a:spcPct val="140000"/>
+              </a:lnSpc>
+              <a:spcAft>
+                <a:spcPts val="400"/>
+              </a:spcAft>
             </a:pPr>
             <a:r>
-              <a:rPr lang="en-US" sz="1100" dirty="0">
+              <a:rPr lang="en-US" sz="1300" dirty="0">
                 <a:solidFill>
-                  <a:srgbClr val="6B6660"/>
+                  <a:srgbClr val="3D3A36"/>
                 </a:solidFill>
-                <a:latin typeface="Calibri" pitchFamily="34" charset="0"/>
-                <a:ea typeface="Calibri" pitchFamily="34" charset="-122"/>
-                <a:cs typeface="Calibri" pitchFamily="34" charset="-120"/>
+                <a:latin typeface="Arial" pitchFamily="34" charset="0"/>
+                <a:ea typeface="Arial" pitchFamily="34" charset="-122"/>
+                <a:cs typeface="Arial" pitchFamily="34" charset="-120"/>
               </a:rPr>
-              <a:t>What SHOULD happen based on equally likely outcomes</a:t>
+              <a:t>Based on what SHOULD happen.</a:t>
             </a:r>
-            <a:endParaRPr lang="en-US" sz="1100" dirty="0"/>
+            <a:endParaRPr lang="en-US" sz="1300" dirty="0"/>
+          </a:p>
+          <a:p>
+            <a:pPr>
+              <a:lnSpc>
+                <a:spcPct val="140000"/>
+              </a:lnSpc>
+              <a:spcAft>
+                <a:spcPts val="400"/>
+              </a:spcAft>
+            </a:pPr>
+            <a:r>
+              <a:rPr lang="en-US" sz="1300" dirty="0">
+                <a:solidFill>
+                  <a:srgbClr val="3D3A36"/>
+                </a:solidFill>
+                <a:latin typeface="Arial" pitchFamily="34" charset="0"/>
+                <a:ea typeface="Arial" pitchFamily="34" charset="-122"/>
+                <a:cs typeface="Arial" pitchFamily="34" charset="-120"/>
+              </a:rPr>
+              <a:t>Calculated using maths.</a:t>
+            </a:r>
+            <a:endParaRPr lang="en-US" sz="1300" dirty="0"/>
+          </a:p>
+          <a:p>
+            <a:pPr>
+              <a:lnSpc>
+                <a:spcPct val="140000"/>
+              </a:lnSpc>
+              <a:spcAft>
+                <a:spcPts val="400"/>
+              </a:spcAft>
+            </a:pPr>
+            <a:r>
+              <a:rPr lang="en-US" sz="1300" dirty="0">
+                <a:solidFill>
+                  <a:srgbClr val="3D3A36"/>
+                </a:solidFill>
+                <a:latin typeface="Arial" pitchFamily="34" charset="0"/>
+                <a:ea typeface="Arial" pitchFamily="34" charset="-122"/>
+                <a:cs typeface="Arial" pitchFamily="34" charset="-120"/>
+              </a:rPr>
+              <a:t>P(heads) = 1/2 for a fair coin.</a:t>
+            </a:r>
+            <a:endParaRPr lang="en-US" sz="1300" dirty="0"/>
+          </a:p>
+          <a:p>
+            <a:pPr>
+              <a:lnSpc>
+                <a:spcPct val="140000"/>
+              </a:lnSpc>
+              <a:spcAft>
+                <a:spcPts val="400"/>
+              </a:spcAft>
+            </a:pPr>
+            <a:r>
+              <a:rPr lang="en-US" sz="1300" dirty="0">
+                <a:solidFill>
+                  <a:srgbClr val="3D3A36"/>
+                </a:solidFill>
+                <a:latin typeface="Arial" pitchFamily="34" charset="0"/>
+                <a:ea typeface="Arial" pitchFamily="34" charset="-122"/>
+                <a:cs typeface="Arial" pitchFamily="34" charset="-120"/>
+              </a:rPr>
+              <a:t>Assumes perfect, fair conditions.</a:t>
+            </a:r>
+            <a:endParaRPr lang="en-US" sz="1300" dirty="0"/>
+          </a:p>
+          <a:p>
+            <a:pPr>
+              <a:lnSpc>
+                <a:spcPct val="140000"/>
+              </a:lnSpc>
+              <a:spcAft>
+                <a:spcPts val="400"/>
+              </a:spcAft>
+            </a:pPr>
+            <a:r>
+              <a:rPr lang="en-US" sz="1300" dirty="0">
+                <a:solidFill>
+                  <a:srgbClr val="3D3A36"/>
+                </a:solidFill>
+                <a:latin typeface="Arial" pitchFamily="34" charset="0"/>
+                <a:ea typeface="Arial" pitchFamily="34" charset="-122"/>
+                <a:cs typeface="Arial" pitchFamily="34" charset="-120"/>
+              </a:rPr>
+              <a:t>Doesn't require any experiments.</a:t>
+            </a:r>
+            <a:endParaRPr lang="en-US" sz="1300" dirty="0"/>
           </a:p>
         </p:txBody>
       </p:sp>
       <p:sp>
         <p:nvSpPr>
-          <p:cNvPr id="10" name="Shape 8"/>
+          <p:cNvPr id="8" name="Shape 6"/>
           <p:cNvSpPr/>
           <p:nvPr/>
         </p:nvSpPr>
         <p:spPr>
           <a:xfrm>
-            <a:off x="4754880" y="1051560"/>
-            <a:ext cx="3657600" cy="658368"/>
+            <a:off x="5852160" y="1188720"/>
+            <a:ext cx="5029200" cy="3474720"/>
           </a:xfrm>
-          <a:prstGeom prst="rect">
-            <a:avLst/>
+          <a:prstGeom prst="roundRect">
+            <a:avLst>
+              <a:gd name="adj" fmla="val 3158"/>
+            </a:avLst>
           </a:prstGeom>
           <a:solidFill>
             <a:srgbClr val="FFFFFF"/>
           </a:solidFill>
-          <a:ln/>
-          <a:effectLst>
-            <a:outerShdw sx="100000" sy="100000" kx="0" ky="0" algn="bl" rotWithShape="0" blurRad="50800" dist="25400" dir="8100000">
-              <a:srgbClr val="000000">
-                <a:alpha val="10000"/>
-              </a:srgbClr>
-            </a:outerShdw>
-          </a:effectLst>
+          <a:ln w="9525">
+            <a:solidFill>
+              <a:srgbClr val="E5E2DC"/>
+            </a:solidFill>
+            <a:prstDash val="solid"/>
+          </a:ln>
         </p:spPr>
       </p:sp>
       <p:sp>
         <p:nvSpPr>
-          <p:cNvPr id="11" name="Shape 9"/>
+          <p:cNvPr id="9" name="Text 7"/>
           <p:cNvSpPr/>
           <p:nvPr/>
         </p:nvSpPr>
         <p:spPr>
           <a:xfrm>
-            <a:off x="4754880" y="1051560"/>
-            <a:ext cx="54864" cy="658368"/>
-          </a:xfrm>
-          <a:prstGeom prst="rect">
-            <a:avLst/>
-          </a:prstGeom>
-          <a:solidFill>
-            <a:srgbClr val="2A9D8F"/>
-          </a:solidFill>
-          <a:ln/>
-        </p:spPr>
-      </p:sp>
-      <p:sp>
-        <p:nvSpPr>
-          <p:cNvPr id="12" name="Text 10"/>
-          <p:cNvSpPr/>
-          <p:nvPr/>
-        </p:nvSpPr>
-        <p:spPr>
-          <a:xfrm>
-            <a:off x="4937760" y="1051560"/>
-            <a:ext cx="1463040" cy="658368"/>
+            <a:off x="6080760" y="1325880"/>
+            <a:ext cx="4572000" cy="365760"/>
           </a:xfrm>
           <a:prstGeom prst="rect">
             <a:avLst/>
@@ -1958,37 +1948,37 @@
           <a:ln/>
         </p:spPr>
         <p:txBody>
-          <a:bodyPr wrap="square" lIns="0" tIns="0" rIns="0" bIns="0" rtlCol="0" anchor="ctr"/>
+          <a:bodyPr wrap="square" rtlCol="0" anchor="ctr"/>
           <a:lstStyle/>
           <a:p>
             <a:pPr indent="0" marL="0">
               <a:buNone/>
             </a:pPr>
             <a:r>
-              <a:rPr lang="en-US" sz="1300" b="1" dirty="0">
+              <a:rPr lang="en-US" sz="1500" b="1" dirty="0">
                 <a:solidFill>
-                  <a:srgbClr val="1B2A4A"/>
+                  <a:srgbClr val="E9C46A"/>
                 </a:solidFill>
                 <a:latin typeface="Georgia" pitchFamily="34" charset="0"/>
                 <a:ea typeface="Georgia" pitchFamily="34" charset="-122"/>
                 <a:cs typeface="Georgia" pitchFamily="34" charset="-120"/>
               </a:rPr>
-              <a:t>Experimental</a:t>
+              <a:t>Experimental Probability</a:t>
             </a:r>
-            <a:endParaRPr lang="en-US" sz="1300" dirty="0"/>
+            <a:endParaRPr lang="en-US" sz="1500" dirty="0"/>
           </a:p>
         </p:txBody>
       </p:sp>
       <p:sp>
         <p:nvSpPr>
-          <p:cNvPr id="13" name="Text 11"/>
+          <p:cNvPr id="10" name="Text 8"/>
           <p:cNvSpPr/>
           <p:nvPr/>
         </p:nvSpPr>
         <p:spPr>
           <a:xfrm>
-            <a:off x="6400800" y="1051560"/>
-            <a:ext cx="1920240" cy="658368"/>
+            <a:off x="6080760" y="1783080"/>
+            <a:ext cx="4572000" cy="2651760"/>
           </a:xfrm>
           <a:prstGeom prst="rect">
             <a:avLst/>
@@ -1997,524 +1987,117 @@
           <a:ln/>
         </p:spPr>
         <p:txBody>
-          <a:bodyPr wrap="square" lIns="0" tIns="0" rIns="0" bIns="0" rtlCol="0" anchor="ctr"/>
+          <a:bodyPr wrap="square" rtlCol="0" anchor="t"/>
           <a:lstStyle/>
           <a:p>
-            <a:pPr indent="0" marL="0">
-              <a:buNone/>
+            <a:pPr>
+              <a:lnSpc>
+                <a:spcPct val="140000"/>
+              </a:lnSpc>
+              <a:spcAft>
+                <a:spcPts val="400"/>
+              </a:spcAft>
             </a:pPr>
             <a:r>
-              <a:rPr lang="en-US" sz="1100" dirty="0">
+              <a:rPr lang="en-US" sz="1300" dirty="0">
                 <a:solidFill>
-                  <a:srgbClr val="6B6660"/>
+                  <a:srgbClr val="3D3A36"/>
                 </a:solidFill>
-                <a:latin typeface="Calibri" pitchFamily="34" charset="0"/>
-                <a:ea typeface="Calibri" pitchFamily="34" charset="-122"/>
-                <a:cs typeface="Calibri" pitchFamily="34" charset="-120"/>
+                <a:latin typeface="Arial" pitchFamily="34" charset="0"/>
+                <a:ea typeface="Arial" pitchFamily="34" charset="-122"/>
+                <a:cs typeface="Arial" pitchFamily="34" charset="-120"/>
               </a:rPr>
-              <a:t>What ACTUALLY happens when you do an experiment</a:t>
+              <a:t>Based on what ACTUALLY happens.</a:t>
             </a:r>
-            <a:endParaRPr lang="en-US" sz="1100" dirty="0"/>
-          </a:p>
-        </p:txBody>
-      </p:sp>
-      <p:sp>
-        <p:nvSpPr>
-          <p:cNvPr id="14" name="Shape 12"/>
-          <p:cNvSpPr/>
-          <p:nvPr/>
-        </p:nvSpPr>
-        <p:spPr>
-          <a:xfrm>
-            <a:off x="731520" y="1819656"/>
-            <a:ext cx="3657600" cy="658368"/>
-          </a:xfrm>
-          <a:prstGeom prst="rect">
-            <a:avLst/>
-          </a:prstGeom>
-          <a:solidFill>
-            <a:srgbClr val="FFFFFF"/>
-          </a:solidFill>
-          <a:ln/>
-          <a:effectLst>
-            <a:outerShdw sx="100000" sy="100000" kx="0" ky="0" algn="bl" rotWithShape="0" blurRad="50800" dist="25400" dir="8100000">
-              <a:srgbClr val="000000">
-                <a:alpha val="10000"/>
-              </a:srgbClr>
-            </a:outerShdw>
-          </a:effectLst>
-        </p:spPr>
-      </p:sp>
-      <p:sp>
-        <p:nvSpPr>
-          <p:cNvPr id="15" name="Shape 13"/>
-          <p:cNvSpPr/>
-          <p:nvPr/>
-        </p:nvSpPr>
-        <p:spPr>
-          <a:xfrm>
-            <a:off x="731520" y="1819656"/>
-            <a:ext cx="54864" cy="658368"/>
-          </a:xfrm>
-          <a:prstGeom prst="rect">
-            <a:avLst/>
-          </a:prstGeom>
-          <a:solidFill>
-            <a:srgbClr val="2A9D8F"/>
-          </a:solidFill>
-          <a:ln/>
-        </p:spPr>
-      </p:sp>
-      <p:sp>
-        <p:nvSpPr>
-          <p:cNvPr id="16" name="Text 14"/>
-          <p:cNvSpPr/>
-          <p:nvPr/>
-        </p:nvSpPr>
-        <p:spPr>
-          <a:xfrm>
-            <a:off x="914400" y="1819656"/>
-            <a:ext cx="1463040" cy="658368"/>
-          </a:xfrm>
-          <a:prstGeom prst="rect">
-            <a:avLst/>
-          </a:prstGeom>
-          <a:noFill/>
-          <a:ln/>
-        </p:spPr>
-        <p:txBody>
-          <a:bodyPr wrap="square" lIns="0" tIns="0" rIns="0" bIns="0" rtlCol="0" anchor="ctr"/>
-          <a:lstStyle/>
-          <a:p>
-            <a:pPr indent="0" marL="0">
-              <a:buNone/>
+            <a:endParaRPr lang="en-US" sz="1300" dirty="0"/>
+          </a:p>
+          <a:p>
+            <a:pPr>
+              <a:lnSpc>
+                <a:spcPct val="140000"/>
+              </a:lnSpc>
+              <a:spcAft>
+                <a:spcPts val="400"/>
+              </a:spcAft>
             </a:pPr>
             <a:r>
-              <a:rPr lang="en-US" sz="1300" b="1" dirty="0">
+              <a:rPr lang="en-US" sz="1300" dirty="0">
                 <a:solidFill>
-                  <a:srgbClr val="1B2A4A"/>
+                  <a:srgbClr val="3D3A36"/>
                 </a:solidFill>
-                <a:latin typeface="Georgia" pitchFamily="34" charset="0"/>
-                <a:ea typeface="Georgia" pitchFamily="34" charset="-122"/>
-                <a:cs typeface="Georgia" pitchFamily="34" charset="-120"/>
+                <a:latin typeface="Arial" pitchFamily="34" charset="0"/>
+                <a:ea typeface="Arial" pitchFamily="34" charset="-122"/>
+                <a:cs typeface="Arial" pitchFamily="34" charset="-120"/>
               </a:rPr>
-              <a:t>Trial</a:t>
+              <a:t>Found by doing experiments.</a:t>
             </a:r>
             <a:endParaRPr lang="en-US" sz="1300" dirty="0"/>
           </a:p>
-        </p:txBody>
-      </p:sp>
-      <p:sp>
-        <p:nvSpPr>
-          <p:cNvPr id="17" name="Text 15"/>
-          <p:cNvSpPr/>
-          <p:nvPr/>
-        </p:nvSpPr>
-        <p:spPr>
-          <a:xfrm>
-            <a:off x="2377440" y="1819656"/>
-            <a:ext cx="1920240" cy="658368"/>
-          </a:xfrm>
-          <a:prstGeom prst="rect">
-            <a:avLst/>
-          </a:prstGeom>
-          <a:noFill/>
-          <a:ln/>
-        </p:spPr>
-        <p:txBody>
-          <a:bodyPr wrap="square" lIns="0" tIns="0" rIns="0" bIns="0" rtlCol="0" anchor="ctr"/>
-          <a:lstStyle/>
-          <a:p>
-            <a:pPr indent="0" marL="0">
-              <a:buNone/>
+          <a:p>
+            <a:pPr>
+              <a:lnSpc>
+                <a:spcPct val="140000"/>
+              </a:lnSpc>
+              <a:spcAft>
+                <a:spcPts val="400"/>
+              </a:spcAft>
             </a:pPr>
             <a:r>
-              <a:rPr lang="en-US" sz="1100" dirty="0">
+              <a:rPr lang="en-US" sz="1300" dirty="0">
                 <a:solidFill>
-                  <a:srgbClr val="6B6660"/>
+                  <a:srgbClr val="3D3A36"/>
                 </a:solidFill>
-                <a:latin typeface="Calibri" pitchFamily="34" charset="0"/>
-                <a:ea typeface="Calibri" pitchFamily="34" charset="-122"/>
-                <a:cs typeface="Calibri" pitchFamily="34" charset="-120"/>
+                <a:latin typeface="Arial" pitchFamily="34" charset="0"/>
+                <a:ea typeface="Arial" pitchFamily="34" charset="-122"/>
+                <a:cs typeface="Arial" pitchFamily="34" charset="-120"/>
               </a:rPr>
-              <a:t>One attempt in an experiment</a:t>
+              <a:t>P(heads) = times heads ÷ total flips.</a:t>
             </a:r>
-            <a:endParaRPr lang="en-US" sz="1100" dirty="0"/>
-          </a:p>
-        </p:txBody>
-      </p:sp>
-      <p:sp>
-        <p:nvSpPr>
-          <p:cNvPr id="18" name="Shape 16"/>
-          <p:cNvSpPr/>
-          <p:nvPr/>
-        </p:nvSpPr>
-        <p:spPr>
-          <a:xfrm>
-            <a:off x="4754880" y="1819656"/>
-            <a:ext cx="3657600" cy="658368"/>
-          </a:xfrm>
-          <a:prstGeom prst="rect">
-            <a:avLst/>
-          </a:prstGeom>
-          <a:solidFill>
-            <a:srgbClr val="FFFFFF"/>
-          </a:solidFill>
-          <a:ln/>
-          <a:effectLst>
-            <a:outerShdw sx="100000" sy="100000" kx="0" ky="0" algn="bl" rotWithShape="0" blurRad="50800" dist="25400" dir="8100000">
-              <a:srgbClr val="000000">
-                <a:alpha val="10000"/>
-              </a:srgbClr>
-            </a:outerShdw>
-          </a:effectLst>
-        </p:spPr>
-      </p:sp>
-      <p:sp>
-        <p:nvSpPr>
-          <p:cNvPr id="19" name="Shape 17"/>
-          <p:cNvSpPr/>
-          <p:nvPr/>
-        </p:nvSpPr>
-        <p:spPr>
-          <a:xfrm>
-            <a:off x="4754880" y="1819656"/>
-            <a:ext cx="54864" cy="658368"/>
-          </a:xfrm>
-          <a:prstGeom prst="rect">
-            <a:avLst/>
-          </a:prstGeom>
-          <a:solidFill>
-            <a:srgbClr val="2A9D8F"/>
-          </a:solidFill>
-          <a:ln/>
-        </p:spPr>
-      </p:sp>
-      <p:sp>
-        <p:nvSpPr>
-          <p:cNvPr id="20" name="Text 18"/>
-          <p:cNvSpPr/>
-          <p:nvPr/>
-        </p:nvSpPr>
-        <p:spPr>
-          <a:xfrm>
-            <a:off x="4937760" y="1819656"/>
-            <a:ext cx="1463040" cy="658368"/>
-          </a:xfrm>
-          <a:prstGeom prst="rect">
-            <a:avLst/>
-          </a:prstGeom>
-          <a:noFill/>
-          <a:ln/>
-        </p:spPr>
-        <p:txBody>
-          <a:bodyPr wrap="square" lIns="0" tIns="0" rIns="0" bIns="0" rtlCol="0" anchor="ctr"/>
-          <a:lstStyle/>
-          <a:p>
-            <a:pPr indent="0" marL="0">
-              <a:buNone/>
+            <a:endParaRPr lang="en-US" sz="1300" dirty="0"/>
+          </a:p>
+          <a:p>
+            <a:pPr>
+              <a:lnSpc>
+                <a:spcPct val="140000"/>
+              </a:lnSpc>
+              <a:spcAft>
+                <a:spcPts val="400"/>
+              </a:spcAft>
             </a:pPr>
             <a:r>
-              <a:rPr lang="en-US" sz="1300" b="1" dirty="0">
+              <a:rPr lang="en-US" sz="1300" dirty="0">
                 <a:solidFill>
-                  <a:srgbClr val="1B2A4A"/>
+                  <a:srgbClr val="3D3A36"/>
                 </a:solidFill>
-                <a:latin typeface="Georgia" pitchFamily="34" charset="0"/>
-                <a:ea typeface="Georgia" pitchFamily="34" charset="-122"/>
-                <a:cs typeface="Georgia" pitchFamily="34" charset="-120"/>
+                <a:latin typeface="Arial" pitchFamily="34" charset="0"/>
+                <a:ea typeface="Arial" pitchFamily="34" charset="-122"/>
+                <a:cs typeface="Arial" pitchFamily="34" charset="-120"/>
               </a:rPr>
-              <a:t>Relative frequency</a:t>
+              <a:t>May differ from theoretical!</a:t>
             </a:r>
             <a:endParaRPr lang="en-US" sz="1300" dirty="0"/>
           </a:p>
-        </p:txBody>
-      </p:sp>
-      <p:sp>
-        <p:nvSpPr>
-          <p:cNvPr id="21" name="Text 19"/>
-          <p:cNvSpPr/>
-          <p:nvPr/>
-        </p:nvSpPr>
-        <p:spPr>
-          <a:xfrm>
-            <a:off x="6400800" y="1819656"/>
-            <a:ext cx="1920240" cy="658368"/>
-          </a:xfrm>
-          <a:prstGeom prst="rect">
-            <a:avLst/>
-          </a:prstGeom>
-          <a:noFill/>
-          <a:ln/>
-        </p:spPr>
-        <p:txBody>
-          <a:bodyPr wrap="square" lIns="0" tIns="0" rIns="0" bIns="0" rtlCol="0" anchor="ctr"/>
-          <a:lstStyle/>
-          <a:p>
-            <a:pPr indent="0" marL="0">
-              <a:buNone/>
+          <a:p>
+            <a:pPr>
+              <a:lnSpc>
+                <a:spcPct val="140000"/>
+              </a:lnSpc>
+              <a:spcAft>
+                <a:spcPts val="400"/>
+              </a:spcAft>
             </a:pPr>
             <a:r>
-              <a:rPr lang="en-US" sz="1100" dirty="0">
+              <a:rPr lang="en-US" sz="1300" dirty="0">
                 <a:solidFill>
-                  <a:srgbClr val="6B6660"/>
+                  <a:srgbClr val="3D3A36"/>
                 </a:solidFill>
-                <a:latin typeface="Calibri" pitchFamily="34" charset="0"/>
-                <a:ea typeface="Calibri" pitchFamily="34" charset="-122"/>
-                <a:cs typeface="Calibri" pitchFamily="34" charset="-120"/>
+                <a:latin typeface="Arial" pitchFamily="34" charset="0"/>
+                <a:ea typeface="Arial" pitchFamily="34" charset="-122"/>
+                <a:cs typeface="Arial" pitchFamily="34" charset="-120"/>
               </a:rPr>
-              <a:t>Experimental probability from results</a:t>
-            </a:r>
-            <a:endParaRPr lang="en-US" sz="1100" dirty="0"/>
-          </a:p>
-        </p:txBody>
-      </p:sp>
-      <p:sp>
-        <p:nvSpPr>
-          <p:cNvPr id="22" name="Shape 20"/>
-          <p:cNvSpPr/>
-          <p:nvPr/>
-        </p:nvSpPr>
-        <p:spPr>
-          <a:xfrm>
-            <a:off x="731520" y="2587752"/>
-            <a:ext cx="3657600" cy="658368"/>
-          </a:xfrm>
-          <a:prstGeom prst="rect">
-            <a:avLst/>
-          </a:prstGeom>
-          <a:solidFill>
-            <a:srgbClr val="FFFFFF"/>
-          </a:solidFill>
-          <a:ln/>
-          <a:effectLst>
-            <a:outerShdw sx="100000" sy="100000" kx="0" ky="0" algn="bl" rotWithShape="0" blurRad="50800" dist="25400" dir="8100000">
-              <a:srgbClr val="000000">
-                <a:alpha val="10000"/>
-              </a:srgbClr>
-            </a:outerShdw>
-          </a:effectLst>
-        </p:spPr>
-      </p:sp>
-      <p:sp>
-        <p:nvSpPr>
-          <p:cNvPr id="23" name="Shape 21"/>
-          <p:cNvSpPr/>
-          <p:nvPr/>
-        </p:nvSpPr>
-        <p:spPr>
-          <a:xfrm>
-            <a:off x="731520" y="2587752"/>
-            <a:ext cx="54864" cy="658368"/>
-          </a:xfrm>
-          <a:prstGeom prst="rect">
-            <a:avLst/>
-          </a:prstGeom>
-          <a:solidFill>
-            <a:srgbClr val="2A9D8F"/>
-          </a:solidFill>
-          <a:ln/>
-        </p:spPr>
-      </p:sp>
-      <p:sp>
-        <p:nvSpPr>
-          <p:cNvPr id="24" name="Text 22"/>
-          <p:cNvSpPr/>
-          <p:nvPr/>
-        </p:nvSpPr>
-        <p:spPr>
-          <a:xfrm>
-            <a:off x="914400" y="2587752"/>
-            <a:ext cx="1463040" cy="658368"/>
-          </a:xfrm>
-          <a:prstGeom prst="rect">
-            <a:avLst/>
-          </a:prstGeom>
-          <a:noFill/>
-          <a:ln/>
-        </p:spPr>
-        <p:txBody>
-          <a:bodyPr wrap="square" lIns="0" tIns="0" rIns="0" bIns="0" rtlCol="0" anchor="ctr"/>
-          <a:lstStyle/>
-          <a:p>
-            <a:pPr indent="0" marL="0">
-              <a:buNone/>
-            </a:pPr>
-            <a:r>
-              <a:rPr lang="en-US" sz="1300" b="1" dirty="0">
-                <a:solidFill>
-                  <a:srgbClr val="1B2A4A"/>
-                </a:solidFill>
-                <a:latin typeface="Georgia" pitchFamily="34" charset="0"/>
-                <a:ea typeface="Georgia" pitchFamily="34" charset="-122"/>
-                <a:cs typeface="Georgia" pitchFamily="34" charset="-120"/>
-              </a:rPr>
-              <a:t>Fair</a:t>
+              <a:t>Gets closer to theoretical with MORE trials.</a:t>
             </a:r>
             <a:endParaRPr lang="en-US" sz="1300" dirty="0"/>
-          </a:p>
-        </p:txBody>
-      </p:sp>
-      <p:sp>
-        <p:nvSpPr>
-          <p:cNvPr id="25" name="Text 23"/>
-          <p:cNvSpPr/>
-          <p:nvPr/>
-        </p:nvSpPr>
-        <p:spPr>
-          <a:xfrm>
-            <a:off x="2377440" y="2587752"/>
-            <a:ext cx="1920240" cy="658368"/>
-          </a:xfrm>
-          <a:prstGeom prst="rect">
-            <a:avLst/>
-          </a:prstGeom>
-          <a:noFill/>
-          <a:ln/>
-        </p:spPr>
-        <p:txBody>
-          <a:bodyPr wrap="square" lIns="0" tIns="0" rIns="0" bIns="0" rtlCol="0" anchor="ctr"/>
-          <a:lstStyle/>
-          <a:p>
-            <a:pPr indent="0" marL="0">
-              <a:buNone/>
-            </a:pPr>
-            <a:r>
-              <a:rPr lang="en-US" sz="1100" dirty="0">
-                <a:solidFill>
-                  <a:srgbClr val="6B6660"/>
-                </a:solidFill>
-                <a:latin typeface="Calibri" pitchFamily="34" charset="0"/>
-                <a:ea typeface="Calibri" pitchFamily="34" charset="-122"/>
-                <a:cs typeface="Calibri" pitchFamily="34" charset="-120"/>
-              </a:rPr>
-              <a:t>All outcomes equally likely</a:t>
-            </a:r>
-            <a:endParaRPr lang="en-US" sz="1100" dirty="0"/>
-          </a:p>
-        </p:txBody>
-      </p:sp>
-      <p:sp>
-        <p:nvSpPr>
-          <p:cNvPr id="26" name="Shape 24"/>
-          <p:cNvSpPr/>
-          <p:nvPr/>
-        </p:nvSpPr>
-        <p:spPr>
-          <a:xfrm>
-            <a:off x="4754880" y="2587752"/>
-            <a:ext cx="3657600" cy="658368"/>
-          </a:xfrm>
-          <a:prstGeom prst="rect">
-            <a:avLst/>
-          </a:prstGeom>
-          <a:solidFill>
-            <a:srgbClr val="FFFFFF"/>
-          </a:solidFill>
-          <a:ln/>
-          <a:effectLst>
-            <a:outerShdw sx="100000" sy="100000" kx="0" ky="0" algn="bl" rotWithShape="0" blurRad="50800" dist="25400" dir="8100000">
-              <a:srgbClr val="000000">
-                <a:alpha val="10000"/>
-              </a:srgbClr>
-            </a:outerShdw>
-          </a:effectLst>
-        </p:spPr>
-      </p:sp>
-      <p:sp>
-        <p:nvSpPr>
-          <p:cNvPr id="27" name="Shape 25"/>
-          <p:cNvSpPr/>
-          <p:nvPr/>
-        </p:nvSpPr>
-        <p:spPr>
-          <a:xfrm>
-            <a:off x="4754880" y="2587752"/>
-            <a:ext cx="54864" cy="658368"/>
-          </a:xfrm>
-          <a:prstGeom prst="rect">
-            <a:avLst/>
-          </a:prstGeom>
-          <a:solidFill>
-            <a:srgbClr val="2A9D8F"/>
-          </a:solidFill>
-          <a:ln/>
-        </p:spPr>
-      </p:sp>
-      <p:sp>
-        <p:nvSpPr>
-          <p:cNvPr id="28" name="Text 26"/>
-          <p:cNvSpPr/>
-          <p:nvPr/>
-        </p:nvSpPr>
-        <p:spPr>
-          <a:xfrm>
-            <a:off x="4937760" y="2587752"/>
-            <a:ext cx="1463040" cy="658368"/>
-          </a:xfrm>
-          <a:prstGeom prst="rect">
-            <a:avLst/>
-          </a:prstGeom>
-          <a:noFill/>
-          <a:ln/>
-        </p:spPr>
-        <p:txBody>
-          <a:bodyPr wrap="square" lIns="0" tIns="0" rIns="0" bIns="0" rtlCol="0" anchor="ctr"/>
-          <a:lstStyle/>
-          <a:p>
-            <a:pPr indent="0" marL="0">
-              <a:buNone/>
-            </a:pPr>
-            <a:r>
-              <a:rPr lang="en-US" sz="1300" b="1" dirty="0">
-                <a:solidFill>
-                  <a:srgbClr val="1B2A4A"/>
-                </a:solidFill>
-                <a:latin typeface="Georgia" pitchFamily="34" charset="0"/>
-                <a:ea typeface="Georgia" pitchFamily="34" charset="-122"/>
-                <a:cs typeface="Georgia" pitchFamily="34" charset="-120"/>
-              </a:rPr>
-              <a:t>Biased</a:t>
-            </a:r>
-            <a:endParaRPr lang="en-US" sz="1300" dirty="0"/>
-          </a:p>
-        </p:txBody>
-      </p:sp>
-      <p:sp>
-        <p:nvSpPr>
-          <p:cNvPr id="29" name="Text 27"/>
-          <p:cNvSpPr/>
-          <p:nvPr/>
-        </p:nvSpPr>
-        <p:spPr>
-          <a:xfrm>
-            <a:off x="6400800" y="2587752"/>
-            <a:ext cx="1920240" cy="658368"/>
-          </a:xfrm>
-          <a:prstGeom prst="rect">
-            <a:avLst/>
-          </a:prstGeom>
-          <a:noFill/>
-          <a:ln/>
-        </p:spPr>
-        <p:txBody>
-          <a:bodyPr wrap="square" lIns="0" tIns="0" rIns="0" bIns="0" rtlCol="0" anchor="ctr"/>
-          <a:lstStyle/>
-          <a:p>
-            <a:pPr indent="0" marL="0">
-              <a:buNone/>
-            </a:pPr>
-            <a:r>
-              <a:rPr lang="en-US" sz="1100" dirty="0">
-                <a:solidFill>
-                  <a:srgbClr val="6B6660"/>
-                </a:solidFill>
-                <a:latin typeface="Calibri" pitchFamily="34" charset="0"/>
-                <a:ea typeface="Calibri" pitchFamily="34" charset="-122"/>
-                <a:cs typeface="Calibri" pitchFamily="34" charset="-120"/>
-              </a:rPr>
-              <a:t>Some outcomes more likely than others</a:t>
-            </a:r>
-            <a:endParaRPr lang="en-US" sz="1100" dirty="0"/>
           </a:p>
         </p:txBody>
       </p:sp>
@@ -2559,47 +2142,7 @@
         <p:spPr>
           <a:xfrm>
             <a:off x="0" y="0"/>
-            <a:ext cx="9144000" cy="822960"/>
-          </a:xfrm>
-          <a:prstGeom prst="rect">
-            <a:avLst/>
-          </a:prstGeom>
-          <a:solidFill>
-            <a:srgbClr val="FFFFFF"/>
-          </a:solidFill>
-          <a:ln/>
-        </p:spPr>
-      </p:sp>
-      <p:sp>
-        <p:nvSpPr>
-          <p:cNvPr id="3" name="Shape 1"/>
-          <p:cNvSpPr/>
-          <p:nvPr/>
-        </p:nvSpPr>
-        <p:spPr>
-          <a:xfrm>
-            <a:off x="0" y="804672"/>
-            <a:ext cx="9144000" cy="27432"/>
-          </a:xfrm>
-          <a:prstGeom prst="rect">
-            <a:avLst/>
-          </a:prstGeom>
-          <a:solidFill>
-            <a:srgbClr val="E5E2DC"/>
-          </a:solidFill>
-          <a:ln/>
-        </p:spPr>
-      </p:sp>
-      <p:sp>
-        <p:nvSpPr>
-          <p:cNvPr id="4" name="Shape 2"/>
-          <p:cNvSpPr/>
-          <p:nvPr/>
-        </p:nvSpPr>
-        <p:spPr>
-          <a:xfrm>
-            <a:off x="548640" y="201168"/>
-            <a:ext cx="54864" cy="420624"/>
+            <a:ext cx="73152" cy="5148072"/>
           </a:xfrm>
           <a:prstGeom prst="rect">
             <a:avLst/>
@@ -2612,14 +2155,14 @@
       </p:sp>
       <p:sp>
         <p:nvSpPr>
-          <p:cNvPr id="5" name="Text 3"/>
+          <p:cNvPr id="3" name="Text 1"/>
           <p:cNvSpPr/>
           <p:nvPr/>
         </p:nvSpPr>
         <p:spPr>
           <a:xfrm>
-            <a:off x="777240" y="137160"/>
-            <a:ext cx="7772400" cy="548640"/>
+            <a:off x="548640" y="274320"/>
+            <a:ext cx="9144000" cy="640080"/>
           </a:xfrm>
           <a:prstGeom prst="rect">
             <a:avLst/>
@@ -2628,14 +2171,14 @@
           <a:ln/>
         </p:spPr>
         <p:txBody>
-          <a:bodyPr wrap="square" lIns="0" tIns="0" rIns="0" bIns="0" rtlCol="0" anchor="ctr"/>
+          <a:bodyPr wrap="square" rtlCol="0" anchor="ctr"/>
           <a:lstStyle/>
           <a:p>
             <a:pPr indent="0" marL="0">
               <a:buNone/>
             </a:pPr>
             <a:r>
-              <a:rPr lang="en-US" sz="2000" b="1" dirty="0">
+              <a:rPr lang="en-US" sz="2400" b="1" dirty="0">
                 <a:solidFill>
                   <a:srgbClr val="1B2A4A"/>
                 </a:solidFill>
@@ -2643,49 +2186,22 @@
                 <a:ea typeface="Georgia" pitchFamily="34" charset="-122"/>
                 <a:cs typeface="Georgia" pitchFamily="34" charset="-120"/>
               </a:rPr>
-              <a:t>Theoretical vs Experimental</a:t>
+              <a:t>Running an Experiment</a:t>
             </a:r>
-            <a:endParaRPr lang="en-US" sz="2000" dirty="0"/>
+            <a:endParaRPr lang="en-US" sz="2400" dirty="0"/>
           </a:p>
         </p:txBody>
       </p:sp>
       <p:sp>
         <p:nvSpPr>
-          <p:cNvPr id="6" name="Shape 4"/>
+          <p:cNvPr id="4" name="Shape 2"/>
           <p:cNvSpPr/>
           <p:nvPr/>
         </p:nvSpPr>
         <p:spPr>
           <a:xfrm>
-            <a:off x="548640" y="1051560"/>
-            <a:ext cx="3840480" cy="3474720"/>
-          </a:xfrm>
-          <a:prstGeom prst="rect">
-            <a:avLst/>
-          </a:prstGeom>
-          <a:solidFill>
-            <a:srgbClr val="FFFFFF"/>
-          </a:solidFill>
-          <a:ln/>
-          <a:effectLst>
-            <a:outerShdw sx="100000" sy="100000" kx="0" ky="0" algn="bl" rotWithShape="0" blurRad="50800" dist="25400" dir="8100000">
-              <a:srgbClr val="000000">
-                <a:alpha val="10000"/>
-              </a:srgbClr>
-            </a:outerShdw>
-          </a:effectLst>
-        </p:spPr>
-      </p:sp>
-      <p:sp>
-        <p:nvSpPr>
-          <p:cNvPr id="7" name="Shape 5"/>
-          <p:cNvSpPr/>
-          <p:nvPr/>
-        </p:nvSpPr>
-        <p:spPr>
-          <a:xfrm>
-            <a:off x="548640" y="1051560"/>
-            <a:ext cx="3840480" cy="54864"/>
+            <a:off x="548640" y="960120"/>
+            <a:ext cx="2286000" cy="36576"/>
           </a:xfrm>
           <a:prstGeom prst="rect">
             <a:avLst/>
@@ -2698,53 +2214,14 @@
       </p:sp>
       <p:sp>
         <p:nvSpPr>
-          <p:cNvPr id="8" name="Text 6"/>
+          <p:cNvPr id="5" name="Text 3"/>
           <p:cNvSpPr/>
           <p:nvPr/>
         </p:nvSpPr>
         <p:spPr>
           <a:xfrm>
-            <a:off x="777240" y="1188720"/>
-            <a:ext cx="3383280" cy="457200"/>
-          </a:xfrm>
-          <a:prstGeom prst="rect">
-            <a:avLst/>
-          </a:prstGeom>
-          <a:noFill/>
-          <a:ln/>
-        </p:spPr>
-        <p:txBody>
-          <a:bodyPr wrap="square" lIns="0" tIns="0" rIns="0" bIns="0" rtlCol="0" anchor="ctr"/>
-          <a:lstStyle/>
-          <a:p>
-            <a:pPr indent="0" marL="0">
-              <a:buNone/>
-            </a:pPr>
-            <a:r>
-              <a:rPr lang="en-US" sz="1500" b="1" dirty="0">
-                <a:solidFill>
-                  <a:srgbClr val="1B2A4A"/>
-                </a:solidFill>
-                <a:latin typeface="Georgia" pitchFamily="34" charset="0"/>
-                <a:ea typeface="Georgia" pitchFamily="34" charset="-122"/>
-                <a:cs typeface="Georgia" pitchFamily="34" charset="-120"/>
-              </a:rPr>
-              <a:t>Theoretical</a:t>
-            </a:r>
-            <a:endParaRPr lang="en-US" sz="1500" dirty="0"/>
-          </a:p>
-        </p:txBody>
-      </p:sp>
-      <p:sp>
-        <p:nvSpPr>
-          <p:cNvPr id="9" name="Text 7"/>
-          <p:cNvSpPr/>
-          <p:nvPr/>
-        </p:nvSpPr>
-        <p:spPr>
-          <a:xfrm>
-            <a:off x="777240" y="1691640"/>
-            <a:ext cx="3383280" cy="2651760"/>
+            <a:off x="548640" y="1188720"/>
+            <a:ext cx="10058400" cy="3474720"/>
           </a:xfrm>
           <a:prstGeom prst="rect">
             <a:avLst/>
@@ -2756,322 +2233,114 @@
           <a:bodyPr wrap="square" rtlCol="0" anchor="t"/>
           <a:lstStyle/>
           <a:p>
-            <a:pPr marL="342900" indent="-342900">
+            <a:pPr>
+              <a:lnSpc>
+                <a:spcPct val="150000"/>
+              </a:lnSpc>
               <a:spcAft>
                 <a:spcPts val="600"/>
               </a:spcAft>
-              <a:buSzPct val="100000"/>
-              <a:buChar char="•"/>
             </a:pPr>
             <a:r>
-              <a:rPr lang="en-US" sz="1300" dirty="0">
+              <a:rPr lang="en-US" sz="1500" dirty="0">
                 <a:solidFill>
                   <a:srgbClr val="3D3A36"/>
                 </a:solidFill>
-                <a:latin typeface="Calibri" pitchFamily="34" charset="0"/>
-                <a:ea typeface="Calibri" pitchFamily="34" charset="-122"/>
-                <a:cs typeface="Calibri" pitchFamily="34" charset="-120"/>
+                <a:latin typeface="Arial" pitchFamily="34" charset="0"/>
+                <a:ea typeface="Arial" pitchFamily="34" charset="-122"/>
+                <a:cs typeface="Arial" pitchFamily="34" charset="-120"/>
               </a:rPr>
-              <a:t>Calculated using logic</a:t>
+              <a:t>1. Decide what you're testing (e.g. is this coin fair?).</a:t>
             </a:r>
-            <a:endParaRPr lang="en-US" sz="1300" dirty="0"/>
-          </a:p>
-          <a:p>
-            <a:pPr marL="342900" indent="-342900">
+            <a:endParaRPr lang="en-US" sz="1500" dirty="0"/>
+          </a:p>
+          <a:p>
+            <a:pPr>
+              <a:lnSpc>
+                <a:spcPct val="150000"/>
+              </a:lnSpc>
               <a:spcAft>
                 <a:spcPts val="600"/>
               </a:spcAft>
-              <a:buSzPct val="100000"/>
-              <a:buChar char="•"/>
             </a:pPr>
             <a:r>
-              <a:rPr lang="en-US" sz="1300" dirty="0">
+              <a:rPr lang="en-US" sz="1500" dirty="0">
                 <a:solidFill>
                   <a:srgbClr val="3D3A36"/>
                 </a:solidFill>
-                <a:latin typeface="Calibri" pitchFamily="34" charset="0"/>
-                <a:ea typeface="Calibri" pitchFamily="34" charset="-122"/>
-                <a:cs typeface="Calibri" pitchFamily="34" charset="-120"/>
+                <a:latin typeface="Arial" pitchFamily="34" charset="0"/>
+                <a:ea typeface="Arial" pitchFamily="34" charset="-122"/>
+                <a:cs typeface="Arial" pitchFamily="34" charset="-120"/>
               </a:rPr>
-              <a:t>Assumes fair/equally likely outcomes</a:t>
+              <a:t>2. Repeat many times (at least 50 trials for good results).</a:t>
             </a:r>
-            <a:endParaRPr lang="en-US" sz="1300" dirty="0"/>
-          </a:p>
-          <a:p>
-            <a:pPr marL="342900" indent="-342900">
+            <a:endParaRPr lang="en-US" sz="1500" dirty="0"/>
+          </a:p>
+          <a:p>
+            <a:pPr>
+              <a:lnSpc>
+                <a:spcPct val="150000"/>
+              </a:lnSpc>
               <a:spcAft>
                 <a:spcPts val="600"/>
               </a:spcAft>
-              <a:buSzPct val="100000"/>
-              <a:buChar char="•"/>
             </a:pPr>
             <a:r>
-              <a:rPr lang="en-US" sz="1300" dirty="0">
+              <a:rPr lang="en-US" sz="1500" dirty="0">
                 <a:solidFill>
                   <a:srgbClr val="3D3A36"/>
                 </a:solidFill>
-                <a:latin typeface="Calibri" pitchFamily="34" charset="0"/>
-                <a:ea typeface="Calibri" pitchFamily="34" charset="-122"/>
-                <a:cs typeface="Calibri" pitchFamily="34" charset="-120"/>
+                <a:latin typeface="Arial" pitchFamily="34" charset="0"/>
+                <a:ea typeface="Arial" pitchFamily="34" charset="-122"/>
+                <a:cs typeface="Arial" pitchFamily="34" charset="-120"/>
               </a:rPr>
-              <a:t>P(heads) = ½ for a fair coin</a:t>
+              <a:t>3. Record results in a frequency table.</a:t>
             </a:r>
-            <a:endParaRPr lang="en-US" sz="1300" dirty="0"/>
-          </a:p>
-          <a:p>
-            <a:pPr marL="342900" indent="-342900">
+            <a:endParaRPr lang="en-US" sz="1500" dirty="0"/>
+          </a:p>
+          <a:p>
+            <a:pPr>
+              <a:lnSpc>
+                <a:spcPct val="150000"/>
+              </a:lnSpc>
               <a:spcAft>
                 <a:spcPts val="600"/>
               </a:spcAft>
-              <a:buSzPct val="100000"/>
-              <a:buChar char="•"/>
             </a:pPr>
             <a:r>
-              <a:rPr lang="en-US" sz="1300" dirty="0">
+              <a:rPr lang="en-US" sz="1500" dirty="0">
                 <a:solidFill>
                   <a:srgbClr val="3D3A36"/>
                 </a:solidFill>
-                <a:latin typeface="Calibri" pitchFamily="34" charset="0"/>
-                <a:ea typeface="Calibri" pitchFamily="34" charset="-122"/>
-                <a:cs typeface="Calibri" pitchFamily="34" charset="-120"/>
+                <a:latin typeface="Arial" pitchFamily="34" charset="0"/>
+                <a:ea typeface="Arial" pitchFamily="34" charset="-122"/>
+                <a:cs typeface="Arial" pitchFamily="34" charset="-120"/>
               </a:rPr>
-              <a:t>Does NOT require an experiment</a:t>
+              <a:t>4. Calculate experimental probability: frequency ÷ total trials.</a:t>
             </a:r>
-            <a:endParaRPr lang="en-US" sz="1300" dirty="0"/>
-          </a:p>
-          <a:p>
-            <a:pPr marL="342900" indent="-342900">
+            <a:endParaRPr lang="en-US" sz="1500" dirty="0"/>
+          </a:p>
+          <a:p>
+            <a:pPr>
+              <a:lnSpc>
+                <a:spcPct val="150000"/>
+              </a:lnSpc>
               <a:spcAft>
                 <a:spcPts val="600"/>
               </a:spcAft>
-              <a:buSzPct val="100000"/>
-              <a:buChar char="•"/>
             </a:pPr>
             <a:r>
-              <a:rPr lang="en-US" sz="1300" dirty="0">
+              <a:rPr lang="en-US" sz="1500" dirty="0">
                 <a:solidFill>
                   <a:srgbClr val="3D3A36"/>
                 </a:solidFill>
-                <a:latin typeface="Calibri" pitchFamily="34" charset="0"/>
-                <a:ea typeface="Calibri" pitchFamily="34" charset="-122"/>
-                <a:cs typeface="Calibri" pitchFamily="34" charset="-120"/>
+                <a:latin typeface="Arial" pitchFamily="34" charset="0"/>
+                <a:ea typeface="Arial" pitchFamily="34" charset="-122"/>
+                <a:cs typeface="Arial" pitchFamily="34" charset="-120"/>
               </a:rPr>
-              <a:t>The 'expected' probability</a:t>
-            </a:r>
-            <a:endParaRPr lang="en-US" sz="1300" dirty="0"/>
-          </a:p>
-        </p:txBody>
-      </p:sp>
-      <p:sp>
-        <p:nvSpPr>
-          <p:cNvPr id="10" name="Shape 8"/>
-          <p:cNvSpPr/>
-          <p:nvPr/>
-        </p:nvSpPr>
-        <p:spPr>
-          <a:xfrm>
-            <a:off x="4754880" y="1051560"/>
-            <a:ext cx="3840480" cy="3474720"/>
-          </a:xfrm>
-          <a:prstGeom prst="rect">
-            <a:avLst/>
-          </a:prstGeom>
-          <a:solidFill>
-            <a:srgbClr val="FFFFFF"/>
-          </a:solidFill>
-          <a:ln/>
-          <a:effectLst>
-            <a:outerShdw sx="100000" sy="100000" kx="0" ky="0" algn="bl" rotWithShape="0" blurRad="50800" dist="25400" dir="8100000">
-              <a:srgbClr val="000000">
-                <a:alpha val="10000"/>
-              </a:srgbClr>
-            </a:outerShdw>
-          </a:effectLst>
-        </p:spPr>
-      </p:sp>
-      <p:sp>
-        <p:nvSpPr>
-          <p:cNvPr id="11" name="Shape 9"/>
-          <p:cNvSpPr/>
-          <p:nvPr/>
-        </p:nvSpPr>
-        <p:spPr>
-          <a:xfrm>
-            <a:off x="4754880" y="1051560"/>
-            <a:ext cx="3840480" cy="54864"/>
-          </a:xfrm>
-          <a:prstGeom prst="rect">
-            <a:avLst/>
-          </a:prstGeom>
-          <a:solidFill>
-            <a:srgbClr val="E9C46A"/>
-          </a:solidFill>
-          <a:ln/>
-        </p:spPr>
-      </p:sp>
-      <p:sp>
-        <p:nvSpPr>
-          <p:cNvPr id="12" name="Text 10"/>
-          <p:cNvSpPr/>
-          <p:nvPr/>
-        </p:nvSpPr>
-        <p:spPr>
-          <a:xfrm>
-            <a:off x="4983480" y="1188720"/>
-            <a:ext cx="3383280" cy="457200"/>
-          </a:xfrm>
-          <a:prstGeom prst="rect">
-            <a:avLst/>
-          </a:prstGeom>
-          <a:noFill/>
-          <a:ln/>
-        </p:spPr>
-        <p:txBody>
-          <a:bodyPr wrap="square" lIns="0" tIns="0" rIns="0" bIns="0" rtlCol="0" anchor="ctr"/>
-          <a:lstStyle/>
-          <a:p>
-            <a:pPr indent="0" marL="0">
-              <a:buNone/>
-            </a:pPr>
-            <a:r>
-              <a:rPr lang="en-US" sz="1500" b="1" dirty="0">
-                <a:solidFill>
-                  <a:srgbClr val="1B2A4A"/>
-                </a:solidFill>
-                <a:latin typeface="Georgia" pitchFamily="34" charset="0"/>
-                <a:ea typeface="Georgia" pitchFamily="34" charset="-122"/>
-                <a:cs typeface="Georgia" pitchFamily="34" charset="-120"/>
-              </a:rPr>
-              <a:t>Experimental</a:t>
+              <a:t>5. Compare to theoretical probability.</a:t>
             </a:r>
             <a:endParaRPr lang="en-US" sz="1500" dirty="0"/>
-          </a:p>
-        </p:txBody>
-      </p:sp>
-      <p:sp>
-        <p:nvSpPr>
-          <p:cNvPr id="13" name="Text 11"/>
-          <p:cNvSpPr/>
-          <p:nvPr/>
-        </p:nvSpPr>
-        <p:spPr>
-          <a:xfrm>
-            <a:off x="4983480" y="1691640"/>
-            <a:ext cx="3383280" cy="2651760"/>
-          </a:xfrm>
-          <a:prstGeom prst="rect">
-            <a:avLst/>
-          </a:prstGeom>
-          <a:noFill/>
-          <a:ln/>
-        </p:spPr>
-        <p:txBody>
-          <a:bodyPr wrap="square" rtlCol="0" anchor="t"/>
-          <a:lstStyle/>
-          <a:p>
-            <a:pPr marL="342900" indent="-342900">
-              <a:spcAft>
-                <a:spcPts val="600"/>
-              </a:spcAft>
-              <a:buSzPct val="100000"/>
-              <a:buChar char="•"/>
-            </a:pPr>
-            <a:r>
-              <a:rPr lang="en-US" sz="1300" dirty="0">
-                <a:solidFill>
-                  <a:srgbClr val="3D3A36"/>
-                </a:solidFill>
-                <a:latin typeface="Calibri" pitchFamily="34" charset="0"/>
-                <a:ea typeface="Calibri" pitchFamily="34" charset="-122"/>
-                <a:cs typeface="Calibri" pitchFamily="34" charset="-120"/>
-              </a:rPr>
-              <a:t>Found by DOING the experiment</a:t>
-            </a:r>
-            <a:endParaRPr lang="en-US" sz="1300" dirty="0"/>
-          </a:p>
-          <a:p>
-            <a:pPr marL="342900" indent="-342900">
-              <a:spcAft>
-                <a:spcPts val="600"/>
-              </a:spcAft>
-              <a:buSzPct val="100000"/>
-              <a:buChar char="•"/>
-            </a:pPr>
-            <a:r>
-              <a:rPr lang="en-US" sz="1300" dirty="0">
-                <a:solidFill>
-                  <a:srgbClr val="3D3A36"/>
-                </a:solidFill>
-                <a:latin typeface="Calibri" pitchFamily="34" charset="0"/>
-                <a:ea typeface="Calibri" pitchFamily="34" charset="-122"/>
-                <a:cs typeface="Calibri" pitchFamily="34" charset="-120"/>
-              </a:rPr>
-              <a:t>Count outcomes and divide by total trials</a:t>
-            </a:r>
-            <a:endParaRPr lang="en-US" sz="1300" dirty="0"/>
-          </a:p>
-          <a:p>
-            <a:pPr marL="342900" indent="-342900">
-              <a:spcAft>
-                <a:spcPts val="600"/>
-              </a:spcAft>
-              <a:buSzPct val="100000"/>
-              <a:buChar char="•"/>
-            </a:pPr>
-            <a:r>
-              <a:rPr lang="en-US" sz="1300" dirty="0">
-                <a:solidFill>
-                  <a:srgbClr val="3D3A36"/>
-                </a:solidFill>
-                <a:latin typeface="Calibri" pitchFamily="34" charset="0"/>
-                <a:ea typeface="Calibri" pitchFamily="34" charset="-122"/>
-                <a:cs typeface="Calibri" pitchFamily="34" charset="-120"/>
-              </a:rPr>
-              <a:t>May NOT match theoretical</a:t>
-            </a:r>
-            <a:endParaRPr lang="en-US" sz="1300" dirty="0"/>
-          </a:p>
-          <a:p>
-            <a:pPr marL="342900" indent="-342900">
-              <a:spcAft>
-                <a:spcPts val="600"/>
-              </a:spcAft>
-              <a:buSzPct val="100000"/>
-              <a:buChar char="•"/>
-            </a:pPr>
-            <a:r>
-              <a:rPr lang="en-US" sz="1300" dirty="0">
-                <a:solidFill>
-                  <a:srgbClr val="3D3A36"/>
-                </a:solidFill>
-                <a:latin typeface="Calibri" pitchFamily="34" charset="0"/>
-                <a:ea typeface="Calibri" pitchFamily="34" charset="-122"/>
-                <a:cs typeface="Calibri" pitchFamily="34" charset="-120"/>
-              </a:rPr>
-              <a:t>More trials → closer to theoretical</a:t>
-            </a:r>
-            <a:endParaRPr lang="en-US" sz="1300" dirty="0"/>
-          </a:p>
-          <a:p>
-            <a:pPr marL="342900" indent="-342900">
-              <a:spcAft>
-                <a:spcPts val="600"/>
-              </a:spcAft>
-              <a:buSzPct val="100000"/>
-              <a:buChar char="•"/>
-            </a:pPr>
-            <a:r>
-              <a:rPr lang="en-US" sz="1300" dirty="0">
-                <a:solidFill>
-                  <a:srgbClr val="3D3A36"/>
-                </a:solidFill>
-                <a:latin typeface="Calibri" pitchFamily="34" charset="0"/>
-                <a:ea typeface="Calibri" pitchFamily="34" charset="-122"/>
-                <a:cs typeface="Calibri" pitchFamily="34" charset="-120"/>
-              </a:rPr>
-              <a:t>Also called relative frequency</a:t>
-            </a:r>
-            <a:endParaRPr lang="en-US" sz="1300" dirty="0"/>
           </a:p>
         </p:txBody>
       </p:sp>
@@ -3116,47 +2385,7 @@
         <p:spPr>
           <a:xfrm>
             <a:off x="0" y="0"/>
-            <a:ext cx="9144000" cy="822960"/>
-          </a:xfrm>
-          <a:prstGeom prst="rect">
-            <a:avLst/>
-          </a:prstGeom>
-          <a:solidFill>
-            <a:srgbClr val="FFFFFF"/>
-          </a:solidFill>
-          <a:ln/>
-        </p:spPr>
-      </p:sp>
-      <p:sp>
-        <p:nvSpPr>
-          <p:cNvPr id="3" name="Shape 1"/>
-          <p:cNvSpPr/>
-          <p:nvPr/>
-        </p:nvSpPr>
-        <p:spPr>
-          <a:xfrm>
-            <a:off x="0" y="804672"/>
-            <a:ext cx="9144000" cy="27432"/>
-          </a:xfrm>
-          <a:prstGeom prst="rect">
-            <a:avLst/>
-          </a:prstGeom>
-          <a:solidFill>
-            <a:srgbClr val="E5E2DC"/>
-          </a:solidFill>
-          <a:ln/>
-        </p:spPr>
-      </p:sp>
-      <p:sp>
-        <p:nvSpPr>
-          <p:cNvPr id="4" name="Shape 2"/>
-          <p:cNvSpPr/>
-          <p:nvPr/>
-        </p:nvSpPr>
-        <p:spPr>
-          <a:xfrm>
-            <a:off x="548640" y="201168"/>
-            <a:ext cx="54864" cy="420624"/>
+            <a:ext cx="73152" cy="5148072"/>
           </a:xfrm>
           <a:prstGeom prst="rect">
             <a:avLst/>
@@ -3169,14 +2398,14 @@
       </p:sp>
       <p:sp>
         <p:nvSpPr>
-          <p:cNvPr id="5" name="Text 3"/>
+          <p:cNvPr id="3" name="Text 1"/>
           <p:cNvSpPr/>
           <p:nvPr/>
         </p:nvSpPr>
         <p:spPr>
           <a:xfrm>
-            <a:off x="777240" y="137160"/>
-            <a:ext cx="7772400" cy="548640"/>
+            <a:off x="548640" y="274320"/>
+            <a:ext cx="9144000" cy="640080"/>
           </a:xfrm>
           <a:prstGeom prst="rect">
             <a:avLst/>
@@ -3185,14 +2414,14 @@
           <a:ln/>
         </p:spPr>
         <p:txBody>
-          <a:bodyPr wrap="square" lIns="0" tIns="0" rIns="0" bIns="0" rtlCol="0" anchor="ctr"/>
+          <a:bodyPr wrap="square" rtlCol="0" anchor="ctr"/>
           <a:lstStyle/>
           <a:p>
             <a:pPr indent="0" marL="0">
               <a:buNone/>
             </a:pPr>
             <a:r>
-              <a:rPr lang="en-US" sz="2000" b="1" dirty="0">
+              <a:rPr lang="en-US" sz="2400" b="1" dirty="0">
                 <a:solidFill>
                   <a:srgbClr val="1B2A4A"/>
                 </a:solidFill>
@@ -3200,22 +2429,42 @@
                 <a:ea typeface="Georgia" pitchFamily="34" charset="-122"/>
                 <a:cs typeface="Georgia" pitchFamily="34" charset="-120"/>
               </a:rPr>
-              <a:t>Why Do They Differ?</a:t>
+              <a:t>The Law of Large Numbers</a:t>
             </a:r>
-            <a:endParaRPr lang="en-US" sz="2000" dirty="0"/>
+            <a:endParaRPr lang="en-US" sz="2400" dirty="0"/>
           </a:p>
         </p:txBody>
       </p:sp>
       <p:sp>
         <p:nvSpPr>
-          <p:cNvPr id="6" name="Text 4"/>
+          <p:cNvPr id="4" name="Shape 2"/>
           <p:cNvSpPr/>
           <p:nvPr/>
         </p:nvSpPr>
         <p:spPr>
           <a:xfrm>
-            <a:off x="731520" y="1051560"/>
-            <a:ext cx="7680960" cy="3108960"/>
+            <a:off x="548640" y="960120"/>
+            <a:ext cx="2286000" cy="36576"/>
+          </a:xfrm>
+          <a:prstGeom prst="rect">
+            <a:avLst/>
+          </a:prstGeom>
+          <a:solidFill>
+            <a:srgbClr val="2A9D8F"/>
+          </a:solidFill>
+          <a:ln/>
+        </p:spPr>
+      </p:sp>
+      <p:sp>
+        <p:nvSpPr>
+          <p:cNvPr id="5" name="Text 3"/>
+          <p:cNvSpPr/>
+          <p:nvPr/>
+        </p:nvSpPr>
+        <p:spPr>
+          <a:xfrm>
+            <a:off x="548640" y="1188720"/>
+            <a:ext cx="10058400" cy="3474720"/>
           </a:xfrm>
           <a:prstGeom prst="rect">
             <a:avLst/>
@@ -3227,189 +2476,114 @@
           <a:bodyPr wrap="square" rtlCol="0" anchor="t"/>
           <a:lstStyle/>
           <a:p>
-            <a:pPr marL="342900" indent="-342900">
+            <a:pPr>
+              <a:lnSpc>
+                <a:spcPct val="150000"/>
+              </a:lnSpc>
               <a:spcAft>
-                <a:spcPts val="800"/>
+                <a:spcPts val="600"/>
               </a:spcAft>
-              <a:buSzPct val="100000"/>
-              <a:buChar char="•"/>
             </a:pPr>
             <a:r>
               <a:rPr lang="en-US" sz="1500" dirty="0">
                 <a:solidFill>
                   <a:srgbClr val="3D3A36"/>
                 </a:solidFill>
-                <a:latin typeface="Calibri" pitchFamily="34" charset="0"/>
-                <a:ea typeface="Calibri" pitchFamily="34" charset="-122"/>
-                <a:cs typeface="Calibri" pitchFamily="34" charset="-120"/>
+                <a:latin typeface="Arial" pitchFamily="34" charset="0"/>
+                <a:ea typeface="Arial" pitchFamily="34" charset="-122"/>
+                <a:cs typeface="Arial" pitchFamily="34" charset="-120"/>
               </a:rPr>
-              <a:t>With few trials, results can be very different from expected.</a:t>
+              <a:t>With FEW trials: experimental probability may be far from theoretical.</a:t>
             </a:r>
             <a:endParaRPr lang="en-US" sz="1500" dirty="0"/>
           </a:p>
           <a:p>
-            <a:pPr marL="342900" indent="-342900">
+            <a:pPr>
+              <a:lnSpc>
+                <a:spcPct val="150000"/>
+              </a:lnSpc>
               <a:spcAft>
-                <a:spcPts val="800"/>
+                <a:spcPts val="600"/>
               </a:spcAft>
-              <a:buSzPct val="100000"/>
-              <a:buChar char="•"/>
             </a:pPr>
             <a:r>
               <a:rPr lang="en-US" sz="1500" dirty="0">
                 <a:solidFill>
                   <a:srgbClr val="3D3A36"/>
                 </a:solidFill>
-                <a:latin typeface="Calibri" pitchFamily="34" charset="0"/>
-                <a:ea typeface="Calibri" pitchFamily="34" charset="-122"/>
-                <a:cs typeface="Calibri" pitchFamily="34" charset="-120"/>
+                <a:latin typeface="Arial" pitchFamily="34" charset="0"/>
+                <a:ea typeface="Arial" pitchFamily="34" charset="-122"/>
+                <a:cs typeface="Arial" pitchFamily="34" charset="-120"/>
               </a:rPr>
-              <a:t>Example: flip a coin 10 times — you might get 7 heads and 3 tails (not 5 and 5).</a:t>
+              <a:t>With MANY trials: experimental probability gets CLOSER to theoretical.</a:t>
             </a:r>
             <a:endParaRPr lang="en-US" sz="1500" dirty="0"/>
           </a:p>
           <a:p>
-            <a:pPr marL="342900" indent="-342900">
+            <a:pPr>
+              <a:lnSpc>
+                <a:spcPct val="150000"/>
+              </a:lnSpc>
               <a:spcAft>
-                <a:spcPts val="800"/>
+                <a:spcPts val="600"/>
               </a:spcAft>
-              <a:buSzPct val="100000"/>
-              <a:buChar char="•"/>
             </a:pPr>
             <a:r>
               <a:rPr lang="en-US" sz="1500" dirty="0">
                 <a:solidFill>
                   <a:srgbClr val="3D3A36"/>
                 </a:solidFill>
-                <a:latin typeface="Calibri" pitchFamily="34" charset="0"/>
-                <a:ea typeface="Calibri" pitchFamily="34" charset="-122"/>
-                <a:cs typeface="Calibri" pitchFamily="34" charset="-120"/>
+                <a:latin typeface="Arial" pitchFamily="34" charset="0"/>
+                <a:ea typeface="Arial" pitchFamily="34" charset="-122"/>
+                <a:cs typeface="Arial" pitchFamily="34" charset="-120"/>
               </a:rPr>
-              <a:t>With MORE trials, experimental probability gets CLOSER to theoretical.</a:t>
+              <a:t>10 coin flips: might get 7 heads (70%) — doesn't mean unfair.</a:t>
             </a:r>
             <a:endParaRPr lang="en-US" sz="1500" dirty="0"/>
           </a:p>
           <a:p>
-            <a:pPr marL="342900" indent="-342900">
+            <a:pPr>
+              <a:lnSpc>
+                <a:spcPct val="150000"/>
+              </a:lnSpc>
               <a:spcAft>
-                <a:spcPts val="800"/>
+                <a:spcPts val="600"/>
               </a:spcAft>
-              <a:buSzPct val="100000"/>
-              <a:buChar char="•"/>
             </a:pPr>
             <a:r>
               <a:rPr lang="en-US" sz="1500" dirty="0">
                 <a:solidFill>
                   <a:srgbClr val="3D3A36"/>
                 </a:solidFill>
-                <a:latin typeface="Calibri" pitchFamily="34" charset="0"/>
-                <a:ea typeface="Calibri" pitchFamily="34" charset="-122"/>
-                <a:cs typeface="Calibri" pitchFamily="34" charset="-120"/>
+                <a:latin typeface="Arial" pitchFamily="34" charset="0"/>
+                <a:ea typeface="Arial" pitchFamily="34" charset="-122"/>
+                <a:cs typeface="Arial" pitchFamily="34" charset="-120"/>
               </a:rPr>
-              <a:t>This is called the LAW OF LARGE NUMBERS.</a:t>
+              <a:t>1,000 coin flips: expect very close to 500 heads (50%).</a:t>
             </a:r>
             <a:endParaRPr lang="en-US" sz="1500" dirty="0"/>
           </a:p>
           <a:p>
-            <a:pPr marL="342900" indent="-342900">
+            <a:pPr>
+              <a:lnSpc>
+                <a:spcPct val="150000"/>
+              </a:lnSpc>
               <a:spcAft>
-                <a:spcPts val="800"/>
+                <a:spcPts val="600"/>
               </a:spcAft>
-              <a:buSzPct val="100000"/>
-              <a:buChar char="•"/>
             </a:pPr>
             <a:r>
               <a:rPr lang="en-US" sz="1500" dirty="0">
                 <a:solidFill>
                   <a:srgbClr val="3D3A36"/>
                 </a:solidFill>
-                <a:latin typeface="Calibri" pitchFamily="34" charset="0"/>
-                <a:ea typeface="Calibri" pitchFamily="34" charset="-122"/>
-                <a:cs typeface="Calibri" pitchFamily="34" charset="-120"/>
+                <a:latin typeface="Arial" pitchFamily="34" charset="0"/>
+                <a:ea typeface="Arial" pitchFamily="34" charset="-122"/>
+                <a:cs typeface="Arial" pitchFamily="34" charset="-120"/>
               </a:rPr>
-              <a:t>If experimental probability is very different from theoretical, the object may be BIASED.</a:t>
+              <a:t>More trials = more reliable results.</a:t>
             </a:r>
             <a:endParaRPr lang="en-US" sz="1500" dirty="0"/>
-          </a:p>
-        </p:txBody>
-      </p:sp>
-      <p:sp>
-        <p:nvSpPr>
-          <p:cNvPr id="7" name="Shape 5"/>
-          <p:cNvSpPr/>
-          <p:nvPr/>
-        </p:nvSpPr>
-        <p:spPr>
-          <a:xfrm>
-            <a:off x="731520" y="4206240"/>
-            <a:ext cx="7680960" cy="640080"/>
-          </a:xfrm>
-          <a:prstGeom prst="rect">
-            <a:avLst/>
-          </a:prstGeom>
-          <a:solidFill>
-            <a:srgbClr val="E8F5F3"/>
-          </a:solidFill>
-          <a:ln/>
-          <a:effectLst>
-            <a:outerShdw sx="100000" sy="100000" kx="0" ky="0" algn="bl" rotWithShape="0" blurRad="50800" dist="25400" dir="8100000">
-              <a:srgbClr val="000000">
-                <a:alpha val="10000"/>
-              </a:srgbClr>
-            </a:outerShdw>
-          </a:effectLst>
-        </p:spPr>
-      </p:sp>
-      <p:sp>
-        <p:nvSpPr>
-          <p:cNvPr id="8" name="Text 6"/>
-          <p:cNvSpPr/>
-          <p:nvPr/>
-        </p:nvSpPr>
-        <p:spPr>
-          <a:xfrm>
-            <a:off x="914400" y="4251960"/>
-            <a:ext cx="7315200" cy="548640"/>
-          </a:xfrm>
-          <a:prstGeom prst="rect">
-            <a:avLst/>
-          </a:prstGeom>
-          <a:noFill/>
-          <a:ln/>
-        </p:spPr>
-        <p:txBody>
-          <a:bodyPr wrap="square" rtlCol="0" anchor="ctr"/>
-          <a:lstStyle/>
-          <a:p>
-            <a:pPr indent="0" marL="0">
-              <a:buNone/>
-            </a:pPr>
-            <a:r>
-              <a:rPr lang="en-US" sz="1200" b="1" dirty="0">
-                <a:solidFill>
-                  <a:srgbClr val="2A9D8F"/>
-                </a:solidFill>
-                <a:latin typeface="Calibri" pitchFamily="34" charset="0"/>
-                <a:ea typeface="Calibri" pitchFamily="34" charset="-122"/>
-                <a:cs typeface="Calibri" pitchFamily="34" charset="-120"/>
-              </a:rPr>
-              <a:t>Key Idea: </a:t>
-            </a:r>
-            <a:pPr indent="0" marL="0">
-              <a:buNone/>
-            </a:pPr>
-            <a:r>
-              <a:rPr lang="en-US" sz="1200" i="1" dirty="0">
-                <a:solidFill>
-                  <a:srgbClr val="3D3A36"/>
-                </a:solidFill>
-                <a:latin typeface="Calibri" pitchFamily="34" charset="0"/>
-                <a:ea typeface="Calibri" pitchFamily="34" charset="-122"/>
-                <a:cs typeface="Calibri" pitchFamily="34" charset="-120"/>
-              </a:rPr>
-              <a:t>100 flips is more reliable than 10 flips. 1,000 flips is even more reliable.</a:t>
-            </a:r>
-            <a:endParaRPr lang="en-US" sz="1200" dirty="0"/>
           </a:p>
         </p:txBody>
       </p:sp>
@@ -3454,47 +2628,7 @@
         <p:spPr>
           <a:xfrm>
             <a:off x="0" y="0"/>
-            <a:ext cx="9144000" cy="822960"/>
-          </a:xfrm>
-          <a:prstGeom prst="rect">
-            <a:avLst/>
-          </a:prstGeom>
-          <a:solidFill>
-            <a:srgbClr val="FFFFFF"/>
-          </a:solidFill>
-          <a:ln/>
-        </p:spPr>
-      </p:sp>
-      <p:sp>
-        <p:nvSpPr>
-          <p:cNvPr id="3" name="Shape 1"/>
-          <p:cNvSpPr/>
-          <p:nvPr/>
-        </p:nvSpPr>
-        <p:spPr>
-          <a:xfrm>
-            <a:off x="0" y="804672"/>
-            <a:ext cx="9144000" cy="27432"/>
-          </a:xfrm>
-          <a:prstGeom prst="rect">
-            <a:avLst/>
-          </a:prstGeom>
-          <a:solidFill>
-            <a:srgbClr val="E5E2DC"/>
-          </a:solidFill>
-          <a:ln/>
-        </p:spPr>
-      </p:sp>
-      <p:sp>
-        <p:nvSpPr>
-          <p:cNvPr id="4" name="Shape 2"/>
-          <p:cNvSpPr/>
-          <p:nvPr/>
-        </p:nvSpPr>
-        <p:spPr>
-          <a:xfrm>
-            <a:off x="548640" y="201168"/>
-            <a:ext cx="54864" cy="420624"/>
+            <a:ext cx="73152" cy="5148072"/>
           </a:xfrm>
           <a:prstGeom prst="rect">
             <a:avLst/>
@@ -3507,14 +2641,14 @@
       </p:sp>
       <p:sp>
         <p:nvSpPr>
-          <p:cNvPr id="5" name="Text 3"/>
+          <p:cNvPr id="3" name="Text 1"/>
           <p:cNvSpPr/>
           <p:nvPr/>
         </p:nvSpPr>
         <p:spPr>
           <a:xfrm>
-            <a:off x="777240" y="137160"/>
-            <a:ext cx="7772400" cy="548640"/>
+            <a:off x="548640" y="274320"/>
+            <a:ext cx="9144000" cy="640080"/>
           </a:xfrm>
           <a:prstGeom prst="rect">
             <a:avLst/>
@@ -3523,14 +2657,14 @@
           <a:ln/>
         </p:spPr>
         <p:txBody>
-          <a:bodyPr wrap="square" lIns="0" tIns="0" rIns="0" bIns="0" rtlCol="0" anchor="ctr"/>
+          <a:bodyPr wrap="square" rtlCol="0" anchor="ctr"/>
           <a:lstStyle/>
           <a:p>
             <a:pPr indent="0" marL="0">
               <a:buNone/>
             </a:pPr>
             <a:r>
-              <a:rPr lang="en-US" sz="2000" b="1" dirty="0">
+              <a:rPr lang="en-US" sz="2400" b="1" dirty="0">
                 <a:solidFill>
                   <a:srgbClr val="1B2A4A"/>
                 </a:solidFill>
@@ -3538,139 +2672,1962 @@
                 <a:ea typeface="Georgia" pitchFamily="34" charset="-122"/>
                 <a:cs typeface="Georgia" pitchFamily="34" charset="-120"/>
               </a:rPr>
-              <a:t>Using Experimental Probability</a:t>
+              <a:t>Example: Dice Rolling Experiment</a:t>
             </a:r>
-            <a:endParaRPr lang="en-US" sz="2000" dirty="0"/>
+            <a:endParaRPr lang="en-US" sz="2400" dirty="0"/>
           </a:p>
         </p:txBody>
       </p:sp>
-      <p:sp>
-        <p:nvSpPr>
-          <p:cNvPr id="6" name="Text 4"/>
-          <p:cNvSpPr/>
-          <p:nvPr/>
-        </p:nvSpPr>
-        <p:spPr>
-          <a:xfrm>
-            <a:off x="731520" y="1051560"/>
-            <a:ext cx="7680960" cy="3108960"/>
-          </a:xfrm>
-          <a:prstGeom prst="rect">
-            <a:avLst/>
-          </a:prstGeom>
-          <a:noFill/>
-          <a:ln/>
-        </p:spPr>
-        <p:txBody>
-          <a:bodyPr wrap="square" rtlCol="0" anchor="t"/>
-          <a:lstStyle/>
-          <a:p>
-            <a:pPr marL="342900" indent="-342900">
-              <a:spcAft>
-                <a:spcPts val="800"/>
-              </a:spcAft>
-              <a:buSzPct val="100000"/>
-              <a:buChar char="•"/>
-            </a:pPr>
-            <a:r>
-              <a:rPr lang="en-US" sz="1500" dirty="0">
-                <a:solidFill>
-                  <a:srgbClr val="3D3A36"/>
-                </a:solidFill>
-                <a:latin typeface="Calibri" pitchFamily="34" charset="0"/>
-                <a:ea typeface="Calibri" pitchFamily="34" charset="-122"/>
-                <a:cs typeface="Calibri" pitchFamily="34" charset="-120"/>
-              </a:rPr>
-              <a:t>Experimental probability = number of successes ÷ total number of trials.</a:t>
-            </a:r>
-            <a:endParaRPr lang="en-US" sz="1500" dirty="0"/>
-          </a:p>
-          <a:p>
-            <a:pPr marL="342900" indent="-342900">
-              <a:spcAft>
-                <a:spcPts val="800"/>
-              </a:spcAft>
-              <a:buSzPct val="100000"/>
-              <a:buChar char="•"/>
-            </a:pPr>
-            <a:r>
-              <a:rPr lang="en-US" sz="1500" dirty="0">
-                <a:solidFill>
-                  <a:srgbClr val="3D3A36"/>
-                </a:solidFill>
-                <a:latin typeface="Calibri" pitchFamily="34" charset="0"/>
-                <a:ea typeface="Calibri" pitchFamily="34" charset="-122"/>
-                <a:cs typeface="Calibri" pitchFamily="34" charset="-120"/>
-              </a:rPr>
-              <a:t>Example: you spin a spinner 50 times and get red 18 times. P(red) ≈ 18/50 = 0.36.</a:t>
-            </a:r>
-            <a:endParaRPr lang="en-US" sz="1500" dirty="0"/>
-          </a:p>
-          <a:p>
-            <a:pPr marL="342900" indent="-342900">
-              <a:spcAft>
-                <a:spcPts val="800"/>
-              </a:spcAft>
-              <a:buSzPct val="100000"/>
-              <a:buChar char="•"/>
-            </a:pPr>
-            <a:r>
-              <a:rPr lang="en-US" sz="1500" dirty="0">
-                <a:solidFill>
-                  <a:srgbClr val="3D3A36"/>
-                </a:solidFill>
-                <a:latin typeface="Calibri" pitchFamily="34" charset="0"/>
-                <a:ea typeface="Calibri" pitchFamily="34" charset="-122"/>
-                <a:cs typeface="Calibri" pitchFamily="34" charset="-120"/>
-              </a:rPr>
-              <a:t>Use experimental probability when you CANNOT calculate theoretical (e.g. biased dice).</a:t>
-            </a:r>
-            <a:endParaRPr lang="en-US" sz="1500" dirty="0"/>
-          </a:p>
-          <a:p>
-            <a:pPr marL="342900" indent="-342900">
-              <a:spcAft>
-                <a:spcPts val="800"/>
-              </a:spcAft>
-              <a:buSzPct val="100000"/>
-              <a:buChar char="•"/>
-            </a:pPr>
-            <a:r>
-              <a:rPr lang="en-US" sz="1500" dirty="0">
-                <a:solidFill>
-                  <a:srgbClr val="3D3A36"/>
-                </a:solidFill>
-                <a:latin typeface="Calibri" pitchFamily="34" charset="0"/>
-                <a:ea typeface="Calibri" pitchFamily="34" charset="-122"/>
-                <a:cs typeface="Calibri" pitchFamily="34" charset="-120"/>
-              </a:rPr>
-              <a:t>The more trials you do, the more reliable your estimate becomes.</a:t>
-            </a:r>
-            <a:endParaRPr lang="en-US" sz="1500" dirty="0"/>
-          </a:p>
-          <a:p>
-            <a:pPr marL="342900" indent="-342900">
-              <a:spcAft>
-                <a:spcPts val="800"/>
-              </a:spcAft>
-              <a:buSzPct val="100000"/>
-              <a:buChar char="•"/>
-            </a:pPr>
-            <a:r>
-              <a:rPr lang="en-US" sz="1500" dirty="0">
-                <a:solidFill>
-                  <a:srgbClr val="3D3A36"/>
-                </a:solidFill>
-                <a:latin typeface="Calibri" pitchFamily="34" charset="0"/>
-                <a:ea typeface="Calibri" pitchFamily="34" charset="-122"/>
-                <a:cs typeface="Calibri" pitchFamily="34" charset="-120"/>
-              </a:rPr>
-              <a:t>Compare experimental results with theoretical to check for fairness.</a:t>
-            </a:r>
-            <a:endParaRPr lang="en-US" sz="1500" dirty="0"/>
-          </a:p>
-        </p:txBody>
-      </p:sp>
+      <p:graphicFrame>
+        <p:nvGraphicFramePr>
+          <p:cNvPr id="6" name="Table 0"/>
+          <p:cNvGraphicFramePr>
+            <a:graphicFrameLocks noGrp="1"/>
+          </p:cNvGraphicFramePr>
+          <p:nvPr>
+            <p:extLst>
+              <p:ext uri="{D42A27DB-BD31-4B8C-83A1-F6EECF244321}">
+                <p14:modId xmlns:p14="http://schemas.microsoft.com/office/powerpoint/2010/main" val="1579011935"/>
+              </p:ext>
+            </p:extLst>
+          </p:nvPr>
+        </p:nvGraphicFramePr>
+        <p:xfrm>
+          <a:off x="548640" y="1097280"/>
+          <a:ext cx="9144000" cy="914400"/>
+        </p:xfrm>
+        <a:graphic>
+          <a:graphicData uri="http://schemas.openxmlformats.org/drawingml/2006/table">
+            <a:tbl>
+              <a:tblPr/>
+              <a:tblGrid>
+                <a:gridCol w="2286000"/>
+                <a:gridCol w="2286000"/>
+                <a:gridCol w="2286000"/>
+                <a:gridCol w="2286000"/>
+              </a:tblGrid>
+              <a:tr h="411480">
+                <a:tc>
+                  <a:txBody>
+                    <a:bodyPr/>
+                    <a:lstStyle/>
+                    <a:p>
+                      <a:pPr algn="ctr" indent="0" marL="0">
+                        <a:buNone/>
+                      </a:pPr>
+                      <a:r>
+                        <a:rPr lang="en-US" sz="1200" b="1" dirty="0">
+                          <a:solidFill>
+                            <a:srgbClr val="FFFFFF"/>
+                          </a:solidFill>
+                          <a:latin typeface="Arial" pitchFamily="34" charset="0"/>
+                          <a:ea typeface="Arial" pitchFamily="34" charset="-122"/>
+                          <a:cs typeface="Arial" pitchFamily="34" charset="-120"/>
+                        </a:rPr>
+                        <a:t>Outcome</a:t>
+                      </a:r>
+                      <a:endParaRPr lang="en-US" sz="1200" dirty="0">
+                        <a:latin typeface="Arial" charset="0"/>
+                        <a:ea typeface="Arial" charset="0"/>
+                        <a:cs typeface="Arial" charset="0"/>
+                      </a:endParaRPr>
+                    </a:p>
+                  </a:txBody>
+                  <a:tcPr marL="101600" marR="101600" marT="50800" marB="50800" anchor="ctr">
+                    <a:lnL w="6350" cap="flat" cmpd="sng" algn="ctr">
+                      <a:solidFill>
+                        <a:srgbClr val="E5E2DC"/>
+                      </a:solidFill>
+                      <a:prstDash val="solid"/>
+                      <a:round/>
+                      <a:headEnd type="none" w="med" len="med"/>
+                      <a:tailEnd type="none" w="med" len="med"/>
+                    </a:lnL>
+                    <a:lnR w="6350" cap="flat" cmpd="sng" algn="ctr">
+                      <a:solidFill>
+                        <a:srgbClr val="E5E2DC"/>
+                      </a:solidFill>
+                      <a:prstDash val="solid"/>
+                      <a:round/>
+                      <a:headEnd type="none" w="med" len="med"/>
+                      <a:tailEnd type="none" w="med" len="med"/>
+                    </a:lnR>
+                    <a:lnT w="6350" cap="flat" cmpd="sng" algn="ctr">
+                      <a:solidFill>
+                        <a:srgbClr val="E5E2DC"/>
+                      </a:solidFill>
+                      <a:prstDash val="solid"/>
+                      <a:round/>
+                      <a:headEnd type="none" w="med" len="med"/>
+                      <a:tailEnd type="none" w="med" len="med"/>
+                    </a:lnT>
+                    <a:lnB w="6350" cap="flat" cmpd="sng" algn="ctr">
+                      <a:solidFill>
+                        <a:srgbClr val="E5E2DC"/>
+                      </a:solidFill>
+                      <a:prstDash val="solid"/>
+                      <a:round/>
+                      <a:headEnd type="none" w="med" len="med"/>
+                      <a:tailEnd type="none" w="med" len="med"/>
+                    </a:lnB>
+                    <a:solidFill>
+                      <a:srgbClr val="2A9D8F"/>
+                    </a:solidFill>
+                  </a:tcPr>
+                </a:tc>
+                <a:tc>
+                  <a:txBody>
+                    <a:bodyPr/>
+                    <a:lstStyle/>
+                    <a:p>
+                      <a:pPr algn="ctr" indent="0" marL="0">
+                        <a:buNone/>
+                      </a:pPr>
+                      <a:r>
+                        <a:rPr lang="en-US" sz="1200" b="1" dirty="0">
+                          <a:solidFill>
+                            <a:srgbClr val="FFFFFF"/>
+                          </a:solidFill>
+                          <a:latin typeface="Arial" pitchFamily="34" charset="0"/>
+                          <a:ea typeface="Arial" pitchFamily="34" charset="-122"/>
+                          <a:cs typeface="Arial" pitchFamily="34" charset="-120"/>
+                        </a:rPr>
+                        <a:t>Frequency (60 rolls)</a:t>
+                      </a:r>
+                      <a:endParaRPr lang="en-US" sz="1200" dirty="0">
+                        <a:latin typeface="Arial" charset="0"/>
+                        <a:ea typeface="Arial" charset="0"/>
+                        <a:cs typeface="Arial" charset="0"/>
+                      </a:endParaRPr>
+                    </a:p>
+                  </a:txBody>
+                  <a:tcPr marL="101600" marR="101600" marT="50800" marB="50800" anchor="ctr">
+                    <a:lnL w="6350" cap="flat" cmpd="sng" algn="ctr">
+                      <a:solidFill>
+                        <a:srgbClr val="E5E2DC"/>
+                      </a:solidFill>
+                      <a:prstDash val="solid"/>
+                      <a:round/>
+                      <a:headEnd type="none" w="med" len="med"/>
+                      <a:tailEnd type="none" w="med" len="med"/>
+                    </a:lnL>
+                    <a:lnR w="6350" cap="flat" cmpd="sng" algn="ctr">
+                      <a:solidFill>
+                        <a:srgbClr val="E5E2DC"/>
+                      </a:solidFill>
+                      <a:prstDash val="solid"/>
+                      <a:round/>
+                      <a:headEnd type="none" w="med" len="med"/>
+                      <a:tailEnd type="none" w="med" len="med"/>
+                    </a:lnR>
+                    <a:lnT w="6350" cap="flat" cmpd="sng" algn="ctr">
+                      <a:solidFill>
+                        <a:srgbClr val="E5E2DC"/>
+                      </a:solidFill>
+                      <a:prstDash val="solid"/>
+                      <a:round/>
+                      <a:headEnd type="none" w="med" len="med"/>
+                      <a:tailEnd type="none" w="med" len="med"/>
+                    </a:lnT>
+                    <a:lnB w="6350" cap="flat" cmpd="sng" algn="ctr">
+                      <a:solidFill>
+                        <a:srgbClr val="E5E2DC"/>
+                      </a:solidFill>
+                      <a:prstDash val="solid"/>
+                      <a:round/>
+                      <a:headEnd type="none" w="med" len="med"/>
+                      <a:tailEnd type="none" w="med" len="med"/>
+                    </a:lnB>
+                    <a:solidFill>
+                      <a:srgbClr val="2A9D8F"/>
+                    </a:solidFill>
+                  </a:tcPr>
+                </a:tc>
+                <a:tc>
+                  <a:txBody>
+                    <a:bodyPr/>
+                    <a:lstStyle/>
+                    <a:p>
+                      <a:pPr algn="ctr" indent="0" marL="0">
+                        <a:buNone/>
+                      </a:pPr>
+                      <a:r>
+                        <a:rPr lang="en-US" sz="1200" b="1" dirty="0">
+                          <a:solidFill>
+                            <a:srgbClr val="FFFFFF"/>
+                          </a:solidFill>
+                          <a:latin typeface="Arial" pitchFamily="34" charset="0"/>
+                          <a:ea typeface="Arial" pitchFamily="34" charset="-122"/>
+                          <a:cs typeface="Arial" pitchFamily="34" charset="-120"/>
+                        </a:rPr>
+                        <a:t>Experimental P</a:t>
+                      </a:r>
+                      <a:endParaRPr lang="en-US" sz="1200" dirty="0">
+                        <a:latin typeface="Arial" charset="0"/>
+                        <a:ea typeface="Arial" charset="0"/>
+                        <a:cs typeface="Arial" charset="0"/>
+                      </a:endParaRPr>
+                    </a:p>
+                  </a:txBody>
+                  <a:tcPr marL="101600" marR="101600" marT="50800" marB="50800" anchor="ctr">
+                    <a:lnL w="6350" cap="flat" cmpd="sng" algn="ctr">
+                      <a:solidFill>
+                        <a:srgbClr val="E5E2DC"/>
+                      </a:solidFill>
+                      <a:prstDash val="solid"/>
+                      <a:round/>
+                      <a:headEnd type="none" w="med" len="med"/>
+                      <a:tailEnd type="none" w="med" len="med"/>
+                    </a:lnL>
+                    <a:lnR w="6350" cap="flat" cmpd="sng" algn="ctr">
+                      <a:solidFill>
+                        <a:srgbClr val="E5E2DC"/>
+                      </a:solidFill>
+                      <a:prstDash val="solid"/>
+                      <a:round/>
+                      <a:headEnd type="none" w="med" len="med"/>
+                      <a:tailEnd type="none" w="med" len="med"/>
+                    </a:lnR>
+                    <a:lnT w="6350" cap="flat" cmpd="sng" algn="ctr">
+                      <a:solidFill>
+                        <a:srgbClr val="E5E2DC"/>
+                      </a:solidFill>
+                      <a:prstDash val="solid"/>
+                      <a:round/>
+                      <a:headEnd type="none" w="med" len="med"/>
+                      <a:tailEnd type="none" w="med" len="med"/>
+                    </a:lnT>
+                    <a:lnB w="6350" cap="flat" cmpd="sng" algn="ctr">
+                      <a:solidFill>
+                        <a:srgbClr val="E5E2DC"/>
+                      </a:solidFill>
+                      <a:prstDash val="solid"/>
+                      <a:round/>
+                      <a:headEnd type="none" w="med" len="med"/>
+                      <a:tailEnd type="none" w="med" len="med"/>
+                    </a:lnB>
+                    <a:solidFill>
+                      <a:srgbClr val="2A9D8F"/>
+                    </a:solidFill>
+                  </a:tcPr>
+                </a:tc>
+                <a:tc>
+                  <a:txBody>
+                    <a:bodyPr/>
+                    <a:lstStyle/>
+                    <a:p>
+                      <a:pPr algn="ctr" indent="0" marL="0">
+                        <a:buNone/>
+                      </a:pPr>
+                      <a:r>
+                        <a:rPr lang="en-US" sz="1200" b="1" dirty="0">
+                          <a:solidFill>
+                            <a:srgbClr val="FFFFFF"/>
+                          </a:solidFill>
+                          <a:latin typeface="Arial" pitchFamily="34" charset="0"/>
+                          <a:ea typeface="Arial" pitchFamily="34" charset="-122"/>
+                          <a:cs typeface="Arial" pitchFamily="34" charset="-120"/>
+                        </a:rPr>
+                        <a:t>Theoretical P</a:t>
+                      </a:r>
+                      <a:endParaRPr lang="en-US" sz="1200" dirty="0">
+                        <a:latin typeface="Arial" charset="0"/>
+                        <a:ea typeface="Arial" charset="0"/>
+                        <a:cs typeface="Arial" charset="0"/>
+                      </a:endParaRPr>
+                    </a:p>
+                  </a:txBody>
+                  <a:tcPr marL="101600" marR="101600" marT="50800" marB="50800" anchor="ctr">
+                    <a:lnL w="6350" cap="flat" cmpd="sng" algn="ctr">
+                      <a:solidFill>
+                        <a:srgbClr val="E5E2DC"/>
+                      </a:solidFill>
+                      <a:prstDash val="solid"/>
+                      <a:round/>
+                      <a:headEnd type="none" w="med" len="med"/>
+                      <a:tailEnd type="none" w="med" len="med"/>
+                    </a:lnL>
+                    <a:lnR w="6350" cap="flat" cmpd="sng" algn="ctr">
+                      <a:solidFill>
+                        <a:srgbClr val="E5E2DC"/>
+                      </a:solidFill>
+                      <a:prstDash val="solid"/>
+                      <a:round/>
+                      <a:headEnd type="none" w="med" len="med"/>
+                      <a:tailEnd type="none" w="med" len="med"/>
+                    </a:lnR>
+                    <a:lnT w="6350" cap="flat" cmpd="sng" algn="ctr">
+                      <a:solidFill>
+                        <a:srgbClr val="E5E2DC"/>
+                      </a:solidFill>
+                      <a:prstDash val="solid"/>
+                      <a:round/>
+                      <a:headEnd type="none" w="med" len="med"/>
+                      <a:tailEnd type="none" w="med" len="med"/>
+                    </a:lnT>
+                    <a:lnB w="6350" cap="flat" cmpd="sng" algn="ctr">
+                      <a:solidFill>
+                        <a:srgbClr val="E5E2DC"/>
+                      </a:solidFill>
+                      <a:prstDash val="solid"/>
+                      <a:round/>
+                      <a:headEnd type="none" w="med" len="med"/>
+                      <a:tailEnd type="none" w="med" len="med"/>
+                    </a:lnB>
+                    <a:solidFill>
+                      <a:srgbClr val="2A9D8F"/>
+                    </a:solidFill>
+                  </a:tcPr>
+                </a:tc>
+              </a:tr>
+              <a:tr h="365760">
+                <a:tc>
+                  <a:txBody>
+                    <a:bodyPr/>
+                    <a:lstStyle/>
+                    <a:p>
+                      <a:pPr indent="0" marL="0">
+                        <a:buNone/>
+                      </a:pPr>
+                      <a:r>
+                        <a:rPr lang="en-US" sz="1200" dirty="0">
+                          <a:solidFill>
+                            <a:srgbClr val="3D3A36"/>
+                          </a:solidFill>
+                          <a:latin typeface="Arial" pitchFamily="34" charset="0"/>
+                          <a:ea typeface="Arial" pitchFamily="34" charset="-122"/>
+                          <a:cs typeface="Arial" pitchFamily="34" charset="-120"/>
+                        </a:rPr>
+                        <a:t>1</a:t>
+                      </a:r>
+                      <a:endParaRPr lang="en-US" sz="1200" dirty="0">
+                        <a:latin typeface="Arial" charset="0"/>
+                        <a:ea typeface="Arial" charset="0"/>
+                        <a:cs typeface="Arial" charset="0"/>
+                      </a:endParaRPr>
+                    </a:p>
+                  </a:txBody>
+                  <a:tcPr marL="101600" marR="101600" marT="50800" marB="50800" anchor="ctr">
+                    <a:lnL w="6350" cap="flat" cmpd="sng" algn="ctr">
+                      <a:solidFill>
+                        <a:srgbClr val="E5E2DC"/>
+                      </a:solidFill>
+                      <a:prstDash val="solid"/>
+                      <a:round/>
+                      <a:headEnd type="none" w="med" len="med"/>
+                      <a:tailEnd type="none" w="med" len="med"/>
+                    </a:lnL>
+                    <a:lnR w="6350" cap="flat" cmpd="sng" algn="ctr">
+                      <a:solidFill>
+                        <a:srgbClr val="E5E2DC"/>
+                      </a:solidFill>
+                      <a:prstDash val="solid"/>
+                      <a:round/>
+                      <a:headEnd type="none" w="med" len="med"/>
+                      <a:tailEnd type="none" w="med" len="med"/>
+                    </a:lnR>
+                    <a:lnT w="6350" cap="flat" cmpd="sng" algn="ctr">
+                      <a:solidFill>
+                        <a:srgbClr val="E5E2DC"/>
+                      </a:solidFill>
+                      <a:prstDash val="solid"/>
+                      <a:round/>
+                      <a:headEnd type="none" w="med" len="med"/>
+                      <a:tailEnd type="none" w="med" len="med"/>
+                    </a:lnT>
+                    <a:lnB w="6350" cap="flat" cmpd="sng" algn="ctr">
+                      <a:solidFill>
+                        <a:srgbClr val="E5E2DC"/>
+                      </a:solidFill>
+                      <a:prstDash val="solid"/>
+                      <a:round/>
+                      <a:headEnd type="none" w="med" len="med"/>
+                      <a:tailEnd type="none" w="med" len="med"/>
+                    </a:lnB>
+                    <a:solidFill>
+                      <a:srgbClr val="FFFFFF"/>
+                    </a:solidFill>
+                  </a:tcPr>
+                </a:tc>
+                <a:tc>
+                  <a:txBody>
+                    <a:bodyPr/>
+                    <a:lstStyle/>
+                    <a:p>
+                      <a:pPr indent="0" marL="0">
+                        <a:buNone/>
+                      </a:pPr>
+                      <a:r>
+                        <a:rPr lang="en-US" sz="1200" dirty="0">
+                          <a:solidFill>
+                            <a:srgbClr val="3D3A36"/>
+                          </a:solidFill>
+                          <a:latin typeface="Arial" pitchFamily="34" charset="0"/>
+                          <a:ea typeface="Arial" pitchFamily="34" charset="-122"/>
+                          <a:cs typeface="Arial" pitchFamily="34" charset="-120"/>
+                        </a:rPr>
+                        <a:t>8</a:t>
+                      </a:r>
+                      <a:endParaRPr lang="en-US" sz="1200" dirty="0">
+                        <a:latin typeface="Arial" charset="0"/>
+                        <a:ea typeface="Arial" charset="0"/>
+                        <a:cs typeface="Arial" charset="0"/>
+                      </a:endParaRPr>
+                    </a:p>
+                  </a:txBody>
+                  <a:tcPr marL="101600" marR="101600" marT="50800" marB="50800" anchor="ctr">
+                    <a:lnL w="6350" cap="flat" cmpd="sng" algn="ctr">
+                      <a:solidFill>
+                        <a:srgbClr val="E5E2DC"/>
+                      </a:solidFill>
+                      <a:prstDash val="solid"/>
+                      <a:round/>
+                      <a:headEnd type="none" w="med" len="med"/>
+                      <a:tailEnd type="none" w="med" len="med"/>
+                    </a:lnL>
+                    <a:lnR w="6350" cap="flat" cmpd="sng" algn="ctr">
+                      <a:solidFill>
+                        <a:srgbClr val="E5E2DC"/>
+                      </a:solidFill>
+                      <a:prstDash val="solid"/>
+                      <a:round/>
+                      <a:headEnd type="none" w="med" len="med"/>
+                      <a:tailEnd type="none" w="med" len="med"/>
+                    </a:lnR>
+                    <a:lnT w="6350" cap="flat" cmpd="sng" algn="ctr">
+                      <a:solidFill>
+                        <a:srgbClr val="E5E2DC"/>
+                      </a:solidFill>
+                      <a:prstDash val="solid"/>
+                      <a:round/>
+                      <a:headEnd type="none" w="med" len="med"/>
+                      <a:tailEnd type="none" w="med" len="med"/>
+                    </a:lnT>
+                    <a:lnB w="6350" cap="flat" cmpd="sng" algn="ctr">
+                      <a:solidFill>
+                        <a:srgbClr val="E5E2DC"/>
+                      </a:solidFill>
+                      <a:prstDash val="solid"/>
+                      <a:round/>
+                      <a:headEnd type="none" w="med" len="med"/>
+                      <a:tailEnd type="none" w="med" len="med"/>
+                    </a:lnB>
+                    <a:solidFill>
+                      <a:srgbClr val="FFFFFF"/>
+                    </a:solidFill>
+                  </a:tcPr>
+                </a:tc>
+                <a:tc>
+                  <a:txBody>
+                    <a:bodyPr/>
+                    <a:lstStyle/>
+                    <a:p>
+                      <a:pPr indent="0" marL="0">
+                        <a:buNone/>
+                      </a:pPr>
+                      <a:r>
+                        <a:rPr lang="en-US" sz="1200" dirty="0">
+                          <a:solidFill>
+                            <a:srgbClr val="3D3A36"/>
+                          </a:solidFill>
+                          <a:latin typeface="Arial" pitchFamily="34" charset="0"/>
+                          <a:ea typeface="Arial" pitchFamily="34" charset="-122"/>
+                          <a:cs typeface="Arial" pitchFamily="34" charset="-120"/>
+                        </a:rPr>
+                        <a:t>8/60 = 0.13</a:t>
+                      </a:r>
+                      <a:endParaRPr lang="en-US" sz="1200" dirty="0">
+                        <a:latin typeface="Arial" charset="0"/>
+                        <a:ea typeface="Arial" charset="0"/>
+                        <a:cs typeface="Arial" charset="0"/>
+                      </a:endParaRPr>
+                    </a:p>
+                  </a:txBody>
+                  <a:tcPr marL="101600" marR="101600" marT="50800" marB="50800" anchor="ctr">
+                    <a:lnL w="6350" cap="flat" cmpd="sng" algn="ctr">
+                      <a:solidFill>
+                        <a:srgbClr val="E5E2DC"/>
+                      </a:solidFill>
+                      <a:prstDash val="solid"/>
+                      <a:round/>
+                      <a:headEnd type="none" w="med" len="med"/>
+                      <a:tailEnd type="none" w="med" len="med"/>
+                    </a:lnL>
+                    <a:lnR w="6350" cap="flat" cmpd="sng" algn="ctr">
+                      <a:solidFill>
+                        <a:srgbClr val="E5E2DC"/>
+                      </a:solidFill>
+                      <a:prstDash val="solid"/>
+                      <a:round/>
+                      <a:headEnd type="none" w="med" len="med"/>
+                      <a:tailEnd type="none" w="med" len="med"/>
+                    </a:lnR>
+                    <a:lnT w="6350" cap="flat" cmpd="sng" algn="ctr">
+                      <a:solidFill>
+                        <a:srgbClr val="E5E2DC"/>
+                      </a:solidFill>
+                      <a:prstDash val="solid"/>
+                      <a:round/>
+                      <a:headEnd type="none" w="med" len="med"/>
+                      <a:tailEnd type="none" w="med" len="med"/>
+                    </a:lnT>
+                    <a:lnB w="6350" cap="flat" cmpd="sng" algn="ctr">
+                      <a:solidFill>
+                        <a:srgbClr val="E5E2DC"/>
+                      </a:solidFill>
+                      <a:prstDash val="solid"/>
+                      <a:round/>
+                      <a:headEnd type="none" w="med" len="med"/>
+                      <a:tailEnd type="none" w="med" len="med"/>
+                    </a:lnB>
+                    <a:solidFill>
+                      <a:srgbClr val="FFFFFF"/>
+                    </a:solidFill>
+                  </a:tcPr>
+                </a:tc>
+                <a:tc>
+                  <a:txBody>
+                    <a:bodyPr/>
+                    <a:lstStyle/>
+                    <a:p>
+                      <a:pPr indent="0" marL="0">
+                        <a:buNone/>
+                      </a:pPr>
+                      <a:r>
+                        <a:rPr lang="en-US" sz="1200" dirty="0">
+                          <a:solidFill>
+                            <a:srgbClr val="3D3A36"/>
+                          </a:solidFill>
+                          <a:latin typeface="Arial" pitchFamily="34" charset="0"/>
+                          <a:ea typeface="Arial" pitchFamily="34" charset="-122"/>
+                          <a:cs typeface="Arial" pitchFamily="34" charset="-120"/>
+                        </a:rPr>
+                        <a:t>1/6 = 0.17</a:t>
+                      </a:r>
+                      <a:endParaRPr lang="en-US" sz="1200" dirty="0">
+                        <a:latin typeface="Arial" charset="0"/>
+                        <a:ea typeface="Arial" charset="0"/>
+                        <a:cs typeface="Arial" charset="0"/>
+                      </a:endParaRPr>
+                    </a:p>
+                  </a:txBody>
+                  <a:tcPr marL="101600" marR="101600" marT="50800" marB="50800" anchor="ctr">
+                    <a:lnL w="6350" cap="flat" cmpd="sng" algn="ctr">
+                      <a:solidFill>
+                        <a:srgbClr val="E5E2DC"/>
+                      </a:solidFill>
+                      <a:prstDash val="solid"/>
+                      <a:round/>
+                      <a:headEnd type="none" w="med" len="med"/>
+                      <a:tailEnd type="none" w="med" len="med"/>
+                    </a:lnL>
+                    <a:lnR w="6350" cap="flat" cmpd="sng" algn="ctr">
+                      <a:solidFill>
+                        <a:srgbClr val="E5E2DC"/>
+                      </a:solidFill>
+                      <a:prstDash val="solid"/>
+                      <a:round/>
+                      <a:headEnd type="none" w="med" len="med"/>
+                      <a:tailEnd type="none" w="med" len="med"/>
+                    </a:lnR>
+                    <a:lnT w="6350" cap="flat" cmpd="sng" algn="ctr">
+                      <a:solidFill>
+                        <a:srgbClr val="E5E2DC"/>
+                      </a:solidFill>
+                      <a:prstDash val="solid"/>
+                      <a:round/>
+                      <a:headEnd type="none" w="med" len="med"/>
+                      <a:tailEnd type="none" w="med" len="med"/>
+                    </a:lnT>
+                    <a:lnB w="6350" cap="flat" cmpd="sng" algn="ctr">
+                      <a:solidFill>
+                        <a:srgbClr val="E5E2DC"/>
+                      </a:solidFill>
+                      <a:prstDash val="solid"/>
+                      <a:round/>
+                      <a:headEnd type="none" w="med" len="med"/>
+                      <a:tailEnd type="none" w="med" len="med"/>
+                    </a:lnB>
+                    <a:solidFill>
+                      <a:srgbClr val="FFFFFF"/>
+                    </a:solidFill>
+                  </a:tcPr>
+                </a:tc>
+              </a:tr>
+              <a:tr h="365760">
+                <a:tc>
+                  <a:txBody>
+                    <a:bodyPr/>
+                    <a:lstStyle/>
+                    <a:p>
+                      <a:pPr indent="0" marL="0">
+                        <a:buNone/>
+                      </a:pPr>
+                      <a:r>
+                        <a:rPr lang="en-US" sz="1200" dirty="0">
+                          <a:solidFill>
+                            <a:srgbClr val="3D3A36"/>
+                          </a:solidFill>
+                          <a:latin typeface="Arial" pitchFamily="34" charset="0"/>
+                          <a:ea typeface="Arial" pitchFamily="34" charset="-122"/>
+                          <a:cs typeface="Arial" pitchFamily="34" charset="-120"/>
+                        </a:rPr>
+                        <a:t>2</a:t>
+                      </a:r>
+                      <a:endParaRPr lang="en-US" sz="1200" dirty="0">
+                        <a:latin typeface="Arial" charset="0"/>
+                        <a:ea typeface="Arial" charset="0"/>
+                        <a:cs typeface="Arial" charset="0"/>
+                      </a:endParaRPr>
+                    </a:p>
+                  </a:txBody>
+                  <a:tcPr marL="101600" marR="101600" marT="50800" marB="50800" anchor="ctr">
+                    <a:lnL w="6350" cap="flat" cmpd="sng" algn="ctr">
+                      <a:solidFill>
+                        <a:srgbClr val="E5E2DC"/>
+                      </a:solidFill>
+                      <a:prstDash val="solid"/>
+                      <a:round/>
+                      <a:headEnd type="none" w="med" len="med"/>
+                      <a:tailEnd type="none" w="med" len="med"/>
+                    </a:lnL>
+                    <a:lnR w="6350" cap="flat" cmpd="sng" algn="ctr">
+                      <a:solidFill>
+                        <a:srgbClr val="E5E2DC"/>
+                      </a:solidFill>
+                      <a:prstDash val="solid"/>
+                      <a:round/>
+                      <a:headEnd type="none" w="med" len="med"/>
+                      <a:tailEnd type="none" w="med" len="med"/>
+                    </a:lnR>
+                    <a:lnT w="6350" cap="flat" cmpd="sng" algn="ctr">
+                      <a:solidFill>
+                        <a:srgbClr val="E5E2DC"/>
+                      </a:solidFill>
+                      <a:prstDash val="solid"/>
+                      <a:round/>
+                      <a:headEnd type="none" w="med" len="med"/>
+                      <a:tailEnd type="none" w="med" len="med"/>
+                    </a:lnT>
+                    <a:lnB w="6350" cap="flat" cmpd="sng" algn="ctr">
+                      <a:solidFill>
+                        <a:srgbClr val="E5E2DC"/>
+                      </a:solidFill>
+                      <a:prstDash val="solid"/>
+                      <a:round/>
+                      <a:headEnd type="none" w="med" len="med"/>
+                      <a:tailEnd type="none" w="med" len="med"/>
+                    </a:lnB>
+                    <a:solidFill>
+                      <a:srgbClr val="F8F6F3"/>
+                    </a:solidFill>
+                  </a:tcPr>
+                </a:tc>
+                <a:tc>
+                  <a:txBody>
+                    <a:bodyPr/>
+                    <a:lstStyle/>
+                    <a:p>
+                      <a:pPr indent="0" marL="0">
+                        <a:buNone/>
+                      </a:pPr>
+                      <a:r>
+                        <a:rPr lang="en-US" sz="1200" dirty="0">
+                          <a:solidFill>
+                            <a:srgbClr val="3D3A36"/>
+                          </a:solidFill>
+                          <a:latin typeface="Arial" pitchFamily="34" charset="0"/>
+                          <a:ea typeface="Arial" pitchFamily="34" charset="-122"/>
+                          <a:cs typeface="Arial" pitchFamily="34" charset="-120"/>
+                        </a:rPr>
+                        <a:t>12</a:t>
+                      </a:r>
+                      <a:endParaRPr lang="en-US" sz="1200" dirty="0">
+                        <a:latin typeface="Arial" charset="0"/>
+                        <a:ea typeface="Arial" charset="0"/>
+                        <a:cs typeface="Arial" charset="0"/>
+                      </a:endParaRPr>
+                    </a:p>
+                  </a:txBody>
+                  <a:tcPr marL="101600" marR="101600" marT="50800" marB="50800" anchor="ctr">
+                    <a:lnL w="6350" cap="flat" cmpd="sng" algn="ctr">
+                      <a:solidFill>
+                        <a:srgbClr val="E5E2DC"/>
+                      </a:solidFill>
+                      <a:prstDash val="solid"/>
+                      <a:round/>
+                      <a:headEnd type="none" w="med" len="med"/>
+                      <a:tailEnd type="none" w="med" len="med"/>
+                    </a:lnL>
+                    <a:lnR w="6350" cap="flat" cmpd="sng" algn="ctr">
+                      <a:solidFill>
+                        <a:srgbClr val="E5E2DC"/>
+                      </a:solidFill>
+                      <a:prstDash val="solid"/>
+                      <a:round/>
+                      <a:headEnd type="none" w="med" len="med"/>
+                      <a:tailEnd type="none" w="med" len="med"/>
+                    </a:lnR>
+                    <a:lnT w="6350" cap="flat" cmpd="sng" algn="ctr">
+                      <a:solidFill>
+                        <a:srgbClr val="E5E2DC"/>
+                      </a:solidFill>
+                      <a:prstDash val="solid"/>
+                      <a:round/>
+                      <a:headEnd type="none" w="med" len="med"/>
+                      <a:tailEnd type="none" w="med" len="med"/>
+                    </a:lnT>
+                    <a:lnB w="6350" cap="flat" cmpd="sng" algn="ctr">
+                      <a:solidFill>
+                        <a:srgbClr val="E5E2DC"/>
+                      </a:solidFill>
+                      <a:prstDash val="solid"/>
+                      <a:round/>
+                      <a:headEnd type="none" w="med" len="med"/>
+                      <a:tailEnd type="none" w="med" len="med"/>
+                    </a:lnB>
+                    <a:solidFill>
+                      <a:srgbClr val="F8F6F3"/>
+                    </a:solidFill>
+                  </a:tcPr>
+                </a:tc>
+                <a:tc>
+                  <a:txBody>
+                    <a:bodyPr/>
+                    <a:lstStyle/>
+                    <a:p>
+                      <a:pPr indent="0" marL="0">
+                        <a:buNone/>
+                      </a:pPr>
+                      <a:r>
+                        <a:rPr lang="en-US" sz="1200" dirty="0">
+                          <a:solidFill>
+                            <a:srgbClr val="3D3A36"/>
+                          </a:solidFill>
+                          <a:latin typeface="Arial" pitchFamily="34" charset="0"/>
+                          <a:ea typeface="Arial" pitchFamily="34" charset="-122"/>
+                          <a:cs typeface="Arial" pitchFamily="34" charset="-120"/>
+                        </a:rPr>
+                        <a:t>12/60 = 0.20</a:t>
+                      </a:r>
+                      <a:endParaRPr lang="en-US" sz="1200" dirty="0">
+                        <a:latin typeface="Arial" charset="0"/>
+                        <a:ea typeface="Arial" charset="0"/>
+                        <a:cs typeface="Arial" charset="0"/>
+                      </a:endParaRPr>
+                    </a:p>
+                  </a:txBody>
+                  <a:tcPr marL="101600" marR="101600" marT="50800" marB="50800" anchor="ctr">
+                    <a:lnL w="6350" cap="flat" cmpd="sng" algn="ctr">
+                      <a:solidFill>
+                        <a:srgbClr val="E5E2DC"/>
+                      </a:solidFill>
+                      <a:prstDash val="solid"/>
+                      <a:round/>
+                      <a:headEnd type="none" w="med" len="med"/>
+                      <a:tailEnd type="none" w="med" len="med"/>
+                    </a:lnL>
+                    <a:lnR w="6350" cap="flat" cmpd="sng" algn="ctr">
+                      <a:solidFill>
+                        <a:srgbClr val="E5E2DC"/>
+                      </a:solidFill>
+                      <a:prstDash val="solid"/>
+                      <a:round/>
+                      <a:headEnd type="none" w="med" len="med"/>
+                      <a:tailEnd type="none" w="med" len="med"/>
+                    </a:lnR>
+                    <a:lnT w="6350" cap="flat" cmpd="sng" algn="ctr">
+                      <a:solidFill>
+                        <a:srgbClr val="E5E2DC"/>
+                      </a:solidFill>
+                      <a:prstDash val="solid"/>
+                      <a:round/>
+                      <a:headEnd type="none" w="med" len="med"/>
+                      <a:tailEnd type="none" w="med" len="med"/>
+                    </a:lnT>
+                    <a:lnB w="6350" cap="flat" cmpd="sng" algn="ctr">
+                      <a:solidFill>
+                        <a:srgbClr val="E5E2DC"/>
+                      </a:solidFill>
+                      <a:prstDash val="solid"/>
+                      <a:round/>
+                      <a:headEnd type="none" w="med" len="med"/>
+                      <a:tailEnd type="none" w="med" len="med"/>
+                    </a:lnB>
+                    <a:solidFill>
+                      <a:srgbClr val="F8F6F3"/>
+                    </a:solidFill>
+                  </a:tcPr>
+                </a:tc>
+                <a:tc>
+                  <a:txBody>
+                    <a:bodyPr/>
+                    <a:lstStyle/>
+                    <a:p>
+                      <a:pPr indent="0" marL="0">
+                        <a:buNone/>
+                      </a:pPr>
+                      <a:r>
+                        <a:rPr lang="en-US" sz="1200" dirty="0">
+                          <a:solidFill>
+                            <a:srgbClr val="3D3A36"/>
+                          </a:solidFill>
+                          <a:latin typeface="Arial" pitchFamily="34" charset="0"/>
+                          <a:ea typeface="Arial" pitchFamily="34" charset="-122"/>
+                          <a:cs typeface="Arial" pitchFamily="34" charset="-120"/>
+                        </a:rPr>
+                        <a:t>1/6 = 0.17</a:t>
+                      </a:r>
+                      <a:endParaRPr lang="en-US" sz="1200" dirty="0">
+                        <a:latin typeface="Arial" charset="0"/>
+                        <a:ea typeface="Arial" charset="0"/>
+                        <a:cs typeface="Arial" charset="0"/>
+                      </a:endParaRPr>
+                    </a:p>
+                  </a:txBody>
+                  <a:tcPr marL="101600" marR="101600" marT="50800" marB="50800" anchor="ctr">
+                    <a:lnL w="6350" cap="flat" cmpd="sng" algn="ctr">
+                      <a:solidFill>
+                        <a:srgbClr val="E5E2DC"/>
+                      </a:solidFill>
+                      <a:prstDash val="solid"/>
+                      <a:round/>
+                      <a:headEnd type="none" w="med" len="med"/>
+                      <a:tailEnd type="none" w="med" len="med"/>
+                    </a:lnL>
+                    <a:lnR w="6350" cap="flat" cmpd="sng" algn="ctr">
+                      <a:solidFill>
+                        <a:srgbClr val="E5E2DC"/>
+                      </a:solidFill>
+                      <a:prstDash val="solid"/>
+                      <a:round/>
+                      <a:headEnd type="none" w="med" len="med"/>
+                      <a:tailEnd type="none" w="med" len="med"/>
+                    </a:lnR>
+                    <a:lnT w="6350" cap="flat" cmpd="sng" algn="ctr">
+                      <a:solidFill>
+                        <a:srgbClr val="E5E2DC"/>
+                      </a:solidFill>
+                      <a:prstDash val="solid"/>
+                      <a:round/>
+                      <a:headEnd type="none" w="med" len="med"/>
+                      <a:tailEnd type="none" w="med" len="med"/>
+                    </a:lnT>
+                    <a:lnB w="6350" cap="flat" cmpd="sng" algn="ctr">
+                      <a:solidFill>
+                        <a:srgbClr val="E5E2DC"/>
+                      </a:solidFill>
+                      <a:prstDash val="solid"/>
+                      <a:round/>
+                      <a:headEnd type="none" w="med" len="med"/>
+                      <a:tailEnd type="none" w="med" len="med"/>
+                    </a:lnB>
+                    <a:solidFill>
+                      <a:srgbClr val="F8F6F3"/>
+                    </a:solidFill>
+                  </a:tcPr>
+                </a:tc>
+              </a:tr>
+              <a:tr h="365760">
+                <a:tc>
+                  <a:txBody>
+                    <a:bodyPr/>
+                    <a:lstStyle/>
+                    <a:p>
+                      <a:pPr indent="0" marL="0">
+                        <a:buNone/>
+                      </a:pPr>
+                      <a:r>
+                        <a:rPr lang="en-US" sz="1200" dirty="0">
+                          <a:solidFill>
+                            <a:srgbClr val="3D3A36"/>
+                          </a:solidFill>
+                          <a:latin typeface="Arial" pitchFamily="34" charset="0"/>
+                          <a:ea typeface="Arial" pitchFamily="34" charset="-122"/>
+                          <a:cs typeface="Arial" pitchFamily="34" charset="-120"/>
+                        </a:rPr>
+                        <a:t>3</a:t>
+                      </a:r>
+                      <a:endParaRPr lang="en-US" sz="1200" dirty="0">
+                        <a:latin typeface="Arial" charset="0"/>
+                        <a:ea typeface="Arial" charset="0"/>
+                        <a:cs typeface="Arial" charset="0"/>
+                      </a:endParaRPr>
+                    </a:p>
+                  </a:txBody>
+                  <a:tcPr marL="101600" marR="101600" marT="50800" marB="50800" anchor="ctr">
+                    <a:lnL w="6350" cap="flat" cmpd="sng" algn="ctr">
+                      <a:solidFill>
+                        <a:srgbClr val="E5E2DC"/>
+                      </a:solidFill>
+                      <a:prstDash val="solid"/>
+                      <a:round/>
+                      <a:headEnd type="none" w="med" len="med"/>
+                      <a:tailEnd type="none" w="med" len="med"/>
+                    </a:lnL>
+                    <a:lnR w="6350" cap="flat" cmpd="sng" algn="ctr">
+                      <a:solidFill>
+                        <a:srgbClr val="E5E2DC"/>
+                      </a:solidFill>
+                      <a:prstDash val="solid"/>
+                      <a:round/>
+                      <a:headEnd type="none" w="med" len="med"/>
+                      <a:tailEnd type="none" w="med" len="med"/>
+                    </a:lnR>
+                    <a:lnT w="6350" cap="flat" cmpd="sng" algn="ctr">
+                      <a:solidFill>
+                        <a:srgbClr val="E5E2DC"/>
+                      </a:solidFill>
+                      <a:prstDash val="solid"/>
+                      <a:round/>
+                      <a:headEnd type="none" w="med" len="med"/>
+                      <a:tailEnd type="none" w="med" len="med"/>
+                    </a:lnT>
+                    <a:lnB w="6350" cap="flat" cmpd="sng" algn="ctr">
+                      <a:solidFill>
+                        <a:srgbClr val="E5E2DC"/>
+                      </a:solidFill>
+                      <a:prstDash val="solid"/>
+                      <a:round/>
+                      <a:headEnd type="none" w="med" len="med"/>
+                      <a:tailEnd type="none" w="med" len="med"/>
+                    </a:lnB>
+                    <a:solidFill>
+                      <a:srgbClr val="FFFFFF"/>
+                    </a:solidFill>
+                  </a:tcPr>
+                </a:tc>
+                <a:tc>
+                  <a:txBody>
+                    <a:bodyPr/>
+                    <a:lstStyle/>
+                    <a:p>
+                      <a:pPr indent="0" marL="0">
+                        <a:buNone/>
+                      </a:pPr>
+                      <a:r>
+                        <a:rPr lang="en-US" sz="1200" dirty="0">
+                          <a:solidFill>
+                            <a:srgbClr val="3D3A36"/>
+                          </a:solidFill>
+                          <a:latin typeface="Arial" pitchFamily="34" charset="0"/>
+                          <a:ea typeface="Arial" pitchFamily="34" charset="-122"/>
+                          <a:cs typeface="Arial" pitchFamily="34" charset="-120"/>
+                        </a:rPr>
+                        <a:t>9</a:t>
+                      </a:r>
+                      <a:endParaRPr lang="en-US" sz="1200" dirty="0">
+                        <a:latin typeface="Arial" charset="0"/>
+                        <a:ea typeface="Arial" charset="0"/>
+                        <a:cs typeface="Arial" charset="0"/>
+                      </a:endParaRPr>
+                    </a:p>
+                  </a:txBody>
+                  <a:tcPr marL="101600" marR="101600" marT="50800" marB="50800" anchor="ctr">
+                    <a:lnL w="6350" cap="flat" cmpd="sng" algn="ctr">
+                      <a:solidFill>
+                        <a:srgbClr val="E5E2DC"/>
+                      </a:solidFill>
+                      <a:prstDash val="solid"/>
+                      <a:round/>
+                      <a:headEnd type="none" w="med" len="med"/>
+                      <a:tailEnd type="none" w="med" len="med"/>
+                    </a:lnL>
+                    <a:lnR w="6350" cap="flat" cmpd="sng" algn="ctr">
+                      <a:solidFill>
+                        <a:srgbClr val="E5E2DC"/>
+                      </a:solidFill>
+                      <a:prstDash val="solid"/>
+                      <a:round/>
+                      <a:headEnd type="none" w="med" len="med"/>
+                      <a:tailEnd type="none" w="med" len="med"/>
+                    </a:lnR>
+                    <a:lnT w="6350" cap="flat" cmpd="sng" algn="ctr">
+                      <a:solidFill>
+                        <a:srgbClr val="E5E2DC"/>
+                      </a:solidFill>
+                      <a:prstDash val="solid"/>
+                      <a:round/>
+                      <a:headEnd type="none" w="med" len="med"/>
+                      <a:tailEnd type="none" w="med" len="med"/>
+                    </a:lnT>
+                    <a:lnB w="6350" cap="flat" cmpd="sng" algn="ctr">
+                      <a:solidFill>
+                        <a:srgbClr val="E5E2DC"/>
+                      </a:solidFill>
+                      <a:prstDash val="solid"/>
+                      <a:round/>
+                      <a:headEnd type="none" w="med" len="med"/>
+                      <a:tailEnd type="none" w="med" len="med"/>
+                    </a:lnB>
+                    <a:solidFill>
+                      <a:srgbClr val="FFFFFF"/>
+                    </a:solidFill>
+                  </a:tcPr>
+                </a:tc>
+                <a:tc>
+                  <a:txBody>
+                    <a:bodyPr/>
+                    <a:lstStyle/>
+                    <a:p>
+                      <a:pPr indent="0" marL="0">
+                        <a:buNone/>
+                      </a:pPr>
+                      <a:r>
+                        <a:rPr lang="en-US" sz="1200" dirty="0">
+                          <a:solidFill>
+                            <a:srgbClr val="3D3A36"/>
+                          </a:solidFill>
+                          <a:latin typeface="Arial" pitchFamily="34" charset="0"/>
+                          <a:ea typeface="Arial" pitchFamily="34" charset="-122"/>
+                          <a:cs typeface="Arial" pitchFamily="34" charset="-120"/>
+                        </a:rPr>
+                        <a:t>9/60 = 0.15</a:t>
+                      </a:r>
+                      <a:endParaRPr lang="en-US" sz="1200" dirty="0">
+                        <a:latin typeface="Arial" charset="0"/>
+                        <a:ea typeface="Arial" charset="0"/>
+                        <a:cs typeface="Arial" charset="0"/>
+                      </a:endParaRPr>
+                    </a:p>
+                  </a:txBody>
+                  <a:tcPr marL="101600" marR="101600" marT="50800" marB="50800" anchor="ctr">
+                    <a:lnL w="6350" cap="flat" cmpd="sng" algn="ctr">
+                      <a:solidFill>
+                        <a:srgbClr val="E5E2DC"/>
+                      </a:solidFill>
+                      <a:prstDash val="solid"/>
+                      <a:round/>
+                      <a:headEnd type="none" w="med" len="med"/>
+                      <a:tailEnd type="none" w="med" len="med"/>
+                    </a:lnL>
+                    <a:lnR w="6350" cap="flat" cmpd="sng" algn="ctr">
+                      <a:solidFill>
+                        <a:srgbClr val="E5E2DC"/>
+                      </a:solidFill>
+                      <a:prstDash val="solid"/>
+                      <a:round/>
+                      <a:headEnd type="none" w="med" len="med"/>
+                      <a:tailEnd type="none" w="med" len="med"/>
+                    </a:lnR>
+                    <a:lnT w="6350" cap="flat" cmpd="sng" algn="ctr">
+                      <a:solidFill>
+                        <a:srgbClr val="E5E2DC"/>
+                      </a:solidFill>
+                      <a:prstDash val="solid"/>
+                      <a:round/>
+                      <a:headEnd type="none" w="med" len="med"/>
+                      <a:tailEnd type="none" w="med" len="med"/>
+                    </a:lnT>
+                    <a:lnB w="6350" cap="flat" cmpd="sng" algn="ctr">
+                      <a:solidFill>
+                        <a:srgbClr val="E5E2DC"/>
+                      </a:solidFill>
+                      <a:prstDash val="solid"/>
+                      <a:round/>
+                      <a:headEnd type="none" w="med" len="med"/>
+                      <a:tailEnd type="none" w="med" len="med"/>
+                    </a:lnB>
+                    <a:solidFill>
+                      <a:srgbClr val="FFFFFF"/>
+                    </a:solidFill>
+                  </a:tcPr>
+                </a:tc>
+                <a:tc>
+                  <a:txBody>
+                    <a:bodyPr/>
+                    <a:lstStyle/>
+                    <a:p>
+                      <a:pPr indent="0" marL="0">
+                        <a:buNone/>
+                      </a:pPr>
+                      <a:r>
+                        <a:rPr lang="en-US" sz="1200" dirty="0">
+                          <a:solidFill>
+                            <a:srgbClr val="3D3A36"/>
+                          </a:solidFill>
+                          <a:latin typeface="Arial" pitchFamily="34" charset="0"/>
+                          <a:ea typeface="Arial" pitchFamily="34" charset="-122"/>
+                          <a:cs typeface="Arial" pitchFamily="34" charset="-120"/>
+                        </a:rPr>
+                        <a:t>1/6 = 0.17</a:t>
+                      </a:r>
+                      <a:endParaRPr lang="en-US" sz="1200" dirty="0">
+                        <a:latin typeface="Arial" charset="0"/>
+                        <a:ea typeface="Arial" charset="0"/>
+                        <a:cs typeface="Arial" charset="0"/>
+                      </a:endParaRPr>
+                    </a:p>
+                  </a:txBody>
+                  <a:tcPr marL="101600" marR="101600" marT="50800" marB="50800" anchor="ctr">
+                    <a:lnL w="6350" cap="flat" cmpd="sng" algn="ctr">
+                      <a:solidFill>
+                        <a:srgbClr val="E5E2DC"/>
+                      </a:solidFill>
+                      <a:prstDash val="solid"/>
+                      <a:round/>
+                      <a:headEnd type="none" w="med" len="med"/>
+                      <a:tailEnd type="none" w="med" len="med"/>
+                    </a:lnL>
+                    <a:lnR w="6350" cap="flat" cmpd="sng" algn="ctr">
+                      <a:solidFill>
+                        <a:srgbClr val="E5E2DC"/>
+                      </a:solidFill>
+                      <a:prstDash val="solid"/>
+                      <a:round/>
+                      <a:headEnd type="none" w="med" len="med"/>
+                      <a:tailEnd type="none" w="med" len="med"/>
+                    </a:lnR>
+                    <a:lnT w="6350" cap="flat" cmpd="sng" algn="ctr">
+                      <a:solidFill>
+                        <a:srgbClr val="E5E2DC"/>
+                      </a:solidFill>
+                      <a:prstDash val="solid"/>
+                      <a:round/>
+                      <a:headEnd type="none" w="med" len="med"/>
+                      <a:tailEnd type="none" w="med" len="med"/>
+                    </a:lnT>
+                    <a:lnB w="6350" cap="flat" cmpd="sng" algn="ctr">
+                      <a:solidFill>
+                        <a:srgbClr val="E5E2DC"/>
+                      </a:solidFill>
+                      <a:prstDash val="solid"/>
+                      <a:round/>
+                      <a:headEnd type="none" w="med" len="med"/>
+                      <a:tailEnd type="none" w="med" len="med"/>
+                    </a:lnB>
+                    <a:solidFill>
+                      <a:srgbClr val="FFFFFF"/>
+                    </a:solidFill>
+                  </a:tcPr>
+                </a:tc>
+              </a:tr>
+              <a:tr h="365760">
+                <a:tc>
+                  <a:txBody>
+                    <a:bodyPr/>
+                    <a:lstStyle/>
+                    <a:p>
+                      <a:pPr indent="0" marL="0">
+                        <a:buNone/>
+                      </a:pPr>
+                      <a:r>
+                        <a:rPr lang="en-US" sz="1200" dirty="0">
+                          <a:solidFill>
+                            <a:srgbClr val="3D3A36"/>
+                          </a:solidFill>
+                          <a:latin typeface="Arial" pitchFamily="34" charset="0"/>
+                          <a:ea typeface="Arial" pitchFamily="34" charset="-122"/>
+                          <a:cs typeface="Arial" pitchFamily="34" charset="-120"/>
+                        </a:rPr>
+                        <a:t>4</a:t>
+                      </a:r>
+                      <a:endParaRPr lang="en-US" sz="1200" dirty="0">
+                        <a:latin typeface="Arial" charset="0"/>
+                        <a:ea typeface="Arial" charset="0"/>
+                        <a:cs typeface="Arial" charset="0"/>
+                      </a:endParaRPr>
+                    </a:p>
+                  </a:txBody>
+                  <a:tcPr marL="101600" marR="101600" marT="50800" marB="50800" anchor="ctr">
+                    <a:lnL w="6350" cap="flat" cmpd="sng" algn="ctr">
+                      <a:solidFill>
+                        <a:srgbClr val="E5E2DC"/>
+                      </a:solidFill>
+                      <a:prstDash val="solid"/>
+                      <a:round/>
+                      <a:headEnd type="none" w="med" len="med"/>
+                      <a:tailEnd type="none" w="med" len="med"/>
+                    </a:lnL>
+                    <a:lnR w="6350" cap="flat" cmpd="sng" algn="ctr">
+                      <a:solidFill>
+                        <a:srgbClr val="E5E2DC"/>
+                      </a:solidFill>
+                      <a:prstDash val="solid"/>
+                      <a:round/>
+                      <a:headEnd type="none" w="med" len="med"/>
+                      <a:tailEnd type="none" w="med" len="med"/>
+                    </a:lnR>
+                    <a:lnT w="6350" cap="flat" cmpd="sng" algn="ctr">
+                      <a:solidFill>
+                        <a:srgbClr val="E5E2DC"/>
+                      </a:solidFill>
+                      <a:prstDash val="solid"/>
+                      <a:round/>
+                      <a:headEnd type="none" w="med" len="med"/>
+                      <a:tailEnd type="none" w="med" len="med"/>
+                    </a:lnT>
+                    <a:lnB w="6350" cap="flat" cmpd="sng" algn="ctr">
+                      <a:solidFill>
+                        <a:srgbClr val="E5E2DC"/>
+                      </a:solidFill>
+                      <a:prstDash val="solid"/>
+                      <a:round/>
+                      <a:headEnd type="none" w="med" len="med"/>
+                      <a:tailEnd type="none" w="med" len="med"/>
+                    </a:lnB>
+                    <a:solidFill>
+                      <a:srgbClr val="F8F6F3"/>
+                    </a:solidFill>
+                  </a:tcPr>
+                </a:tc>
+                <a:tc>
+                  <a:txBody>
+                    <a:bodyPr/>
+                    <a:lstStyle/>
+                    <a:p>
+                      <a:pPr indent="0" marL="0">
+                        <a:buNone/>
+                      </a:pPr>
+                      <a:r>
+                        <a:rPr lang="en-US" sz="1200" dirty="0">
+                          <a:solidFill>
+                            <a:srgbClr val="3D3A36"/>
+                          </a:solidFill>
+                          <a:latin typeface="Arial" pitchFamily="34" charset="0"/>
+                          <a:ea typeface="Arial" pitchFamily="34" charset="-122"/>
+                          <a:cs typeface="Arial" pitchFamily="34" charset="-120"/>
+                        </a:rPr>
+                        <a:t>11</a:t>
+                      </a:r>
+                      <a:endParaRPr lang="en-US" sz="1200" dirty="0">
+                        <a:latin typeface="Arial" charset="0"/>
+                        <a:ea typeface="Arial" charset="0"/>
+                        <a:cs typeface="Arial" charset="0"/>
+                      </a:endParaRPr>
+                    </a:p>
+                  </a:txBody>
+                  <a:tcPr marL="101600" marR="101600" marT="50800" marB="50800" anchor="ctr">
+                    <a:lnL w="6350" cap="flat" cmpd="sng" algn="ctr">
+                      <a:solidFill>
+                        <a:srgbClr val="E5E2DC"/>
+                      </a:solidFill>
+                      <a:prstDash val="solid"/>
+                      <a:round/>
+                      <a:headEnd type="none" w="med" len="med"/>
+                      <a:tailEnd type="none" w="med" len="med"/>
+                    </a:lnL>
+                    <a:lnR w="6350" cap="flat" cmpd="sng" algn="ctr">
+                      <a:solidFill>
+                        <a:srgbClr val="E5E2DC"/>
+                      </a:solidFill>
+                      <a:prstDash val="solid"/>
+                      <a:round/>
+                      <a:headEnd type="none" w="med" len="med"/>
+                      <a:tailEnd type="none" w="med" len="med"/>
+                    </a:lnR>
+                    <a:lnT w="6350" cap="flat" cmpd="sng" algn="ctr">
+                      <a:solidFill>
+                        <a:srgbClr val="E5E2DC"/>
+                      </a:solidFill>
+                      <a:prstDash val="solid"/>
+                      <a:round/>
+                      <a:headEnd type="none" w="med" len="med"/>
+                      <a:tailEnd type="none" w="med" len="med"/>
+                    </a:lnT>
+                    <a:lnB w="6350" cap="flat" cmpd="sng" algn="ctr">
+                      <a:solidFill>
+                        <a:srgbClr val="E5E2DC"/>
+                      </a:solidFill>
+                      <a:prstDash val="solid"/>
+                      <a:round/>
+                      <a:headEnd type="none" w="med" len="med"/>
+                      <a:tailEnd type="none" w="med" len="med"/>
+                    </a:lnB>
+                    <a:solidFill>
+                      <a:srgbClr val="F8F6F3"/>
+                    </a:solidFill>
+                  </a:tcPr>
+                </a:tc>
+                <a:tc>
+                  <a:txBody>
+                    <a:bodyPr/>
+                    <a:lstStyle/>
+                    <a:p>
+                      <a:pPr indent="0" marL="0">
+                        <a:buNone/>
+                      </a:pPr>
+                      <a:r>
+                        <a:rPr lang="en-US" sz="1200" dirty="0">
+                          <a:solidFill>
+                            <a:srgbClr val="3D3A36"/>
+                          </a:solidFill>
+                          <a:latin typeface="Arial" pitchFamily="34" charset="0"/>
+                          <a:ea typeface="Arial" pitchFamily="34" charset="-122"/>
+                          <a:cs typeface="Arial" pitchFamily="34" charset="-120"/>
+                        </a:rPr>
+                        <a:t>11/60 = 0.18</a:t>
+                      </a:r>
+                      <a:endParaRPr lang="en-US" sz="1200" dirty="0">
+                        <a:latin typeface="Arial" charset="0"/>
+                        <a:ea typeface="Arial" charset="0"/>
+                        <a:cs typeface="Arial" charset="0"/>
+                      </a:endParaRPr>
+                    </a:p>
+                  </a:txBody>
+                  <a:tcPr marL="101600" marR="101600" marT="50800" marB="50800" anchor="ctr">
+                    <a:lnL w="6350" cap="flat" cmpd="sng" algn="ctr">
+                      <a:solidFill>
+                        <a:srgbClr val="E5E2DC"/>
+                      </a:solidFill>
+                      <a:prstDash val="solid"/>
+                      <a:round/>
+                      <a:headEnd type="none" w="med" len="med"/>
+                      <a:tailEnd type="none" w="med" len="med"/>
+                    </a:lnL>
+                    <a:lnR w="6350" cap="flat" cmpd="sng" algn="ctr">
+                      <a:solidFill>
+                        <a:srgbClr val="E5E2DC"/>
+                      </a:solidFill>
+                      <a:prstDash val="solid"/>
+                      <a:round/>
+                      <a:headEnd type="none" w="med" len="med"/>
+                      <a:tailEnd type="none" w="med" len="med"/>
+                    </a:lnR>
+                    <a:lnT w="6350" cap="flat" cmpd="sng" algn="ctr">
+                      <a:solidFill>
+                        <a:srgbClr val="E5E2DC"/>
+                      </a:solidFill>
+                      <a:prstDash val="solid"/>
+                      <a:round/>
+                      <a:headEnd type="none" w="med" len="med"/>
+                      <a:tailEnd type="none" w="med" len="med"/>
+                    </a:lnT>
+                    <a:lnB w="6350" cap="flat" cmpd="sng" algn="ctr">
+                      <a:solidFill>
+                        <a:srgbClr val="E5E2DC"/>
+                      </a:solidFill>
+                      <a:prstDash val="solid"/>
+                      <a:round/>
+                      <a:headEnd type="none" w="med" len="med"/>
+                      <a:tailEnd type="none" w="med" len="med"/>
+                    </a:lnB>
+                    <a:solidFill>
+                      <a:srgbClr val="F8F6F3"/>
+                    </a:solidFill>
+                  </a:tcPr>
+                </a:tc>
+                <a:tc>
+                  <a:txBody>
+                    <a:bodyPr/>
+                    <a:lstStyle/>
+                    <a:p>
+                      <a:pPr indent="0" marL="0">
+                        <a:buNone/>
+                      </a:pPr>
+                      <a:r>
+                        <a:rPr lang="en-US" sz="1200" dirty="0">
+                          <a:solidFill>
+                            <a:srgbClr val="3D3A36"/>
+                          </a:solidFill>
+                          <a:latin typeface="Arial" pitchFamily="34" charset="0"/>
+                          <a:ea typeface="Arial" pitchFamily="34" charset="-122"/>
+                          <a:cs typeface="Arial" pitchFamily="34" charset="-120"/>
+                        </a:rPr>
+                        <a:t>1/6 = 0.17</a:t>
+                      </a:r>
+                      <a:endParaRPr lang="en-US" sz="1200" dirty="0">
+                        <a:latin typeface="Arial" charset="0"/>
+                        <a:ea typeface="Arial" charset="0"/>
+                        <a:cs typeface="Arial" charset="0"/>
+                      </a:endParaRPr>
+                    </a:p>
+                  </a:txBody>
+                  <a:tcPr marL="101600" marR="101600" marT="50800" marB="50800" anchor="ctr">
+                    <a:lnL w="6350" cap="flat" cmpd="sng" algn="ctr">
+                      <a:solidFill>
+                        <a:srgbClr val="E5E2DC"/>
+                      </a:solidFill>
+                      <a:prstDash val="solid"/>
+                      <a:round/>
+                      <a:headEnd type="none" w="med" len="med"/>
+                      <a:tailEnd type="none" w="med" len="med"/>
+                    </a:lnL>
+                    <a:lnR w="6350" cap="flat" cmpd="sng" algn="ctr">
+                      <a:solidFill>
+                        <a:srgbClr val="E5E2DC"/>
+                      </a:solidFill>
+                      <a:prstDash val="solid"/>
+                      <a:round/>
+                      <a:headEnd type="none" w="med" len="med"/>
+                      <a:tailEnd type="none" w="med" len="med"/>
+                    </a:lnR>
+                    <a:lnT w="6350" cap="flat" cmpd="sng" algn="ctr">
+                      <a:solidFill>
+                        <a:srgbClr val="E5E2DC"/>
+                      </a:solidFill>
+                      <a:prstDash val="solid"/>
+                      <a:round/>
+                      <a:headEnd type="none" w="med" len="med"/>
+                      <a:tailEnd type="none" w="med" len="med"/>
+                    </a:lnT>
+                    <a:lnB w="6350" cap="flat" cmpd="sng" algn="ctr">
+                      <a:solidFill>
+                        <a:srgbClr val="E5E2DC"/>
+                      </a:solidFill>
+                      <a:prstDash val="solid"/>
+                      <a:round/>
+                      <a:headEnd type="none" w="med" len="med"/>
+                      <a:tailEnd type="none" w="med" len="med"/>
+                    </a:lnB>
+                    <a:solidFill>
+                      <a:srgbClr val="F8F6F3"/>
+                    </a:solidFill>
+                  </a:tcPr>
+                </a:tc>
+              </a:tr>
+              <a:tr h="365760">
+                <a:tc>
+                  <a:txBody>
+                    <a:bodyPr/>
+                    <a:lstStyle/>
+                    <a:p>
+                      <a:pPr indent="0" marL="0">
+                        <a:buNone/>
+                      </a:pPr>
+                      <a:r>
+                        <a:rPr lang="en-US" sz="1200" dirty="0">
+                          <a:solidFill>
+                            <a:srgbClr val="3D3A36"/>
+                          </a:solidFill>
+                          <a:latin typeface="Arial" pitchFamily="34" charset="0"/>
+                          <a:ea typeface="Arial" pitchFamily="34" charset="-122"/>
+                          <a:cs typeface="Arial" pitchFamily="34" charset="-120"/>
+                        </a:rPr>
+                        <a:t>5</a:t>
+                      </a:r>
+                      <a:endParaRPr lang="en-US" sz="1200" dirty="0">
+                        <a:latin typeface="Arial" charset="0"/>
+                        <a:ea typeface="Arial" charset="0"/>
+                        <a:cs typeface="Arial" charset="0"/>
+                      </a:endParaRPr>
+                    </a:p>
+                  </a:txBody>
+                  <a:tcPr marL="101600" marR="101600" marT="50800" marB="50800" anchor="ctr">
+                    <a:lnL w="6350" cap="flat" cmpd="sng" algn="ctr">
+                      <a:solidFill>
+                        <a:srgbClr val="E5E2DC"/>
+                      </a:solidFill>
+                      <a:prstDash val="solid"/>
+                      <a:round/>
+                      <a:headEnd type="none" w="med" len="med"/>
+                      <a:tailEnd type="none" w="med" len="med"/>
+                    </a:lnL>
+                    <a:lnR w="6350" cap="flat" cmpd="sng" algn="ctr">
+                      <a:solidFill>
+                        <a:srgbClr val="E5E2DC"/>
+                      </a:solidFill>
+                      <a:prstDash val="solid"/>
+                      <a:round/>
+                      <a:headEnd type="none" w="med" len="med"/>
+                      <a:tailEnd type="none" w="med" len="med"/>
+                    </a:lnR>
+                    <a:lnT w="6350" cap="flat" cmpd="sng" algn="ctr">
+                      <a:solidFill>
+                        <a:srgbClr val="E5E2DC"/>
+                      </a:solidFill>
+                      <a:prstDash val="solid"/>
+                      <a:round/>
+                      <a:headEnd type="none" w="med" len="med"/>
+                      <a:tailEnd type="none" w="med" len="med"/>
+                    </a:lnT>
+                    <a:lnB w="6350" cap="flat" cmpd="sng" algn="ctr">
+                      <a:solidFill>
+                        <a:srgbClr val="E5E2DC"/>
+                      </a:solidFill>
+                      <a:prstDash val="solid"/>
+                      <a:round/>
+                      <a:headEnd type="none" w="med" len="med"/>
+                      <a:tailEnd type="none" w="med" len="med"/>
+                    </a:lnB>
+                    <a:solidFill>
+                      <a:srgbClr val="FFFFFF"/>
+                    </a:solidFill>
+                  </a:tcPr>
+                </a:tc>
+                <a:tc>
+                  <a:txBody>
+                    <a:bodyPr/>
+                    <a:lstStyle/>
+                    <a:p>
+                      <a:pPr indent="0" marL="0">
+                        <a:buNone/>
+                      </a:pPr>
+                      <a:r>
+                        <a:rPr lang="en-US" sz="1200" dirty="0">
+                          <a:solidFill>
+                            <a:srgbClr val="3D3A36"/>
+                          </a:solidFill>
+                          <a:latin typeface="Arial" pitchFamily="34" charset="0"/>
+                          <a:ea typeface="Arial" pitchFamily="34" charset="-122"/>
+                          <a:cs typeface="Arial" pitchFamily="34" charset="-120"/>
+                        </a:rPr>
+                        <a:t>10</a:t>
+                      </a:r>
+                      <a:endParaRPr lang="en-US" sz="1200" dirty="0">
+                        <a:latin typeface="Arial" charset="0"/>
+                        <a:ea typeface="Arial" charset="0"/>
+                        <a:cs typeface="Arial" charset="0"/>
+                      </a:endParaRPr>
+                    </a:p>
+                  </a:txBody>
+                  <a:tcPr marL="101600" marR="101600" marT="50800" marB="50800" anchor="ctr">
+                    <a:lnL w="6350" cap="flat" cmpd="sng" algn="ctr">
+                      <a:solidFill>
+                        <a:srgbClr val="E5E2DC"/>
+                      </a:solidFill>
+                      <a:prstDash val="solid"/>
+                      <a:round/>
+                      <a:headEnd type="none" w="med" len="med"/>
+                      <a:tailEnd type="none" w="med" len="med"/>
+                    </a:lnL>
+                    <a:lnR w="6350" cap="flat" cmpd="sng" algn="ctr">
+                      <a:solidFill>
+                        <a:srgbClr val="E5E2DC"/>
+                      </a:solidFill>
+                      <a:prstDash val="solid"/>
+                      <a:round/>
+                      <a:headEnd type="none" w="med" len="med"/>
+                      <a:tailEnd type="none" w="med" len="med"/>
+                    </a:lnR>
+                    <a:lnT w="6350" cap="flat" cmpd="sng" algn="ctr">
+                      <a:solidFill>
+                        <a:srgbClr val="E5E2DC"/>
+                      </a:solidFill>
+                      <a:prstDash val="solid"/>
+                      <a:round/>
+                      <a:headEnd type="none" w="med" len="med"/>
+                      <a:tailEnd type="none" w="med" len="med"/>
+                    </a:lnT>
+                    <a:lnB w="6350" cap="flat" cmpd="sng" algn="ctr">
+                      <a:solidFill>
+                        <a:srgbClr val="E5E2DC"/>
+                      </a:solidFill>
+                      <a:prstDash val="solid"/>
+                      <a:round/>
+                      <a:headEnd type="none" w="med" len="med"/>
+                      <a:tailEnd type="none" w="med" len="med"/>
+                    </a:lnB>
+                    <a:solidFill>
+                      <a:srgbClr val="FFFFFF"/>
+                    </a:solidFill>
+                  </a:tcPr>
+                </a:tc>
+                <a:tc>
+                  <a:txBody>
+                    <a:bodyPr/>
+                    <a:lstStyle/>
+                    <a:p>
+                      <a:pPr indent="0" marL="0">
+                        <a:buNone/>
+                      </a:pPr>
+                      <a:r>
+                        <a:rPr lang="en-US" sz="1200" dirty="0">
+                          <a:solidFill>
+                            <a:srgbClr val="3D3A36"/>
+                          </a:solidFill>
+                          <a:latin typeface="Arial" pitchFamily="34" charset="0"/>
+                          <a:ea typeface="Arial" pitchFamily="34" charset="-122"/>
+                          <a:cs typeface="Arial" pitchFamily="34" charset="-120"/>
+                        </a:rPr>
+                        <a:t>10/60 = 0.17</a:t>
+                      </a:r>
+                      <a:endParaRPr lang="en-US" sz="1200" dirty="0">
+                        <a:latin typeface="Arial" charset="0"/>
+                        <a:ea typeface="Arial" charset="0"/>
+                        <a:cs typeface="Arial" charset="0"/>
+                      </a:endParaRPr>
+                    </a:p>
+                  </a:txBody>
+                  <a:tcPr marL="101600" marR="101600" marT="50800" marB="50800" anchor="ctr">
+                    <a:lnL w="6350" cap="flat" cmpd="sng" algn="ctr">
+                      <a:solidFill>
+                        <a:srgbClr val="E5E2DC"/>
+                      </a:solidFill>
+                      <a:prstDash val="solid"/>
+                      <a:round/>
+                      <a:headEnd type="none" w="med" len="med"/>
+                      <a:tailEnd type="none" w="med" len="med"/>
+                    </a:lnL>
+                    <a:lnR w="6350" cap="flat" cmpd="sng" algn="ctr">
+                      <a:solidFill>
+                        <a:srgbClr val="E5E2DC"/>
+                      </a:solidFill>
+                      <a:prstDash val="solid"/>
+                      <a:round/>
+                      <a:headEnd type="none" w="med" len="med"/>
+                      <a:tailEnd type="none" w="med" len="med"/>
+                    </a:lnR>
+                    <a:lnT w="6350" cap="flat" cmpd="sng" algn="ctr">
+                      <a:solidFill>
+                        <a:srgbClr val="E5E2DC"/>
+                      </a:solidFill>
+                      <a:prstDash val="solid"/>
+                      <a:round/>
+                      <a:headEnd type="none" w="med" len="med"/>
+                      <a:tailEnd type="none" w="med" len="med"/>
+                    </a:lnT>
+                    <a:lnB w="6350" cap="flat" cmpd="sng" algn="ctr">
+                      <a:solidFill>
+                        <a:srgbClr val="E5E2DC"/>
+                      </a:solidFill>
+                      <a:prstDash val="solid"/>
+                      <a:round/>
+                      <a:headEnd type="none" w="med" len="med"/>
+                      <a:tailEnd type="none" w="med" len="med"/>
+                    </a:lnB>
+                    <a:solidFill>
+                      <a:srgbClr val="FFFFFF"/>
+                    </a:solidFill>
+                  </a:tcPr>
+                </a:tc>
+                <a:tc>
+                  <a:txBody>
+                    <a:bodyPr/>
+                    <a:lstStyle/>
+                    <a:p>
+                      <a:pPr indent="0" marL="0">
+                        <a:buNone/>
+                      </a:pPr>
+                      <a:r>
+                        <a:rPr lang="en-US" sz="1200" dirty="0">
+                          <a:solidFill>
+                            <a:srgbClr val="3D3A36"/>
+                          </a:solidFill>
+                          <a:latin typeface="Arial" pitchFamily="34" charset="0"/>
+                          <a:ea typeface="Arial" pitchFamily="34" charset="-122"/>
+                          <a:cs typeface="Arial" pitchFamily="34" charset="-120"/>
+                        </a:rPr>
+                        <a:t>1/6 = 0.17</a:t>
+                      </a:r>
+                      <a:endParaRPr lang="en-US" sz="1200" dirty="0">
+                        <a:latin typeface="Arial" charset="0"/>
+                        <a:ea typeface="Arial" charset="0"/>
+                        <a:cs typeface="Arial" charset="0"/>
+                      </a:endParaRPr>
+                    </a:p>
+                  </a:txBody>
+                  <a:tcPr marL="101600" marR="101600" marT="50800" marB="50800" anchor="ctr">
+                    <a:lnL w="6350" cap="flat" cmpd="sng" algn="ctr">
+                      <a:solidFill>
+                        <a:srgbClr val="E5E2DC"/>
+                      </a:solidFill>
+                      <a:prstDash val="solid"/>
+                      <a:round/>
+                      <a:headEnd type="none" w="med" len="med"/>
+                      <a:tailEnd type="none" w="med" len="med"/>
+                    </a:lnL>
+                    <a:lnR w="6350" cap="flat" cmpd="sng" algn="ctr">
+                      <a:solidFill>
+                        <a:srgbClr val="E5E2DC"/>
+                      </a:solidFill>
+                      <a:prstDash val="solid"/>
+                      <a:round/>
+                      <a:headEnd type="none" w="med" len="med"/>
+                      <a:tailEnd type="none" w="med" len="med"/>
+                    </a:lnR>
+                    <a:lnT w="6350" cap="flat" cmpd="sng" algn="ctr">
+                      <a:solidFill>
+                        <a:srgbClr val="E5E2DC"/>
+                      </a:solidFill>
+                      <a:prstDash val="solid"/>
+                      <a:round/>
+                      <a:headEnd type="none" w="med" len="med"/>
+                      <a:tailEnd type="none" w="med" len="med"/>
+                    </a:lnT>
+                    <a:lnB w="6350" cap="flat" cmpd="sng" algn="ctr">
+                      <a:solidFill>
+                        <a:srgbClr val="E5E2DC"/>
+                      </a:solidFill>
+                      <a:prstDash val="solid"/>
+                      <a:round/>
+                      <a:headEnd type="none" w="med" len="med"/>
+                      <a:tailEnd type="none" w="med" len="med"/>
+                    </a:lnB>
+                    <a:solidFill>
+                      <a:srgbClr val="FFFFFF"/>
+                    </a:solidFill>
+                  </a:tcPr>
+                </a:tc>
+              </a:tr>
+              <a:tr h="365760">
+                <a:tc>
+                  <a:txBody>
+                    <a:bodyPr/>
+                    <a:lstStyle/>
+                    <a:p>
+                      <a:pPr indent="0" marL="0">
+                        <a:buNone/>
+                      </a:pPr>
+                      <a:r>
+                        <a:rPr lang="en-US" sz="1200" dirty="0">
+                          <a:solidFill>
+                            <a:srgbClr val="3D3A36"/>
+                          </a:solidFill>
+                          <a:latin typeface="Arial" pitchFamily="34" charset="0"/>
+                          <a:ea typeface="Arial" pitchFamily="34" charset="-122"/>
+                          <a:cs typeface="Arial" pitchFamily="34" charset="-120"/>
+                        </a:rPr>
+                        <a:t>6</a:t>
+                      </a:r>
+                      <a:endParaRPr lang="en-US" sz="1200" dirty="0">
+                        <a:latin typeface="Arial" charset="0"/>
+                        <a:ea typeface="Arial" charset="0"/>
+                        <a:cs typeface="Arial" charset="0"/>
+                      </a:endParaRPr>
+                    </a:p>
+                  </a:txBody>
+                  <a:tcPr marL="101600" marR="101600" marT="50800" marB="50800" anchor="ctr">
+                    <a:lnL w="6350" cap="flat" cmpd="sng" algn="ctr">
+                      <a:solidFill>
+                        <a:srgbClr val="E5E2DC"/>
+                      </a:solidFill>
+                      <a:prstDash val="solid"/>
+                      <a:round/>
+                      <a:headEnd type="none" w="med" len="med"/>
+                      <a:tailEnd type="none" w="med" len="med"/>
+                    </a:lnL>
+                    <a:lnR w="6350" cap="flat" cmpd="sng" algn="ctr">
+                      <a:solidFill>
+                        <a:srgbClr val="E5E2DC"/>
+                      </a:solidFill>
+                      <a:prstDash val="solid"/>
+                      <a:round/>
+                      <a:headEnd type="none" w="med" len="med"/>
+                      <a:tailEnd type="none" w="med" len="med"/>
+                    </a:lnR>
+                    <a:lnT w="6350" cap="flat" cmpd="sng" algn="ctr">
+                      <a:solidFill>
+                        <a:srgbClr val="E5E2DC"/>
+                      </a:solidFill>
+                      <a:prstDash val="solid"/>
+                      <a:round/>
+                      <a:headEnd type="none" w="med" len="med"/>
+                      <a:tailEnd type="none" w="med" len="med"/>
+                    </a:lnT>
+                    <a:lnB w="6350" cap="flat" cmpd="sng" algn="ctr">
+                      <a:solidFill>
+                        <a:srgbClr val="E5E2DC"/>
+                      </a:solidFill>
+                      <a:prstDash val="solid"/>
+                      <a:round/>
+                      <a:headEnd type="none" w="med" len="med"/>
+                      <a:tailEnd type="none" w="med" len="med"/>
+                    </a:lnB>
+                    <a:solidFill>
+                      <a:srgbClr val="F8F6F3"/>
+                    </a:solidFill>
+                  </a:tcPr>
+                </a:tc>
+                <a:tc>
+                  <a:txBody>
+                    <a:bodyPr/>
+                    <a:lstStyle/>
+                    <a:p>
+                      <a:pPr indent="0" marL="0">
+                        <a:buNone/>
+                      </a:pPr>
+                      <a:r>
+                        <a:rPr lang="en-US" sz="1200" dirty="0">
+                          <a:solidFill>
+                            <a:srgbClr val="3D3A36"/>
+                          </a:solidFill>
+                          <a:latin typeface="Arial" pitchFamily="34" charset="0"/>
+                          <a:ea typeface="Arial" pitchFamily="34" charset="-122"/>
+                          <a:cs typeface="Arial" pitchFamily="34" charset="-120"/>
+                        </a:rPr>
+                        <a:t>10</a:t>
+                      </a:r>
+                      <a:endParaRPr lang="en-US" sz="1200" dirty="0">
+                        <a:latin typeface="Arial" charset="0"/>
+                        <a:ea typeface="Arial" charset="0"/>
+                        <a:cs typeface="Arial" charset="0"/>
+                      </a:endParaRPr>
+                    </a:p>
+                  </a:txBody>
+                  <a:tcPr marL="101600" marR="101600" marT="50800" marB="50800" anchor="ctr">
+                    <a:lnL w="6350" cap="flat" cmpd="sng" algn="ctr">
+                      <a:solidFill>
+                        <a:srgbClr val="E5E2DC"/>
+                      </a:solidFill>
+                      <a:prstDash val="solid"/>
+                      <a:round/>
+                      <a:headEnd type="none" w="med" len="med"/>
+                      <a:tailEnd type="none" w="med" len="med"/>
+                    </a:lnL>
+                    <a:lnR w="6350" cap="flat" cmpd="sng" algn="ctr">
+                      <a:solidFill>
+                        <a:srgbClr val="E5E2DC"/>
+                      </a:solidFill>
+                      <a:prstDash val="solid"/>
+                      <a:round/>
+                      <a:headEnd type="none" w="med" len="med"/>
+                      <a:tailEnd type="none" w="med" len="med"/>
+                    </a:lnR>
+                    <a:lnT w="6350" cap="flat" cmpd="sng" algn="ctr">
+                      <a:solidFill>
+                        <a:srgbClr val="E5E2DC"/>
+                      </a:solidFill>
+                      <a:prstDash val="solid"/>
+                      <a:round/>
+                      <a:headEnd type="none" w="med" len="med"/>
+                      <a:tailEnd type="none" w="med" len="med"/>
+                    </a:lnT>
+                    <a:lnB w="6350" cap="flat" cmpd="sng" algn="ctr">
+                      <a:solidFill>
+                        <a:srgbClr val="E5E2DC"/>
+                      </a:solidFill>
+                      <a:prstDash val="solid"/>
+                      <a:round/>
+                      <a:headEnd type="none" w="med" len="med"/>
+                      <a:tailEnd type="none" w="med" len="med"/>
+                    </a:lnB>
+                    <a:solidFill>
+                      <a:srgbClr val="F8F6F3"/>
+                    </a:solidFill>
+                  </a:tcPr>
+                </a:tc>
+                <a:tc>
+                  <a:txBody>
+                    <a:bodyPr/>
+                    <a:lstStyle/>
+                    <a:p>
+                      <a:pPr indent="0" marL="0">
+                        <a:buNone/>
+                      </a:pPr>
+                      <a:r>
+                        <a:rPr lang="en-US" sz="1200" dirty="0">
+                          <a:solidFill>
+                            <a:srgbClr val="3D3A36"/>
+                          </a:solidFill>
+                          <a:latin typeface="Arial" pitchFamily="34" charset="0"/>
+                          <a:ea typeface="Arial" pitchFamily="34" charset="-122"/>
+                          <a:cs typeface="Arial" pitchFamily="34" charset="-120"/>
+                        </a:rPr>
+                        <a:t>10/60 = 0.17</a:t>
+                      </a:r>
+                      <a:endParaRPr lang="en-US" sz="1200" dirty="0">
+                        <a:latin typeface="Arial" charset="0"/>
+                        <a:ea typeface="Arial" charset="0"/>
+                        <a:cs typeface="Arial" charset="0"/>
+                      </a:endParaRPr>
+                    </a:p>
+                  </a:txBody>
+                  <a:tcPr marL="101600" marR="101600" marT="50800" marB="50800" anchor="ctr">
+                    <a:lnL w="6350" cap="flat" cmpd="sng" algn="ctr">
+                      <a:solidFill>
+                        <a:srgbClr val="E5E2DC"/>
+                      </a:solidFill>
+                      <a:prstDash val="solid"/>
+                      <a:round/>
+                      <a:headEnd type="none" w="med" len="med"/>
+                      <a:tailEnd type="none" w="med" len="med"/>
+                    </a:lnL>
+                    <a:lnR w="6350" cap="flat" cmpd="sng" algn="ctr">
+                      <a:solidFill>
+                        <a:srgbClr val="E5E2DC"/>
+                      </a:solidFill>
+                      <a:prstDash val="solid"/>
+                      <a:round/>
+                      <a:headEnd type="none" w="med" len="med"/>
+                      <a:tailEnd type="none" w="med" len="med"/>
+                    </a:lnR>
+                    <a:lnT w="6350" cap="flat" cmpd="sng" algn="ctr">
+                      <a:solidFill>
+                        <a:srgbClr val="E5E2DC"/>
+                      </a:solidFill>
+                      <a:prstDash val="solid"/>
+                      <a:round/>
+                      <a:headEnd type="none" w="med" len="med"/>
+                      <a:tailEnd type="none" w="med" len="med"/>
+                    </a:lnT>
+                    <a:lnB w="6350" cap="flat" cmpd="sng" algn="ctr">
+                      <a:solidFill>
+                        <a:srgbClr val="E5E2DC"/>
+                      </a:solidFill>
+                      <a:prstDash val="solid"/>
+                      <a:round/>
+                      <a:headEnd type="none" w="med" len="med"/>
+                      <a:tailEnd type="none" w="med" len="med"/>
+                    </a:lnB>
+                    <a:solidFill>
+                      <a:srgbClr val="F8F6F3"/>
+                    </a:solidFill>
+                  </a:tcPr>
+                </a:tc>
+                <a:tc>
+                  <a:txBody>
+                    <a:bodyPr/>
+                    <a:lstStyle/>
+                    <a:p>
+                      <a:pPr indent="0" marL="0">
+                        <a:buNone/>
+                      </a:pPr>
+                      <a:r>
+                        <a:rPr lang="en-US" sz="1200" dirty="0">
+                          <a:solidFill>
+                            <a:srgbClr val="3D3A36"/>
+                          </a:solidFill>
+                          <a:latin typeface="Arial" pitchFamily="34" charset="0"/>
+                          <a:ea typeface="Arial" pitchFamily="34" charset="-122"/>
+                          <a:cs typeface="Arial" pitchFamily="34" charset="-120"/>
+                        </a:rPr>
+                        <a:t>1/6 = 0.17</a:t>
+                      </a:r>
+                      <a:endParaRPr lang="en-US" sz="1200" dirty="0">
+                        <a:latin typeface="Arial" charset="0"/>
+                        <a:ea typeface="Arial" charset="0"/>
+                        <a:cs typeface="Arial" charset="0"/>
+                      </a:endParaRPr>
+                    </a:p>
+                  </a:txBody>
+                  <a:tcPr marL="101600" marR="101600" marT="50800" marB="50800" anchor="ctr">
+                    <a:lnL w="6350" cap="flat" cmpd="sng" algn="ctr">
+                      <a:solidFill>
+                        <a:srgbClr val="E5E2DC"/>
+                      </a:solidFill>
+                      <a:prstDash val="solid"/>
+                      <a:round/>
+                      <a:headEnd type="none" w="med" len="med"/>
+                      <a:tailEnd type="none" w="med" len="med"/>
+                    </a:lnL>
+                    <a:lnR w="6350" cap="flat" cmpd="sng" algn="ctr">
+                      <a:solidFill>
+                        <a:srgbClr val="E5E2DC"/>
+                      </a:solidFill>
+                      <a:prstDash val="solid"/>
+                      <a:round/>
+                      <a:headEnd type="none" w="med" len="med"/>
+                      <a:tailEnd type="none" w="med" len="med"/>
+                    </a:lnR>
+                    <a:lnT w="6350" cap="flat" cmpd="sng" algn="ctr">
+                      <a:solidFill>
+                        <a:srgbClr val="E5E2DC"/>
+                      </a:solidFill>
+                      <a:prstDash val="solid"/>
+                      <a:round/>
+                      <a:headEnd type="none" w="med" len="med"/>
+                      <a:tailEnd type="none" w="med" len="med"/>
+                    </a:lnT>
+                    <a:lnB w="6350" cap="flat" cmpd="sng" algn="ctr">
+                      <a:solidFill>
+                        <a:srgbClr val="E5E2DC"/>
+                      </a:solidFill>
+                      <a:prstDash val="solid"/>
+                      <a:round/>
+                      <a:headEnd type="none" w="med" len="med"/>
+                      <a:tailEnd type="none" w="med" len="med"/>
+                    </a:lnB>
+                    <a:solidFill>
+                      <a:srgbClr val="F8F6F3"/>
+                    </a:solidFill>
+                  </a:tcPr>
+                </a:tc>
+              </a:tr>
+            </a:tbl>
+          </a:graphicData>
+        </a:graphic>
+      </p:graphicFrame>
     </p:spTree>
   </p:cSld>
   <p:clrMapOvr>
@@ -3712,47 +4669,7 @@
         <p:spPr>
           <a:xfrm>
             <a:off x="0" y="0"/>
-            <a:ext cx="9144000" cy="822960"/>
-          </a:xfrm>
-          <a:prstGeom prst="rect">
-            <a:avLst/>
-          </a:prstGeom>
-          <a:solidFill>
-            <a:srgbClr val="FFFFFF"/>
-          </a:solidFill>
-          <a:ln/>
-        </p:spPr>
-      </p:sp>
-      <p:sp>
-        <p:nvSpPr>
-          <p:cNvPr id="3" name="Shape 1"/>
-          <p:cNvSpPr/>
-          <p:nvPr/>
-        </p:nvSpPr>
-        <p:spPr>
-          <a:xfrm>
-            <a:off x="0" y="804672"/>
-            <a:ext cx="9144000" cy="27432"/>
-          </a:xfrm>
-          <a:prstGeom prst="rect">
-            <a:avLst/>
-          </a:prstGeom>
-          <a:solidFill>
-            <a:srgbClr val="E5E2DC"/>
-          </a:solidFill>
-          <a:ln/>
-        </p:spPr>
-      </p:sp>
-      <p:sp>
-        <p:nvSpPr>
-          <p:cNvPr id="4" name="Shape 2"/>
-          <p:cNvSpPr/>
-          <p:nvPr/>
-        </p:nvSpPr>
-        <p:spPr>
-          <a:xfrm>
-            <a:off x="548640" y="201168"/>
-            <a:ext cx="54864" cy="420624"/>
+            <a:ext cx="73152" cy="5148072"/>
           </a:xfrm>
           <a:prstGeom prst="rect">
             <a:avLst/>
@@ -3765,73 +4682,14 @@
       </p:sp>
       <p:sp>
         <p:nvSpPr>
-          <p:cNvPr id="5" name="Text 3"/>
+          <p:cNvPr id="3" name="Text 1"/>
           <p:cNvSpPr/>
           <p:nvPr/>
         </p:nvSpPr>
         <p:spPr>
           <a:xfrm>
-            <a:off x="777240" y="137160"/>
-            <a:ext cx="7772400" cy="548640"/>
-          </a:xfrm>
-          <a:prstGeom prst="rect">
-            <a:avLst/>
-          </a:prstGeom>
-          <a:noFill/>
-          <a:ln/>
-        </p:spPr>
-        <p:txBody>
-          <a:bodyPr wrap="square" lIns="0" tIns="0" rIns="0" bIns="0" rtlCol="0" anchor="ctr"/>
-          <a:lstStyle/>
-          <a:p>
-            <a:pPr indent="0" marL="0">
-              <a:buNone/>
-            </a:pPr>
-            <a:r>
-              <a:rPr lang="en-US" sz="2000" b="1" dirty="0">
-                <a:solidFill>
-                  <a:srgbClr val="1B2A4A"/>
-                </a:solidFill>
-                <a:latin typeface="Georgia" pitchFamily="34" charset="0"/>
-                <a:ea typeface="Georgia" pitchFamily="34" charset="-122"/>
-                <a:cs typeface="Georgia" pitchFamily="34" charset="-120"/>
-              </a:rPr>
-              <a:t>Check Your Understanding</a:t>
-            </a:r>
-            <a:endParaRPr lang="en-US" sz="2000" dirty="0"/>
-          </a:p>
-        </p:txBody>
-      </p:sp>
-      <p:sp>
-        <p:nvSpPr>
-          <p:cNvPr id="6" name="Shape 4"/>
-          <p:cNvSpPr/>
-          <p:nvPr/>
-        </p:nvSpPr>
-        <p:spPr>
-          <a:xfrm>
-            <a:off x="731520" y="1051560"/>
-            <a:ext cx="7680960" cy="438912"/>
-          </a:xfrm>
-          <a:prstGeom prst="rect">
-            <a:avLst/>
-          </a:prstGeom>
-          <a:solidFill>
-            <a:srgbClr val="FFFFFF"/>
-          </a:solidFill>
-          <a:ln/>
-        </p:spPr>
-      </p:sp>
-      <p:sp>
-        <p:nvSpPr>
-          <p:cNvPr id="7" name="Text 5"/>
-          <p:cNvSpPr/>
-          <p:nvPr/>
-        </p:nvSpPr>
-        <p:spPr>
-          <a:xfrm>
-            <a:off x="868680" y="1051560"/>
-            <a:ext cx="320040" cy="438912"/>
+            <a:off x="548640" y="274320"/>
+            <a:ext cx="9144000" cy="640080"/>
           </a:xfrm>
           <a:prstGeom prst="rect">
             <a:avLst/>
@@ -3847,27 +4705,50 @@
               <a:buNone/>
             </a:pPr>
             <a:r>
-              <a:rPr lang="en-US" sz="1400" dirty="0">
+              <a:rPr lang="en-US" sz="2400" b="1" dirty="0">
                 <a:solidFill>
-                  <a:srgbClr val="2A9D8F"/>
+                  <a:srgbClr val="1B2A4A"/>
                 </a:solidFill>
+                <a:latin typeface="Georgia" pitchFamily="34" charset="0"/>
+                <a:ea typeface="Georgia" pitchFamily="34" charset="-122"/>
+                <a:cs typeface="Georgia" pitchFamily="34" charset="-120"/>
               </a:rPr>
-              <a:t>☐</a:t>
+              <a:t>Check Your Understanding</a:t>
             </a:r>
-            <a:endParaRPr lang="en-US" sz="1400" dirty="0"/>
+            <a:endParaRPr lang="en-US" sz="2400" dirty="0"/>
           </a:p>
         </p:txBody>
       </p:sp>
       <p:sp>
         <p:nvSpPr>
-          <p:cNvPr id="8" name="Text 6"/>
+          <p:cNvPr id="4" name="Shape 2"/>
           <p:cNvSpPr/>
           <p:nvPr/>
         </p:nvSpPr>
         <p:spPr>
           <a:xfrm>
-            <a:off x="1234440" y="1051560"/>
-            <a:ext cx="6949440" cy="438912"/>
+            <a:off x="548640" y="960120"/>
+            <a:ext cx="2286000" cy="36576"/>
+          </a:xfrm>
+          <a:prstGeom prst="rect">
+            <a:avLst/>
+          </a:prstGeom>
+          <a:solidFill>
+            <a:srgbClr val="2A9D8F"/>
+          </a:solidFill>
+          <a:ln/>
+        </p:spPr>
+      </p:sp>
+      <p:sp>
+        <p:nvSpPr>
+          <p:cNvPr id="5" name="Text 3"/>
+          <p:cNvSpPr/>
+          <p:nvPr/>
+        </p:nvSpPr>
+        <p:spPr>
+          <a:xfrm>
+            <a:off x="548640" y="1188720"/>
+            <a:ext cx="365760" cy="457200"/>
           </a:xfrm>
           <a:prstGeom prst="rect">
             <a:avLst/>
@@ -3883,50 +4764,30 @@
               <a:buNone/>
             </a:pPr>
             <a:r>
-              <a:rPr lang="en-US" sz="1300" dirty="0">
+              <a:rPr lang="en-US" sz="1600" dirty="0">
                 <a:solidFill>
-                  <a:srgbClr val="3D3A36"/>
+                  <a:srgbClr val="2A9D8F"/>
                 </a:solidFill>
-                <a:latin typeface="Calibri" pitchFamily="34" charset="0"/>
-                <a:ea typeface="Calibri" pitchFamily="34" charset="-122"/>
-                <a:cs typeface="Calibri" pitchFamily="34" charset="-120"/>
+                <a:latin typeface="Arial" pitchFamily="34" charset="0"/>
+                <a:ea typeface="Arial" pitchFamily="34" charset="-122"/>
+                <a:cs typeface="Arial" pitchFamily="34" charset="-120"/>
               </a:rPr>
-              <a:t>I can calculate theoretical and experimental probability</a:t>
+              <a:t>☐</a:t>
             </a:r>
-            <a:endParaRPr lang="en-US" sz="1300" dirty="0"/>
+            <a:endParaRPr lang="en-US" sz="1600" dirty="0"/>
           </a:p>
         </p:txBody>
       </p:sp>
       <p:sp>
         <p:nvSpPr>
-          <p:cNvPr id="9" name="Shape 7"/>
+          <p:cNvPr id="6" name="Text 4"/>
           <p:cNvSpPr/>
           <p:nvPr/>
         </p:nvSpPr>
         <p:spPr>
           <a:xfrm>
-            <a:off x="731520" y="1554480"/>
-            <a:ext cx="7680960" cy="438912"/>
-          </a:xfrm>
-          <a:prstGeom prst="rect">
-            <a:avLst/>
-          </a:prstGeom>
-          <a:solidFill>
-            <a:srgbClr val="F8F6F3"/>
-          </a:solidFill>
-          <a:ln/>
-        </p:spPr>
-      </p:sp>
-      <p:sp>
-        <p:nvSpPr>
-          <p:cNvPr id="10" name="Text 8"/>
-          <p:cNvSpPr/>
-          <p:nvPr/>
-        </p:nvSpPr>
-        <p:spPr>
-          <a:xfrm>
-            <a:off x="868680" y="1554480"/>
-            <a:ext cx="320040" cy="438912"/>
+            <a:off x="1005840" y="1188720"/>
+            <a:ext cx="9601200" cy="457200"/>
           </a:xfrm>
           <a:prstGeom prst="rect">
             <a:avLst/>
@@ -3939,15 +4800,21 @@
           <a:lstStyle/>
           <a:p>
             <a:pPr indent="0" marL="0">
+              <a:lnSpc>
+                <a:spcPct val="130000"/>
+              </a:lnSpc>
               <a:buNone/>
             </a:pPr>
             <a:r>
               <a:rPr lang="en-US" sz="1400" dirty="0">
                 <a:solidFill>
-                  <a:srgbClr val="2A9D8F"/>
+                  <a:srgbClr val="3D3A36"/>
                 </a:solidFill>
+                <a:latin typeface="Arial" pitchFamily="34" charset="0"/>
+                <a:ea typeface="Arial" pitchFamily="34" charset="-122"/>
+                <a:cs typeface="Arial" pitchFamily="34" charset="-120"/>
               </a:rPr>
-              <a:t>☐</a:t>
+              <a:t>I can explain the difference between theoretical and experimental probability.</a:t>
             </a:r>
             <a:endParaRPr lang="en-US" sz="1400" dirty="0"/>
           </a:p>
@@ -3955,14 +4822,14 @@
       </p:sp>
       <p:sp>
         <p:nvSpPr>
-          <p:cNvPr id="11" name="Text 9"/>
+          <p:cNvPr id="7" name="Text 5"/>
           <p:cNvSpPr/>
           <p:nvPr/>
         </p:nvSpPr>
         <p:spPr>
           <a:xfrm>
-            <a:off x="1234440" y="1554480"/>
-            <a:ext cx="6949440" cy="438912"/>
+            <a:off x="548640" y="1783080"/>
+            <a:ext cx="365760" cy="457200"/>
           </a:xfrm>
           <a:prstGeom prst="rect">
             <a:avLst/>
@@ -3978,50 +4845,30 @@
               <a:buNone/>
             </a:pPr>
             <a:r>
-              <a:rPr lang="en-US" sz="1300" dirty="0">
+              <a:rPr lang="en-US" sz="1600" dirty="0">
                 <a:solidFill>
-                  <a:srgbClr val="3D3A36"/>
+                  <a:srgbClr val="2A9D8F"/>
                 </a:solidFill>
-                <a:latin typeface="Calibri" pitchFamily="34" charset="0"/>
-                <a:ea typeface="Calibri" pitchFamily="34" charset="-122"/>
-                <a:cs typeface="Calibri" pitchFamily="34" charset="-120"/>
+                <a:latin typeface="Arial" pitchFamily="34" charset="0"/>
+                <a:ea typeface="Arial" pitchFamily="34" charset="-122"/>
+                <a:cs typeface="Arial" pitchFamily="34" charset="-120"/>
               </a:rPr>
-              <a:t>I understand why they may differ</a:t>
+              <a:t>☐</a:t>
             </a:r>
-            <a:endParaRPr lang="en-US" sz="1300" dirty="0"/>
+            <a:endParaRPr lang="en-US" sz="1600" dirty="0"/>
           </a:p>
         </p:txBody>
       </p:sp>
       <p:sp>
         <p:nvSpPr>
-          <p:cNvPr id="12" name="Shape 10"/>
+          <p:cNvPr id="8" name="Text 6"/>
           <p:cNvSpPr/>
           <p:nvPr/>
         </p:nvSpPr>
         <p:spPr>
           <a:xfrm>
-            <a:off x="731520" y="2057400"/>
-            <a:ext cx="7680960" cy="438912"/>
-          </a:xfrm>
-          <a:prstGeom prst="rect">
-            <a:avLst/>
-          </a:prstGeom>
-          <a:solidFill>
-            <a:srgbClr val="FFFFFF"/>
-          </a:solidFill>
-          <a:ln/>
-        </p:spPr>
-      </p:sp>
-      <p:sp>
-        <p:nvSpPr>
-          <p:cNvPr id="13" name="Text 11"/>
-          <p:cNvSpPr/>
-          <p:nvPr/>
-        </p:nvSpPr>
-        <p:spPr>
-          <a:xfrm>
-            <a:off x="868680" y="2057400"/>
-            <a:ext cx="320040" cy="438912"/>
+            <a:off x="1005840" y="1783080"/>
+            <a:ext cx="9601200" cy="457200"/>
           </a:xfrm>
           <a:prstGeom prst="rect">
             <a:avLst/>
@@ -4034,15 +4881,21 @@
           <a:lstStyle/>
           <a:p>
             <a:pPr indent="0" marL="0">
+              <a:lnSpc>
+                <a:spcPct val="130000"/>
+              </a:lnSpc>
               <a:buNone/>
             </a:pPr>
             <a:r>
               <a:rPr lang="en-US" sz="1400" dirty="0">
                 <a:solidFill>
-                  <a:srgbClr val="2A9D8F"/>
+                  <a:srgbClr val="3D3A36"/>
                 </a:solidFill>
+                <a:latin typeface="Arial" pitchFamily="34" charset="0"/>
+                <a:ea typeface="Arial" pitchFamily="34" charset="-122"/>
+                <a:cs typeface="Arial" pitchFamily="34" charset="-120"/>
               </a:rPr>
-              <a:t>☐</a:t>
+              <a:t>I can calculate experimental probability from results.</a:t>
             </a:r>
             <a:endParaRPr lang="en-US" sz="1400" dirty="0"/>
           </a:p>
@@ -4050,14 +4903,14 @@
       </p:sp>
       <p:sp>
         <p:nvSpPr>
-          <p:cNvPr id="14" name="Text 12"/>
+          <p:cNvPr id="9" name="Text 7"/>
           <p:cNvSpPr/>
           <p:nvPr/>
         </p:nvSpPr>
         <p:spPr>
           <a:xfrm>
-            <a:off x="1234440" y="2057400"/>
-            <a:ext cx="6949440" cy="438912"/>
+            <a:off x="548640" y="2377440"/>
+            <a:ext cx="365760" cy="457200"/>
           </a:xfrm>
           <a:prstGeom prst="rect">
             <a:avLst/>
@@ -4073,50 +4926,30 @@
               <a:buNone/>
             </a:pPr>
             <a:r>
-              <a:rPr lang="en-US" sz="1300" dirty="0">
+              <a:rPr lang="en-US" sz="1600" dirty="0">
                 <a:solidFill>
-                  <a:srgbClr val="3D3A36"/>
+                  <a:srgbClr val="2A9D8F"/>
                 </a:solidFill>
-                <a:latin typeface="Calibri" pitchFamily="34" charset="0"/>
-                <a:ea typeface="Calibri" pitchFamily="34" charset="-122"/>
-                <a:cs typeface="Calibri" pitchFamily="34" charset="-120"/>
+                <a:latin typeface="Arial" pitchFamily="34" charset="0"/>
+                <a:ea typeface="Arial" pitchFamily="34" charset="-122"/>
+                <a:cs typeface="Arial" pitchFamily="34" charset="-120"/>
               </a:rPr>
-              <a:t>I know that more trials gives more reliable results</a:t>
+              <a:t>☐</a:t>
             </a:r>
-            <a:endParaRPr lang="en-US" sz="1300" dirty="0"/>
+            <a:endParaRPr lang="en-US" sz="1600" dirty="0"/>
           </a:p>
         </p:txBody>
       </p:sp>
       <p:sp>
         <p:nvSpPr>
-          <p:cNvPr id="15" name="Shape 13"/>
+          <p:cNvPr id="10" name="Text 8"/>
           <p:cNvSpPr/>
           <p:nvPr/>
         </p:nvSpPr>
         <p:spPr>
           <a:xfrm>
-            <a:off x="731520" y="2560320"/>
-            <a:ext cx="7680960" cy="438912"/>
-          </a:xfrm>
-          <a:prstGeom prst="rect">
-            <a:avLst/>
-          </a:prstGeom>
-          <a:solidFill>
-            <a:srgbClr val="F8F6F3"/>
-          </a:solidFill>
-          <a:ln/>
-        </p:spPr>
-      </p:sp>
-      <p:sp>
-        <p:nvSpPr>
-          <p:cNvPr id="16" name="Text 14"/>
-          <p:cNvSpPr/>
-          <p:nvPr/>
-        </p:nvSpPr>
-        <p:spPr>
-          <a:xfrm>
-            <a:off x="868680" y="2560320"/>
-            <a:ext cx="320040" cy="438912"/>
+            <a:off x="1005840" y="2377440"/>
+            <a:ext cx="9601200" cy="457200"/>
           </a:xfrm>
           <a:prstGeom prst="rect">
             <a:avLst/>
@@ -4129,15 +4962,21 @@
           <a:lstStyle/>
           <a:p>
             <a:pPr indent="0" marL="0">
+              <a:lnSpc>
+                <a:spcPct val="130000"/>
+              </a:lnSpc>
               <a:buNone/>
             </a:pPr>
             <a:r>
               <a:rPr lang="en-US" sz="1400" dirty="0">
                 <a:solidFill>
-                  <a:srgbClr val="2A9D8F"/>
+                  <a:srgbClr val="3D3A36"/>
                 </a:solidFill>
+                <a:latin typeface="Arial" pitchFamily="34" charset="0"/>
+                <a:ea typeface="Arial" pitchFamily="34" charset="-122"/>
+                <a:cs typeface="Arial" pitchFamily="34" charset="-120"/>
               </a:rPr>
-              <a:t>☐</a:t>
+              <a:t>I can explain why more trials give more reliable results.</a:t>
             </a:r>
             <a:endParaRPr lang="en-US" sz="1400" dirty="0"/>
           </a:p>
@@ -4145,14 +4984,14 @@
       </p:sp>
       <p:sp>
         <p:nvSpPr>
-          <p:cNvPr id="17" name="Text 15"/>
+          <p:cNvPr id="11" name="Text 9"/>
           <p:cNvSpPr/>
           <p:nvPr/>
         </p:nvSpPr>
         <p:spPr>
           <a:xfrm>
-            <a:off x="1234440" y="2560320"/>
-            <a:ext cx="6949440" cy="438912"/>
+            <a:off x="548640" y="2971800"/>
+            <a:ext cx="365760" cy="457200"/>
           </a:xfrm>
           <a:prstGeom prst="rect">
             <a:avLst/>
@@ -4168,50 +5007,30 @@
               <a:buNone/>
             </a:pPr>
             <a:r>
-              <a:rPr lang="en-US" sz="1300" dirty="0">
+              <a:rPr lang="en-US" sz="1600" dirty="0">
                 <a:solidFill>
-                  <a:srgbClr val="3D3A36"/>
+                  <a:srgbClr val="2A9D8F"/>
                 </a:solidFill>
-                <a:latin typeface="Calibri" pitchFamily="34" charset="0"/>
-                <a:ea typeface="Calibri" pitchFamily="34" charset="-122"/>
-                <a:cs typeface="Calibri" pitchFamily="34" charset="-120"/>
+                <a:latin typeface="Arial" pitchFamily="34" charset="0"/>
+                <a:ea typeface="Arial" pitchFamily="34" charset="-122"/>
+                <a:cs typeface="Arial" pitchFamily="34" charset="-120"/>
               </a:rPr>
-              <a:t>I can identify whether an object might be biased</a:t>
+              <a:t>☐</a:t>
             </a:r>
-            <a:endParaRPr lang="en-US" sz="1300" dirty="0"/>
+            <a:endParaRPr lang="en-US" sz="1600" dirty="0"/>
           </a:p>
         </p:txBody>
       </p:sp>
       <p:sp>
         <p:nvSpPr>
-          <p:cNvPr id="18" name="Shape 16"/>
+          <p:cNvPr id="12" name="Text 10"/>
           <p:cNvSpPr/>
           <p:nvPr/>
         </p:nvSpPr>
         <p:spPr>
           <a:xfrm>
-            <a:off x="731520" y="3063240"/>
-            <a:ext cx="7680960" cy="438912"/>
-          </a:xfrm>
-          <a:prstGeom prst="rect">
-            <a:avLst/>
-          </a:prstGeom>
-          <a:solidFill>
-            <a:srgbClr val="FFFFFF"/>
-          </a:solidFill>
-          <a:ln/>
-        </p:spPr>
-      </p:sp>
-      <p:sp>
-        <p:nvSpPr>
-          <p:cNvPr id="19" name="Text 17"/>
-          <p:cNvSpPr/>
-          <p:nvPr/>
-        </p:nvSpPr>
-        <p:spPr>
-          <a:xfrm>
-            <a:off x="868680" y="3063240"/>
-            <a:ext cx="320040" cy="438912"/>
+            <a:off x="1005840" y="2971800"/>
+            <a:ext cx="9601200" cy="457200"/>
           </a:xfrm>
           <a:prstGeom prst="rect">
             <a:avLst/>
@@ -4224,136 +5043,23 @@
           <a:lstStyle/>
           <a:p>
             <a:pPr indent="0" marL="0">
+              <a:lnSpc>
+                <a:spcPct val="130000"/>
+              </a:lnSpc>
               <a:buNone/>
             </a:pPr>
             <a:r>
               <a:rPr lang="en-US" sz="1400" dirty="0">
                 <a:solidFill>
-                  <a:srgbClr val="2A9D8F"/>
+                  <a:srgbClr val="3D3A36"/>
                 </a:solidFill>
+                <a:latin typeface="Arial" pitchFamily="34" charset="0"/>
+                <a:ea typeface="Arial" pitchFamily="34" charset="-122"/>
+                <a:cs typeface="Arial" pitchFamily="34" charset="-120"/>
               </a:rPr>
-              <a:t>☐</a:t>
+              <a:t>I can compare experimental results to theoretical predictions.</a:t>
             </a:r>
             <a:endParaRPr lang="en-US" sz="1400" dirty="0"/>
-          </a:p>
-        </p:txBody>
-      </p:sp>
-      <p:sp>
-        <p:nvSpPr>
-          <p:cNvPr id="20" name="Text 18"/>
-          <p:cNvSpPr/>
-          <p:nvPr/>
-        </p:nvSpPr>
-        <p:spPr>
-          <a:xfrm>
-            <a:off x="1234440" y="3063240"/>
-            <a:ext cx="6949440" cy="438912"/>
-          </a:xfrm>
-          <a:prstGeom prst="rect">
-            <a:avLst/>
-          </a:prstGeom>
-          <a:noFill/>
-          <a:ln/>
-        </p:spPr>
-        <p:txBody>
-          <a:bodyPr wrap="square" rtlCol="0" anchor="ctr"/>
-          <a:lstStyle/>
-          <a:p>
-            <a:pPr indent="0" marL="0">
-              <a:buNone/>
-            </a:pPr>
-            <a:r>
-              <a:rPr lang="en-US" sz="1300" dirty="0">
-                <a:solidFill>
-                  <a:srgbClr val="3D3A36"/>
-                </a:solidFill>
-                <a:latin typeface="Calibri" pitchFamily="34" charset="0"/>
-                <a:ea typeface="Calibri" pitchFamily="34" charset="-122"/>
-                <a:cs typeface="Calibri" pitchFamily="34" charset="-120"/>
-              </a:rPr>
-              <a:t>I can use relative frequency from experimental data</a:t>
-            </a:r>
-            <a:endParaRPr lang="en-US" sz="1300" dirty="0"/>
-          </a:p>
-        </p:txBody>
-      </p:sp>
-      <p:sp>
-        <p:nvSpPr>
-          <p:cNvPr id="21" name="Shape 19"/>
-          <p:cNvSpPr/>
-          <p:nvPr/>
-        </p:nvSpPr>
-        <p:spPr>
-          <a:xfrm>
-            <a:off x="731520" y="3749040"/>
-            <a:ext cx="7680960" cy="594360"/>
-          </a:xfrm>
-          <a:prstGeom prst="rect">
-            <a:avLst/>
-          </a:prstGeom>
-          <a:solidFill>
-            <a:srgbClr val="E8F5F3"/>
-          </a:solidFill>
-          <a:ln/>
-          <a:effectLst>
-            <a:outerShdw sx="100000" sy="100000" kx="0" ky="0" algn="bl" rotWithShape="0" blurRad="50800" dist="25400" dir="8100000">
-              <a:srgbClr val="000000">
-                <a:alpha val="10000"/>
-              </a:srgbClr>
-            </a:outerShdw>
-          </a:effectLst>
-        </p:spPr>
-      </p:sp>
-      <p:sp>
-        <p:nvSpPr>
-          <p:cNvPr id="22" name="Text 20"/>
-          <p:cNvSpPr/>
-          <p:nvPr/>
-        </p:nvSpPr>
-        <p:spPr>
-          <a:xfrm>
-            <a:off x="914400" y="3749040"/>
-            <a:ext cx="7315200" cy="594360"/>
-          </a:xfrm>
-          <a:prstGeom prst="rect">
-            <a:avLst/>
-          </a:prstGeom>
-          <a:noFill/>
-          <a:ln/>
-        </p:spPr>
-        <p:txBody>
-          <a:bodyPr wrap="square" rtlCol="0" anchor="ctr"/>
-          <a:lstStyle/>
-          <a:p>
-            <a:pPr indent="0" marL="0">
-              <a:buNone/>
-            </a:pPr>
-            <a:r>
-              <a:rPr lang="en-US" sz="1200" b="1" dirty="0">
-                <a:solidFill>
-                  <a:srgbClr val="2A9D8F"/>
-                </a:solidFill>
-                <a:latin typeface="Calibri" pitchFamily="34" charset="0"/>
-                <a:ea typeface="Calibri" pitchFamily="34" charset="-122"/>
-                <a:cs typeface="Calibri" pitchFamily="34" charset="-120"/>
-              </a:rPr>
-              <a:t>Key Idea: </a:t>
-            </a:r>
-            <a:pPr indent="0" marL="0">
-              <a:buNone/>
-            </a:pPr>
-            <a:r>
-              <a:rPr lang="en-US" sz="1200" i="1" dirty="0">
-                <a:solidFill>
-                  <a:srgbClr val="3D3A36"/>
-                </a:solidFill>
-                <a:latin typeface="Calibri" pitchFamily="34" charset="0"/>
-                <a:ea typeface="Calibri" pitchFamily="34" charset="-122"/>
-                <a:cs typeface="Calibri" pitchFamily="34" charset="-120"/>
-              </a:rPr>
-              <a:t>More trials = closer to theoretical probability. This is the law of large numbers.</a:t>
-            </a:r>
-            <a:endParaRPr lang="en-US" sz="1200" dirty="0"/>
           </a:p>
         </p:txBody>
       </p:sp>
@@ -4368,6 +5074,13 @@
 <file path=ppt/slides/slide7.xml><?xml version="1.0" encoding="utf-8"?>
 <p:sld xmlns:a="http://schemas.openxmlformats.org/drawingml/2006/main" xmlns:r="http://schemas.openxmlformats.org/officeDocument/2006/relationships" xmlns:p="http://schemas.openxmlformats.org/presentationml/2006/main">
   <p:cSld name="Slide 7">
+    <p:bg>
+      <p:bgPr>
+        <a:solidFill>
+          <a:srgbClr val="111D35"/>
+        </a:solidFill>
+      </p:bgPr>
+    </p:bg>
     <p:spTree>
       <p:nvGrpSpPr>
         <p:cNvPr id="1" name=""/>
@@ -4384,76 +5097,14 @@
       </p:grpSpPr>
       <p:sp>
         <p:nvSpPr>
-          <p:cNvPr id="2" name="Shape 0"/>
+          <p:cNvPr id="2" name="Text 0"/>
           <p:cNvSpPr/>
           <p:nvPr/>
         </p:nvSpPr>
         <p:spPr>
           <a:xfrm>
-            <a:off x="0" y="0"/>
-            <a:ext cx="9144000" cy="5143500"/>
-          </a:xfrm>
-          <a:prstGeom prst="rect">
-            <a:avLst/>
-          </a:prstGeom>
-          <a:solidFill>
-            <a:srgbClr val="1B2A4A"/>
-          </a:solidFill>
-          <a:ln/>
-        </p:spPr>
-      </p:sp>
-      <p:sp>
-        <p:nvSpPr>
-          <p:cNvPr id="3" name="Shape 1"/>
-          <p:cNvSpPr/>
-          <p:nvPr/>
-        </p:nvSpPr>
-        <p:spPr>
-          <a:xfrm>
-            <a:off x="0" y="4777740"/>
-            <a:ext cx="9144000" cy="365760"/>
-          </a:xfrm>
-          <a:prstGeom prst="rect">
-            <a:avLst/>
-          </a:prstGeom>
-          <a:solidFill>
-            <a:srgbClr val="2A9D8F"/>
-          </a:solidFill>
-          <a:ln/>
-        </p:spPr>
-      </p:sp>
-      <p:sp>
-        <p:nvSpPr>
-          <p:cNvPr id="4" name="Shape 2"/>
-          <p:cNvSpPr/>
-          <p:nvPr/>
-        </p:nvSpPr>
-        <p:spPr>
-          <a:xfrm>
-            <a:off x="-914400" y="-914400"/>
-            <a:ext cx="3657600" cy="3657600"/>
-          </a:xfrm>
-          <a:prstGeom prst="ellipse">
-            <a:avLst/>
-          </a:prstGeom>
-          <a:solidFill>
-            <a:srgbClr val="2A9D8F">
-              <a:alpha val="10000"/>
-            </a:srgbClr>
-          </a:solidFill>
-          <a:ln/>
-        </p:spPr>
-      </p:sp>
-      <p:sp>
-        <p:nvSpPr>
-          <p:cNvPr id="5" name="Text 3"/>
-          <p:cNvSpPr/>
-          <p:nvPr/>
-        </p:nvSpPr>
-        <p:spPr>
-          <a:xfrm>
-            <a:off x="731520" y="1463040"/>
-            <a:ext cx="7680960" cy="822960"/>
+            <a:off x="731520" y="1371600"/>
+            <a:ext cx="9144000" cy="914400"/>
           </a:xfrm>
           <a:prstGeom prst="rect">
             <a:avLst/>
@@ -4465,11 +5116,11 @@
           <a:bodyPr wrap="square" rtlCol="0" anchor="ctr"/>
           <a:lstStyle/>
           <a:p>
-            <a:pPr algn="ctr" indent="0" marL="0">
+            <a:pPr indent="0" marL="0">
               <a:buNone/>
             </a:pPr>
             <a:r>
-              <a:rPr lang="en-US" sz="3400" b="1" dirty="0">
+              <a:rPr lang="en-US" sz="3200" b="1" dirty="0">
                 <a:solidFill>
                   <a:srgbClr val="FFFFFF"/>
                 </a:solidFill>
@@ -4479,20 +5130,20 @@
               </a:rPr>
               <a:t>Review &amp; Practise</a:t>
             </a:r>
-            <a:endParaRPr lang="en-US" sz="3400" dirty="0"/>
+            <a:endParaRPr lang="en-US" sz="3200" dirty="0"/>
           </a:p>
         </p:txBody>
       </p:sp>
       <p:sp>
         <p:nvSpPr>
-          <p:cNvPr id="6" name="Text 4"/>
+          <p:cNvPr id="3" name="Text 1"/>
           <p:cNvSpPr/>
           <p:nvPr/>
         </p:nvSpPr>
         <p:spPr>
           <a:xfrm>
-            <a:off x="731520" y="2468880"/>
-            <a:ext cx="7680960" cy="457200"/>
+            <a:off x="731520" y="2377440"/>
+            <a:ext cx="7315200" cy="548640"/>
           </a:xfrm>
           <a:prstGeom prst="rect">
             <a:avLst/>
@@ -4504,34 +5155,36 @@
           <a:bodyPr wrap="square" rtlCol="0" anchor="ctr"/>
           <a:lstStyle/>
           <a:p>
-            <a:pPr algn="ctr" indent="0" marL="0">
+            <a:pPr indent="0" marL="0">
               <a:buNone/>
             </a:pPr>
             <a:r>
-              <a:rPr lang="en-US" sz="1800" dirty="0">
+              <a:rPr lang="en-US" sz="1500" dirty="0">
                 <a:solidFill>
-                  <a:srgbClr val="2A9D8F"/>
+                  <a:srgbClr val="FFFFFF">
+                    <a:alpha val="60000"/>
+                  </a:srgbClr>
                 </a:solidFill>
-                <a:latin typeface="Calibri" pitchFamily="34" charset="0"/>
-                <a:ea typeface="Calibri" pitchFamily="34" charset="-122"/>
-                <a:cs typeface="Calibri" pitchFamily="34" charset="-120"/>
+                <a:latin typeface="Arial" pitchFamily="34" charset="0"/>
+                <a:ea typeface="Arial" pitchFamily="34" charset="-122"/>
+                <a:cs typeface="Arial" pitchFamily="34" charset="-120"/>
               </a:rPr>
-              <a:t>mrzocchi.com</a:t>
+              <a:t>Use the Self-Quiz, Review Games, and Practice Builder to test yourself.</a:t>
             </a:r>
-            <a:endParaRPr lang="en-US" sz="1800" dirty="0"/>
+            <a:endParaRPr lang="en-US" sz="1500" dirty="0"/>
           </a:p>
         </p:txBody>
       </p:sp>
       <p:sp>
         <p:nvSpPr>
-          <p:cNvPr id="7" name="Text 5"/>
+          <p:cNvPr id="4" name="Text 2"/>
           <p:cNvSpPr/>
           <p:nvPr/>
         </p:nvSpPr>
         <p:spPr>
           <a:xfrm>
-            <a:off x="731520" y="3108960"/>
-            <a:ext cx="7680960" cy="457200"/>
+            <a:off x="731520" y="3291840"/>
+            <a:ext cx="3657600" cy="457200"/>
           </a:xfrm>
           <a:prstGeom prst="rect">
             <a:avLst/>
@@ -4543,21 +5196,21 @@
           <a:bodyPr wrap="square" rtlCol="0" anchor="ctr"/>
           <a:lstStyle/>
           <a:p>
-            <a:pPr algn="ctr" indent="0" marL="0">
+            <a:pPr indent="0" marL="0">
               <a:buNone/>
             </a:pPr>
             <a:r>
-              <a:rPr lang="en-US" sz="1300" dirty="0">
+              <a:rPr lang="en-US" sz="1800" b="1" dirty="0">
                 <a:solidFill>
-                  <a:srgbClr val="9B9690"/>
+                  <a:srgbClr val="E9C46A"/>
                 </a:solidFill>
-                <a:latin typeface="Calibri" pitchFamily="34" charset="0"/>
-                <a:ea typeface="Calibri" pitchFamily="34" charset="-122"/>
-                <a:cs typeface="Calibri" pitchFamily="34" charset="-120"/>
+                <a:latin typeface="Georgia" pitchFamily="34" charset="0"/>
+                <a:ea typeface="Georgia" pitchFamily="34" charset="-122"/>
+                <a:cs typeface="Georgia" pitchFamily="34" charset="-120"/>
               </a:rPr>
-              <a:t>Use the Self-Quiz, Review Games, and Practice Builder to test yourself.</a:t>
+              <a:t>mrzocchi.com</a:t>
             </a:r>
-            <a:endParaRPr lang="en-US" sz="1300" dirty="0"/>
+            <a:endParaRPr lang="en-US" sz="1800" dirty="0"/>
           </a:p>
         </p:txBody>
       </p:sp>
